--- a/konferans-bildirisi/06-sunum/ICSMMEP26_Presentation_Unal.pptx
+++ b/konferans-bildirisi/06-sunum/ICSMMEP26_Presentation_Unal.pptx
@@ -129,7 +129,7 @@
   <p:extLst>
     <p:ext uri="{521415D9-36F7-43E2-AB2F-B90AF26B5E84}">
       <p14:sectionLst xmlns:p14="http://schemas.microsoft.com/office/powerpoint/2010/main">
-        <p14:section name="Introduction" id="{8c258224-402f-9135-5125-10cf2eeb607e}">
+        <p14:section name="Introduction" id="{28797173-b0c8-3356-6b60-5decabd07242}">
           <p14:sldIdLst>
             <p14:sldId id="256"/>
             <p14:sldId id="257"/>
@@ -138,7 +138,7 @@
             <p14:sldId id="260"/>
           </p14:sldIdLst>
         </p14:section>
-        <p14:section name="Production" id="{3dc5fff5-cd0d-1755-9d01-528a076685da}">
+        <p14:section name="Production" id="{0ae8fcf8-2b67-da35-a503-05a60d987fd4}">
           <p14:sldIdLst>
             <p14:sldId id="261"/>
             <p14:sldId id="262"/>
@@ -146,7 +146,7 @@
             <p14:sldId id="264"/>
           </p14:sldIdLst>
         </p14:section>
-        <p14:section name="Characterisation" id="{a591debf-cce5-a24e-c409-1cfb89f768fd}">
+        <p14:section name="Characterisation" id="{376a87e2-f52b-1f01-91d8-f03b37a52d32}">
           <p14:sldIdLst>
             <p14:sldId id="265"/>
             <p14:sldId id="266"/>
@@ -156,20 +156,20 @@
             <p14:sldId id="270"/>
           </p14:sldIdLst>
         </p14:section>
-        <p14:section name="Benchmarking" id="{30f53cfb-3948-35df-661b-57aa9e1a416c}">
+        <p14:section name="Benchmarking" id="{1383be96-b2eb-5695-4add-8722f42ac09b}">
           <p14:sldIdLst>
             <p14:sldId id="271"/>
             <p14:sldId id="272"/>
             <p14:sldId id="273"/>
           </p14:sldIdLst>
         </p14:section>
-        <p14:section name="Application" id="{70f348c0-ce2d-9a4d-d318-9d76b5ccdef0}">
+        <p14:section name="Application" id="{b5957017-fef1-0b99-9f72-c90151351b58}">
           <p14:sldIdLst>
             <p14:sldId id="274"/>
             <p14:sldId id="275"/>
           </p14:sldIdLst>
         </p14:section>
-        <p14:section name="Closing" id="{83228d9b-eb96-86ff-4bf0-14b34f475186}">
+        <p14:section name="Closing" id="{b5d71cec-079f-ee11-83f8-50aae2c7bb8c}">
           <p14:sldIdLst>
             <p14:sldId id="276"/>
             <p14:sldId id="277"/>
@@ -1807,7 +1807,7 @@
           <a:p>
             <a:r>
               <a:rPr lang="en-US" dirty="0"/>
-              <a:t>Three environmental properties together. On fire: ignition at around ten seconds under direct flame, self-extinguishing four seconds after removal, charring local, no lateral spread, and no melting or dripping. The probable mechanism is endothermic carbonate decomposition releasing carbon dioxide, which dilutes the flame front - not verified calorimetrically. And to be explicit: 11925-1 is an ignitability test. No Euroclass, no cone calorimetry, no smoke or toxicity data. On water: 0.7 percent mass gain over twenty-four hours with three shellac coats, with local dissolution where the coating was thin - so coating integrity is the limiting factor, not the composite. On density: 1.38, between the fungal and cellulosic materials below and fired clay above, and quoted on a mould-volume basis so it is a lower bound.</a:t>
+              <a:t>Three environmental properties together. On fire: ignition at around ten seconds under direct flame, self-extinguishing four seconds after removal, charring local, no lateral spread, and no melting or dripping. The probable mechanism is endothermic carbonate decomposition releasing carbon dioxide, which dilutes the flame front - not verified calorimetrically. And to be explicit: 11925-2 is an ignitability test. No Euroclass, no cone calorimetry, no smoke or toxicity data. On water: 0.7 percent mass gain over twenty-four hours with three shellac coats, with local dissolution where the coating was thin - so coating integrity is the limiting factor, not the composite. On density: 1.38, between the fungal and cellulosic materials below and fired clay above, and quoted on a mould-volume basis so it is a lower bound.</a:t>
             </a:r>
             <a:endParaRPr lang="en-US" dirty="0"/>
           </a:p>
@@ -9917,7 +9917,7 @@
                           <a:ea typeface="Calibri" pitchFamily="34" charset="-122"/>
                           <a:cs typeface="Calibri" pitchFamily="34" charset="-120"/>
                         </a:rPr>
-                        <a:t>ISO 11925-1</a:t>
+                        <a:t>ISO 11925-2</a:t>
                       </a:r>
                       <a:endParaRPr lang="en-US" sz="1200" dirty="0">
                         <a:latin typeface="Calibri" charset="0"/>
@@ -14887,7 +14887,7 @@
                   <a:schemeClr val="accent1"/>
                 </a:solidFill>
               </a:rPr>
-              <a:t>IGNITABILITY — ISO 11925-1</a:t>
+              <a:t>IGNITABILITY — ISO 11925-2</a:t>
             </a:r>
             <a:endParaRPr lang="en-US" sz="1200" dirty="0"/>
           </a:p>
@@ -15206,7 +15206,7 @@
                   <a:schemeClr val="accent1"/>
                 </a:solidFill>
               </a:rPr>
-              <a:t>Probable mechanism: endothermic carbonate decomposition releasing CO₂, diluting the flame front locally. Not verified calorimetrically. ISO 11925-1 is an ignitability test — no Euroclass classification, cone calorimetry, smoke or toxicity data were obtained.</a:t>
+              <a:t>Probable mechanism: endothermic carbonate decomposition releasing CO₂, diluting the flame front locally. Not verified calorimetrically. ISO 11925-2 is an ignitability test — no Euroclass classification, cone calorimetry, smoke or toxicity data were obtained.</a:t>
             </a:r>
             <a:endParaRPr lang="en-US" sz="1050" dirty="0"/>
           </a:p>
@@ -26598,7 +26598,7 @@
                   <a:schemeClr val="accent6"/>
                 </a:solidFill>
               </a:rPr>
-              <a:t>Standards: ASTM D790-17 · ISO 11925-1:2020 · ASTM D570-98(2018).   Full reference list available on request.</a:t>
+              <a:t>Standards: ASTM D790-17 · ISO 11925-2:2020 · ASTM D570-98(2018).   Full reference list available on request.</a:t>
             </a:r>
             <a:endParaRPr lang="en-US" sz="1050" dirty="0"/>
           </a:p>
@@ -29360,7 +29360,7 @@
                   <a:schemeClr val="accent6"/>
                 </a:solidFill>
               </a:rPr>
-              <a:t>Standardised tests: ASTM D790, ISO 11925-1, ASTM D570</a:t>
+              <a:t>Standardised tests: ASTM D790, ISO 11925-2, ASTM D570</a:t>
             </a:r>
             <a:endParaRPr lang="en-US" sz="1250" dirty="0"/>
           </a:p>

--- a/konferans-bildirisi/06-sunum/ICSMMEP26_Presentation_Unal.pptx
+++ b/konferans-bildirisi/06-sunum/ICSMMEP26_Presentation_Unal.pptx
@@ -135,12 +135,12 @@
   <p:extLst>
     <p:ext uri="{521415D9-36F7-43E2-AB2F-B90AF26B5E84}">
       <p14:sectionLst xmlns:p14="http://schemas.microsoft.com/office/powerpoint/2010/main">
-        <p14:section name="Opening" id="{724e0081-c8dd-025a-ffde-d6f531f9f79f}">
+        <p14:section name="Opening" id="{12ac3792-cb7b-e9e0-6659-21daf5986bf9}">
           <p14:sldIdLst>
             <p14:sldId id="256"/>
           </p14:sldIdLst>
         </p14:section>
-        <p14:section name="Introduction" id="{ca48cbb5-6109-2996-bec1-b80671d45631}">
+        <p14:section name="Introduction" id="{9a858043-7780-b306-7d91-24230eed7f0f}">
           <p14:sldIdLst>
             <p14:sldId id="257"/>
             <p14:sldId id="258"/>
@@ -148,7 +148,7 @@
             <p14:sldId id="260"/>
           </p14:sldIdLst>
         </p14:section>
-        <p14:section name="Framework" id="{10f42e3f-d469-4568-7bd7-e7f47659ec6d}">
+        <p14:section name="Framework" id="{a8ff9875-f65d-738d-69fe-74f3872d6459}">
           <p14:sldIdLst>
             <p14:sldId id="261"/>
             <p14:sldId id="262"/>
@@ -157,12 +157,12 @@
             <p14:sldId id="265"/>
           </p14:sldIdLst>
         </p14:section>
-        <p14:section name="Material" id="{4f66e20b-5c3a-ed74-57b4-bf518befd138}">
+        <p14:section name="Material" id="{b3f59cbf-8eee-e84f-e4a0-c306eac95d72}">
           <p14:sldIdLst>
             <p14:sldId id="266"/>
           </p14:sldIdLst>
         </p14:section>
-        <p14:section name="Protocol" id="{7796d5a3-fbed-00c9-a9cb-e5292e834618}">
+        <p14:section name="Protocol" id="{bec91c56-db1a-8389-9b86-6060ded7e7bd}">
           <p14:sldIdLst>
             <p14:sldId id="267"/>
             <p14:sldId id="268"/>
@@ -170,7 +170,7 @@
             <p14:sldId id="270"/>
           </p14:sldIdLst>
         </p14:section>
-        <p14:section name="Results" id="{0c650558-52bb-58b6-34bf-d00b1847d9a6}">
+        <p14:section name="Results" id="{3d91e074-7716-1f7b-2139-449fc9232fd6}">
           <p14:sldIdLst>
             <p14:sldId id="271"/>
             <p14:sldId id="272"/>
@@ -180,19 +180,19 @@
             <p14:sldId id="276"/>
           </p14:sldIdLst>
         </p14:section>
-        <p14:section name="Benchmark" id="{c1470fe1-bfaf-4165-5316-6f8c9587b197}">
+        <p14:section name="Benchmark" id="{73ed3ad2-ea9c-7949-3bfc-915b66f3a8a2}">
           <p14:sldIdLst>
             <p14:sldId id="277"/>
             <p14:sldId id="278"/>
             <p14:sldId id="279"/>
           </p14:sldIdLst>
         </p14:section>
-        <p14:section name="Application" id="{f9e58e63-e135-7dc3-41c6-1896a546d639}">
+        <p14:section name="Application" id="{231fb476-83ab-81db-c1c3-e411485cba15}">
           <p14:sldIdLst>
             <p14:sldId id="280"/>
           </p14:sldIdLst>
         </p14:section>
-        <p14:section name="Closing" id="{e2bced74-38d2-b0f6-968a-e1591d5e532c}">
+        <p14:section name="Closing" id="{8437cb03-1ba0-747a-5fad-2f39015abab4}">
           <p14:sldIdLst>
             <p14:sldId id="281"/>
             <p14:sldId id="282"/>
@@ -4870,7 +4870,7 @@
         <p:spPr>
           <a:xfrm>
             <a:off x="6126480" y="3447288"/>
-            <a:ext cx="5303520" cy="868680"/>
+            <a:ext cx="4297680" cy="868680"/>
           </a:xfrm>
           <a:prstGeom prst="rect">
             <a:avLst/>
@@ -4905,7 +4905,96 @@
       </p:sp>
       <p:sp>
         <p:nvSpPr>
-          <p:cNvPr id="10" name="ru0.84.75"/>
+          <p:cNvPr id="10" name="aw11.53.92"/>
+          <p:cNvSpPr/>
+          <p:nvPr/>
+        </p:nvSpPr>
+        <p:spPr>
+          <a:xfrm>
+            <a:off x="10515600" y="3584448"/>
+            <a:ext cx="201168" cy="137160"/>
+          </a:xfrm>
+          <a:prstGeom prst="rightArrow">
+            <a:avLst/>
+          </a:prstGeom>
+          <a:solidFill>
+            <a:srgbClr val="BDBDBD"/>
+          </a:solidFill>
+          <a:ln w="12700">
+            <a:solidFill>
+              <a:srgbClr val="BDBDBD">
+                <a:alpha val="0"/>
+              </a:srgbClr>
+            </a:solidFill>
+            <a:prstDash val="solid"/>
+          </a:ln>
+        </p:spPr>
+      </p:sp>
+      <p:sp>
+        <p:nvSpPr>
+          <p:cNvPr id="11" name="Text 9"/>
+          <p:cNvSpPr txBox="1"/>
+          <p:nvPr/>
+        </p:nvSpPr>
+        <p:spPr>
+          <a:xfrm>
+            <a:off x="10835640" y="3410712"/>
+            <a:ext cx="868680" cy="548640"/>
+          </a:xfrm>
+          <a:prstGeom prst="rect">
+            <a:avLst/>
+          </a:prstGeom>
+          <a:noFill/>
+          <a:ln/>
+        </p:spPr>
+        <p:txBody>
+          <a:bodyPr wrap="square" lIns="0" tIns="0" rIns="0" bIns="0" rtlCol="0" anchor="ctr"/>
+          <a:lstStyle/>
+          <a:p>
+            <a:pPr indent="0" marL="0">
+              <a:lnSpc>
+                <a:spcPts val="1400"/>
+              </a:lnSpc>
+              <a:buNone/>
+            </a:pPr>
+            <a:r>
+              <a:rPr lang="en-US" sz="1100" b="1" dirty="0">
+                <a:solidFill>
+                  <a:srgbClr val="B4513A"/>
+                </a:solidFill>
+                <a:latin typeface="Calibri" pitchFamily="34" charset="0"/>
+                <a:ea typeface="Calibri" pitchFamily="34" charset="-122"/>
+                <a:cs typeface="Calibri" pitchFamily="34" charset="-120"/>
+              </a:rPr>
+              <a:t>Slides</a:t>
+            </a:r>
+            <a:endParaRPr lang="en-US" sz="1100" dirty="0"/>
+          </a:p>
+          <a:p>
+            <a:pPr indent="0" marL="0">
+              <a:lnSpc>
+                <a:spcPts val="1400"/>
+              </a:lnSpc>
+              <a:buNone/>
+            </a:pPr>
+            <a:r>
+              <a:rPr lang="en-US" sz="1100" b="1" dirty="0">
+                <a:solidFill>
+                  <a:srgbClr val="B4513A"/>
+                </a:solidFill>
+                <a:latin typeface="Calibri" pitchFamily="34" charset="0"/>
+                <a:ea typeface="Calibri" pitchFamily="34" charset="-122"/>
+                <a:cs typeface="Calibri" pitchFamily="34" charset="-120"/>
+              </a:rPr>
+              <a:t>12–15</a:t>
+            </a:r>
+            <a:endParaRPr lang="en-US" sz="1100" dirty="0"/>
+          </a:p>
+        </p:txBody>
+      </p:sp>
+      <p:sp>
+        <p:nvSpPr>
+          <p:cNvPr id="12" name="ru0.84.75"/>
           <p:cNvSpPr/>
           <p:nvPr/>
         </p:nvSpPr>
@@ -4932,7 +5021,7 @@
       </p:sp>
       <p:sp>
         <p:nvSpPr>
-          <p:cNvPr id="11" name="Text 9"/>
+          <p:cNvPr id="13" name="Text 11"/>
           <p:cNvSpPr txBox="1"/>
           <p:nvPr/>
         </p:nvSpPr>
@@ -4971,7 +5060,7 @@
       </p:sp>
       <p:sp>
         <p:nvSpPr>
-          <p:cNvPr id="12" name="Text 10"/>
+          <p:cNvPr id="14" name="Text 12"/>
           <p:cNvSpPr txBox="1"/>
           <p:nvPr/>
         </p:nvSpPr>
@@ -5013,14 +5102,14 @@
       </p:sp>
       <p:sp>
         <p:nvSpPr>
-          <p:cNvPr id="13" name="Text 11"/>
+          <p:cNvPr id="15" name="Text 13"/>
           <p:cNvSpPr txBox="1"/>
           <p:nvPr/>
         </p:nvSpPr>
         <p:spPr>
           <a:xfrm>
             <a:off x="6126480" y="4544568"/>
-            <a:ext cx="5303520" cy="868680"/>
+            <a:ext cx="4297680" cy="868680"/>
           </a:xfrm>
           <a:prstGeom prst="rect">
             <a:avLst/>
@@ -5055,7 +5144,96 @@
       </p:sp>
       <p:sp>
         <p:nvSpPr>
-          <p:cNvPr id="14" name="ru0.86.15"/>
+          <p:cNvPr id="16" name="aw11.55.12"/>
+          <p:cNvSpPr/>
+          <p:nvPr/>
+        </p:nvSpPr>
+        <p:spPr>
+          <a:xfrm>
+            <a:off x="10515600" y="4681728"/>
+            <a:ext cx="201168" cy="137160"/>
+          </a:xfrm>
+          <a:prstGeom prst="rightArrow">
+            <a:avLst/>
+          </a:prstGeom>
+          <a:solidFill>
+            <a:srgbClr val="BDBDBD"/>
+          </a:solidFill>
+          <a:ln w="12700">
+            <a:solidFill>
+              <a:srgbClr val="BDBDBD">
+                <a:alpha val="0"/>
+              </a:srgbClr>
+            </a:solidFill>
+            <a:prstDash val="solid"/>
+          </a:ln>
+        </p:spPr>
+      </p:sp>
+      <p:sp>
+        <p:nvSpPr>
+          <p:cNvPr id="17" name="Text 15"/>
+          <p:cNvSpPr txBox="1"/>
+          <p:nvPr/>
+        </p:nvSpPr>
+        <p:spPr>
+          <a:xfrm>
+            <a:off x="10835640" y="4507992"/>
+            <a:ext cx="868680" cy="548640"/>
+          </a:xfrm>
+          <a:prstGeom prst="rect">
+            <a:avLst/>
+          </a:prstGeom>
+          <a:noFill/>
+          <a:ln/>
+        </p:spPr>
+        <p:txBody>
+          <a:bodyPr wrap="square" lIns="0" tIns="0" rIns="0" bIns="0" rtlCol="0" anchor="ctr"/>
+          <a:lstStyle/>
+          <a:p>
+            <a:pPr indent="0" marL="0">
+              <a:lnSpc>
+                <a:spcPts val="1400"/>
+              </a:lnSpc>
+              <a:buNone/>
+            </a:pPr>
+            <a:r>
+              <a:rPr lang="en-US" sz="1100" b="1" dirty="0">
+                <a:solidFill>
+                  <a:srgbClr val="B4513A"/>
+                </a:solidFill>
+                <a:latin typeface="Calibri" pitchFamily="34" charset="0"/>
+                <a:ea typeface="Calibri" pitchFamily="34" charset="-122"/>
+                <a:cs typeface="Calibri" pitchFamily="34" charset="-120"/>
+              </a:rPr>
+              <a:t>Slides</a:t>
+            </a:r>
+            <a:endParaRPr lang="en-US" sz="1100" dirty="0"/>
+          </a:p>
+          <a:p>
+            <a:pPr indent="0" marL="0">
+              <a:lnSpc>
+                <a:spcPts val="1400"/>
+              </a:lnSpc>
+              <a:buNone/>
+            </a:pPr>
+            <a:r>
+              <a:rPr lang="en-US" sz="1100" b="1" dirty="0">
+                <a:solidFill>
+                  <a:srgbClr val="B4513A"/>
+                </a:solidFill>
+                <a:latin typeface="Calibri" pitchFamily="34" charset="0"/>
+                <a:ea typeface="Calibri" pitchFamily="34" charset="-122"/>
+                <a:cs typeface="Calibri" pitchFamily="34" charset="-120"/>
+              </a:rPr>
+              <a:t>17–24</a:t>
+            </a:r>
+            <a:endParaRPr lang="en-US" sz="1100" dirty="0"/>
+          </a:p>
+        </p:txBody>
+      </p:sp>
+      <p:sp>
+        <p:nvSpPr>
+          <p:cNvPr id="18" name="ru0.86.15"/>
           <p:cNvSpPr/>
           <p:nvPr/>
         </p:nvSpPr>
@@ -5082,7 +5260,7 @@
       </p:sp>
       <p:sp>
         <p:nvSpPr>
-          <p:cNvPr id="15" name="Text 13"/>
+          <p:cNvPr id="19" name="Text 17"/>
           <p:cNvSpPr txBox="1"/>
           <p:nvPr/>
         </p:nvSpPr>
@@ -5124,7 +5302,7 @@
       </p:sp>
       <p:sp>
         <p:nvSpPr>
-          <p:cNvPr id="17" name="Text 0"/>
+          <p:cNvPr id="21" name="Text 0"/>
           <p:cNvSpPr/>
           <p:nvPr>
             <p:ph idx="100" hasCustomPrompt="1"/>
@@ -12730,13 +12908,13 @@
       </p:graphicFrame>
       <p:sp>
         <p:nvSpPr>
-          <p:cNvPr id="5" name="ru0.84.5"/>
+          <p:cNvPr id="5" name="ru0.84.45"/>
           <p:cNvSpPr/>
           <p:nvPr/>
         </p:nvSpPr>
         <p:spPr>
           <a:xfrm>
-            <a:off x="731520" y="4114800"/>
+            <a:off x="731520" y="4069080"/>
             <a:ext cx="10698480" cy="9144"/>
           </a:xfrm>
           <a:prstGeom prst="rect">
@@ -12763,8 +12941,1228 @@
         </p:nvSpPr>
         <p:spPr>
           <a:xfrm>
-            <a:off x="731520" y="4297680"/>
-            <a:ext cx="5029200" cy="274320"/>
+            <a:off x="731520" y="4224528"/>
+            <a:ext cx="5486400" cy="274320"/>
+          </a:xfrm>
+          <a:prstGeom prst="rect">
+            <a:avLst/>
+          </a:prstGeom>
+          <a:noFill/>
+          <a:ln/>
+        </p:spPr>
+        <p:txBody>
+          <a:bodyPr wrap="square" lIns="0" tIns="0" rIns="0" bIns="0" rtlCol="0" anchor="ctr"/>
+          <a:lstStyle/>
+          <a:p>
+            <a:pPr indent="0" marL="0">
+              <a:buNone/>
+            </a:pPr>
+            <a:r>
+              <a:rPr lang="en-US" sz="1300" b="1" dirty="0">
+                <a:solidFill>
+                  <a:srgbClr val="141414"/>
+                </a:solidFill>
+                <a:latin typeface="Calibri" pitchFamily="34" charset="0"/>
+                <a:ea typeface="Calibri" pitchFamily="34" charset="-122"/>
+                <a:cs typeface="Calibri" pitchFamily="34" charset="-120"/>
+              </a:rPr>
+              <a:t>Batch composition by mass</a:t>
+            </a:r>
+            <a:endParaRPr lang="en-US" sz="1300" dirty="0"/>
+          </a:p>
+        </p:txBody>
+      </p:sp>
+      <p:sp>
+        <p:nvSpPr>
+          <p:cNvPr id="7" name="sw0.85.02"/>
+          <p:cNvSpPr/>
+          <p:nvPr/>
+        </p:nvSpPr>
+        <p:spPr>
+          <a:xfrm>
+            <a:off x="731520" y="4626864"/>
+            <a:ext cx="164592" cy="109728"/>
+          </a:xfrm>
+          <a:prstGeom prst="rect">
+            <a:avLst/>
+          </a:prstGeom>
+          <a:solidFill>
+            <a:srgbClr val="BDBDBD"/>
+          </a:solidFill>
+          <a:ln w="12700">
+            <a:solidFill>
+              <a:srgbClr val="BDBDBD">
+                <a:alpha val="0"/>
+              </a:srgbClr>
+            </a:solidFill>
+            <a:prstDash val="solid"/>
+          </a:ln>
+        </p:spPr>
+      </p:sp>
+      <p:sp>
+        <p:nvSpPr>
+          <p:cNvPr id="8" name="Text 5"/>
+          <p:cNvSpPr txBox="1"/>
+          <p:nvPr/>
+        </p:nvSpPr>
+        <p:spPr>
+          <a:xfrm>
+            <a:off x="969264" y="4590288"/>
+            <a:ext cx="1188720" cy="182880"/>
+          </a:xfrm>
+          <a:prstGeom prst="rect">
+            <a:avLst/>
+          </a:prstGeom>
+          <a:noFill/>
+          <a:ln/>
+        </p:spPr>
+        <p:txBody>
+          <a:bodyPr wrap="square" lIns="0" tIns="0" rIns="0" bIns="0" rtlCol="0" anchor="ctr"/>
+          <a:lstStyle/>
+          <a:p>
+            <a:pPr indent="0" marL="0">
+              <a:buNone/>
+            </a:pPr>
+            <a:r>
+              <a:rPr lang="en-US" sz="950" dirty="0">
+                <a:solidFill>
+                  <a:srgbClr val="8C8C8C"/>
+                </a:solidFill>
+                <a:latin typeface="Calibri" pitchFamily="34" charset="0"/>
+                <a:ea typeface="Calibri" pitchFamily="34" charset="-122"/>
+                <a:cs typeface="Calibri" pitchFamily="34" charset="-120"/>
+              </a:rPr>
+              <a:t>water</a:t>
+            </a:r>
+            <a:endParaRPr lang="en-US" sz="950" dirty="0"/>
+          </a:p>
+        </p:txBody>
+      </p:sp>
+      <p:sp>
+        <p:nvSpPr>
+          <p:cNvPr id="9" name="sw25.02"/>
+          <p:cNvSpPr/>
+          <p:nvPr/>
+        </p:nvSpPr>
+        <p:spPr>
+          <a:xfrm>
+            <a:off x="1828800" y="4626864"/>
+            <a:ext cx="164592" cy="109728"/>
+          </a:xfrm>
+          <a:prstGeom prst="rect">
+            <a:avLst/>
+          </a:prstGeom>
+          <a:solidFill>
+            <a:srgbClr val="B4513A"/>
+          </a:solidFill>
+          <a:ln w="12700">
+            <a:solidFill>
+              <a:srgbClr val="B4513A">
+                <a:alpha val="0"/>
+              </a:srgbClr>
+            </a:solidFill>
+            <a:prstDash val="solid"/>
+          </a:ln>
+        </p:spPr>
+      </p:sp>
+      <p:sp>
+        <p:nvSpPr>
+          <p:cNvPr id="10" name="Text 7"/>
+          <p:cNvSpPr txBox="1"/>
+          <p:nvPr/>
+        </p:nvSpPr>
+        <p:spPr>
+          <a:xfrm>
+            <a:off x="2066544" y="4590288"/>
+            <a:ext cx="1188720" cy="182880"/>
+          </a:xfrm>
+          <a:prstGeom prst="rect">
+            <a:avLst/>
+          </a:prstGeom>
+          <a:noFill/>
+          <a:ln/>
+        </p:spPr>
+        <p:txBody>
+          <a:bodyPr wrap="square" lIns="0" tIns="0" rIns="0" bIns="0" rtlCol="0" anchor="ctr"/>
+          <a:lstStyle/>
+          <a:p>
+            <a:pPr indent="0" marL="0">
+              <a:buNone/>
+            </a:pPr>
+            <a:r>
+              <a:rPr lang="en-US" sz="950" dirty="0">
+                <a:solidFill>
+                  <a:srgbClr val="8C8C8C"/>
+                </a:solidFill>
+                <a:latin typeface="Calibri" pitchFamily="34" charset="0"/>
+                <a:ea typeface="Calibri" pitchFamily="34" charset="-122"/>
+                <a:cs typeface="Calibri" pitchFamily="34" charset="-120"/>
+              </a:rPr>
+              <a:t>shell</a:t>
+            </a:r>
+            <a:endParaRPr lang="en-US" sz="950" dirty="0"/>
+          </a:p>
+        </p:txBody>
+      </p:sp>
+      <p:sp>
+        <p:nvSpPr>
+          <p:cNvPr id="11" name="sw3.25.02"/>
+          <p:cNvSpPr/>
+          <p:nvPr/>
+        </p:nvSpPr>
+        <p:spPr>
+          <a:xfrm>
+            <a:off x="2926080" y="4626864"/>
+            <a:ext cx="164592" cy="109728"/>
+          </a:xfrm>
+          <a:prstGeom prst="rect">
+            <a:avLst/>
+          </a:prstGeom>
+          <a:solidFill>
+            <a:srgbClr val="141414"/>
+          </a:solidFill>
+          <a:ln w="12700">
+            <a:solidFill>
+              <a:srgbClr val="141414">
+                <a:alpha val="0"/>
+              </a:srgbClr>
+            </a:solidFill>
+            <a:prstDash val="solid"/>
+          </a:ln>
+        </p:spPr>
+      </p:sp>
+      <p:sp>
+        <p:nvSpPr>
+          <p:cNvPr id="12" name="Text 9"/>
+          <p:cNvSpPr txBox="1"/>
+          <p:nvPr/>
+        </p:nvSpPr>
+        <p:spPr>
+          <a:xfrm>
+            <a:off x="3163824" y="4590288"/>
+            <a:ext cx="1188720" cy="182880"/>
+          </a:xfrm>
+          <a:prstGeom prst="rect">
+            <a:avLst/>
+          </a:prstGeom>
+          <a:noFill/>
+          <a:ln/>
+        </p:spPr>
+        <p:txBody>
+          <a:bodyPr wrap="square" lIns="0" tIns="0" rIns="0" bIns="0" rtlCol="0" anchor="ctr"/>
+          <a:lstStyle/>
+          <a:p>
+            <a:pPr indent="0" marL="0">
+              <a:buNone/>
+            </a:pPr>
+            <a:r>
+              <a:rPr lang="en-US" sz="950" dirty="0">
+                <a:solidFill>
+                  <a:srgbClr val="8C8C8C"/>
+                </a:solidFill>
+                <a:latin typeface="Calibri" pitchFamily="34" charset="0"/>
+                <a:ea typeface="Calibri" pitchFamily="34" charset="-122"/>
+                <a:cs typeface="Calibri" pitchFamily="34" charset="-120"/>
+              </a:rPr>
+              <a:t>agar</a:t>
+            </a:r>
+            <a:endParaRPr lang="en-US" sz="950" dirty="0"/>
+          </a:p>
+        </p:txBody>
+      </p:sp>
+      <p:sp>
+        <p:nvSpPr>
+          <p:cNvPr id="13" name="sw4.45.02"/>
+          <p:cNvSpPr/>
+          <p:nvPr/>
+        </p:nvSpPr>
+        <p:spPr>
+          <a:xfrm>
+            <a:off x="4023360" y="4626864"/>
+            <a:ext cx="164592" cy="109728"/>
+          </a:xfrm>
+          <a:prstGeom prst="rect">
+            <a:avLst/>
+          </a:prstGeom>
+          <a:solidFill>
+            <a:srgbClr val="8C8C8C"/>
+          </a:solidFill>
+          <a:ln w="12700">
+            <a:solidFill>
+              <a:srgbClr val="8C8C8C">
+                <a:alpha val="0"/>
+              </a:srgbClr>
+            </a:solidFill>
+            <a:prstDash val="solid"/>
+          </a:ln>
+        </p:spPr>
+      </p:sp>
+      <p:sp>
+        <p:nvSpPr>
+          <p:cNvPr id="14" name="Text 11"/>
+          <p:cNvSpPr txBox="1"/>
+          <p:nvPr/>
+        </p:nvSpPr>
+        <p:spPr>
+          <a:xfrm>
+            <a:off x="4261104" y="4590288"/>
+            <a:ext cx="1188720" cy="182880"/>
+          </a:xfrm>
+          <a:prstGeom prst="rect">
+            <a:avLst/>
+          </a:prstGeom>
+          <a:noFill/>
+          <a:ln/>
+        </p:spPr>
+        <p:txBody>
+          <a:bodyPr wrap="square" lIns="0" tIns="0" rIns="0" bIns="0" rtlCol="0" anchor="ctr"/>
+          <a:lstStyle/>
+          <a:p>
+            <a:pPr indent="0" marL="0">
+              <a:buNone/>
+            </a:pPr>
+            <a:r>
+              <a:rPr lang="en-US" sz="950" dirty="0">
+                <a:solidFill>
+                  <a:srgbClr val="8C8C8C"/>
+                </a:solidFill>
+                <a:latin typeface="Calibri" pitchFamily="34" charset="0"/>
+                <a:ea typeface="Calibri" pitchFamily="34" charset="-122"/>
+                <a:cs typeface="Calibri" pitchFamily="34" charset="-120"/>
+              </a:rPr>
+              <a:t>glycerol</a:t>
+            </a:r>
+            <a:endParaRPr lang="en-US" sz="950" dirty="0"/>
+          </a:p>
+        </p:txBody>
+      </p:sp>
+      <p:sp>
+        <p:nvSpPr>
+          <p:cNvPr id="15" name="Text 12"/>
+          <p:cNvSpPr txBox="1"/>
+          <p:nvPr/>
+        </p:nvSpPr>
+        <p:spPr>
+          <a:xfrm>
+            <a:off x="731520" y="4919472"/>
+            <a:ext cx="457200" cy="201168"/>
+          </a:xfrm>
+          <a:prstGeom prst="rect">
+            <a:avLst/>
+          </a:prstGeom>
+          <a:noFill/>
+          <a:ln/>
+        </p:spPr>
+        <p:txBody>
+          <a:bodyPr wrap="square" lIns="0" tIns="0" rIns="0" bIns="0" rtlCol="0" anchor="ctr"/>
+          <a:lstStyle/>
+          <a:p>
+            <a:pPr indent="0" marL="0">
+              <a:buNone/>
+            </a:pPr>
+            <a:r>
+              <a:rPr lang="en-US" sz="1050" b="1" dirty="0">
+                <a:solidFill>
+                  <a:srgbClr val="141414"/>
+                </a:solidFill>
+                <a:latin typeface="Calibri" pitchFamily="34" charset="0"/>
+                <a:ea typeface="Calibri" pitchFamily="34" charset="-122"/>
+                <a:cs typeface="Calibri" pitchFamily="34" charset="-120"/>
+              </a:rPr>
+              <a:t>C1</a:t>
+            </a:r>
+            <a:endParaRPr lang="en-US" sz="1050" dirty="0"/>
+          </a:p>
+        </p:txBody>
+      </p:sp>
+      <p:sp>
+        <p:nvSpPr>
+          <p:cNvPr id="16" name="sb1.355.380"/>
+          <p:cNvSpPr/>
+          <p:nvPr/>
+        </p:nvSpPr>
+        <p:spPr>
+          <a:xfrm>
+            <a:off x="1234440" y="4919472"/>
+            <a:ext cx="3405883" cy="201168"/>
+          </a:xfrm>
+          <a:prstGeom prst="rect">
+            <a:avLst/>
+          </a:prstGeom>
+          <a:solidFill>
+            <a:srgbClr val="BDBDBD"/>
+          </a:solidFill>
+          <a:ln w="9525">
+            <a:solidFill>
+              <a:srgbClr val="FFFFFF"/>
+            </a:solidFill>
+            <a:prstDash val="solid"/>
+          </a:ln>
+        </p:spPr>
+      </p:sp>
+      <p:sp>
+        <p:nvSpPr>
+          <p:cNvPr id="17" name="sb1.355.381"/>
+          <p:cNvSpPr/>
+          <p:nvPr/>
+        </p:nvSpPr>
+        <p:spPr>
+          <a:xfrm>
+            <a:off x="4640323" y="4919472"/>
+            <a:ext cx="838371" cy="201168"/>
+          </a:xfrm>
+          <a:prstGeom prst="rect">
+            <a:avLst/>
+          </a:prstGeom>
+          <a:solidFill>
+            <a:srgbClr val="B4513A"/>
+          </a:solidFill>
+          <a:ln w="9525">
+            <a:solidFill>
+              <a:srgbClr val="FFFFFF"/>
+            </a:solidFill>
+            <a:prstDash val="solid"/>
+          </a:ln>
+        </p:spPr>
+      </p:sp>
+      <p:sp>
+        <p:nvSpPr>
+          <p:cNvPr id="18" name="sb1.355.382"/>
+          <p:cNvSpPr/>
+          <p:nvPr/>
+        </p:nvSpPr>
+        <p:spPr>
+          <a:xfrm>
+            <a:off x="5478694" y="4919472"/>
+            <a:ext cx="366787" cy="201168"/>
+          </a:xfrm>
+          <a:prstGeom prst="rect">
+            <a:avLst/>
+          </a:prstGeom>
+          <a:solidFill>
+            <a:srgbClr val="141414"/>
+          </a:solidFill>
+          <a:ln w="9525">
+            <a:solidFill>
+              <a:srgbClr val="FFFFFF"/>
+            </a:solidFill>
+            <a:prstDash val="solid"/>
+          </a:ln>
+        </p:spPr>
+      </p:sp>
+      <p:sp>
+        <p:nvSpPr>
+          <p:cNvPr id="19" name="sb1.355.383"/>
+          <p:cNvSpPr/>
+          <p:nvPr/>
+        </p:nvSpPr>
+        <p:spPr>
+          <a:xfrm>
+            <a:off x="5845482" y="4919472"/>
+            <a:ext cx="52398" cy="201168"/>
+          </a:xfrm>
+          <a:prstGeom prst="rect">
+            <a:avLst/>
+          </a:prstGeom>
+          <a:solidFill>
+            <a:srgbClr val="8C8C8C"/>
+          </a:solidFill>
+          <a:ln w="9525">
+            <a:solidFill>
+              <a:srgbClr val="FFFFFF"/>
+            </a:solidFill>
+            <a:prstDash val="solid"/>
+          </a:ln>
+        </p:spPr>
+      </p:sp>
+      <p:sp>
+        <p:nvSpPr>
+          <p:cNvPr id="20" name="Text 17"/>
+          <p:cNvSpPr txBox="1"/>
+          <p:nvPr/>
+        </p:nvSpPr>
+        <p:spPr>
+          <a:xfrm>
+            <a:off x="5961888" y="4919472"/>
+            <a:ext cx="1005840" cy="201168"/>
+          </a:xfrm>
+          <a:prstGeom prst="rect">
+            <a:avLst/>
+          </a:prstGeom>
+          <a:noFill/>
+          <a:ln/>
+        </p:spPr>
+        <p:txBody>
+          <a:bodyPr wrap="square" lIns="0" tIns="0" rIns="0" bIns="0" rtlCol="0" anchor="ctr"/>
+          <a:lstStyle/>
+          <a:p>
+            <a:pPr indent="0" marL="0">
+              <a:buNone/>
+            </a:pPr>
+            <a:r>
+              <a:rPr lang="en-US" sz="950" b="1" dirty="0">
+                <a:solidFill>
+                  <a:srgbClr val="B4513A"/>
+                </a:solidFill>
+                <a:latin typeface="Calibri" pitchFamily="34" charset="0"/>
+                <a:ea typeface="Calibri" pitchFamily="34" charset="-122"/>
+                <a:cs typeface="Calibri" pitchFamily="34" charset="-120"/>
+              </a:rPr>
+              <a:t>73% water</a:t>
+            </a:r>
+            <a:endParaRPr lang="en-US" sz="950" dirty="0"/>
+          </a:p>
+        </p:txBody>
+      </p:sp>
+      <p:sp>
+        <p:nvSpPr>
+          <p:cNvPr id="21" name="Text 18"/>
+          <p:cNvSpPr txBox="1"/>
+          <p:nvPr/>
+        </p:nvSpPr>
+        <p:spPr>
+          <a:xfrm>
+            <a:off x="731520" y="5193792"/>
+            <a:ext cx="457200" cy="201168"/>
+          </a:xfrm>
+          <a:prstGeom prst="rect">
+            <a:avLst/>
+          </a:prstGeom>
+          <a:noFill/>
+          <a:ln/>
+        </p:spPr>
+        <p:txBody>
+          <a:bodyPr wrap="square" lIns="0" tIns="0" rIns="0" bIns="0" rtlCol="0" anchor="ctr"/>
+          <a:lstStyle/>
+          <a:p>
+            <a:pPr indent="0" marL="0">
+              <a:buNone/>
+            </a:pPr>
+            <a:r>
+              <a:rPr lang="en-US" sz="1050" b="1" dirty="0">
+                <a:solidFill>
+                  <a:srgbClr val="141414"/>
+                </a:solidFill>
+                <a:latin typeface="Calibri" pitchFamily="34" charset="0"/>
+                <a:ea typeface="Calibri" pitchFamily="34" charset="-122"/>
+                <a:cs typeface="Calibri" pitchFamily="34" charset="-120"/>
+              </a:rPr>
+              <a:t>C2</a:t>
+            </a:r>
+            <a:endParaRPr lang="en-US" sz="1050" dirty="0"/>
+          </a:p>
+        </p:txBody>
+      </p:sp>
+      <p:sp>
+        <p:nvSpPr>
+          <p:cNvPr id="22" name="sb1.355.680"/>
+          <p:cNvSpPr/>
+          <p:nvPr/>
+        </p:nvSpPr>
+        <p:spPr>
+          <a:xfrm>
+            <a:off x="1234440" y="5193792"/>
+            <a:ext cx="3248689" cy="201168"/>
+          </a:xfrm>
+          <a:prstGeom prst="rect">
+            <a:avLst/>
+          </a:prstGeom>
+          <a:solidFill>
+            <a:srgbClr val="BDBDBD"/>
+          </a:solidFill>
+          <a:ln w="9525">
+            <a:solidFill>
+              <a:srgbClr val="FFFFFF"/>
+            </a:solidFill>
+            <a:prstDash val="solid"/>
+          </a:ln>
+        </p:spPr>
+      </p:sp>
+      <p:sp>
+        <p:nvSpPr>
+          <p:cNvPr id="23" name="sb1.355.681"/>
+          <p:cNvSpPr/>
+          <p:nvPr/>
+        </p:nvSpPr>
+        <p:spPr>
+          <a:xfrm>
+            <a:off x="4483129" y="5193792"/>
+            <a:ext cx="943168" cy="201168"/>
+          </a:xfrm>
+          <a:prstGeom prst="rect">
+            <a:avLst/>
+          </a:prstGeom>
+          <a:solidFill>
+            <a:srgbClr val="B4513A"/>
+          </a:solidFill>
+          <a:ln w="9525">
+            <a:solidFill>
+              <a:srgbClr val="FFFFFF"/>
+            </a:solidFill>
+            <a:prstDash val="solid"/>
+          </a:ln>
+        </p:spPr>
+      </p:sp>
+      <p:sp>
+        <p:nvSpPr>
+          <p:cNvPr id="24" name="sb1.355.682"/>
+          <p:cNvSpPr/>
+          <p:nvPr/>
+        </p:nvSpPr>
+        <p:spPr>
+          <a:xfrm>
+            <a:off x="5426296" y="5193792"/>
+            <a:ext cx="419186" cy="201168"/>
+          </a:xfrm>
+          <a:prstGeom prst="rect">
+            <a:avLst/>
+          </a:prstGeom>
+          <a:solidFill>
+            <a:srgbClr val="141414"/>
+          </a:solidFill>
+          <a:ln w="9525">
+            <a:solidFill>
+              <a:srgbClr val="FFFFFF"/>
+            </a:solidFill>
+            <a:prstDash val="solid"/>
+          </a:ln>
+        </p:spPr>
+      </p:sp>
+      <p:sp>
+        <p:nvSpPr>
+          <p:cNvPr id="25" name="sb1.355.683"/>
+          <p:cNvSpPr/>
+          <p:nvPr/>
+        </p:nvSpPr>
+        <p:spPr>
+          <a:xfrm>
+            <a:off x="5845482" y="5193792"/>
+            <a:ext cx="52398" cy="201168"/>
+          </a:xfrm>
+          <a:prstGeom prst="rect">
+            <a:avLst/>
+          </a:prstGeom>
+          <a:solidFill>
+            <a:srgbClr val="8C8C8C"/>
+          </a:solidFill>
+          <a:ln w="9525">
+            <a:solidFill>
+              <a:srgbClr val="FFFFFF"/>
+            </a:solidFill>
+            <a:prstDash val="solid"/>
+          </a:ln>
+        </p:spPr>
+      </p:sp>
+      <p:sp>
+        <p:nvSpPr>
+          <p:cNvPr id="26" name="Text 23"/>
+          <p:cNvSpPr txBox="1"/>
+          <p:nvPr/>
+        </p:nvSpPr>
+        <p:spPr>
+          <a:xfrm>
+            <a:off x="5961888" y="5193792"/>
+            <a:ext cx="1005840" cy="201168"/>
+          </a:xfrm>
+          <a:prstGeom prst="rect">
+            <a:avLst/>
+          </a:prstGeom>
+          <a:noFill/>
+          <a:ln/>
+        </p:spPr>
+        <p:txBody>
+          <a:bodyPr wrap="square" lIns="0" tIns="0" rIns="0" bIns="0" rtlCol="0" anchor="ctr"/>
+          <a:lstStyle/>
+          <a:p>
+            <a:pPr indent="0" marL="0">
+              <a:buNone/>
+            </a:pPr>
+            <a:r>
+              <a:rPr lang="en-US" sz="950" b="1" dirty="0">
+                <a:solidFill>
+                  <a:srgbClr val="B4513A"/>
+                </a:solidFill>
+                <a:latin typeface="Calibri" pitchFamily="34" charset="0"/>
+                <a:ea typeface="Calibri" pitchFamily="34" charset="-122"/>
+                <a:cs typeface="Calibri" pitchFamily="34" charset="-120"/>
+              </a:rPr>
+              <a:t>70% water</a:t>
+            </a:r>
+            <a:endParaRPr lang="en-US" sz="950" dirty="0"/>
+          </a:p>
+        </p:txBody>
+      </p:sp>
+      <p:sp>
+        <p:nvSpPr>
+          <p:cNvPr id="27" name="Text 24"/>
+          <p:cNvSpPr txBox="1"/>
+          <p:nvPr/>
+        </p:nvSpPr>
+        <p:spPr>
+          <a:xfrm>
+            <a:off x="731520" y="5468112"/>
+            <a:ext cx="457200" cy="201168"/>
+          </a:xfrm>
+          <a:prstGeom prst="rect">
+            <a:avLst/>
+          </a:prstGeom>
+          <a:noFill/>
+          <a:ln/>
+        </p:spPr>
+        <p:txBody>
+          <a:bodyPr wrap="square" lIns="0" tIns="0" rIns="0" bIns="0" rtlCol="0" anchor="ctr"/>
+          <a:lstStyle/>
+          <a:p>
+            <a:pPr indent="0" marL="0">
+              <a:buNone/>
+            </a:pPr>
+            <a:r>
+              <a:rPr lang="en-US" sz="1050" b="1" dirty="0">
+                <a:solidFill>
+                  <a:srgbClr val="141414"/>
+                </a:solidFill>
+                <a:latin typeface="Calibri" pitchFamily="34" charset="0"/>
+                <a:ea typeface="Calibri" pitchFamily="34" charset="-122"/>
+                <a:cs typeface="Calibri" pitchFamily="34" charset="-120"/>
+              </a:rPr>
+              <a:t>C3</a:t>
+            </a:r>
+            <a:endParaRPr lang="en-US" sz="1050" dirty="0"/>
+          </a:p>
+        </p:txBody>
+      </p:sp>
+      <p:sp>
+        <p:nvSpPr>
+          <p:cNvPr id="28" name="sb1.355.97999999999999950"/>
+          <p:cNvSpPr/>
+          <p:nvPr/>
+        </p:nvSpPr>
+        <p:spPr>
+          <a:xfrm>
+            <a:off x="1234440" y="5468112"/>
+            <a:ext cx="2934299" cy="201168"/>
+          </a:xfrm>
+          <a:prstGeom prst="rect">
+            <a:avLst/>
+          </a:prstGeom>
+          <a:solidFill>
+            <a:srgbClr val="BDBDBD"/>
+          </a:solidFill>
+          <a:ln w="9525">
+            <a:solidFill>
+              <a:srgbClr val="FFFFFF"/>
+            </a:solidFill>
+            <a:prstDash val="solid"/>
+          </a:ln>
+        </p:spPr>
+      </p:sp>
+      <p:sp>
+        <p:nvSpPr>
+          <p:cNvPr id="29" name="sb1.355.97999999999999951"/>
+          <p:cNvSpPr/>
+          <p:nvPr/>
+        </p:nvSpPr>
+        <p:spPr>
+          <a:xfrm>
+            <a:off x="4168739" y="5468112"/>
+            <a:ext cx="1152760" cy="201168"/>
+          </a:xfrm>
+          <a:prstGeom prst="rect">
+            <a:avLst/>
+          </a:prstGeom>
+          <a:solidFill>
+            <a:srgbClr val="B4513A"/>
+          </a:solidFill>
+          <a:ln w="9525">
+            <a:solidFill>
+              <a:srgbClr val="FFFFFF"/>
+            </a:solidFill>
+            <a:prstDash val="solid"/>
+          </a:ln>
+        </p:spPr>
+      </p:sp>
+      <p:sp>
+        <p:nvSpPr>
+          <p:cNvPr id="30" name="sb1.355.97999999999999952"/>
+          <p:cNvSpPr/>
+          <p:nvPr/>
+        </p:nvSpPr>
+        <p:spPr>
+          <a:xfrm>
+            <a:off x="5321500" y="5468112"/>
+            <a:ext cx="471584" cy="201168"/>
+          </a:xfrm>
+          <a:prstGeom prst="rect">
+            <a:avLst/>
+          </a:prstGeom>
+          <a:solidFill>
+            <a:srgbClr val="141414"/>
+          </a:solidFill>
+          <a:ln w="9525">
+            <a:solidFill>
+              <a:srgbClr val="FFFFFF"/>
+            </a:solidFill>
+            <a:prstDash val="solid"/>
+          </a:ln>
+        </p:spPr>
+      </p:sp>
+      <p:sp>
+        <p:nvSpPr>
+          <p:cNvPr id="31" name="sb1.355.97999999999999953"/>
+          <p:cNvSpPr/>
+          <p:nvPr/>
+        </p:nvSpPr>
+        <p:spPr>
+          <a:xfrm>
+            <a:off x="5793084" y="5468112"/>
+            <a:ext cx="104796" cy="201168"/>
+          </a:xfrm>
+          <a:prstGeom prst="rect">
+            <a:avLst/>
+          </a:prstGeom>
+          <a:solidFill>
+            <a:srgbClr val="8C8C8C"/>
+          </a:solidFill>
+          <a:ln w="9525">
+            <a:solidFill>
+              <a:srgbClr val="FFFFFF"/>
+            </a:solidFill>
+            <a:prstDash val="solid"/>
+          </a:ln>
+        </p:spPr>
+      </p:sp>
+      <p:sp>
+        <p:nvSpPr>
+          <p:cNvPr id="32" name="Text 29"/>
+          <p:cNvSpPr txBox="1"/>
+          <p:nvPr/>
+        </p:nvSpPr>
+        <p:spPr>
+          <a:xfrm>
+            <a:off x="5961888" y="5468112"/>
+            <a:ext cx="1005840" cy="201168"/>
+          </a:xfrm>
+          <a:prstGeom prst="rect">
+            <a:avLst/>
+          </a:prstGeom>
+          <a:noFill/>
+          <a:ln/>
+        </p:spPr>
+        <p:txBody>
+          <a:bodyPr wrap="square" lIns="0" tIns="0" rIns="0" bIns="0" rtlCol="0" anchor="ctr"/>
+          <a:lstStyle/>
+          <a:p>
+            <a:pPr indent="0" marL="0">
+              <a:buNone/>
+            </a:pPr>
+            <a:r>
+              <a:rPr lang="en-US" sz="950" b="1" dirty="0">
+                <a:solidFill>
+                  <a:srgbClr val="B4513A"/>
+                </a:solidFill>
+                <a:latin typeface="Calibri" pitchFamily="34" charset="0"/>
+                <a:ea typeface="Calibri" pitchFamily="34" charset="-122"/>
+                <a:cs typeface="Calibri" pitchFamily="34" charset="-120"/>
+              </a:rPr>
+              <a:t>63% water</a:t>
+            </a:r>
+            <a:endParaRPr lang="en-US" sz="950" dirty="0"/>
+          </a:p>
+        </p:txBody>
+      </p:sp>
+      <p:sp>
+        <p:nvSpPr>
+          <p:cNvPr id="33" name="Text 30"/>
+          <p:cNvSpPr txBox="1"/>
+          <p:nvPr/>
+        </p:nvSpPr>
+        <p:spPr>
+          <a:xfrm>
+            <a:off x="731520" y="5742432"/>
+            <a:ext cx="457200" cy="201168"/>
+          </a:xfrm>
+          <a:prstGeom prst="rect">
+            <a:avLst/>
+          </a:prstGeom>
+          <a:noFill/>
+          <a:ln/>
+        </p:spPr>
+        <p:txBody>
+          <a:bodyPr wrap="square" lIns="0" tIns="0" rIns="0" bIns="0" rtlCol="0" anchor="ctr"/>
+          <a:lstStyle/>
+          <a:p>
+            <a:pPr indent="0" marL="0">
+              <a:buNone/>
+            </a:pPr>
+            <a:r>
+              <a:rPr lang="en-US" sz="1050" b="1" dirty="0">
+                <a:solidFill>
+                  <a:srgbClr val="141414"/>
+                </a:solidFill>
+                <a:latin typeface="Calibri" pitchFamily="34" charset="0"/>
+                <a:ea typeface="Calibri" pitchFamily="34" charset="-122"/>
+                <a:cs typeface="Calibri" pitchFamily="34" charset="-120"/>
+              </a:rPr>
+              <a:t>F1</a:t>
+            </a:r>
+            <a:endParaRPr lang="en-US" sz="1050" dirty="0"/>
+          </a:p>
+        </p:txBody>
+      </p:sp>
+      <p:sp>
+        <p:nvSpPr>
+          <p:cNvPr id="34" name="sb1.356.2799999999999990"/>
+          <p:cNvSpPr/>
+          <p:nvPr/>
+        </p:nvSpPr>
+        <p:spPr>
+          <a:xfrm>
+            <a:off x="1234440" y="5742432"/>
+            <a:ext cx="2725387" cy="201168"/>
+          </a:xfrm>
+          <a:prstGeom prst="rect">
+            <a:avLst/>
+          </a:prstGeom>
+          <a:solidFill>
+            <a:srgbClr val="BDBDBD"/>
+          </a:solidFill>
+          <a:ln w="9525">
+            <a:solidFill>
+              <a:srgbClr val="FFFFFF"/>
+            </a:solidFill>
+            <a:prstDash val="solid"/>
+          </a:ln>
+        </p:spPr>
+      </p:sp>
+      <p:sp>
+        <p:nvSpPr>
+          <p:cNvPr id="35" name="sb1.356.2799999999999991"/>
+          <p:cNvSpPr/>
+          <p:nvPr/>
+        </p:nvSpPr>
+        <p:spPr>
+          <a:xfrm>
+            <a:off x="3959827" y="5742432"/>
+            <a:ext cx="1150719" cy="201168"/>
+          </a:xfrm>
+          <a:prstGeom prst="rect">
+            <a:avLst/>
+          </a:prstGeom>
+          <a:solidFill>
+            <a:srgbClr val="B4513A"/>
+          </a:solidFill>
+          <a:ln w="9525">
+            <a:solidFill>
+              <a:srgbClr val="FFFFFF"/>
+            </a:solidFill>
+            <a:prstDash val="solid"/>
+          </a:ln>
+        </p:spPr>
+      </p:sp>
+      <p:sp>
+        <p:nvSpPr>
+          <p:cNvPr id="36" name="sb1.356.2799999999999992"/>
+          <p:cNvSpPr/>
+          <p:nvPr/>
+        </p:nvSpPr>
+        <p:spPr>
+          <a:xfrm>
+            <a:off x="5110546" y="5742432"/>
+            <a:ext cx="423949" cy="201168"/>
+          </a:xfrm>
+          <a:prstGeom prst="rect">
+            <a:avLst/>
+          </a:prstGeom>
+          <a:solidFill>
+            <a:srgbClr val="141414"/>
+          </a:solidFill>
+          <a:ln w="9525">
+            <a:solidFill>
+              <a:srgbClr val="FFFFFF"/>
+            </a:solidFill>
+            <a:prstDash val="solid"/>
+          </a:ln>
+        </p:spPr>
+      </p:sp>
+      <p:sp>
+        <p:nvSpPr>
+          <p:cNvPr id="37" name="sb1.356.2799999999999993"/>
+          <p:cNvSpPr/>
+          <p:nvPr/>
+        </p:nvSpPr>
+        <p:spPr>
+          <a:xfrm>
+            <a:off x="5534495" y="5742432"/>
+            <a:ext cx="363385" cy="201168"/>
+          </a:xfrm>
+          <a:prstGeom prst="rect">
+            <a:avLst/>
+          </a:prstGeom>
+          <a:solidFill>
+            <a:srgbClr val="8C8C8C"/>
+          </a:solidFill>
+          <a:ln w="9525">
+            <a:solidFill>
+              <a:srgbClr val="FFFFFF"/>
+            </a:solidFill>
+            <a:prstDash val="solid"/>
+          </a:ln>
+        </p:spPr>
+      </p:sp>
+      <p:sp>
+        <p:nvSpPr>
+          <p:cNvPr id="38" name="Text 35"/>
+          <p:cNvSpPr txBox="1"/>
+          <p:nvPr/>
+        </p:nvSpPr>
+        <p:spPr>
+          <a:xfrm>
+            <a:off x="5961888" y="5742432"/>
+            <a:ext cx="1005840" cy="201168"/>
+          </a:xfrm>
+          <a:prstGeom prst="rect">
+            <a:avLst/>
+          </a:prstGeom>
+          <a:noFill/>
+          <a:ln/>
+        </p:spPr>
+        <p:txBody>
+          <a:bodyPr wrap="square" lIns="0" tIns="0" rIns="0" bIns="0" rtlCol="0" anchor="ctr"/>
+          <a:lstStyle/>
+          <a:p>
+            <a:pPr indent="0" marL="0">
+              <a:buNone/>
+            </a:pPr>
+            <a:r>
+              <a:rPr lang="en-US" sz="950" dirty="0">
+                <a:solidFill>
+                  <a:srgbClr val="8C8C8C"/>
+                </a:solidFill>
+                <a:latin typeface="Calibri" pitchFamily="34" charset="0"/>
+                <a:ea typeface="Calibri" pitchFamily="34" charset="-122"/>
+                <a:cs typeface="Calibri" pitchFamily="34" charset="-120"/>
+              </a:rPr>
+              <a:t>58% water</a:t>
+            </a:r>
+            <a:endParaRPr lang="en-US" sz="950" dirty="0"/>
+          </a:p>
+        </p:txBody>
+      </p:sp>
+      <p:sp>
+        <p:nvSpPr>
+          <p:cNvPr id="39" name="Text 36"/>
+          <p:cNvSpPr txBox="1"/>
+          <p:nvPr/>
+        </p:nvSpPr>
+        <p:spPr>
+          <a:xfrm>
+            <a:off x="731520" y="6016752"/>
+            <a:ext cx="457200" cy="201168"/>
+          </a:xfrm>
+          <a:prstGeom prst="rect">
+            <a:avLst/>
+          </a:prstGeom>
+          <a:noFill/>
+          <a:ln/>
+        </p:spPr>
+        <p:txBody>
+          <a:bodyPr wrap="square" lIns="0" tIns="0" rIns="0" bIns="0" rtlCol="0" anchor="ctr"/>
+          <a:lstStyle/>
+          <a:p>
+            <a:pPr indent="0" marL="0">
+              <a:buNone/>
+            </a:pPr>
+            <a:r>
+              <a:rPr lang="en-US" sz="1050" b="1" dirty="0">
+                <a:solidFill>
+                  <a:srgbClr val="141414"/>
+                </a:solidFill>
+                <a:latin typeface="Calibri" pitchFamily="34" charset="0"/>
+                <a:ea typeface="Calibri" pitchFamily="34" charset="-122"/>
+                <a:cs typeface="Calibri" pitchFamily="34" charset="-120"/>
+              </a:rPr>
+              <a:t>F2</a:t>
+            </a:r>
+            <a:endParaRPr lang="en-US" sz="1050" dirty="0"/>
+          </a:p>
+        </p:txBody>
+      </p:sp>
+      <p:sp>
+        <p:nvSpPr>
+          <p:cNvPr id="40" name="sb1.356.580"/>
+          <p:cNvSpPr/>
+          <p:nvPr/>
+        </p:nvSpPr>
+        <p:spPr>
+          <a:xfrm>
+            <a:off x="1234440" y="6016752"/>
+            <a:ext cx="2907079" cy="201168"/>
+          </a:xfrm>
+          <a:prstGeom prst="rect">
+            <a:avLst/>
+          </a:prstGeom>
+          <a:solidFill>
+            <a:srgbClr val="BDBDBD"/>
+          </a:solidFill>
+          <a:ln w="9525">
+            <a:solidFill>
+              <a:srgbClr val="FFFFFF"/>
+            </a:solidFill>
+            <a:prstDash val="solid"/>
+          </a:ln>
+        </p:spPr>
+      </p:sp>
+      <p:sp>
+        <p:nvSpPr>
+          <p:cNvPr id="41" name="sb1.356.581"/>
+          <p:cNvSpPr/>
+          <p:nvPr/>
+        </p:nvSpPr>
+        <p:spPr>
+          <a:xfrm>
+            <a:off x="4141519" y="6016752"/>
+            <a:ext cx="1150719" cy="201168"/>
+          </a:xfrm>
+          <a:prstGeom prst="rect">
+            <a:avLst/>
+          </a:prstGeom>
+          <a:solidFill>
+            <a:srgbClr val="B4513A"/>
+          </a:solidFill>
+          <a:ln w="9525">
+            <a:solidFill>
+              <a:srgbClr val="FFFFFF"/>
+            </a:solidFill>
+            <a:prstDash val="solid"/>
+          </a:ln>
+        </p:spPr>
+      </p:sp>
+      <p:sp>
+        <p:nvSpPr>
+          <p:cNvPr id="42" name="sb1.356.582"/>
+          <p:cNvSpPr/>
+          <p:nvPr/>
+        </p:nvSpPr>
+        <p:spPr>
+          <a:xfrm>
+            <a:off x="5292238" y="6016752"/>
+            <a:ext cx="423949" cy="201168"/>
+          </a:xfrm>
+          <a:prstGeom prst="rect">
+            <a:avLst/>
+          </a:prstGeom>
+          <a:solidFill>
+            <a:srgbClr val="141414"/>
+          </a:solidFill>
+          <a:ln w="9525">
+            <a:solidFill>
+              <a:srgbClr val="FFFFFF"/>
+            </a:solidFill>
+            <a:prstDash val="solid"/>
+          </a:ln>
+        </p:spPr>
+      </p:sp>
+      <p:sp>
+        <p:nvSpPr>
+          <p:cNvPr id="43" name="sb1.356.583"/>
+          <p:cNvSpPr/>
+          <p:nvPr/>
+        </p:nvSpPr>
+        <p:spPr>
+          <a:xfrm>
+            <a:off x="5716188" y="6016752"/>
+            <a:ext cx="181692" cy="201168"/>
+          </a:xfrm>
+          <a:prstGeom prst="rect">
+            <a:avLst/>
+          </a:prstGeom>
+          <a:solidFill>
+            <a:srgbClr val="8C8C8C"/>
+          </a:solidFill>
+          <a:ln w="9525">
+            <a:solidFill>
+              <a:srgbClr val="FFFFFF"/>
+            </a:solidFill>
+            <a:prstDash val="solid"/>
+          </a:ln>
+        </p:spPr>
+      </p:sp>
+      <p:sp>
+        <p:nvSpPr>
+          <p:cNvPr id="44" name="Text 41"/>
+          <p:cNvSpPr txBox="1"/>
+          <p:nvPr/>
+        </p:nvSpPr>
+        <p:spPr>
+          <a:xfrm>
+            <a:off x="5961888" y="6016752"/>
+            <a:ext cx="1005840" cy="201168"/>
+          </a:xfrm>
+          <a:prstGeom prst="rect">
+            <a:avLst/>
+          </a:prstGeom>
+          <a:noFill/>
+          <a:ln/>
+        </p:spPr>
+        <p:txBody>
+          <a:bodyPr wrap="square" lIns="0" tIns="0" rIns="0" bIns="0" rtlCol="0" anchor="ctr"/>
+          <a:lstStyle/>
+          <a:p>
+            <a:pPr indent="0" marL="0">
+              <a:buNone/>
+            </a:pPr>
+            <a:r>
+              <a:rPr lang="en-US" sz="950" dirty="0">
+                <a:solidFill>
+                  <a:srgbClr val="8C8C8C"/>
+                </a:solidFill>
+                <a:latin typeface="Calibri" pitchFamily="34" charset="0"/>
+                <a:ea typeface="Calibri" pitchFamily="34" charset="-122"/>
+                <a:cs typeface="Calibri" pitchFamily="34" charset="-120"/>
+              </a:rPr>
+              <a:t>62% water</a:t>
+            </a:r>
+            <a:endParaRPr lang="en-US" sz="950" dirty="0"/>
+          </a:p>
+        </p:txBody>
+      </p:sp>
+      <p:sp>
+        <p:nvSpPr>
+          <p:cNvPr id="45" name="vr84.45"/>
+          <p:cNvSpPr/>
+          <p:nvPr/>
+        </p:nvSpPr>
+        <p:spPr>
+          <a:xfrm>
+            <a:off x="7315200" y="4069080"/>
+            <a:ext cx="13716" cy="2194560"/>
+          </a:xfrm>
+          <a:prstGeom prst="rect">
+            <a:avLst/>
+          </a:prstGeom>
+          <a:solidFill>
+            <a:srgbClr val="E4E4E4"/>
+          </a:solidFill>
+          <a:ln w="12700">
+            <a:solidFill>
+              <a:srgbClr val="E4E4E4">
+                <a:alpha val="0"/>
+              </a:srgbClr>
+            </a:solidFill>
+            <a:prstDash val="solid"/>
+          </a:ln>
+        </p:spPr>
+      </p:sp>
+      <p:sp>
+        <p:nvSpPr>
+          <p:cNvPr id="46" name="Text 43"/>
+          <p:cNvSpPr txBox="1"/>
+          <p:nvPr/>
+        </p:nvSpPr>
+        <p:spPr>
+          <a:xfrm>
+            <a:off x="7680960" y="4224528"/>
+            <a:ext cx="3749040" cy="274320"/>
           </a:xfrm>
           <a:prstGeom prst="rect">
             <a:avLst/>
@@ -12796,14 +14194,14 @@
       </p:sp>
       <p:sp>
         <p:nvSpPr>
-          <p:cNvPr id="7" name="Text 4"/>
+          <p:cNvPr id="47" name="Text 44"/>
           <p:cNvSpPr txBox="1"/>
           <p:nvPr/>
         </p:nvSpPr>
         <p:spPr>
           <a:xfrm>
-            <a:off x="731520" y="4663440"/>
-            <a:ext cx="5029200" cy="914400"/>
+            <a:off x="7680960" y="4572000"/>
+            <a:ext cx="3749040" cy="822960"/>
           </a:xfrm>
           <a:prstGeom prst="rect">
             <a:avLst/>
@@ -12817,12 +14215,12 @@
           <a:p>
             <a:pPr indent="0" marL="0">
               <a:lnSpc>
-                <a:spcPts val="1800"/>
+                <a:spcPts val="1750"/>
               </a:lnSpc>
               <a:buNone/>
             </a:pPr>
             <a:r>
-              <a:rPr lang="en-US" sz="1200" dirty="0">
+              <a:rPr lang="en-US" sz="1150" dirty="0">
                 <a:solidFill>
                   <a:srgbClr val="3C3C3C"/>
                 </a:solidFill>
@@ -12830,22 +14228,22 @@
                 <a:ea typeface="Calibri" pitchFamily="34" charset="-122"/>
                 <a:cs typeface="Calibri" pitchFamily="34" charset="-120"/>
               </a:rPr>
-              <a:t>Shell-to-binder is held at exactly 2.00 across all three mixes, so solids concentration is the only variable in the series.</a:t>
-            </a:r>
-            <a:endParaRPr lang="en-US" sz="1200" dirty="0"/>
-          </a:p>
-        </p:txBody>
-      </p:sp>
-      <p:sp>
-        <p:nvSpPr>
-          <p:cNvPr id="8" name="Text 5"/>
+              <a:t>Shell-to-binder is held at exactly 2.00 across all three mixes, so solids concentration is the only variable — the water band shortens from C1 to C3.</a:t>
+            </a:r>
+            <a:endParaRPr lang="en-US" sz="1150" dirty="0"/>
+          </a:p>
+        </p:txBody>
+      </p:sp>
+      <p:sp>
+        <p:nvSpPr>
+          <p:cNvPr id="48" name="Text 45"/>
           <p:cNvSpPr txBox="1"/>
           <p:nvPr/>
         </p:nvSpPr>
         <p:spPr>
           <a:xfrm>
-            <a:off x="6400800" y="4297680"/>
-            <a:ext cx="5029200" cy="274320"/>
+            <a:off x="7680960" y="5486400"/>
+            <a:ext cx="3749040" cy="274320"/>
           </a:xfrm>
           <a:prstGeom prst="rect">
             <a:avLst/>
@@ -12869,7 +14267,7 @@
                 <a:ea typeface="Calibri" pitchFamily="34" charset="-122"/>
                 <a:cs typeface="Calibri" pitchFamily="34" charset="-120"/>
               </a:rPr>
-              <a:t>Flexural series — declared confound</a:t>
+              <a:t>Flexural series</a:t>
             </a:r>
             <a:endParaRPr lang="en-US" sz="1300" dirty="0"/>
           </a:p>
@@ -12877,14 +14275,14 @@
       </p:sp>
       <p:sp>
         <p:nvSpPr>
-          <p:cNvPr id="9" name="Text 6"/>
+          <p:cNvPr id="49" name="Text 46"/>
           <p:cNvSpPr txBox="1"/>
           <p:nvPr/>
         </p:nvSpPr>
         <p:spPr>
           <a:xfrm>
-            <a:off x="6400800" y="4663440"/>
-            <a:ext cx="5029200" cy="914400"/>
+            <a:off x="7680960" y="5833872"/>
+            <a:ext cx="3749040" cy="822960"/>
           </a:xfrm>
           <a:prstGeom prst="rect">
             <a:avLst/>
@@ -12898,12 +14296,12 @@
           <a:p>
             <a:pPr indent="0" marL="0">
               <a:lnSpc>
-                <a:spcPts val="1800"/>
+                <a:spcPts val="1750"/>
               </a:lnSpc>
               <a:buNone/>
             </a:pPr>
             <a:r>
-              <a:rPr lang="en-US" sz="1200" dirty="0">
+              <a:rPr lang="en-US" sz="1150" dirty="0">
                 <a:solidFill>
                   <a:srgbClr val="3C3C3C"/>
                 </a:solidFill>
@@ -12911,22 +14309,22 @@
                 <a:ea typeface="Calibri" pitchFamily="34" charset="-122"/>
                 <a:cs typeface="Calibri" pitchFamily="34" charset="-120"/>
               </a:rPr>
-              <a:t>Glycerol was halved at fixed batch mass, so water rose to compensate and solids concentration moved with it. The plasticiser effect is not isolated.</a:t>
-            </a:r>
-            <a:endParaRPr lang="en-US" sz="1200" dirty="0"/>
-          </a:p>
-        </p:txBody>
-      </p:sp>
-      <p:sp>
-        <p:nvSpPr>
-          <p:cNvPr id="10" name="Text 7"/>
+              <a:t>Glycerol was halved at fixed batch mass, so water rose with it. The plasticiser effect is not isolated.</a:t>
+            </a:r>
+            <a:endParaRPr lang="en-US" sz="1150" dirty="0"/>
+          </a:p>
+        </p:txBody>
+      </p:sp>
+      <p:sp>
+        <p:nvSpPr>
+          <p:cNvPr id="50" name="Text 47"/>
           <p:cNvSpPr txBox="1"/>
           <p:nvPr/>
         </p:nvSpPr>
         <p:spPr>
           <a:xfrm>
-            <a:off x="731520" y="5897880"/>
-            <a:ext cx="10698480" cy="457200"/>
+            <a:off x="731520" y="6446520"/>
+            <a:ext cx="6400800" cy="457200"/>
           </a:xfrm>
           <a:prstGeom prst="rect">
             <a:avLst/>
@@ -12953,7 +14351,7 @@
                 <a:ea typeface="Calibri" pitchFamily="34" charset="-122"/>
                 <a:cs typeface="Calibri" pitchFamily="34" charset="-120"/>
               </a:rPr>
-              <a:t>Three specimens per formulation. Values reported later are means; individual specimen values were not retained, so standard deviations cannot be given.</a:t>
+              <a:t>Three specimens per formulation. Values reported later are means; individual values were not retained, so standard deviations cannot be given.</a:t>
             </a:r>
             <a:endParaRPr lang="en-US" sz="900" dirty="0"/>
           </a:p>
@@ -12961,7 +14359,7 @@
       </p:sp>
       <p:sp>
         <p:nvSpPr>
-          <p:cNvPr id="12" name="Text 0"/>
+          <p:cNvPr id="52" name="Text 0"/>
           <p:cNvSpPr/>
           <p:nvPr>
             <p:ph idx="100" hasCustomPrompt="1"/>
@@ -13086,7 +14484,7 @@
                 <a:ea typeface="Calibri" pitchFamily="34" charset="-122"/>
                 <a:cs typeface="Calibri" pitchFamily="34" charset="-120"/>
               </a:rPr>
-              <a:t>Five properties, three published standards</a:t>
+              <a:t>Five properties, three published standards, four specimen geometries</a:t>
             </a:r>
             <a:endParaRPr lang="en-US" sz="1300" dirty="0"/>
           </a:p>
@@ -13115,13 +14513,12 @@
             <a:tbl>
               <a:tblPr/>
               <a:tblGrid>
-                <a:gridCol w="2286000"/>
-                <a:gridCol w="2103120"/>
-                <a:gridCol w="3200400"/>
-                <a:gridCol w="1005840"/>
-                <a:gridCol w="2103120"/>
+                <a:gridCol w="2743200"/>
+                <a:gridCol w="2651760"/>
+                <a:gridCol w="1280160"/>
+                <a:gridCol w="4023360"/>
               </a:tblGrid>
-              <a:tr h="420624">
+              <a:tr h="365760">
                 <a:tc>
                   <a:txBody>
                     <a:bodyPr/>
@@ -13275,74 +14672,6 @@
                           <a:ea typeface="Calibri" pitchFamily="34" charset="-122"/>
                           <a:cs typeface="Calibri" pitchFamily="34" charset="-120"/>
                         </a:rPr>
-                        <a:t>Specimen</a:t>
-                      </a:r>
-                      <a:endParaRPr lang="en-US" sz="1050" dirty="0">
-                        <a:latin typeface="Calibri" charset="0"/>
-                        <a:ea typeface="Calibri" charset="0"/>
-                        <a:cs typeface="Calibri" charset="0"/>
-                      </a:endParaRPr>
-                    </a:p>
-                  </a:txBody>
-                  <a:tcPr marL="91440" marR="91440" marT="45720" marB="45720" anchor="ctr">
-                    <a:lnL w="12700" cap="flat" cmpd="sng" algn="ctr">
-                      <a:solidFill>
-                        <a:srgbClr val="E4E4E4"/>
-                      </a:solidFill>
-                      <a:prstDash val="solid"/>
-                      <a:round/>
-                      <a:headEnd type="none" w="med" len="med"/>
-                      <a:tailEnd type="none" w="med" len="med"/>
-                    </a:lnL>
-                    <a:lnR w="12700" cap="flat" cmpd="sng" algn="ctr">
-                      <a:solidFill>
-                        <a:srgbClr val="E4E4E4"/>
-                      </a:solidFill>
-                      <a:prstDash val="solid"/>
-                      <a:round/>
-                      <a:headEnd type="none" w="med" len="med"/>
-                      <a:tailEnd type="none" w="med" len="med"/>
-                    </a:lnR>
-                    <a:lnT w="12700" cap="flat" cmpd="sng" algn="ctr">
-                      <a:solidFill>
-                        <a:srgbClr val="E4E4E4"/>
-                      </a:solidFill>
-                      <a:prstDash val="solid"/>
-                      <a:round/>
-                      <a:headEnd type="none" w="med" len="med"/>
-                      <a:tailEnd type="none" w="med" len="med"/>
-                    </a:lnT>
-                    <a:lnB w="12700" cap="flat" cmpd="sng" algn="ctr">
-                      <a:solidFill>
-                        <a:srgbClr val="E4E4E4"/>
-                      </a:solidFill>
-                      <a:prstDash val="solid"/>
-                      <a:round/>
-                      <a:headEnd type="none" w="med" len="med"/>
-                      <a:tailEnd type="none" w="med" len="med"/>
-                    </a:lnB>
-                    <a:solidFill>
-                      <a:srgbClr val="F7F6F4"/>
-                    </a:solidFill>
-                  </a:tcPr>
-                </a:tc>
-                <a:tc>
-                  <a:txBody>
-                    <a:bodyPr/>
-                    <a:lstStyle/>
-                    <a:p>
-                      <a:pPr algn="ctr" indent="0" marL="0">
-                        <a:buNone/>
-                      </a:pPr>
-                      <a:r>
-                        <a:rPr lang="en-US" sz="1050" b="1" dirty="0">
-                          <a:solidFill>
-                            <a:srgbClr val="141414"/>
-                          </a:solidFill>
-                          <a:latin typeface="Calibri" pitchFamily="34" charset="0"/>
-                          <a:ea typeface="Calibri" pitchFamily="34" charset="-122"/>
-                          <a:cs typeface="Calibri" pitchFamily="34" charset="-120"/>
-                        </a:rPr>
                         <a:t>n</a:t>
                       </a:r>
                       <a:endParaRPr lang="en-US" sz="1050" dirty="0">
@@ -13463,7 +14792,7 @@
                   </a:tcPr>
                 </a:tc>
               </a:tr>
-              <a:tr h="420624">
+              <a:tr h="365760">
                 <a:tc>
                   <a:txBody>
                     <a:bodyPr/>
@@ -13605,6 +14934,74 @@
                     <a:bodyPr/>
                     <a:lstStyle/>
                     <a:p>
+                      <a:pPr algn="ctr" indent="0" marL="0">
+                        <a:buNone/>
+                      </a:pPr>
+                      <a:r>
+                        <a:rPr lang="en-US" sz="1050" dirty="0">
+                          <a:solidFill>
+                            <a:srgbClr val="3C3C3C"/>
+                          </a:solidFill>
+                          <a:latin typeface="Calibri" pitchFamily="34" charset="0"/>
+                          <a:ea typeface="Calibri" pitchFamily="34" charset="-122"/>
+                          <a:cs typeface="Calibri" pitchFamily="34" charset="-120"/>
+                        </a:rPr>
+                        <a:t>3 per mix</a:t>
+                      </a:r>
+                      <a:endParaRPr lang="en-US" sz="1050" dirty="0">
+                        <a:latin typeface="Calibri" charset="0"/>
+                        <a:ea typeface="Calibri" charset="0"/>
+                        <a:cs typeface="Calibri" charset="0"/>
+                      </a:endParaRPr>
+                    </a:p>
+                  </a:txBody>
+                  <a:tcPr marL="91440" marR="91440" marT="45720" marB="45720" anchor="ctr">
+                    <a:lnL w="12700" cap="flat" cmpd="sng" algn="ctr">
+                      <a:solidFill>
+                        <a:srgbClr val="E4E4E4"/>
+                      </a:solidFill>
+                      <a:prstDash val="solid"/>
+                      <a:round/>
+                      <a:headEnd type="none" w="med" len="med"/>
+                      <a:tailEnd type="none" w="med" len="med"/>
+                    </a:lnL>
+                    <a:lnR w="12700" cap="flat" cmpd="sng" algn="ctr">
+                      <a:solidFill>
+                        <a:srgbClr val="E4E4E4"/>
+                      </a:solidFill>
+                      <a:prstDash val="solid"/>
+                      <a:round/>
+                      <a:headEnd type="none" w="med" len="med"/>
+                      <a:tailEnd type="none" w="med" len="med"/>
+                    </a:lnR>
+                    <a:lnT w="12700" cap="flat" cmpd="sng" algn="ctr">
+                      <a:solidFill>
+                        <a:srgbClr val="E4E4E4"/>
+                      </a:solidFill>
+                      <a:prstDash val="solid"/>
+                      <a:round/>
+                      <a:headEnd type="none" w="med" len="med"/>
+                      <a:tailEnd type="none" w="med" len="med"/>
+                    </a:lnT>
+                    <a:lnB w="12700" cap="flat" cmpd="sng" algn="ctr">
+                      <a:solidFill>
+                        <a:srgbClr val="E4E4E4"/>
+                      </a:solidFill>
+                      <a:prstDash val="solid"/>
+                      <a:round/>
+                      <a:headEnd type="none" w="med" len="med"/>
+                      <a:tailEnd type="none" w="med" len="med"/>
+                    </a:lnB>
+                    <a:solidFill>
+                      <a:srgbClr val="FFFFFF"/>
+                    </a:solidFill>
+                  </a:tcPr>
+                </a:tc>
+                <a:tc>
+                  <a:txBody>
+                    <a:bodyPr/>
+                    <a:lstStyle/>
+                    <a:p>
                       <a:pPr algn="l" indent="0" marL="0">
                         <a:buNone/>
                       </a:pPr>
@@ -13617,7 +15014,145 @@
                           <a:ea typeface="Calibri" pitchFamily="34" charset="-122"/>
                           <a:cs typeface="Calibri" pitchFamily="34" charset="-120"/>
                         </a:rPr>
-                        <a:t>50 mm cube moulds</a:t>
+                        <a:t>Maximum load; compressive stress</a:t>
+                      </a:r>
+                      <a:endParaRPr lang="en-US" sz="1050" dirty="0">
+                        <a:latin typeface="Calibri" charset="0"/>
+                        <a:ea typeface="Calibri" charset="0"/>
+                        <a:cs typeface="Calibri" charset="0"/>
+                      </a:endParaRPr>
+                    </a:p>
+                  </a:txBody>
+                  <a:tcPr marL="91440" marR="91440" marT="45720" marB="45720" anchor="ctr">
+                    <a:lnL w="12700" cap="flat" cmpd="sng" algn="ctr">
+                      <a:solidFill>
+                        <a:srgbClr val="E4E4E4"/>
+                      </a:solidFill>
+                      <a:prstDash val="solid"/>
+                      <a:round/>
+                      <a:headEnd type="none" w="med" len="med"/>
+                      <a:tailEnd type="none" w="med" len="med"/>
+                    </a:lnL>
+                    <a:lnR w="12700" cap="flat" cmpd="sng" algn="ctr">
+                      <a:solidFill>
+                        <a:srgbClr val="E4E4E4"/>
+                      </a:solidFill>
+                      <a:prstDash val="solid"/>
+                      <a:round/>
+                      <a:headEnd type="none" w="med" len="med"/>
+                      <a:tailEnd type="none" w="med" len="med"/>
+                    </a:lnR>
+                    <a:lnT w="12700" cap="flat" cmpd="sng" algn="ctr">
+                      <a:solidFill>
+                        <a:srgbClr val="E4E4E4"/>
+                      </a:solidFill>
+                      <a:prstDash val="solid"/>
+                      <a:round/>
+                      <a:headEnd type="none" w="med" len="med"/>
+                      <a:tailEnd type="none" w="med" len="med"/>
+                    </a:lnT>
+                    <a:lnB w="12700" cap="flat" cmpd="sng" algn="ctr">
+                      <a:solidFill>
+                        <a:srgbClr val="E4E4E4"/>
+                      </a:solidFill>
+                      <a:prstDash val="solid"/>
+                      <a:round/>
+                      <a:headEnd type="none" w="med" len="med"/>
+                      <a:tailEnd type="none" w="med" len="med"/>
+                    </a:lnB>
+                    <a:solidFill>
+                      <a:srgbClr val="FFFFFF"/>
+                    </a:solidFill>
+                  </a:tcPr>
+                </a:tc>
+              </a:tr>
+              <a:tr h="365760">
+                <a:tc>
+                  <a:txBody>
+                    <a:bodyPr/>
+                    <a:lstStyle/>
+                    <a:p>
+                      <a:pPr algn="l" indent="0" marL="0">
+                        <a:buNone/>
+                      </a:pPr>
+                      <a:r>
+                        <a:rPr lang="en-US" sz="1050" dirty="0">
+                          <a:solidFill>
+                            <a:srgbClr val="3C3C3C"/>
+                          </a:solidFill>
+                          <a:latin typeface="Calibri" pitchFamily="34" charset="0"/>
+                          <a:ea typeface="Calibri" pitchFamily="34" charset="-122"/>
+                          <a:cs typeface="Calibri" pitchFamily="34" charset="-120"/>
+                        </a:rPr>
+                        <a:t>Flexural behaviour</a:t>
+                      </a:r>
+                      <a:endParaRPr lang="en-US" sz="1050" dirty="0">
+                        <a:latin typeface="Calibri" charset="0"/>
+                        <a:ea typeface="Calibri" charset="0"/>
+                        <a:cs typeface="Calibri" charset="0"/>
+                      </a:endParaRPr>
+                    </a:p>
+                  </a:txBody>
+                  <a:tcPr marL="91440" marR="91440" marT="45720" marB="45720" anchor="ctr">
+                    <a:lnL w="12700" cap="flat" cmpd="sng" algn="ctr">
+                      <a:solidFill>
+                        <a:srgbClr val="E4E4E4"/>
+                      </a:solidFill>
+                      <a:prstDash val="solid"/>
+                      <a:round/>
+                      <a:headEnd type="none" w="med" len="med"/>
+                      <a:tailEnd type="none" w="med" len="med"/>
+                    </a:lnL>
+                    <a:lnR w="12700" cap="flat" cmpd="sng" algn="ctr">
+                      <a:solidFill>
+                        <a:srgbClr val="E4E4E4"/>
+                      </a:solidFill>
+                      <a:prstDash val="solid"/>
+                      <a:round/>
+                      <a:headEnd type="none" w="med" len="med"/>
+                      <a:tailEnd type="none" w="med" len="med"/>
+                    </a:lnR>
+                    <a:lnT w="12700" cap="flat" cmpd="sng" algn="ctr">
+                      <a:solidFill>
+                        <a:srgbClr val="E4E4E4"/>
+                      </a:solidFill>
+                      <a:prstDash val="solid"/>
+                      <a:round/>
+                      <a:headEnd type="none" w="med" len="med"/>
+                      <a:tailEnd type="none" w="med" len="med"/>
+                    </a:lnT>
+                    <a:lnB w="12700" cap="flat" cmpd="sng" algn="ctr">
+                      <a:solidFill>
+                        <a:srgbClr val="E4E4E4"/>
+                      </a:solidFill>
+                      <a:prstDash val="solid"/>
+                      <a:round/>
+                      <a:headEnd type="none" w="med" len="med"/>
+                      <a:tailEnd type="none" w="med" len="med"/>
+                    </a:lnB>
+                    <a:solidFill>
+                      <a:srgbClr val="FFFFFF"/>
+                    </a:solidFill>
+                  </a:tcPr>
+                </a:tc>
+                <a:tc>
+                  <a:txBody>
+                    <a:bodyPr/>
+                    <a:lstStyle/>
+                    <a:p>
+                      <a:pPr algn="l" indent="0" marL="0">
+                        <a:buNone/>
+                      </a:pPr>
+                      <a:r>
+                        <a:rPr lang="en-US" sz="1050" dirty="0">
+                          <a:solidFill>
+                            <a:srgbClr val="3C3C3C"/>
+                          </a:solidFill>
+                          <a:latin typeface="Calibri" pitchFamily="34" charset="0"/>
+                          <a:ea typeface="Calibri" pitchFamily="34" charset="-122"/>
+                          <a:cs typeface="Calibri" pitchFamily="34" charset="-120"/>
+                        </a:rPr>
+                        <a:t>ASTM D790-17</a:t>
                       </a:r>
                       <a:endParaRPr lang="en-US" sz="1050" dirty="0">
                         <a:latin typeface="Calibri" charset="0"/>
@@ -13753,348 +15288,6 @@
                           <a:ea typeface="Calibri" pitchFamily="34" charset="-122"/>
                           <a:cs typeface="Calibri" pitchFamily="34" charset="-120"/>
                         </a:rPr>
-                        <a:t>Maximum load; compressive stress</a:t>
-                      </a:r>
-                      <a:endParaRPr lang="en-US" sz="1050" dirty="0">
-                        <a:latin typeface="Calibri" charset="0"/>
-                        <a:ea typeface="Calibri" charset="0"/>
-                        <a:cs typeface="Calibri" charset="0"/>
-                      </a:endParaRPr>
-                    </a:p>
-                  </a:txBody>
-                  <a:tcPr marL="91440" marR="91440" marT="45720" marB="45720" anchor="ctr">
-                    <a:lnL w="12700" cap="flat" cmpd="sng" algn="ctr">
-                      <a:solidFill>
-                        <a:srgbClr val="E4E4E4"/>
-                      </a:solidFill>
-                      <a:prstDash val="solid"/>
-                      <a:round/>
-                      <a:headEnd type="none" w="med" len="med"/>
-                      <a:tailEnd type="none" w="med" len="med"/>
-                    </a:lnL>
-                    <a:lnR w="12700" cap="flat" cmpd="sng" algn="ctr">
-                      <a:solidFill>
-                        <a:srgbClr val="E4E4E4"/>
-                      </a:solidFill>
-                      <a:prstDash val="solid"/>
-                      <a:round/>
-                      <a:headEnd type="none" w="med" len="med"/>
-                      <a:tailEnd type="none" w="med" len="med"/>
-                    </a:lnR>
-                    <a:lnT w="12700" cap="flat" cmpd="sng" algn="ctr">
-                      <a:solidFill>
-                        <a:srgbClr val="E4E4E4"/>
-                      </a:solidFill>
-                      <a:prstDash val="solid"/>
-                      <a:round/>
-                      <a:headEnd type="none" w="med" len="med"/>
-                      <a:tailEnd type="none" w="med" len="med"/>
-                    </a:lnT>
-                    <a:lnB w="12700" cap="flat" cmpd="sng" algn="ctr">
-                      <a:solidFill>
-                        <a:srgbClr val="E4E4E4"/>
-                      </a:solidFill>
-                      <a:prstDash val="solid"/>
-                      <a:round/>
-                      <a:headEnd type="none" w="med" len="med"/>
-                      <a:tailEnd type="none" w="med" len="med"/>
-                    </a:lnB>
-                    <a:solidFill>
-                      <a:srgbClr val="FFFFFF"/>
-                    </a:solidFill>
-                  </a:tcPr>
-                </a:tc>
-              </a:tr>
-              <a:tr h="420624">
-                <a:tc>
-                  <a:txBody>
-                    <a:bodyPr/>
-                    <a:lstStyle/>
-                    <a:p>
-                      <a:pPr algn="l" indent="0" marL="0">
-                        <a:buNone/>
-                      </a:pPr>
-                      <a:r>
-                        <a:rPr lang="en-US" sz="1050" dirty="0">
-                          <a:solidFill>
-                            <a:srgbClr val="3C3C3C"/>
-                          </a:solidFill>
-                          <a:latin typeface="Calibri" pitchFamily="34" charset="0"/>
-                          <a:ea typeface="Calibri" pitchFamily="34" charset="-122"/>
-                          <a:cs typeface="Calibri" pitchFamily="34" charset="-120"/>
-                        </a:rPr>
-                        <a:t>Flexural behaviour</a:t>
-                      </a:r>
-                      <a:endParaRPr lang="en-US" sz="1050" dirty="0">
-                        <a:latin typeface="Calibri" charset="0"/>
-                        <a:ea typeface="Calibri" charset="0"/>
-                        <a:cs typeface="Calibri" charset="0"/>
-                      </a:endParaRPr>
-                    </a:p>
-                  </a:txBody>
-                  <a:tcPr marL="91440" marR="91440" marT="45720" marB="45720" anchor="ctr">
-                    <a:lnL w="12700" cap="flat" cmpd="sng" algn="ctr">
-                      <a:solidFill>
-                        <a:srgbClr val="E4E4E4"/>
-                      </a:solidFill>
-                      <a:prstDash val="solid"/>
-                      <a:round/>
-                      <a:headEnd type="none" w="med" len="med"/>
-                      <a:tailEnd type="none" w="med" len="med"/>
-                    </a:lnL>
-                    <a:lnR w="12700" cap="flat" cmpd="sng" algn="ctr">
-                      <a:solidFill>
-                        <a:srgbClr val="E4E4E4"/>
-                      </a:solidFill>
-                      <a:prstDash val="solid"/>
-                      <a:round/>
-                      <a:headEnd type="none" w="med" len="med"/>
-                      <a:tailEnd type="none" w="med" len="med"/>
-                    </a:lnR>
-                    <a:lnT w="12700" cap="flat" cmpd="sng" algn="ctr">
-                      <a:solidFill>
-                        <a:srgbClr val="E4E4E4"/>
-                      </a:solidFill>
-                      <a:prstDash val="solid"/>
-                      <a:round/>
-                      <a:headEnd type="none" w="med" len="med"/>
-                      <a:tailEnd type="none" w="med" len="med"/>
-                    </a:lnT>
-                    <a:lnB w="12700" cap="flat" cmpd="sng" algn="ctr">
-                      <a:solidFill>
-                        <a:srgbClr val="E4E4E4"/>
-                      </a:solidFill>
-                      <a:prstDash val="solid"/>
-                      <a:round/>
-                      <a:headEnd type="none" w="med" len="med"/>
-                      <a:tailEnd type="none" w="med" len="med"/>
-                    </a:lnB>
-                    <a:solidFill>
-                      <a:srgbClr val="FFFFFF"/>
-                    </a:solidFill>
-                  </a:tcPr>
-                </a:tc>
-                <a:tc>
-                  <a:txBody>
-                    <a:bodyPr/>
-                    <a:lstStyle/>
-                    <a:p>
-                      <a:pPr algn="l" indent="0" marL="0">
-                        <a:buNone/>
-                      </a:pPr>
-                      <a:r>
-                        <a:rPr lang="en-US" sz="1050" dirty="0">
-                          <a:solidFill>
-                            <a:srgbClr val="3C3C3C"/>
-                          </a:solidFill>
-                          <a:latin typeface="Calibri" pitchFamily="34" charset="0"/>
-                          <a:ea typeface="Calibri" pitchFamily="34" charset="-122"/>
-                          <a:cs typeface="Calibri" pitchFamily="34" charset="-120"/>
-                        </a:rPr>
-                        <a:t>ASTM D790-17</a:t>
-                      </a:r>
-                      <a:endParaRPr lang="en-US" sz="1050" dirty="0">
-                        <a:latin typeface="Calibri" charset="0"/>
-                        <a:ea typeface="Calibri" charset="0"/>
-                        <a:cs typeface="Calibri" charset="0"/>
-                      </a:endParaRPr>
-                    </a:p>
-                  </a:txBody>
-                  <a:tcPr marL="91440" marR="91440" marT="45720" marB="45720" anchor="ctr">
-                    <a:lnL w="12700" cap="flat" cmpd="sng" algn="ctr">
-                      <a:solidFill>
-                        <a:srgbClr val="E4E4E4"/>
-                      </a:solidFill>
-                      <a:prstDash val="solid"/>
-                      <a:round/>
-                      <a:headEnd type="none" w="med" len="med"/>
-                      <a:tailEnd type="none" w="med" len="med"/>
-                    </a:lnL>
-                    <a:lnR w="12700" cap="flat" cmpd="sng" algn="ctr">
-                      <a:solidFill>
-                        <a:srgbClr val="E4E4E4"/>
-                      </a:solidFill>
-                      <a:prstDash val="solid"/>
-                      <a:round/>
-                      <a:headEnd type="none" w="med" len="med"/>
-                      <a:tailEnd type="none" w="med" len="med"/>
-                    </a:lnR>
-                    <a:lnT w="12700" cap="flat" cmpd="sng" algn="ctr">
-                      <a:solidFill>
-                        <a:srgbClr val="E4E4E4"/>
-                      </a:solidFill>
-                      <a:prstDash val="solid"/>
-                      <a:round/>
-                      <a:headEnd type="none" w="med" len="med"/>
-                      <a:tailEnd type="none" w="med" len="med"/>
-                    </a:lnT>
-                    <a:lnB w="12700" cap="flat" cmpd="sng" algn="ctr">
-                      <a:solidFill>
-                        <a:srgbClr val="E4E4E4"/>
-                      </a:solidFill>
-                      <a:prstDash val="solid"/>
-                      <a:round/>
-                      <a:headEnd type="none" w="med" len="med"/>
-                      <a:tailEnd type="none" w="med" len="med"/>
-                    </a:lnB>
-                    <a:solidFill>
-                      <a:srgbClr val="FFFFFF"/>
-                    </a:solidFill>
-                  </a:tcPr>
-                </a:tc>
-                <a:tc>
-                  <a:txBody>
-                    <a:bodyPr/>
-                    <a:lstStyle/>
-                    <a:p>
-                      <a:pPr algn="l" indent="0" marL="0">
-                        <a:buNone/>
-                      </a:pPr>
-                      <a:r>
-                        <a:rPr lang="en-US" sz="1050" dirty="0">
-                          <a:solidFill>
-                            <a:srgbClr val="3C3C3C"/>
-                          </a:solidFill>
-                          <a:latin typeface="Calibri" pitchFamily="34" charset="0"/>
-                          <a:ea typeface="Calibri" pitchFamily="34" charset="-122"/>
-                          <a:cs typeface="Calibri" pitchFamily="34" charset="-120"/>
-                        </a:rPr>
-                        <a:t>180 × 60 × 20 mm, 120 mm span</a:t>
-                      </a:r>
-                      <a:endParaRPr lang="en-US" sz="1050" dirty="0">
-                        <a:latin typeface="Calibri" charset="0"/>
-                        <a:ea typeface="Calibri" charset="0"/>
-                        <a:cs typeface="Calibri" charset="0"/>
-                      </a:endParaRPr>
-                    </a:p>
-                  </a:txBody>
-                  <a:tcPr marL="91440" marR="91440" marT="45720" marB="45720" anchor="ctr">
-                    <a:lnL w="12700" cap="flat" cmpd="sng" algn="ctr">
-                      <a:solidFill>
-                        <a:srgbClr val="E4E4E4"/>
-                      </a:solidFill>
-                      <a:prstDash val="solid"/>
-                      <a:round/>
-                      <a:headEnd type="none" w="med" len="med"/>
-                      <a:tailEnd type="none" w="med" len="med"/>
-                    </a:lnL>
-                    <a:lnR w="12700" cap="flat" cmpd="sng" algn="ctr">
-                      <a:solidFill>
-                        <a:srgbClr val="E4E4E4"/>
-                      </a:solidFill>
-                      <a:prstDash val="solid"/>
-                      <a:round/>
-                      <a:headEnd type="none" w="med" len="med"/>
-                      <a:tailEnd type="none" w="med" len="med"/>
-                    </a:lnR>
-                    <a:lnT w="12700" cap="flat" cmpd="sng" algn="ctr">
-                      <a:solidFill>
-                        <a:srgbClr val="E4E4E4"/>
-                      </a:solidFill>
-                      <a:prstDash val="solid"/>
-                      <a:round/>
-                      <a:headEnd type="none" w="med" len="med"/>
-                      <a:tailEnd type="none" w="med" len="med"/>
-                    </a:lnT>
-                    <a:lnB w="12700" cap="flat" cmpd="sng" algn="ctr">
-                      <a:solidFill>
-                        <a:srgbClr val="E4E4E4"/>
-                      </a:solidFill>
-                      <a:prstDash val="solid"/>
-                      <a:round/>
-                      <a:headEnd type="none" w="med" len="med"/>
-                      <a:tailEnd type="none" w="med" len="med"/>
-                    </a:lnB>
-                    <a:solidFill>
-                      <a:srgbClr val="FFFFFF"/>
-                    </a:solidFill>
-                  </a:tcPr>
-                </a:tc>
-                <a:tc>
-                  <a:txBody>
-                    <a:bodyPr/>
-                    <a:lstStyle/>
-                    <a:p>
-                      <a:pPr algn="ctr" indent="0" marL="0">
-                        <a:buNone/>
-                      </a:pPr>
-                      <a:r>
-                        <a:rPr lang="en-US" sz="1050" dirty="0">
-                          <a:solidFill>
-                            <a:srgbClr val="3C3C3C"/>
-                          </a:solidFill>
-                          <a:latin typeface="Calibri" pitchFamily="34" charset="0"/>
-                          <a:ea typeface="Calibri" pitchFamily="34" charset="-122"/>
-                          <a:cs typeface="Calibri" pitchFamily="34" charset="-120"/>
-                        </a:rPr>
-                        <a:t>3 per mix</a:t>
-                      </a:r>
-                      <a:endParaRPr lang="en-US" sz="1050" dirty="0">
-                        <a:latin typeface="Calibri" charset="0"/>
-                        <a:ea typeface="Calibri" charset="0"/>
-                        <a:cs typeface="Calibri" charset="0"/>
-                      </a:endParaRPr>
-                    </a:p>
-                  </a:txBody>
-                  <a:tcPr marL="91440" marR="91440" marT="45720" marB="45720" anchor="ctr">
-                    <a:lnL w="12700" cap="flat" cmpd="sng" algn="ctr">
-                      <a:solidFill>
-                        <a:srgbClr val="E4E4E4"/>
-                      </a:solidFill>
-                      <a:prstDash val="solid"/>
-                      <a:round/>
-                      <a:headEnd type="none" w="med" len="med"/>
-                      <a:tailEnd type="none" w="med" len="med"/>
-                    </a:lnL>
-                    <a:lnR w="12700" cap="flat" cmpd="sng" algn="ctr">
-                      <a:solidFill>
-                        <a:srgbClr val="E4E4E4"/>
-                      </a:solidFill>
-                      <a:prstDash val="solid"/>
-                      <a:round/>
-                      <a:headEnd type="none" w="med" len="med"/>
-                      <a:tailEnd type="none" w="med" len="med"/>
-                    </a:lnR>
-                    <a:lnT w="12700" cap="flat" cmpd="sng" algn="ctr">
-                      <a:solidFill>
-                        <a:srgbClr val="E4E4E4"/>
-                      </a:solidFill>
-                      <a:prstDash val="solid"/>
-                      <a:round/>
-                      <a:headEnd type="none" w="med" len="med"/>
-                      <a:tailEnd type="none" w="med" len="med"/>
-                    </a:lnT>
-                    <a:lnB w="12700" cap="flat" cmpd="sng" algn="ctr">
-                      <a:solidFill>
-                        <a:srgbClr val="E4E4E4"/>
-                      </a:solidFill>
-                      <a:prstDash val="solid"/>
-                      <a:round/>
-                      <a:headEnd type="none" w="med" len="med"/>
-                      <a:tailEnd type="none" w="med" len="med"/>
-                    </a:lnB>
-                    <a:solidFill>
-                      <a:srgbClr val="FFFFFF"/>
-                    </a:solidFill>
-                  </a:tcPr>
-                </a:tc>
-                <a:tc>
-                  <a:txBody>
-                    <a:bodyPr/>
-                    <a:lstStyle/>
-                    <a:p>
-                      <a:pPr algn="l" indent="0" marL="0">
-                        <a:buNone/>
-                      </a:pPr>
-                      <a:r>
-                        <a:rPr lang="en-US" sz="1050" dirty="0">
-                          <a:solidFill>
-                            <a:srgbClr val="3C3C3C"/>
-                          </a:solidFill>
-                          <a:latin typeface="Calibri" pitchFamily="34" charset="0"/>
-                          <a:ea typeface="Calibri" pitchFamily="34" charset="-122"/>
-                          <a:cs typeface="Calibri" pitchFamily="34" charset="-120"/>
-                        </a:rPr>
                         <a:t>Flexural strength; flexural modulus</a:t>
                       </a:r>
                       <a:endParaRPr lang="en-US" sz="1050" dirty="0">
@@ -14147,7 +15340,7 @@
                   </a:tcPr>
                 </a:tc>
               </a:tr>
-              <a:tr h="420624">
+              <a:tr h="365760">
                 <a:tc>
                   <a:txBody>
                     <a:bodyPr/>
@@ -14289,74 +15482,6 @@
                     <a:bodyPr/>
                     <a:lstStyle/>
                     <a:p>
-                      <a:pPr algn="l" indent="0" marL="0">
-                        <a:buNone/>
-                      </a:pPr>
-                      <a:r>
-                        <a:rPr lang="en-US" sz="1050" dirty="0">
-                          <a:solidFill>
-                            <a:srgbClr val="3C3C3C"/>
-                          </a:solidFill>
-                          <a:latin typeface="Calibri" pitchFamily="34" charset="0"/>
-                          <a:ea typeface="Calibri" pitchFamily="34" charset="-122"/>
-                          <a:cs typeface="Calibri" pitchFamily="34" charset="-120"/>
-                        </a:rPr>
-                        <a:t>40 × 50 mm, 45°, 15 s edge flame</a:t>
-                      </a:r>
-                      <a:endParaRPr lang="en-US" sz="1050" dirty="0">
-                        <a:latin typeface="Calibri" charset="0"/>
-                        <a:ea typeface="Calibri" charset="0"/>
-                        <a:cs typeface="Calibri" charset="0"/>
-                      </a:endParaRPr>
-                    </a:p>
-                  </a:txBody>
-                  <a:tcPr marL="91440" marR="91440" marT="45720" marB="45720" anchor="ctr">
-                    <a:lnL w="12700" cap="flat" cmpd="sng" algn="ctr">
-                      <a:solidFill>
-                        <a:srgbClr val="E4E4E4"/>
-                      </a:solidFill>
-                      <a:prstDash val="solid"/>
-                      <a:round/>
-                      <a:headEnd type="none" w="med" len="med"/>
-                      <a:tailEnd type="none" w="med" len="med"/>
-                    </a:lnL>
-                    <a:lnR w="12700" cap="flat" cmpd="sng" algn="ctr">
-                      <a:solidFill>
-                        <a:srgbClr val="E4E4E4"/>
-                      </a:solidFill>
-                      <a:prstDash val="solid"/>
-                      <a:round/>
-                      <a:headEnd type="none" w="med" len="med"/>
-                      <a:tailEnd type="none" w="med" len="med"/>
-                    </a:lnR>
-                    <a:lnT w="12700" cap="flat" cmpd="sng" algn="ctr">
-                      <a:solidFill>
-                        <a:srgbClr val="E4E4E4"/>
-                      </a:solidFill>
-                      <a:prstDash val="solid"/>
-                      <a:round/>
-                      <a:headEnd type="none" w="med" len="med"/>
-                      <a:tailEnd type="none" w="med" len="med"/>
-                    </a:lnT>
-                    <a:lnB w="12700" cap="flat" cmpd="sng" algn="ctr">
-                      <a:solidFill>
-                        <a:srgbClr val="E4E4E4"/>
-                      </a:solidFill>
-                      <a:prstDash val="solid"/>
-                      <a:round/>
-                      <a:headEnd type="none" w="med" len="med"/>
-                      <a:tailEnd type="none" w="med" len="med"/>
-                    </a:lnB>
-                    <a:solidFill>
-                      <a:srgbClr val="FFFFFF"/>
-                    </a:solidFill>
-                  </a:tcPr>
-                </a:tc>
-                <a:tc>
-                  <a:txBody>
-                    <a:bodyPr/>
-                    <a:lstStyle/>
-                    <a:p>
                       <a:pPr algn="ctr" indent="0" marL="0">
                         <a:buNone/>
                       </a:pPr>
@@ -14437,7 +15562,7 @@
                           <a:ea typeface="Calibri" pitchFamily="34" charset="-122"/>
                           <a:cs typeface="Calibri" pitchFamily="34" charset="-120"/>
                         </a:rPr>
-                        <a:t>Time to ignition; to extinguish</a:t>
+                        <a:t>Time to ignition; time to extinguish</a:t>
                       </a:r>
                       <a:endParaRPr lang="en-US" sz="1050" dirty="0">
                         <a:latin typeface="Calibri" charset="0"/>
@@ -14489,7 +15614,7 @@
                   </a:tcPr>
                 </a:tc>
               </a:tr>
-              <a:tr h="420624">
+              <a:tr h="365760">
                 <a:tc>
                   <a:txBody>
                     <a:bodyPr/>
@@ -14631,6 +15756,74 @@
                     <a:bodyPr/>
                     <a:lstStyle/>
                     <a:p>
+                      <a:pPr algn="ctr" indent="0" marL="0">
+                        <a:buNone/>
+                      </a:pPr>
+                      <a:r>
+                        <a:rPr lang="en-US" sz="1050" dirty="0">
+                          <a:solidFill>
+                            <a:srgbClr val="3C3C3C"/>
+                          </a:solidFill>
+                          <a:latin typeface="Calibri" pitchFamily="34" charset="0"/>
+                          <a:ea typeface="Calibri" pitchFamily="34" charset="-122"/>
+                          <a:cs typeface="Calibri" pitchFamily="34" charset="-120"/>
+                        </a:rPr>
+                        <a:t>1</a:t>
+                      </a:r>
+                      <a:endParaRPr lang="en-US" sz="1050" dirty="0">
+                        <a:latin typeface="Calibri" charset="0"/>
+                        <a:ea typeface="Calibri" charset="0"/>
+                        <a:cs typeface="Calibri" charset="0"/>
+                      </a:endParaRPr>
+                    </a:p>
+                  </a:txBody>
+                  <a:tcPr marL="91440" marR="91440" marT="45720" marB="45720" anchor="ctr">
+                    <a:lnL w="12700" cap="flat" cmpd="sng" algn="ctr">
+                      <a:solidFill>
+                        <a:srgbClr val="E4E4E4"/>
+                      </a:solidFill>
+                      <a:prstDash val="solid"/>
+                      <a:round/>
+                      <a:headEnd type="none" w="med" len="med"/>
+                      <a:tailEnd type="none" w="med" len="med"/>
+                    </a:lnL>
+                    <a:lnR w="12700" cap="flat" cmpd="sng" algn="ctr">
+                      <a:solidFill>
+                        <a:srgbClr val="E4E4E4"/>
+                      </a:solidFill>
+                      <a:prstDash val="solid"/>
+                      <a:round/>
+                      <a:headEnd type="none" w="med" len="med"/>
+                      <a:tailEnd type="none" w="med" len="med"/>
+                    </a:lnR>
+                    <a:lnT w="12700" cap="flat" cmpd="sng" algn="ctr">
+                      <a:solidFill>
+                        <a:srgbClr val="E4E4E4"/>
+                      </a:solidFill>
+                      <a:prstDash val="solid"/>
+                      <a:round/>
+                      <a:headEnd type="none" w="med" len="med"/>
+                      <a:tailEnd type="none" w="med" len="med"/>
+                    </a:lnT>
+                    <a:lnB w="12700" cap="flat" cmpd="sng" algn="ctr">
+                      <a:solidFill>
+                        <a:srgbClr val="E4E4E4"/>
+                      </a:solidFill>
+                      <a:prstDash val="solid"/>
+                      <a:round/>
+                      <a:headEnd type="none" w="med" len="med"/>
+                      <a:tailEnd type="none" w="med" len="med"/>
+                    </a:lnB>
+                    <a:solidFill>
+                      <a:srgbClr val="FFFFFF"/>
+                    </a:solidFill>
+                  </a:tcPr>
+                </a:tc>
+                <a:tc>
+                  <a:txBody>
+                    <a:bodyPr/>
+                    <a:lstStyle/>
+                    <a:p>
                       <a:pPr algn="l" indent="0" marL="0">
                         <a:buNone/>
                       </a:pPr>
@@ -14643,7 +15836,145 @@
                           <a:ea typeface="Calibri" pitchFamily="34" charset="-122"/>
                           <a:cs typeface="Calibri" pitchFamily="34" charset="-120"/>
                         </a:rPr>
-                        <a:t>40 × 50 mm, shellac-coated</a:t>
+                        <a:t>Mass gain over 24 h immersion</a:t>
+                      </a:r>
+                      <a:endParaRPr lang="en-US" sz="1050" dirty="0">
+                        <a:latin typeface="Calibri" charset="0"/>
+                        <a:ea typeface="Calibri" charset="0"/>
+                        <a:cs typeface="Calibri" charset="0"/>
+                      </a:endParaRPr>
+                    </a:p>
+                  </a:txBody>
+                  <a:tcPr marL="91440" marR="91440" marT="45720" marB="45720" anchor="ctr">
+                    <a:lnL w="12700" cap="flat" cmpd="sng" algn="ctr">
+                      <a:solidFill>
+                        <a:srgbClr val="E4E4E4"/>
+                      </a:solidFill>
+                      <a:prstDash val="solid"/>
+                      <a:round/>
+                      <a:headEnd type="none" w="med" len="med"/>
+                      <a:tailEnd type="none" w="med" len="med"/>
+                    </a:lnL>
+                    <a:lnR w="12700" cap="flat" cmpd="sng" algn="ctr">
+                      <a:solidFill>
+                        <a:srgbClr val="E4E4E4"/>
+                      </a:solidFill>
+                      <a:prstDash val="solid"/>
+                      <a:round/>
+                      <a:headEnd type="none" w="med" len="med"/>
+                      <a:tailEnd type="none" w="med" len="med"/>
+                    </a:lnR>
+                    <a:lnT w="12700" cap="flat" cmpd="sng" algn="ctr">
+                      <a:solidFill>
+                        <a:srgbClr val="E4E4E4"/>
+                      </a:solidFill>
+                      <a:prstDash val="solid"/>
+                      <a:round/>
+                      <a:headEnd type="none" w="med" len="med"/>
+                      <a:tailEnd type="none" w="med" len="med"/>
+                    </a:lnT>
+                    <a:lnB w="12700" cap="flat" cmpd="sng" algn="ctr">
+                      <a:solidFill>
+                        <a:srgbClr val="E4E4E4"/>
+                      </a:solidFill>
+                      <a:prstDash val="solid"/>
+                      <a:round/>
+                      <a:headEnd type="none" w="med" len="med"/>
+                      <a:tailEnd type="none" w="med" len="med"/>
+                    </a:lnB>
+                    <a:solidFill>
+                      <a:srgbClr val="FFFFFF"/>
+                    </a:solidFill>
+                  </a:tcPr>
+                </a:tc>
+              </a:tr>
+              <a:tr h="365760">
+                <a:tc>
+                  <a:txBody>
+                    <a:bodyPr/>
+                    <a:lstStyle/>
+                    <a:p>
+                      <a:pPr algn="l" indent="0" marL="0">
+                        <a:buNone/>
+                      </a:pPr>
+                      <a:r>
+                        <a:rPr lang="en-US" sz="1050" dirty="0">
+                          <a:solidFill>
+                            <a:srgbClr val="3C3C3C"/>
+                          </a:solidFill>
+                          <a:latin typeface="Calibri" pitchFamily="34" charset="0"/>
+                          <a:ea typeface="Calibri" pitchFamily="34" charset="-122"/>
+                          <a:cs typeface="Calibri" pitchFamily="34" charset="-120"/>
+                        </a:rPr>
+                        <a:t>Bulk density</a:t>
+                      </a:r>
+                      <a:endParaRPr lang="en-US" sz="1050" dirty="0">
+                        <a:latin typeface="Calibri" charset="0"/>
+                        <a:ea typeface="Calibri" charset="0"/>
+                        <a:cs typeface="Calibri" charset="0"/>
+                      </a:endParaRPr>
+                    </a:p>
+                  </a:txBody>
+                  <a:tcPr marL="91440" marR="91440" marT="45720" marB="45720" anchor="ctr">
+                    <a:lnL w="12700" cap="flat" cmpd="sng" algn="ctr">
+                      <a:solidFill>
+                        <a:srgbClr val="E4E4E4"/>
+                      </a:solidFill>
+                      <a:prstDash val="solid"/>
+                      <a:round/>
+                      <a:headEnd type="none" w="med" len="med"/>
+                      <a:tailEnd type="none" w="med" len="med"/>
+                    </a:lnL>
+                    <a:lnR w="12700" cap="flat" cmpd="sng" algn="ctr">
+                      <a:solidFill>
+                        <a:srgbClr val="E4E4E4"/>
+                      </a:solidFill>
+                      <a:prstDash val="solid"/>
+                      <a:round/>
+                      <a:headEnd type="none" w="med" len="med"/>
+                      <a:tailEnd type="none" w="med" len="med"/>
+                    </a:lnR>
+                    <a:lnT w="12700" cap="flat" cmpd="sng" algn="ctr">
+                      <a:solidFill>
+                        <a:srgbClr val="E4E4E4"/>
+                      </a:solidFill>
+                      <a:prstDash val="solid"/>
+                      <a:round/>
+                      <a:headEnd type="none" w="med" len="med"/>
+                      <a:tailEnd type="none" w="med" len="med"/>
+                    </a:lnT>
+                    <a:lnB w="12700" cap="flat" cmpd="sng" algn="ctr">
+                      <a:solidFill>
+                        <a:srgbClr val="E4E4E4"/>
+                      </a:solidFill>
+                      <a:prstDash val="solid"/>
+                      <a:round/>
+                      <a:headEnd type="none" w="med" len="med"/>
+                      <a:tailEnd type="none" w="med" len="med"/>
+                    </a:lnB>
+                    <a:solidFill>
+                      <a:srgbClr val="FFFFFF"/>
+                    </a:solidFill>
+                  </a:tcPr>
+                </a:tc>
+                <a:tc>
+                  <a:txBody>
+                    <a:bodyPr/>
+                    <a:lstStyle/>
+                    <a:p>
+                      <a:pPr algn="l" indent="0" marL="0">
+                        <a:buNone/>
+                      </a:pPr>
+                      <a:r>
+                        <a:rPr lang="en-US" sz="1050" dirty="0">
+                          <a:solidFill>
+                            <a:srgbClr val="3C3C3C"/>
+                          </a:solidFill>
+                          <a:latin typeface="Calibri" pitchFamily="34" charset="0"/>
+                          <a:ea typeface="Calibri" pitchFamily="34" charset="-122"/>
+                          <a:cs typeface="Calibri" pitchFamily="34" charset="-120"/>
+                        </a:rPr>
+                        <a:t>Gravimetric</a:t>
                       </a:r>
                       <a:endParaRPr lang="en-US" sz="1050" dirty="0">
                         <a:latin typeface="Calibri" charset="0"/>
@@ -14779,348 +16110,6 @@
                           <a:ea typeface="Calibri" pitchFamily="34" charset="-122"/>
                           <a:cs typeface="Calibri" pitchFamily="34" charset="-120"/>
                         </a:rPr>
-                        <a:t>Mass gain, 24 h immersion</a:t>
-                      </a:r>
-                      <a:endParaRPr lang="en-US" sz="1050" dirty="0">
-                        <a:latin typeface="Calibri" charset="0"/>
-                        <a:ea typeface="Calibri" charset="0"/>
-                        <a:cs typeface="Calibri" charset="0"/>
-                      </a:endParaRPr>
-                    </a:p>
-                  </a:txBody>
-                  <a:tcPr marL="91440" marR="91440" marT="45720" marB="45720" anchor="ctr">
-                    <a:lnL w="12700" cap="flat" cmpd="sng" algn="ctr">
-                      <a:solidFill>
-                        <a:srgbClr val="E4E4E4"/>
-                      </a:solidFill>
-                      <a:prstDash val="solid"/>
-                      <a:round/>
-                      <a:headEnd type="none" w="med" len="med"/>
-                      <a:tailEnd type="none" w="med" len="med"/>
-                    </a:lnL>
-                    <a:lnR w="12700" cap="flat" cmpd="sng" algn="ctr">
-                      <a:solidFill>
-                        <a:srgbClr val="E4E4E4"/>
-                      </a:solidFill>
-                      <a:prstDash val="solid"/>
-                      <a:round/>
-                      <a:headEnd type="none" w="med" len="med"/>
-                      <a:tailEnd type="none" w="med" len="med"/>
-                    </a:lnR>
-                    <a:lnT w="12700" cap="flat" cmpd="sng" algn="ctr">
-                      <a:solidFill>
-                        <a:srgbClr val="E4E4E4"/>
-                      </a:solidFill>
-                      <a:prstDash val="solid"/>
-                      <a:round/>
-                      <a:headEnd type="none" w="med" len="med"/>
-                      <a:tailEnd type="none" w="med" len="med"/>
-                    </a:lnT>
-                    <a:lnB w="12700" cap="flat" cmpd="sng" algn="ctr">
-                      <a:solidFill>
-                        <a:srgbClr val="E4E4E4"/>
-                      </a:solidFill>
-                      <a:prstDash val="solid"/>
-                      <a:round/>
-                      <a:headEnd type="none" w="med" len="med"/>
-                      <a:tailEnd type="none" w="med" len="med"/>
-                    </a:lnB>
-                    <a:solidFill>
-                      <a:srgbClr val="FFFFFF"/>
-                    </a:solidFill>
-                  </a:tcPr>
-                </a:tc>
-              </a:tr>
-              <a:tr h="420624">
-                <a:tc>
-                  <a:txBody>
-                    <a:bodyPr/>
-                    <a:lstStyle/>
-                    <a:p>
-                      <a:pPr algn="l" indent="0" marL="0">
-                        <a:buNone/>
-                      </a:pPr>
-                      <a:r>
-                        <a:rPr lang="en-US" sz="1050" dirty="0">
-                          <a:solidFill>
-                            <a:srgbClr val="3C3C3C"/>
-                          </a:solidFill>
-                          <a:latin typeface="Calibri" pitchFamily="34" charset="0"/>
-                          <a:ea typeface="Calibri" pitchFamily="34" charset="-122"/>
-                          <a:cs typeface="Calibri" pitchFamily="34" charset="-120"/>
-                        </a:rPr>
-                        <a:t>Bulk density</a:t>
-                      </a:r>
-                      <a:endParaRPr lang="en-US" sz="1050" dirty="0">
-                        <a:latin typeface="Calibri" charset="0"/>
-                        <a:ea typeface="Calibri" charset="0"/>
-                        <a:cs typeface="Calibri" charset="0"/>
-                      </a:endParaRPr>
-                    </a:p>
-                  </a:txBody>
-                  <a:tcPr marL="91440" marR="91440" marT="45720" marB="45720" anchor="ctr">
-                    <a:lnL w="12700" cap="flat" cmpd="sng" algn="ctr">
-                      <a:solidFill>
-                        <a:srgbClr val="E4E4E4"/>
-                      </a:solidFill>
-                      <a:prstDash val="solid"/>
-                      <a:round/>
-                      <a:headEnd type="none" w="med" len="med"/>
-                      <a:tailEnd type="none" w="med" len="med"/>
-                    </a:lnL>
-                    <a:lnR w="12700" cap="flat" cmpd="sng" algn="ctr">
-                      <a:solidFill>
-                        <a:srgbClr val="E4E4E4"/>
-                      </a:solidFill>
-                      <a:prstDash val="solid"/>
-                      <a:round/>
-                      <a:headEnd type="none" w="med" len="med"/>
-                      <a:tailEnd type="none" w="med" len="med"/>
-                    </a:lnR>
-                    <a:lnT w="12700" cap="flat" cmpd="sng" algn="ctr">
-                      <a:solidFill>
-                        <a:srgbClr val="E4E4E4"/>
-                      </a:solidFill>
-                      <a:prstDash val="solid"/>
-                      <a:round/>
-                      <a:headEnd type="none" w="med" len="med"/>
-                      <a:tailEnd type="none" w="med" len="med"/>
-                    </a:lnT>
-                    <a:lnB w="12700" cap="flat" cmpd="sng" algn="ctr">
-                      <a:solidFill>
-                        <a:srgbClr val="E4E4E4"/>
-                      </a:solidFill>
-                      <a:prstDash val="solid"/>
-                      <a:round/>
-                      <a:headEnd type="none" w="med" len="med"/>
-                      <a:tailEnd type="none" w="med" len="med"/>
-                    </a:lnB>
-                    <a:solidFill>
-                      <a:srgbClr val="FFFFFF"/>
-                    </a:solidFill>
-                  </a:tcPr>
-                </a:tc>
-                <a:tc>
-                  <a:txBody>
-                    <a:bodyPr/>
-                    <a:lstStyle/>
-                    <a:p>
-                      <a:pPr algn="l" indent="0" marL="0">
-                        <a:buNone/>
-                      </a:pPr>
-                      <a:r>
-                        <a:rPr lang="en-US" sz="1050" dirty="0">
-                          <a:solidFill>
-                            <a:srgbClr val="3C3C3C"/>
-                          </a:solidFill>
-                          <a:latin typeface="Calibri" pitchFamily="34" charset="0"/>
-                          <a:ea typeface="Calibri" pitchFamily="34" charset="-122"/>
-                          <a:cs typeface="Calibri" pitchFamily="34" charset="-120"/>
-                        </a:rPr>
-                        <a:t>Gravimetric</a:t>
-                      </a:r>
-                      <a:endParaRPr lang="en-US" sz="1050" dirty="0">
-                        <a:latin typeface="Calibri" charset="0"/>
-                        <a:ea typeface="Calibri" charset="0"/>
-                        <a:cs typeface="Calibri" charset="0"/>
-                      </a:endParaRPr>
-                    </a:p>
-                  </a:txBody>
-                  <a:tcPr marL="91440" marR="91440" marT="45720" marB="45720" anchor="ctr">
-                    <a:lnL w="12700" cap="flat" cmpd="sng" algn="ctr">
-                      <a:solidFill>
-                        <a:srgbClr val="E4E4E4"/>
-                      </a:solidFill>
-                      <a:prstDash val="solid"/>
-                      <a:round/>
-                      <a:headEnd type="none" w="med" len="med"/>
-                      <a:tailEnd type="none" w="med" len="med"/>
-                    </a:lnL>
-                    <a:lnR w="12700" cap="flat" cmpd="sng" algn="ctr">
-                      <a:solidFill>
-                        <a:srgbClr val="E4E4E4"/>
-                      </a:solidFill>
-                      <a:prstDash val="solid"/>
-                      <a:round/>
-                      <a:headEnd type="none" w="med" len="med"/>
-                      <a:tailEnd type="none" w="med" len="med"/>
-                    </a:lnR>
-                    <a:lnT w="12700" cap="flat" cmpd="sng" algn="ctr">
-                      <a:solidFill>
-                        <a:srgbClr val="E4E4E4"/>
-                      </a:solidFill>
-                      <a:prstDash val="solid"/>
-                      <a:round/>
-                      <a:headEnd type="none" w="med" len="med"/>
-                      <a:tailEnd type="none" w="med" len="med"/>
-                    </a:lnT>
-                    <a:lnB w="12700" cap="flat" cmpd="sng" algn="ctr">
-                      <a:solidFill>
-                        <a:srgbClr val="E4E4E4"/>
-                      </a:solidFill>
-                      <a:prstDash val="solid"/>
-                      <a:round/>
-                      <a:headEnd type="none" w="med" len="med"/>
-                      <a:tailEnd type="none" w="med" len="med"/>
-                    </a:lnB>
-                    <a:solidFill>
-                      <a:srgbClr val="FFFFFF"/>
-                    </a:solidFill>
-                  </a:tcPr>
-                </a:tc>
-                <a:tc>
-                  <a:txBody>
-                    <a:bodyPr/>
-                    <a:lstStyle/>
-                    <a:p>
-                      <a:pPr algn="l" indent="0" marL="0">
-                        <a:buNone/>
-                      </a:pPr>
-                      <a:r>
-                        <a:rPr lang="en-US" sz="1050" dirty="0">
-                          <a:solidFill>
-                            <a:srgbClr val="3C3C3C"/>
-                          </a:solidFill>
-                          <a:latin typeface="Calibri" pitchFamily="34" charset="0"/>
-                          <a:ea typeface="Calibri" pitchFamily="34" charset="-122"/>
-                          <a:cs typeface="Calibri" pitchFamily="34" charset="-120"/>
-                        </a:rPr>
-                        <a:t>50 mm cube</a:t>
-                      </a:r>
-                      <a:endParaRPr lang="en-US" sz="1050" dirty="0">
-                        <a:latin typeface="Calibri" charset="0"/>
-                        <a:ea typeface="Calibri" charset="0"/>
-                        <a:cs typeface="Calibri" charset="0"/>
-                      </a:endParaRPr>
-                    </a:p>
-                  </a:txBody>
-                  <a:tcPr marL="91440" marR="91440" marT="45720" marB="45720" anchor="ctr">
-                    <a:lnL w="12700" cap="flat" cmpd="sng" algn="ctr">
-                      <a:solidFill>
-                        <a:srgbClr val="E4E4E4"/>
-                      </a:solidFill>
-                      <a:prstDash val="solid"/>
-                      <a:round/>
-                      <a:headEnd type="none" w="med" len="med"/>
-                      <a:tailEnd type="none" w="med" len="med"/>
-                    </a:lnL>
-                    <a:lnR w="12700" cap="flat" cmpd="sng" algn="ctr">
-                      <a:solidFill>
-                        <a:srgbClr val="E4E4E4"/>
-                      </a:solidFill>
-                      <a:prstDash val="solid"/>
-                      <a:round/>
-                      <a:headEnd type="none" w="med" len="med"/>
-                      <a:tailEnd type="none" w="med" len="med"/>
-                    </a:lnR>
-                    <a:lnT w="12700" cap="flat" cmpd="sng" algn="ctr">
-                      <a:solidFill>
-                        <a:srgbClr val="E4E4E4"/>
-                      </a:solidFill>
-                      <a:prstDash val="solid"/>
-                      <a:round/>
-                      <a:headEnd type="none" w="med" len="med"/>
-                      <a:tailEnd type="none" w="med" len="med"/>
-                    </a:lnT>
-                    <a:lnB w="12700" cap="flat" cmpd="sng" algn="ctr">
-                      <a:solidFill>
-                        <a:srgbClr val="E4E4E4"/>
-                      </a:solidFill>
-                      <a:prstDash val="solid"/>
-                      <a:round/>
-                      <a:headEnd type="none" w="med" len="med"/>
-                      <a:tailEnd type="none" w="med" len="med"/>
-                    </a:lnB>
-                    <a:solidFill>
-                      <a:srgbClr val="FFFFFF"/>
-                    </a:solidFill>
-                  </a:tcPr>
-                </a:tc>
-                <a:tc>
-                  <a:txBody>
-                    <a:bodyPr/>
-                    <a:lstStyle/>
-                    <a:p>
-                      <a:pPr algn="ctr" indent="0" marL="0">
-                        <a:buNone/>
-                      </a:pPr>
-                      <a:r>
-                        <a:rPr lang="en-US" sz="1050" dirty="0">
-                          <a:solidFill>
-                            <a:srgbClr val="3C3C3C"/>
-                          </a:solidFill>
-                          <a:latin typeface="Calibri" pitchFamily="34" charset="0"/>
-                          <a:ea typeface="Calibri" pitchFamily="34" charset="-122"/>
-                          <a:cs typeface="Calibri" pitchFamily="34" charset="-120"/>
-                        </a:rPr>
-                        <a:t>1</a:t>
-                      </a:r>
-                      <a:endParaRPr lang="en-US" sz="1050" dirty="0">
-                        <a:latin typeface="Calibri" charset="0"/>
-                        <a:ea typeface="Calibri" charset="0"/>
-                        <a:cs typeface="Calibri" charset="0"/>
-                      </a:endParaRPr>
-                    </a:p>
-                  </a:txBody>
-                  <a:tcPr marL="91440" marR="91440" marT="45720" marB="45720" anchor="ctr">
-                    <a:lnL w="12700" cap="flat" cmpd="sng" algn="ctr">
-                      <a:solidFill>
-                        <a:srgbClr val="E4E4E4"/>
-                      </a:solidFill>
-                      <a:prstDash val="solid"/>
-                      <a:round/>
-                      <a:headEnd type="none" w="med" len="med"/>
-                      <a:tailEnd type="none" w="med" len="med"/>
-                    </a:lnL>
-                    <a:lnR w="12700" cap="flat" cmpd="sng" algn="ctr">
-                      <a:solidFill>
-                        <a:srgbClr val="E4E4E4"/>
-                      </a:solidFill>
-                      <a:prstDash val="solid"/>
-                      <a:round/>
-                      <a:headEnd type="none" w="med" len="med"/>
-                      <a:tailEnd type="none" w="med" len="med"/>
-                    </a:lnR>
-                    <a:lnT w="12700" cap="flat" cmpd="sng" algn="ctr">
-                      <a:solidFill>
-                        <a:srgbClr val="E4E4E4"/>
-                      </a:solidFill>
-                      <a:prstDash val="solid"/>
-                      <a:round/>
-                      <a:headEnd type="none" w="med" len="med"/>
-                      <a:tailEnd type="none" w="med" len="med"/>
-                    </a:lnT>
-                    <a:lnB w="12700" cap="flat" cmpd="sng" algn="ctr">
-                      <a:solidFill>
-                        <a:srgbClr val="E4E4E4"/>
-                      </a:solidFill>
-                      <a:prstDash val="solid"/>
-                      <a:round/>
-                      <a:headEnd type="none" w="med" len="med"/>
-                      <a:tailEnd type="none" w="med" len="med"/>
-                    </a:lnB>
-                    <a:solidFill>
-                      <a:srgbClr val="FFFFFF"/>
-                    </a:solidFill>
-                  </a:tcPr>
-                </a:tc>
-                <a:tc>
-                  <a:txBody>
-                    <a:bodyPr/>
-                    <a:lstStyle/>
-                    <a:p>
-                      <a:pPr algn="l" indent="0" marL="0">
-                        <a:buNone/>
-                      </a:pPr>
-                      <a:r>
-                        <a:rPr lang="en-US" sz="1050" dirty="0">
-                          <a:solidFill>
-                            <a:srgbClr val="3C3C3C"/>
-                          </a:solidFill>
-                          <a:latin typeface="Calibri" pitchFamily="34" charset="0"/>
-                          <a:ea typeface="Calibri" pitchFamily="34" charset="-122"/>
-                          <a:cs typeface="Calibri" pitchFamily="34" charset="-120"/>
-                        </a:rPr>
                         <a:t>Mass per mould volume</a:t>
                       </a:r>
                       <a:endParaRPr lang="en-US" sz="1050" dirty="0">
@@ -15179,13 +16168,55 @@
       </p:graphicFrame>
       <p:sp>
         <p:nvSpPr>
-          <p:cNvPr id="5" name="ru0.84.85"/>
+          <p:cNvPr id="5" name="Text 2"/>
+          <p:cNvSpPr txBox="1"/>
+          <p:nvPr/>
+        </p:nvSpPr>
+        <p:spPr>
+          <a:xfrm>
+            <a:off x="731520" y="3977640"/>
+            <a:ext cx="10698480" cy="457200"/>
+          </a:xfrm>
+          <a:prstGeom prst="rect">
+            <a:avLst/>
+          </a:prstGeom>
+          <a:noFill/>
+          <a:ln/>
+        </p:spPr>
+        <p:txBody>
+          <a:bodyPr wrap="square" lIns="0" tIns="0" rIns="0" bIns="0" rtlCol="0" anchor="t"/>
+          <a:lstStyle/>
+          <a:p>
+            <a:pPr indent="0" marL="0">
+              <a:lnSpc>
+                <a:spcPts val="1750"/>
+              </a:lnSpc>
+              <a:buNone/>
+            </a:pPr>
+            <a:r>
+              <a:rPr lang="en-US" sz="1150" dirty="0">
+                <a:solidFill>
+                  <a:srgbClr val="3C3C3C"/>
+                </a:solidFill>
+                <a:latin typeface="Calibri" pitchFamily="34" charset="0"/>
+                <a:ea typeface="Calibri" pitchFamily="34" charset="-122"/>
+                <a:cs typeface="Calibri" pitchFamily="34" charset="-120"/>
+              </a:rPr>
+              <a:t>Mechanical values are means of three specimens; individual values were not retained, so standard deviations cannot be reported. Ignitability, absorption and density rest on single determinations and are indicative rather than characteristic values.</a:t>
+            </a:r>
+            <a:endParaRPr lang="en-US" sz="1150" dirty="0"/>
+          </a:p>
+        </p:txBody>
+      </p:sp>
+      <p:sp>
+        <p:nvSpPr>
+          <p:cNvPr id="6" name="ru0.85.15"/>
           <p:cNvSpPr/>
           <p:nvPr/>
         </p:nvSpPr>
         <p:spPr>
           <a:xfrm>
-            <a:off x="731520" y="4434840"/>
+            <a:off x="731520" y="4709160"/>
             <a:ext cx="10698480" cy="9144"/>
           </a:xfrm>
           <a:prstGeom prst="rect">
@@ -15206,14 +16237,14 @@
       </p:sp>
       <p:sp>
         <p:nvSpPr>
-          <p:cNvPr id="6" name="Text 3"/>
+          <p:cNvPr id="7" name="Text 4"/>
           <p:cNvSpPr txBox="1"/>
           <p:nvPr/>
         </p:nvSpPr>
         <p:spPr>
           <a:xfrm>
-            <a:off x="731520" y="4617720"/>
-            <a:ext cx="10698480" cy="274320"/>
+            <a:off x="731520" y="5943600"/>
+            <a:ext cx="2606040" cy="256032"/>
           </a:xfrm>
           <a:prstGeom prst="rect">
             <a:avLst/>
@@ -15225,11 +16256,11 @@
           <a:bodyPr wrap="square" lIns="0" tIns="0" rIns="0" bIns="0" rtlCol="0" anchor="ctr"/>
           <a:lstStyle/>
           <a:p>
-            <a:pPr indent="0" marL="0">
+            <a:pPr algn="ctr" indent="0" marL="0">
               <a:buNone/>
             </a:pPr>
             <a:r>
-              <a:rPr lang="en-US" sz="1300" b="1" dirty="0">
+              <a:rPr lang="en-US" sz="1200" b="1" dirty="0">
                 <a:solidFill>
                   <a:srgbClr val="141414"/>
                 </a:solidFill>
@@ -15237,22 +16268,22 @@
                 <a:ea typeface="Calibri" pitchFamily="34" charset="-122"/>
                 <a:cs typeface="Calibri" pitchFamily="34" charset="-120"/>
               </a:rPr>
-              <a:t>Reporting convention</a:t>
-            </a:r>
-            <a:endParaRPr lang="en-US" sz="1300" dirty="0"/>
-          </a:p>
-        </p:txBody>
-      </p:sp>
-      <p:sp>
-        <p:nvSpPr>
-          <p:cNvPr id="7" name="Text 4"/>
+              <a:t>Cube compression</a:t>
+            </a:r>
+            <a:endParaRPr lang="en-US" sz="1200" dirty="0"/>
+          </a:p>
+        </p:txBody>
+      </p:sp>
+      <p:sp>
+        <p:nvSpPr>
+          <p:cNvPr id="8" name="Text 5"/>
           <p:cNvSpPr txBox="1"/>
           <p:nvPr/>
         </p:nvSpPr>
         <p:spPr>
           <a:xfrm>
-            <a:off x="731520" y="4983480"/>
-            <a:ext cx="10698480" cy="822960"/>
+            <a:off x="731520" y="6217920"/>
+            <a:ext cx="2606040" cy="274320"/>
           </a:xfrm>
           <a:prstGeom prst="rect">
             <a:avLst/>
@@ -15261,25 +16292,91 @@
           <a:ln/>
         </p:spPr>
         <p:txBody>
-          <a:bodyPr wrap="square" lIns="0" tIns="0" rIns="0" bIns="0" rtlCol="0" anchor="t"/>
-          <a:lstStyle/>
-          <a:p>
-            <a:pPr indent="0" marL="0">
+          <a:bodyPr wrap="square" lIns="0" tIns="0" rIns="0" bIns="0" rtlCol="0" anchor="ctr"/>
+          <a:lstStyle/>
+          <a:p>
+            <a:pPr algn="ctr" indent="0" marL="0">
               <a:lnSpc>
-                <a:spcPts val="1800"/>
+                <a:spcPts val="1200"/>
               </a:lnSpc>
               <a:buNone/>
             </a:pPr>
             <a:r>
-              <a:rPr lang="en-US" sz="1200" dirty="0">
+              <a:rPr lang="en-US" sz="950" dirty="0">
                 <a:solidFill>
-                  <a:srgbClr val="3C3C3C"/>
+                  <a:srgbClr val="8C8C8C"/>
                 </a:solidFill>
                 <a:latin typeface="Calibri" pitchFamily="34" charset="0"/>
                 <a:ea typeface="Calibri" pitchFamily="34" charset="-122"/>
                 <a:cs typeface="Calibri" pitchFamily="34" charset="-120"/>
               </a:rPr>
-              <a:t>Mechanical values are means of three specimens; individual values were not retained, so standard deviations cannot be reported. Ignitability, absorption and density rest on single determinations and are indicative rather than characteristic values.</a:t>
+              <a:t>50 mm cube, platen-loaded</a:t>
+            </a:r>
+            <a:endParaRPr lang="en-US" sz="950" dirty="0"/>
+          </a:p>
+        </p:txBody>
+      </p:sp>
+      <p:sp>
+        <p:nvSpPr>
+          <p:cNvPr id="9" name="sp0"/>
+          <p:cNvSpPr/>
+          <p:nvPr/>
+        </p:nvSpPr>
+        <p:spPr>
+          <a:xfrm>
+            <a:off x="3364992" y="4983480"/>
+            <a:ext cx="13716" cy="1463040"/>
+          </a:xfrm>
+          <a:prstGeom prst="rect">
+            <a:avLst/>
+          </a:prstGeom>
+          <a:solidFill>
+            <a:srgbClr val="E4E4E4"/>
+          </a:solidFill>
+          <a:ln w="12700">
+            <a:solidFill>
+              <a:srgbClr val="E4E4E4">
+                <a:alpha val="0"/>
+              </a:srgbClr>
+            </a:solidFill>
+            <a:prstDash val="solid"/>
+          </a:ln>
+        </p:spPr>
+      </p:sp>
+      <p:sp>
+        <p:nvSpPr>
+          <p:cNvPr id="10" name="Text 7"/>
+          <p:cNvSpPr txBox="1"/>
+          <p:nvPr/>
+        </p:nvSpPr>
+        <p:spPr>
+          <a:xfrm>
+            <a:off x="3429000" y="5943600"/>
+            <a:ext cx="2606040" cy="256032"/>
+          </a:xfrm>
+          <a:prstGeom prst="rect">
+            <a:avLst/>
+          </a:prstGeom>
+          <a:noFill/>
+          <a:ln/>
+        </p:spPr>
+        <p:txBody>
+          <a:bodyPr wrap="square" lIns="0" tIns="0" rIns="0" bIns="0" rtlCol="0" anchor="ctr"/>
+          <a:lstStyle/>
+          <a:p>
+            <a:pPr algn="ctr" indent="0" marL="0">
+              <a:buNone/>
+            </a:pPr>
+            <a:r>
+              <a:rPr lang="en-US" sz="1200" b="1" dirty="0">
+                <a:solidFill>
+                  <a:srgbClr val="141414"/>
+                </a:solidFill>
+                <a:latin typeface="Calibri" pitchFamily="34" charset="0"/>
+                <a:ea typeface="Calibri" pitchFamily="34" charset="-122"/>
+                <a:cs typeface="Calibri" pitchFamily="34" charset="-120"/>
+              </a:rPr>
+              <a:t>Three-point flexure</a:t>
             </a:r>
             <a:endParaRPr lang="en-US" sz="1200" dirty="0"/>
           </a:p>
@@ -15287,14 +16384,720 @@
       </p:sp>
       <p:sp>
         <p:nvSpPr>
-          <p:cNvPr id="8" name="Text 5"/>
+          <p:cNvPr id="11" name="Text 8"/>
           <p:cNvSpPr txBox="1"/>
           <p:nvPr/>
         </p:nvSpPr>
         <p:spPr>
           <a:xfrm>
-            <a:off x="731520" y="5989320"/>
-            <a:ext cx="10698480" cy="457200"/>
+            <a:off x="3429000" y="6217920"/>
+            <a:ext cx="2606040" cy="274320"/>
+          </a:xfrm>
+          <a:prstGeom prst="rect">
+            <a:avLst/>
+          </a:prstGeom>
+          <a:noFill/>
+          <a:ln/>
+        </p:spPr>
+        <p:txBody>
+          <a:bodyPr wrap="square" lIns="0" tIns="0" rIns="0" bIns="0" rtlCol="0" anchor="ctr"/>
+          <a:lstStyle/>
+          <a:p>
+            <a:pPr algn="ctr" indent="0" marL="0">
+              <a:lnSpc>
+                <a:spcPts val="1200"/>
+              </a:lnSpc>
+              <a:buNone/>
+            </a:pPr>
+            <a:r>
+              <a:rPr lang="en-US" sz="950" dirty="0">
+                <a:solidFill>
+                  <a:srgbClr val="8C8C8C"/>
+                </a:solidFill>
+                <a:latin typeface="Calibri" pitchFamily="34" charset="0"/>
+                <a:ea typeface="Calibri" pitchFamily="34" charset="-122"/>
+                <a:cs typeface="Calibri" pitchFamily="34" charset="-120"/>
+              </a:rPr>
+              <a:t>180 × 60 × 20 mm, 120 mm span</a:t>
+            </a:r>
+            <a:endParaRPr lang="en-US" sz="950" dirty="0"/>
+          </a:p>
+        </p:txBody>
+      </p:sp>
+      <p:sp>
+        <p:nvSpPr>
+          <p:cNvPr id="12" name="sp1"/>
+          <p:cNvSpPr/>
+          <p:nvPr/>
+        </p:nvSpPr>
+        <p:spPr>
+          <a:xfrm>
+            <a:off x="6062472" y="4983480"/>
+            <a:ext cx="13716" cy="1463040"/>
+          </a:xfrm>
+          <a:prstGeom prst="rect">
+            <a:avLst/>
+          </a:prstGeom>
+          <a:solidFill>
+            <a:srgbClr val="E4E4E4"/>
+          </a:solidFill>
+          <a:ln w="12700">
+            <a:solidFill>
+              <a:srgbClr val="E4E4E4">
+                <a:alpha val="0"/>
+              </a:srgbClr>
+            </a:solidFill>
+            <a:prstDash val="solid"/>
+          </a:ln>
+        </p:spPr>
+      </p:sp>
+      <p:sp>
+        <p:nvSpPr>
+          <p:cNvPr id="13" name="Text 10"/>
+          <p:cNvSpPr txBox="1"/>
+          <p:nvPr/>
+        </p:nvSpPr>
+        <p:spPr>
+          <a:xfrm>
+            <a:off x="6126480" y="5943600"/>
+            <a:ext cx="2606040" cy="256032"/>
+          </a:xfrm>
+          <a:prstGeom prst="rect">
+            <a:avLst/>
+          </a:prstGeom>
+          <a:noFill/>
+          <a:ln/>
+        </p:spPr>
+        <p:txBody>
+          <a:bodyPr wrap="square" lIns="0" tIns="0" rIns="0" bIns="0" rtlCol="0" anchor="ctr"/>
+          <a:lstStyle/>
+          <a:p>
+            <a:pPr algn="ctr" indent="0" marL="0">
+              <a:buNone/>
+            </a:pPr>
+            <a:r>
+              <a:rPr lang="en-US" sz="1200" b="1" dirty="0">
+                <a:solidFill>
+                  <a:srgbClr val="141414"/>
+                </a:solidFill>
+                <a:latin typeface="Calibri" pitchFamily="34" charset="0"/>
+                <a:ea typeface="Calibri" pitchFamily="34" charset="-122"/>
+                <a:cs typeface="Calibri" pitchFamily="34" charset="-120"/>
+              </a:rPr>
+              <a:t>Edge ignition</a:t>
+            </a:r>
+            <a:endParaRPr lang="en-US" sz="1200" dirty="0"/>
+          </a:p>
+        </p:txBody>
+      </p:sp>
+      <p:sp>
+        <p:nvSpPr>
+          <p:cNvPr id="14" name="Text 11"/>
+          <p:cNvSpPr txBox="1"/>
+          <p:nvPr/>
+        </p:nvSpPr>
+        <p:spPr>
+          <a:xfrm>
+            <a:off x="6126480" y="6217920"/>
+            <a:ext cx="2606040" cy="274320"/>
+          </a:xfrm>
+          <a:prstGeom prst="rect">
+            <a:avLst/>
+          </a:prstGeom>
+          <a:noFill/>
+          <a:ln/>
+        </p:spPr>
+        <p:txBody>
+          <a:bodyPr wrap="square" lIns="0" tIns="0" rIns="0" bIns="0" rtlCol="0" anchor="ctr"/>
+          <a:lstStyle/>
+          <a:p>
+            <a:pPr algn="ctr" indent="0" marL="0">
+              <a:lnSpc>
+                <a:spcPts val="1200"/>
+              </a:lnSpc>
+              <a:buNone/>
+            </a:pPr>
+            <a:r>
+              <a:rPr lang="en-US" sz="950" dirty="0">
+                <a:solidFill>
+                  <a:srgbClr val="8C8C8C"/>
+                </a:solidFill>
+                <a:latin typeface="Calibri" pitchFamily="34" charset="0"/>
+                <a:ea typeface="Calibri" pitchFamily="34" charset="-122"/>
+                <a:cs typeface="Calibri" pitchFamily="34" charset="-120"/>
+              </a:rPr>
+              <a:t>40 × 50 mm at 45°, 15 s flame</a:t>
+            </a:r>
+            <a:endParaRPr lang="en-US" sz="950" dirty="0"/>
+          </a:p>
+        </p:txBody>
+      </p:sp>
+      <p:sp>
+        <p:nvSpPr>
+          <p:cNvPr id="15" name="sp2"/>
+          <p:cNvSpPr/>
+          <p:nvPr/>
+        </p:nvSpPr>
+        <p:spPr>
+          <a:xfrm>
+            <a:off x="8759952" y="4983480"/>
+            <a:ext cx="13716" cy="1463040"/>
+          </a:xfrm>
+          <a:prstGeom prst="rect">
+            <a:avLst/>
+          </a:prstGeom>
+          <a:solidFill>
+            <a:srgbClr val="E4E4E4"/>
+          </a:solidFill>
+          <a:ln w="12700">
+            <a:solidFill>
+              <a:srgbClr val="E4E4E4">
+                <a:alpha val="0"/>
+              </a:srgbClr>
+            </a:solidFill>
+            <a:prstDash val="solid"/>
+          </a:ln>
+        </p:spPr>
+      </p:sp>
+      <p:sp>
+        <p:nvSpPr>
+          <p:cNvPr id="16" name="Text 13"/>
+          <p:cNvSpPr txBox="1"/>
+          <p:nvPr/>
+        </p:nvSpPr>
+        <p:spPr>
+          <a:xfrm>
+            <a:off x="8823960" y="5943600"/>
+            <a:ext cx="2606040" cy="256032"/>
+          </a:xfrm>
+          <a:prstGeom prst="rect">
+            <a:avLst/>
+          </a:prstGeom>
+          <a:noFill/>
+          <a:ln/>
+        </p:spPr>
+        <p:txBody>
+          <a:bodyPr wrap="square" lIns="0" tIns="0" rIns="0" bIns="0" rtlCol="0" anchor="ctr"/>
+          <a:lstStyle/>
+          <a:p>
+            <a:pPr algn="ctr" indent="0" marL="0">
+              <a:buNone/>
+            </a:pPr>
+            <a:r>
+              <a:rPr lang="en-US" sz="1200" b="1" dirty="0">
+                <a:solidFill>
+                  <a:srgbClr val="141414"/>
+                </a:solidFill>
+                <a:latin typeface="Calibri" pitchFamily="34" charset="0"/>
+                <a:ea typeface="Calibri" pitchFamily="34" charset="-122"/>
+                <a:cs typeface="Calibri" pitchFamily="34" charset="-120"/>
+              </a:rPr>
+              <a:t>Immersion</a:t>
+            </a:r>
+            <a:endParaRPr lang="en-US" sz="1200" dirty="0"/>
+          </a:p>
+        </p:txBody>
+      </p:sp>
+      <p:sp>
+        <p:nvSpPr>
+          <p:cNvPr id="17" name="Text 14"/>
+          <p:cNvSpPr txBox="1"/>
+          <p:nvPr/>
+        </p:nvSpPr>
+        <p:spPr>
+          <a:xfrm>
+            <a:off x="8823960" y="6217920"/>
+            <a:ext cx="2606040" cy="274320"/>
+          </a:xfrm>
+          <a:prstGeom prst="rect">
+            <a:avLst/>
+          </a:prstGeom>
+          <a:noFill/>
+          <a:ln/>
+        </p:spPr>
+        <p:txBody>
+          <a:bodyPr wrap="square" lIns="0" tIns="0" rIns="0" bIns="0" rtlCol="0" anchor="ctr"/>
+          <a:lstStyle/>
+          <a:p>
+            <a:pPr algn="ctr" indent="0" marL="0">
+              <a:lnSpc>
+                <a:spcPts val="1200"/>
+              </a:lnSpc>
+              <a:buNone/>
+            </a:pPr>
+            <a:r>
+              <a:rPr lang="en-US" sz="950" dirty="0">
+                <a:solidFill>
+                  <a:srgbClr val="8C8C8C"/>
+                </a:solidFill>
+                <a:latin typeface="Calibri" pitchFamily="34" charset="0"/>
+                <a:ea typeface="Calibri" pitchFamily="34" charset="-122"/>
+                <a:cs typeface="Calibri" pitchFamily="34" charset="-120"/>
+              </a:rPr>
+              <a:t>40 × 50 mm, shellac-coated, 24 h</a:t>
+            </a:r>
+            <a:endParaRPr lang="en-US" sz="950" dirty="0"/>
+          </a:p>
+        </p:txBody>
+      </p:sp>
+      <p:sp>
+        <p:nvSpPr>
+          <p:cNvPr id="18" name="cl1"/>
+          <p:cNvSpPr/>
+          <p:nvPr/>
+        </p:nvSpPr>
+        <p:spPr>
+          <a:xfrm>
+            <a:off x="1947672" y="4873752"/>
+            <a:ext cx="128016" cy="219456"/>
+          </a:xfrm>
+          <a:prstGeom prst="downArrow">
+            <a:avLst/>
+          </a:prstGeom>
+          <a:solidFill>
+            <a:srgbClr val="B4513A"/>
+          </a:solidFill>
+          <a:ln w="12700">
+            <a:solidFill>
+              <a:srgbClr val="B4513A">
+                <a:alpha val="0"/>
+              </a:srgbClr>
+            </a:solidFill>
+            <a:prstDash val="solid"/>
+          </a:ln>
+        </p:spPr>
+      </p:sp>
+      <p:sp>
+        <p:nvSpPr>
+          <p:cNvPr id="19" name="pt1"/>
+          <p:cNvSpPr/>
+          <p:nvPr/>
+        </p:nvSpPr>
+        <p:spPr>
+          <a:xfrm>
+            <a:off x="1508760" y="5138928"/>
+            <a:ext cx="1005840" cy="64008"/>
+          </a:xfrm>
+          <a:prstGeom prst="rect">
+            <a:avLst/>
+          </a:prstGeom>
+          <a:solidFill>
+            <a:srgbClr val="141414"/>
+          </a:solidFill>
+          <a:ln w="12700">
+            <a:solidFill>
+              <a:srgbClr val="141414">
+                <a:alpha val="0"/>
+              </a:srgbClr>
+            </a:solidFill>
+            <a:prstDash val="solid"/>
+          </a:ln>
+        </p:spPr>
+      </p:sp>
+      <p:sp>
+        <p:nvSpPr>
+          <p:cNvPr id="20" name="cb1"/>
+          <p:cNvSpPr/>
+          <p:nvPr/>
+        </p:nvSpPr>
+        <p:spPr>
+          <a:xfrm>
+            <a:off x="1600200" y="5230368"/>
+            <a:ext cx="822960" cy="512064"/>
+          </a:xfrm>
+          <a:prstGeom prst="rect">
+            <a:avLst/>
+          </a:prstGeom>
+          <a:solidFill>
+            <a:srgbClr val="F7F6F4"/>
+          </a:solidFill>
+          <a:ln w="15875">
+            <a:solidFill>
+              <a:srgbClr val="141414"/>
+            </a:solidFill>
+            <a:prstDash val="solid"/>
+          </a:ln>
+        </p:spPr>
+      </p:sp>
+      <p:sp>
+        <p:nvSpPr>
+          <p:cNvPr id="21" name="pt2"/>
+          <p:cNvSpPr/>
+          <p:nvPr/>
+        </p:nvSpPr>
+        <p:spPr>
+          <a:xfrm>
+            <a:off x="1508760" y="5769864"/>
+            <a:ext cx="1005840" cy="64008"/>
+          </a:xfrm>
+          <a:prstGeom prst="rect">
+            <a:avLst/>
+          </a:prstGeom>
+          <a:solidFill>
+            <a:srgbClr val="141414"/>
+          </a:solidFill>
+          <a:ln w="12700">
+            <a:solidFill>
+              <a:srgbClr val="141414">
+                <a:alpha val="0"/>
+              </a:srgbClr>
+            </a:solidFill>
+            <a:prstDash val="solid"/>
+          </a:ln>
+        </p:spPr>
+      </p:sp>
+      <p:sp>
+        <p:nvSpPr>
+          <p:cNvPr id="22" name="cl2"/>
+          <p:cNvSpPr/>
+          <p:nvPr/>
+        </p:nvSpPr>
+        <p:spPr>
+          <a:xfrm>
+            <a:off x="4672584" y="4937760"/>
+            <a:ext cx="128016" cy="237744"/>
+          </a:xfrm>
+          <a:prstGeom prst="downArrow">
+            <a:avLst/>
+          </a:prstGeom>
+          <a:solidFill>
+            <a:srgbClr val="B4513A"/>
+          </a:solidFill>
+          <a:ln w="12700">
+            <a:solidFill>
+              <a:srgbClr val="B4513A">
+                <a:alpha val="0"/>
+              </a:srgbClr>
+            </a:solidFill>
+            <a:prstDash val="solid"/>
+          </a:ln>
+        </p:spPr>
+      </p:sp>
+      <p:sp>
+        <p:nvSpPr>
+          <p:cNvPr id="23" name="bm"/>
+          <p:cNvSpPr/>
+          <p:nvPr/>
+        </p:nvSpPr>
+        <p:spPr>
+          <a:xfrm>
+            <a:off x="3611880" y="5230368"/>
+            <a:ext cx="2240280" cy="182880"/>
+          </a:xfrm>
+          <a:prstGeom prst="rect">
+            <a:avLst/>
+          </a:prstGeom>
+          <a:solidFill>
+            <a:srgbClr val="F7F6F4"/>
+          </a:solidFill>
+          <a:ln w="15875">
+            <a:solidFill>
+              <a:srgbClr val="141414"/>
+            </a:solidFill>
+            <a:prstDash val="solid"/>
+          </a:ln>
+        </p:spPr>
+      </p:sp>
+      <p:sp>
+        <p:nvSpPr>
+          <p:cNvPr id="24" name="su1"/>
+          <p:cNvSpPr/>
+          <p:nvPr/>
+        </p:nvSpPr>
+        <p:spPr>
+          <a:xfrm>
+            <a:off x="3813048" y="5431536"/>
+            <a:ext cx="219456" cy="182880"/>
+          </a:xfrm>
+          <a:prstGeom prst="triangle">
+            <a:avLst/>
+          </a:prstGeom>
+          <a:solidFill>
+            <a:srgbClr val="141414"/>
+          </a:solidFill>
+          <a:ln w="12700">
+            <a:solidFill>
+              <a:srgbClr val="141414">
+                <a:alpha val="0"/>
+              </a:srgbClr>
+            </a:solidFill>
+            <a:prstDash val="solid"/>
+          </a:ln>
+        </p:spPr>
+      </p:sp>
+      <p:sp>
+        <p:nvSpPr>
+          <p:cNvPr id="25" name="su2"/>
+          <p:cNvSpPr/>
+          <p:nvPr/>
+        </p:nvSpPr>
+        <p:spPr>
+          <a:xfrm>
+            <a:off x="5431536" y="5431536"/>
+            <a:ext cx="219456" cy="182880"/>
+          </a:xfrm>
+          <a:prstGeom prst="triangle">
+            <a:avLst/>
+          </a:prstGeom>
+          <a:solidFill>
+            <a:srgbClr val="141414"/>
+          </a:solidFill>
+          <a:ln w="12700">
+            <a:solidFill>
+              <a:srgbClr val="141414">
+                <a:alpha val="0"/>
+              </a:srgbClr>
+            </a:solidFill>
+            <a:prstDash val="solid"/>
+          </a:ln>
+        </p:spPr>
+      </p:sp>
+      <p:sp>
+        <p:nvSpPr>
+          <p:cNvPr id="26" name="spn"/>
+          <p:cNvSpPr/>
+          <p:nvPr/>
+        </p:nvSpPr>
+        <p:spPr>
+          <a:xfrm>
+            <a:off x="3922776" y="5724144"/>
+            <a:ext cx="1618488" cy="13716"/>
+          </a:xfrm>
+          <a:prstGeom prst="rect">
+            <a:avLst/>
+          </a:prstGeom>
+          <a:solidFill>
+            <a:srgbClr val="BDBDBD"/>
+          </a:solidFill>
+          <a:ln w="12700">
+            <a:solidFill>
+              <a:srgbClr val="BDBDBD">
+                <a:alpha val="0"/>
+              </a:srgbClr>
+            </a:solidFill>
+            <a:prstDash val="solid"/>
+          </a:ln>
+        </p:spPr>
+      </p:sp>
+      <p:sp>
+        <p:nvSpPr>
+          <p:cNvPr id="27" name="Text 24"/>
+          <p:cNvSpPr txBox="1"/>
+          <p:nvPr/>
+        </p:nvSpPr>
+        <p:spPr>
+          <a:xfrm>
+            <a:off x="4114800" y="5742432"/>
+            <a:ext cx="1234440" cy="201168"/>
+          </a:xfrm>
+          <a:prstGeom prst="rect">
+            <a:avLst/>
+          </a:prstGeom>
+          <a:noFill/>
+          <a:ln/>
+        </p:spPr>
+        <p:txBody>
+          <a:bodyPr wrap="square" lIns="0" tIns="0" rIns="0" bIns="0" rtlCol="0" anchor="ctr"/>
+          <a:lstStyle/>
+          <a:p>
+            <a:pPr algn="ctr" indent="0" marL="0">
+              <a:buNone/>
+            </a:pPr>
+            <a:r>
+              <a:rPr lang="en-US" sz="900" dirty="0">
+                <a:solidFill>
+                  <a:srgbClr val="8C8C8C"/>
+                </a:solidFill>
+                <a:latin typeface="Calibri" pitchFamily="34" charset="0"/>
+                <a:ea typeface="Calibri" pitchFamily="34" charset="-122"/>
+                <a:cs typeface="Calibri" pitchFamily="34" charset="-120"/>
+              </a:rPr>
+              <a:t>120 mm</a:t>
+            </a:r>
+            <a:endParaRPr lang="en-US" sz="900" dirty="0"/>
+          </a:p>
+        </p:txBody>
+      </p:sp>
+      <p:sp>
+        <p:nvSpPr>
+          <p:cNvPr id="28" name="fs"/>
+          <p:cNvSpPr/>
+          <p:nvPr/>
+        </p:nvSpPr>
+        <p:spPr>
+          <a:xfrm rot="2700000">
+            <a:off x="6903720" y="4992624"/>
+            <a:ext cx="603504" cy="603504"/>
+          </a:xfrm>
+          <a:prstGeom prst="rect">
+            <a:avLst/>
+          </a:prstGeom>
+          <a:solidFill>
+            <a:srgbClr val="F7F6F4"/>
+          </a:solidFill>
+          <a:ln w="15875">
+            <a:solidFill>
+              <a:srgbClr val="141414"/>
+            </a:solidFill>
+            <a:prstDash val="solid"/>
+          </a:ln>
+        </p:spPr>
+      </p:sp>
+      <p:sp>
+        <p:nvSpPr>
+          <p:cNvPr id="29" name="fm"/>
+          <p:cNvSpPr/>
+          <p:nvPr/>
+        </p:nvSpPr>
+        <p:spPr>
+          <a:xfrm>
+            <a:off x="7114032" y="5687568"/>
+            <a:ext cx="182880" cy="219456"/>
+          </a:xfrm>
+          <a:prstGeom prst="triangle">
+            <a:avLst/>
+          </a:prstGeom>
+          <a:solidFill>
+            <a:srgbClr val="B4513A"/>
+          </a:solidFill>
+          <a:ln w="12700">
+            <a:solidFill>
+              <a:srgbClr val="B4513A">
+                <a:alpha val="0"/>
+              </a:srgbClr>
+            </a:solidFill>
+            <a:prstDash val="solid"/>
+          </a:ln>
+        </p:spPr>
+      </p:sp>
+      <p:sp>
+        <p:nvSpPr>
+          <p:cNvPr id="30" name="Text 27"/>
+          <p:cNvSpPr txBox="1"/>
+          <p:nvPr/>
+        </p:nvSpPr>
+        <p:spPr>
+          <a:xfrm>
+            <a:off x="7653528" y="5230368"/>
+            <a:ext cx="457200" cy="201168"/>
+          </a:xfrm>
+          <a:prstGeom prst="rect">
+            <a:avLst/>
+          </a:prstGeom>
+          <a:noFill/>
+          <a:ln/>
+        </p:spPr>
+        <p:txBody>
+          <a:bodyPr wrap="square" lIns="0" tIns="0" rIns="0" bIns="0" rtlCol="0" anchor="ctr"/>
+          <a:lstStyle/>
+          <a:p>
+            <a:pPr indent="0" marL="0">
+              <a:buNone/>
+            </a:pPr>
+            <a:r>
+              <a:rPr lang="en-US" sz="900" dirty="0">
+                <a:solidFill>
+                  <a:srgbClr val="8C8C8C"/>
+                </a:solidFill>
+                <a:latin typeface="Calibri" pitchFamily="34" charset="0"/>
+                <a:ea typeface="Calibri" pitchFamily="34" charset="-122"/>
+                <a:cs typeface="Calibri" pitchFamily="34" charset="-120"/>
+              </a:rPr>
+              <a:t>45°</a:t>
+            </a:r>
+            <a:endParaRPr lang="en-US" sz="900" dirty="0"/>
+          </a:p>
+        </p:txBody>
+      </p:sp>
+      <p:sp>
+        <p:nvSpPr>
+          <p:cNvPr id="31" name="vs"/>
+          <p:cNvSpPr/>
+          <p:nvPr/>
+        </p:nvSpPr>
+        <p:spPr>
+          <a:xfrm>
+            <a:off x="9281160" y="5074920"/>
+            <a:ext cx="1691640" cy="777240"/>
+          </a:xfrm>
+          <a:prstGeom prst="rect">
+            <a:avLst/>
+          </a:prstGeom>
+          <a:solidFill>
+            <a:srgbClr val="FFFFFF"/>
+          </a:solidFill>
+          <a:ln w="15875">
+            <a:solidFill>
+              <a:srgbClr val="141414"/>
+            </a:solidFill>
+            <a:prstDash val="solid"/>
+          </a:ln>
+        </p:spPr>
+      </p:sp>
+      <p:sp>
+        <p:nvSpPr>
+          <p:cNvPr id="32" name="wt"/>
+          <p:cNvSpPr/>
+          <p:nvPr/>
+        </p:nvSpPr>
+        <p:spPr>
+          <a:xfrm>
+            <a:off x="9299448" y="5285232"/>
+            <a:ext cx="1655064" cy="548640"/>
+          </a:xfrm>
+          <a:prstGeom prst="rect">
+            <a:avLst/>
+          </a:prstGeom>
+          <a:solidFill>
+            <a:srgbClr val="B4513A">
+              <a:alpha val="28000"/>
+            </a:srgbClr>
+          </a:solidFill>
+          <a:ln w="12700">
+            <a:solidFill>
+              <a:srgbClr val="B4513A">
+                <a:alpha val="0"/>
+              </a:srgbClr>
+            </a:solidFill>
+            <a:prstDash val="solid"/>
+          </a:ln>
+        </p:spPr>
+      </p:sp>
+      <p:sp>
+        <p:nvSpPr>
+          <p:cNvPr id="33" name="cp"/>
+          <p:cNvSpPr/>
+          <p:nvPr/>
+        </p:nvSpPr>
+        <p:spPr>
+          <a:xfrm>
+            <a:off x="9829800" y="5413248"/>
+            <a:ext cx="594360" cy="310896"/>
+          </a:xfrm>
+          <a:prstGeom prst="rect">
+            <a:avLst/>
+          </a:prstGeom>
+          <a:solidFill>
+            <a:srgbClr val="F7F6F4"/>
+          </a:solidFill>
+          <a:ln w="12700">
+            <a:solidFill>
+              <a:srgbClr val="141414"/>
+            </a:solidFill>
+            <a:prstDash val="solid"/>
+          </a:ln>
+        </p:spPr>
+      </p:sp>
+      <p:sp>
+        <p:nvSpPr>
+          <p:cNvPr id="34" name="Text 31"/>
+          <p:cNvSpPr txBox="1"/>
+          <p:nvPr/>
+        </p:nvSpPr>
+        <p:spPr>
+          <a:xfrm>
+            <a:off x="731520" y="6583680"/>
+            <a:ext cx="10241280" cy="457200"/>
           </a:xfrm>
           <a:prstGeom prst="rect">
             <a:avLst/>
@@ -15321,7 +17124,7 @@
                 <a:ea typeface="Calibri" pitchFamily="34" charset="-122"/>
                 <a:cs typeface="Calibri" pitchFamily="34" charset="-120"/>
               </a:rPr>
-              <a:t>All testing: Advanced Construction Materials Research Laboratory, Hacettepe University.</a:t>
+              <a:t>All testing: Advanced Construction Materials Research Laboratory, Hacettepe University.  ·  Schematic, not to scale.</a:t>
             </a:r>
             <a:endParaRPr lang="en-US" sz="900" dirty="0"/>
           </a:p>
@@ -15329,7 +17132,7 @@
       </p:sp>
       <p:sp>
         <p:nvSpPr>
-          <p:cNvPr id="10" name="Text 0"/>
+          <p:cNvPr id="36" name="Text 0"/>
           <p:cNvSpPr/>
           <p:nvPr>
             <p:ph idx="100" hasCustomPrompt="1"/>
@@ -19503,7 +21306,7 @@
         <p:spPr>
           <a:xfrm>
             <a:off x="7680960" y="1325880"/>
-            <a:ext cx="13716" cy="3931920"/>
+            <a:ext cx="13716" cy="3383280"/>
           </a:xfrm>
           <a:prstGeom prst="rect">
             <a:avLst/>
@@ -19649,7 +21452,7 @@
         </p:nvSpPr>
         <p:spPr>
           <a:xfrm>
-            <a:off x="8138160" y="2834640"/>
+            <a:off x="8138160" y="2697480"/>
             <a:ext cx="3291840" cy="609600"/>
           </a:xfrm>
           <a:prstGeom prst="rect">
@@ -19688,7 +21491,7 @@
         </p:nvSpPr>
         <p:spPr>
           <a:xfrm>
-            <a:off x="8138160" y="3480816"/>
+            <a:off x="8138160" y="3343656"/>
             <a:ext cx="3291840" cy="420624"/>
           </a:xfrm>
           <a:prstGeom prst="rect">
@@ -19730,7 +21533,7 @@
         </p:nvSpPr>
         <p:spPr>
           <a:xfrm>
-            <a:off x="8138160" y="4069080"/>
+            <a:off x="8138160" y="3657600"/>
             <a:ext cx="3291840" cy="609600"/>
           </a:xfrm>
           <a:prstGeom prst="rect">
@@ -19769,7 +21572,7 @@
         </p:nvSpPr>
         <p:spPr>
           <a:xfrm>
-            <a:off x="8138160" y="4715256"/>
+            <a:off x="8138160" y="4303776"/>
             <a:ext cx="3291840" cy="420624"/>
           </a:xfrm>
           <a:prstGeom prst="rect">
@@ -19805,14 +21608,80 @@
       </p:sp>
       <p:sp>
         <p:nvSpPr>
-          <p:cNvPr id="14" name="bgp"/>
+          <p:cNvPr id="14" name="ru0.85.3"/>
           <p:cNvSpPr/>
           <p:nvPr/>
         </p:nvSpPr>
         <p:spPr>
           <a:xfrm>
+            <a:off x="731520" y="4846320"/>
+            <a:ext cx="10698480" cy="9144"/>
+          </a:xfrm>
+          <a:prstGeom prst="rect">
+            <a:avLst/>
+          </a:prstGeom>
+          <a:solidFill>
+            <a:srgbClr val="E4E4E4"/>
+          </a:solidFill>
+          <a:ln w="12700">
+            <a:solidFill>
+              <a:srgbClr val="E4E4E4">
+                <a:alpha val="0"/>
+              </a:srgbClr>
+            </a:solidFill>
+            <a:prstDash val="solid"/>
+          </a:ln>
+        </p:spPr>
+      </p:sp>
+      <p:sp>
+        <p:nvSpPr>
+          <p:cNvPr id="15" name="Text 13"/>
+          <p:cNvSpPr txBox="1"/>
+          <p:nvPr/>
+        </p:nvSpPr>
+        <p:spPr>
+          <a:xfrm>
+            <a:off x="731520" y="5029200"/>
+            <a:ext cx="10698480" cy="274320"/>
+          </a:xfrm>
+          <a:prstGeom prst="rect">
+            <a:avLst/>
+          </a:prstGeom>
+          <a:noFill/>
+          <a:ln/>
+        </p:spPr>
+        <p:txBody>
+          <a:bodyPr wrap="square" lIns="0" tIns="0" rIns="0" bIns="0" rtlCol="0" anchor="ctr"/>
+          <a:lstStyle/>
+          <a:p>
+            <a:pPr indent="0" marL="0">
+              <a:buNone/>
+            </a:pPr>
+            <a:r>
+              <a:rPr lang="en-US" sz="1300" b="1" dirty="0">
+                <a:solidFill>
+                  <a:srgbClr val="141414"/>
+                </a:solidFill>
+                <a:latin typeface="Calibri" pitchFamily="34" charset="0"/>
+                <a:ea typeface="Calibri" pitchFamily="34" charset="-122"/>
+                <a:cs typeface="Calibri" pitchFamily="34" charset="-120"/>
+              </a:rPr>
+              <a:t>Disposal and valorisation routes</a:t>
+            </a:r>
+            <a:endParaRPr lang="en-US" sz="1300" dirty="0"/>
+          </a:p>
+        </p:txBody>
+      </p:sp>
+      <p:sp>
+        <p:nvSpPr>
+          <p:cNvPr id="16" name="nd0.85.95"/>
+          <p:cNvSpPr/>
+          <p:nvPr/>
+        </p:nvSpPr>
+        <p:spPr>
+          <a:xfrm>
             <a:off x="731520" y="5440680"/>
-            <a:ext cx="10698480" cy="868680"/>
+            <a:ext cx="1828800" cy="411480"/>
           </a:xfrm>
           <a:prstGeom prst="rect">
             <a:avLst/>
@@ -19822,7 +21691,74 @@
           </a:solidFill>
           <a:ln w="12700">
             <a:solidFill>
-              <a:srgbClr val="F7F6F4">
+              <a:srgbClr val="F7F6F4"/>
+            </a:solidFill>
+            <a:prstDash val="solid"/>
+          </a:ln>
+        </p:spPr>
+      </p:sp>
+      <p:sp>
+        <p:nvSpPr>
+          <p:cNvPr id="17" name="Text 15"/>
+          <p:cNvSpPr txBox="1"/>
+          <p:nvPr/>
+        </p:nvSpPr>
+        <p:spPr>
+          <a:xfrm>
+            <a:off x="841248" y="5440680"/>
+            <a:ext cx="1609344" cy="411480"/>
+          </a:xfrm>
+          <a:prstGeom prst="rect">
+            <a:avLst/>
+          </a:prstGeom>
+          <a:noFill/>
+          <a:ln/>
+        </p:spPr>
+        <p:txBody>
+          <a:bodyPr wrap="square" lIns="0" tIns="0" rIns="0" bIns="0" rtlCol="0" anchor="ctr"/>
+          <a:lstStyle/>
+          <a:p>
+            <a:pPr algn="ctr" indent="0" marL="0">
+              <a:lnSpc>
+                <a:spcPts val="1400"/>
+              </a:lnSpc>
+              <a:buNone/>
+            </a:pPr>
+            <a:r>
+              <a:rPr lang="en-US" sz="1100" b="1" dirty="0">
+                <a:solidFill>
+                  <a:srgbClr val="141414"/>
+                </a:solidFill>
+                <a:latin typeface="Calibri" pitchFamily="34" charset="0"/>
+                <a:ea typeface="Calibri" pitchFamily="34" charset="-122"/>
+                <a:cs typeface="Calibri" pitchFamily="34" charset="-120"/>
+              </a:rPr>
+              <a:t>Food processing</a:t>
+            </a:r>
+            <a:endParaRPr lang="en-US" sz="1100" dirty="0"/>
+          </a:p>
+        </p:txBody>
+      </p:sp>
+      <p:sp>
+        <p:nvSpPr>
+          <p:cNvPr id="18" name="aw2.96.1"/>
+          <p:cNvSpPr/>
+          <p:nvPr/>
+        </p:nvSpPr>
+        <p:spPr>
+          <a:xfrm>
+            <a:off x="2651760" y="5577840"/>
+            <a:ext cx="201168" cy="137160"/>
+          </a:xfrm>
+          <a:prstGeom prst="rightArrow">
+            <a:avLst/>
+          </a:prstGeom>
+          <a:solidFill>
+            <a:srgbClr val="BDBDBD"/>
+          </a:solidFill>
+          <a:ln w="12700">
+            <a:solidFill>
+              <a:srgbClr val="BDBDBD">
                 <a:alpha val="0"/>
               </a:srgbClr>
             </a:solidFill>
@@ -19832,14 +21768,39 @@
       </p:sp>
       <p:sp>
         <p:nvSpPr>
-          <p:cNvPr id="15" name="Text 13"/>
+          <p:cNvPr id="19" name="nd3.255.95"/>
+          <p:cNvSpPr/>
+          <p:nvPr/>
+        </p:nvSpPr>
+        <p:spPr>
+          <a:xfrm>
+            <a:off x="2971800" y="5440680"/>
+            <a:ext cx="2011680" cy="411480"/>
+          </a:xfrm>
+          <a:prstGeom prst="rect">
+            <a:avLst/>
+          </a:prstGeom>
+          <a:solidFill>
+            <a:srgbClr val="F7F6F4"/>
+          </a:solidFill>
+          <a:ln w="12700">
+            <a:solidFill>
+              <a:srgbClr val="F7F6F4"/>
+            </a:solidFill>
+            <a:prstDash val="solid"/>
+          </a:ln>
+        </p:spPr>
+      </p:sp>
+      <p:sp>
+        <p:nvSpPr>
+          <p:cNvPr id="20" name="Text 18"/>
           <p:cNvSpPr txBox="1"/>
           <p:nvPr/>
         </p:nvSpPr>
         <p:spPr>
           <a:xfrm>
-            <a:off x="1051560" y="5687568"/>
-            <a:ext cx="10058400" cy="411480"/>
+            <a:off x="3081528" y="5440680"/>
+            <a:ext cx="1792224" cy="411480"/>
           </a:xfrm>
           <a:prstGeom prst="rect">
             <a:avLst/>
@@ -19851,11 +21812,271 @@
           <a:bodyPr wrap="square" lIns="0" tIns="0" rIns="0" bIns="0" rtlCol="0" anchor="ctr"/>
           <a:lstStyle/>
           <a:p>
+            <a:pPr algn="ctr" indent="0" marL="0">
+              <a:lnSpc>
+                <a:spcPts val="1400"/>
+              </a:lnSpc>
+              <a:buNone/>
+            </a:pPr>
+            <a:r>
+              <a:rPr lang="en-US" sz="1100" b="1" dirty="0">
+                <a:solidFill>
+                  <a:srgbClr val="141414"/>
+                </a:solidFill>
+                <a:latin typeface="Calibri" pitchFamily="34" charset="0"/>
+                <a:ea typeface="Calibri" pitchFamily="34" charset="-122"/>
+                <a:cs typeface="Calibri" pitchFamily="34" charset="-120"/>
+              </a:rPr>
+              <a:t>Waste eggshell</a:t>
+            </a:r>
+            <a:endParaRPr lang="en-US" sz="1100" dirty="0"/>
+          </a:p>
+        </p:txBody>
+      </p:sp>
+      <p:sp>
+        <p:nvSpPr>
+          <p:cNvPr id="21" name="br"/>
+          <p:cNvSpPr/>
+          <p:nvPr/>
+        </p:nvSpPr>
+        <p:spPr>
+          <a:xfrm>
+            <a:off x="5148072" y="5468112"/>
+            <a:ext cx="18288" cy="502920"/>
+          </a:xfrm>
+          <a:prstGeom prst="rect">
+            <a:avLst/>
+          </a:prstGeom>
+          <a:solidFill>
+            <a:srgbClr val="BDBDBD"/>
+          </a:solidFill>
+          <a:ln w="12700">
+            <a:solidFill>
+              <a:srgbClr val="BDBDBD">
+                <a:alpha val="0"/>
+              </a:srgbClr>
+            </a:solidFill>
+            <a:prstDash val="solid"/>
+          </a:ln>
+        </p:spPr>
+      </p:sp>
+      <p:sp>
+        <p:nvSpPr>
+          <p:cNvPr id="22" name="aw5.725.9"/>
+          <p:cNvSpPr/>
+          <p:nvPr/>
+        </p:nvSpPr>
+        <p:spPr>
+          <a:xfrm>
+            <a:off x="5230368" y="5394960"/>
+            <a:ext cx="201168" cy="137160"/>
+          </a:xfrm>
+          <a:prstGeom prst="rightArrow">
+            <a:avLst/>
+          </a:prstGeom>
+          <a:solidFill>
+            <a:srgbClr val="BDBDBD"/>
+          </a:solidFill>
+          <a:ln w="12700">
+            <a:solidFill>
+              <a:srgbClr val="BDBDBD">
+                <a:alpha val="0"/>
+              </a:srgbClr>
+            </a:solidFill>
+            <a:prstDash val="solid"/>
+          </a:ln>
+        </p:spPr>
+      </p:sp>
+      <p:sp>
+        <p:nvSpPr>
+          <p:cNvPr id="23" name="aw5.726.38"/>
+          <p:cNvSpPr/>
+          <p:nvPr/>
+        </p:nvSpPr>
+        <p:spPr>
+          <a:xfrm>
+            <a:off x="5230368" y="5833872"/>
+            <a:ext cx="201168" cy="137160"/>
+          </a:xfrm>
+          <a:prstGeom prst="rightArrow">
+            <a:avLst/>
+          </a:prstGeom>
+          <a:solidFill>
+            <a:srgbClr val="BDBDBD"/>
+          </a:solidFill>
+          <a:ln w="12700">
+            <a:solidFill>
+              <a:srgbClr val="BDBDBD">
+                <a:alpha val="0"/>
+              </a:srgbClr>
+            </a:solidFill>
+            <a:prstDash val="solid"/>
+          </a:ln>
+        </p:spPr>
+      </p:sp>
+      <p:sp>
+        <p:nvSpPr>
+          <p:cNvPr id="24" name="nd6.055.78"/>
+          <p:cNvSpPr/>
+          <p:nvPr/>
+        </p:nvSpPr>
+        <p:spPr>
+          <a:xfrm>
+            <a:off x="5532120" y="5285232"/>
+            <a:ext cx="2651760" cy="365760"/>
+          </a:xfrm>
+          <a:prstGeom prst="rect">
+            <a:avLst/>
+          </a:prstGeom>
+          <a:solidFill>
+            <a:srgbClr val="FFFFFF"/>
+          </a:solidFill>
+          <a:ln w="12700">
+            <a:solidFill>
+              <a:srgbClr val="BDBDBD"/>
+            </a:solidFill>
+            <a:prstDash val="solid"/>
+          </a:ln>
+        </p:spPr>
+      </p:sp>
+      <p:sp>
+        <p:nvSpPr>
+          <p:cNvPr id="25" name="Text 23"/>
+          <p:cNvSpPr txBox="1"/>
+          <p:nvPr/>
+        </p:nvSpPr>
+        <p:spPr>
+          <a:xfrm>
+            <a:off x="5641848" y="5285232"/>
+            <a:ext cx="2432304" cy="365760"/>
+          </a:xfrm>
+          <a:prstGeom prst="rect">
+            <a:avLst/>
+          </a:prstGeom>
+          <a:noFill/>
+          <a:ln/>
+        </p:spPr>
+        <p:txBody>
+          <a:bodyPr wrap="square" lIns="0" tIns="0" rIns="0" bIns="0" rtlCol="0" anchor="ctr"/>
+          <a:lstStyle/>
+          <a:p>
+            <a:pPr algn="ctr" indent="0" marL="0">
+              <a:lnSpc>
+                <a:spcPts val="1400"/>
+              </a:lnSpc>
+              <a:buNone/>
+            </a:pPr>
+            <a:r>
+              <a:rPr lang="en-US" sz="1100" b="1" dirty="0">
+                <a:solidFill>
+                  <a:srgbClr val="8C8C8C"/>
+                </a:solidFill>
+                <a:latin typeface="Calibri" pitchFamily="34" charset="0"/>
+                <a:ea typeface="Calibri" pitchFamily="34" charset="-122"/>
+                <a:cs typeface="Calibri" pitchFamily="34" charset="-120"/>
+              </a:rPr>
+              <a:t>Landfill — current practice</a:t>
+            </a:r>
+            <a:endParaRPr lang="en-US" sz="1100" dirty="0"/>
+          </a:p>
+        </p:txBody>
+      </p:sp>
+      <p:sp>
+        <p:nvSpPr>
+          <p:cNvPr id="26" name="nd6.056.26"/>
+          <p:cNvSpPr/>
+          <p:nvPr/>
+        </p:nvSpPr>
+        <p:spPr>
+          <a:xfrm>
+            <a:off x="5532120" y="5724144"/>
+            <a:ext cx="2651760" cy="365760"/>
+          </a:xfrm>
+          <a:prstGeom prst="rect">
+            <a:avLst/>
+          </a:prstGeom>
+          <a:solidFill>
+            <a:srgbClr val="B4513A"/>
+          </a:solidFill>
+          <a:ln w="12700">
+            <a:solidFill>
+              <a:srgbClr val="B4513A"/>
+            </a:solidFill>
+            <a:prstDash val="solid"/>
+          </a:ln>
+        </p:spPr>
+      </p:sp>
+      <p:sp>
+        <p:nvSpPr>
+          <p:cNvPr id="27" name="Text 25"/>
+          <p:cNvSpPr txBox="1"/>
+          <p:nvPr/>
+        </p:nvSpPr>
+        <p:spPr>
+          <a:xfrm>
+            <a:off x="5641848" y="5724144"/>
+            <a:ext cx="2432304" cy="365760"/>
+          </a:xfrm>
+          <a:prstGeom prst="rect">
+            <a:avLst/>
+          </a:prstGeom>
+          <a:noFill/>
+          <a:ln/>
+        </p:spPr>
+        <p:txBody>
+          <a:bodyPr wrap="square" lIns="0" tIns="0" rIns="0" bIns="0" rtlCol="0" anchor="ctr"/>
+          <a:lstStyle/>
+          <a:p>
+            <a:pPr algn="ctr" indent="0" marL="0">
+              <a:lnSpc>
+                <a:spcPts val="1400"/>
+              </a:lnSpc>
+              <a:buNone/>
+            </a:pPr>
+            <a:r>
+              <a:rPr lang="en-US" sz="1100" b="1" dirty="0">
+                <a:solidFill>
+                  <a:srgbClr val="FFFFFF"/>
+                </a:solidFill>
+                <a:latin typeface="Calibri" pitchFamily="34" charset="0"/>
+                <a:ea typeface="Calibri" pitchFamily="34" charset="-122"/>
+                <a:cs typeface="Calibri" pitchFamily="34" charset="-120"/>
+              </a:rPr>
+              <a:t>Secondary mineral resource</a:t>
+            </a:r>
+            <a:endParaRPr lang="en-US" sz="1100" dirty="0"/>
+          </a:p>
+        </p:txBody>
+      </p:sp>
+      <p:sp>
+        <p:nvSpPr>
+          <p:cNvPr id="28" name="Text 26"/>
+          <p:cNvSpPr txBox="1"/>
+          <p:nvPr/>
+        </p:nvSpPr>
+        <p:spPr>
+          <a:xfrm>
+            <a:off x="8503920" y="5349240"/>
+            <a:ext cx="2926080" cy="822960"/>
+          </a:xfrm>
+          <a:prstGeom prst="rect">
+            <a:avLst/>
+          </a:prstGeom>
+          <a:noFill/>
+          <a:ln/>
+        </p:spPr>
+        <p:txBody>
+          <a:bodyPr wrap="square" lIns="0" tIns="0" rIns="0" bIns="0" rtlCol="0" anchor="ctr"/>
+          <a:lstStyle/>
+          <a:p>
             <a:pPr indent="0" marL="0">
+              <a:lnSpc>
+                <a:spcPts val="1800"/>
+              </a:lnSpc>
               <a:buNone/>
             </a:pPr>
             <a:r>
-              <a:rPr lang="en-US" sz="1300" b="1" i="1" dirty="0">
+              <a:rPr lang="en-US" sz="1200" b="1" i="1" dirty="0">
                 <a:solidFill>
                   <a:srgbClr val="141414"/>
                 </a:solidFill>
@@ -19865,13 +22086,13 @@
               </a:rPr>
               <a:t>The case for eggshell as a mineral phase is settled. This paper is concerned with the phase that binds it.</a:t>
             </a:r>
-            <a:endParaRPr lang="en-US" sz="1300" dirty="0"/>
-          </a:p>
-        </p:txBody>
-      </p:sp>
-      <p:sp>
-        <p:nvSpPr>
-          <p:cNvPr id="17" name="Text 0"/>
+            <a:endParaRPr lang="en-US" sz="1200" dirty="0"/>
+          </a:p>
+        </p:txBody>
+      </p:sp>
+      <p:sp>
+        <p:nvSpPr>
+          <p:cNvPr id="30" name="Text 0"/>
           <p:cNvSpPr/>
           <p:nvPr>
             <p:ph idx="100" hasCustomPrompt="1"/>
@@ -20515,7 +22736,7 @@
         <p:spPr>
           <a:xfrm>
             <a:off x="3200400" y="3931920"/>
-            <a:ext cx="3017520" cy="1371600"/>
+            <a:ext cx="3017520" cy="1188720"/>
           </a:xfrm>
           <a:prstGeom prst="rect">
             <a:avLst/>
@@ -20608,7 +22829,49 @@
         </p:nvSpPr>
         <p:spPr>
           <a:xfrm>
-            <a:off x="3200400" y="5577840"/>
+            <a:off x="3200400" y="5257800"/>
+            <a:ext cx="3017520" cy="914400"/>
+          </a:xfrm>
+          <a:prstGeom prst="rect">
+            <a:avLst/>
+          </a:prstGeom>
+          <a:noFill/>
+          <a:ln/>
+        </p:spPr>
+        <p:txBody>
+          <a:bodyPr wrap="square" lIns="0" tIns="0" rIns="0" bIns="0" rtlCol="0" anchor="t"/>
+          <a:lstStyle/>
+          <a:p>
+            <a:pPr indent="0" marL="0">
+              <a:lnSpc>
+                <a:spcPts val="1750"/>
+              </a:lnSpc>
+              <a:buNone/>
+            </a:pPr>
+            <a:r>
+              <a:rPr lang="en-US" sz="1150" dirty="0">
+                <a:solidFill>
+                  <a:srgbClr val="3C3C3C"/>
+                </a:solidFill>
+                <a:latin typeface="Calibri" pitchFamily="34" charset="0"/>
+                <a:ea typeface="Calibri" pitchFamily="34" charset="-122"/>
+                <a:cs typeface="Calibri" pitchFamily="34" charset="-120"/>
+              </a:rPr>
+              <a:t>The probable mechanism is endothermic decomposition of the carbonate fraction, diluting the flame front. This was not verified calorimetrically.</a:t>
+            </a:r>
+            <a:endParaRPr lang="en-US" sz="1150" dirty="0"/>
+          </a:p>
+        </p:txBody>
+      </p:sp>
+      <p:sp>
+        <p:nvSpPr>
+          <p:cNvPr id="11" name="Text 8"/>
+          <p:cNvSpPr txBox="1"/>
+          <p:nvPr/>
+        </p:nvSpPr>
+        <p:spPr>
+          <a:xfrm>
+            <a:off x="3200400" y="6355080"/>
             <a:ext cx="3017520" cy="457200"/>
           </a:xfrm>
           <a:prstGeom prst="rect">
@@ -20644,7 +22907,7 @@
       </p:sp>
       <p:sp>
         <p:nvSpPr>
-          <p:cNvPr id="11" name="vr7.31.45"/>
+          <p:cNvPr id="12" name="vr7.31.45"/>
           <p:cNvSpPr/>
           <p:nvPr/>
         </p:nvSpPr>
@@ -20671,7 +22934,7 @@
       </p:sp>
       <p:sp>
         <p:nvSpPr>
-          <p:cNvPr id="12" name="Text 9"/>
+          <p:cNvPr id="13" name="Text 10"/>
           <p:cNvSpPr txBox="1"/>
           <p:nvPr/>
         </p:nvSpPr>
@@ -20710,7 +22973,7 @@
       </p:sp>
       <p:sp>
         <p:nvSpPr>
-          <p:cNvPr id="13" name="Text 10"/>
+          <p:cNvPr id="14" name="Text 11"/>
           <p:cNvSpPr txBox="1"/>
           <p:nvPr/>
         </p:nvSpPr>
@@ -20749,7 +23012,7 @@
       </p:sp>
       <p:sp>
         <p:nvSpPr>
-          <p:cNvPr id="14" name="Text 11"/>
+          <p:cNvPr id="15" name="Text 12"/>
           <p:cNvSpPr txBox="1"/>
           <p:nvPr/>
         </p:nvSpPr>
@@ -20791,7 +23054,7 @@
       </p:sp>
       <p:sp>
         <p:nvSpPr>
-          <p:cNvPr id="15" name="ru7.83.2"/>
+          <p:cNvPr id="16" name="ru7.83.2"/>
           <p:cNvSpPr/>
           <p:nvPr/>
         </p:nvSpPr>
@@ -20818,7 +23081,7 @@
       </p:sp>
       <p:sp>
         <p:nvSpPr>
-          <p:cNvPr id="16" name="Text 13"/>
+          <p:cNvPr id="17" name="Text 14"/>
           <p:cNvSpPr txBox="1"/>
           <p:nvPr/>
         </p:nvSpPr>
@@ -21918,7 +24181,7 @@
       </p:graphicFrame>
       <p:sp>
         <p:nvSpPr>
-          <p:cNvPr id="18" name="Text 14"/>
+          <p:cNvPr id="19" name="Text 15"/>
           <p:cNvSpPr txBox="1"/>
           <p:nvPr/>
         </p:nvSpPr>
@@ -21960,7 +24223,7 @@
       </p:sp>
       <p:sp>
         <p:nvSpPr>
-          <p:cNvPr id="20" name="Text 0"/>
+          <p:cNvPr id="21" name="Text 0"/>
           <p:cNvSpPr/>
           <p:nvPr>
             <p:ph idx="100" hasCustomPrompt="1"/>
@@ -23765,7 +26028,7 @@
                 <a:gridCol w="1234440"/>
                 <a:gridCol w="1554480"/>
               </a:tblGrid>
-              <a:tr h="365760">
+              <a:tr h="329184">
                 <a:tc>
                   <a:txBody>
                     <a:bodyPr/>
@@ -23971,7 +26234,7 @@
                   </a:tcPr>
                 </a:tc>
               </a:tr>
-              <a:tr h="365760">
+              <a:tr h="329184">
                 <a:tc>
                   <a:txBody>
                     <a:bodyPr/>
@@ -24177,7 +26440,7 @@
                   </a:tcPr>
                 </a:tc>
               </a:tr>
-              <a:tr h="365760">
+              <a:tr h="329184">
                 <a:tc>
                   <a:txBody>
                     <a:bodyPr/>
@@ -24383,7 +26646,7 @@
                   </a:tcPr>
                 </a:tc>
               </a:tr>
-              <a:tr h="365760">
+              <a:tr h="329184">
                 <a:tc>
                   <a:txBody>
                     <a:bodyPr/>
@@ -24589,7 +26852,7 @@
                   </a:tcPr>
                 </a:tc>
               </a:tr>
-              <a:tr h="365760">
+              <a:tr h="329184">
                 <a:tc>
                   <a:txBody>
                     <a:bodyPr/>
@@ -24795,7 +27058,7 @@
                   </a:tcPr>
                 </a:tc>
               </a:tr>
-              <a:tr h="365760">
+              <a:tr h="329184">
                 <a:tc>
                   <a:txBody>
                     <a:bodyPr/>
@@ -25001,7 +27264,7 @@
                   </a:tcPr>
                 </a:tc>
               </a:tr>
-              <a:tr h="365760">
+              <a:tr h="329184">
                 <a:tc>
                   <a:txBody>
                     <a:bodyPr/>
@@ -25213,13 +27476,13 @@
       </p:graphicFrame>
       <p:sp>
         <p:nvSpPr>
-          <p:cNvPr id="7" name="ru0.84.65"/>
+          <p:cNvPr id="7" name="ru0.84.4"/>
           <p:cNvSpPr/>
           <p:nvPr/>
         </p:nvSpPr>
         <p:spPr>
           <a:xfrm>
-            <a:off x="731520" y="4251960"/>
+            <a:off x="731520" y="4023360"/>
             <a:ext cx="10698480" cy="9144"/>
           </a:xfrm>
           <a:prstGeom prst="rect">
@@ -25246,7 +27509,752 @@
         </p:nvSpPr>
         <p:spPr>
           <a:xfrm>
-            <a:off x="731520" y="4434840"/>
+            <a:off x="731520" y="4178808"/>
+            <a:ext cx="10698480" cy="274320"/>
+          </a:xfrm>
+          <a:prstGeom prst="rect">
+            <a:avLst/>
+          </a:prstGeom>
+          <a:noFill/>
+          <a:ln/>
+        </p:spPr>
+        <p:txBody>
+          <a:bodyPr wrap="square" lIns="0" tIns="0" rIns="0" bIns="0" rtlCol="0" anchor="ctr"/>
+          <a:lstStyle/>
+          <a:p>
+            <a:pPr indent="0" marL="0">
+              <a:buNone/>
+            </a:pPr>
+            <a:r>
+              <a:rPr lang="en-US" sz="1300" b="1" dirty="0">
+                <a:solidFill>
+                  <a:srgbClr val="141414"/>
+                </a:solidFill>
+                <a:latin typeface="Calibri" pitchFamily="34" charset="0"/>
+                <a:ea typeface="Calibri" pitchFamily="34" charset="-122"/>
+                <a:cs typeface="Calibri" pitchFamily="34" charset="-120"/>
+              </a:rPr>
+              <a:t>Elastic modulus on a logarithmic scale, MPa</a:t>
+            </a:r>
+            <a:endParaRPr lang="en-US" sz="1300" dirty="0"/>
+          </a:p>
+        </p:txBody>
+      </p:sp>
+      <p:sp>
+        <p:nvSpPr>
+          <p:cNvPr id="9" name="lax"/>
+          <p:cNvSpPr/>
+          <p:nvPr/>
+        </p:nvSpPr>
+        <p:spPr>
+          <a:xfrm>
+            <a:off x="1188720" y="5257800"/>
+            <a:ext cx="9948672" cy="18288"/>
+          </a:xfrm>
+          <a:prstGeom prst="rect">
+            <a:avLst/>
+          </a:prstGeom>
+          <a:solidFill>
+            <a:srgbClr val="141414"/>
+          </a:solidFill>
+          <a:ln w="12700">
+            <a:solidFill>
+              <a:srgbClr val="141414">
+                <a:alpha val="0"/>
+              </a:srgbClr>
+            </a:solidFill>
+            <a:prstDash val="solid"/>
+          </a:ln>
+        </p:spPr>
+      </p:sp>
+      <p:sp>
+        <p:nvSpPr>
+          <p:cNvPr id="10" name="lt1"/>
+          <p:cNvSpPr/>
+          <p:nvPr/>
+        </p:nvSpPr>
+        <p:spPr>
+          <a:xfrm>
+            <a:off x="1188720" y="5257800"/>
+            <a:ext cx="13716" cy="128016"/>
+          </a:xfrm>
+          <a:prstGeom prst="rect">
+            <a:avLst/>
+          </a:prstGeom>
+          <a:solidFill>
+            <a:srgbClr val="BDBDBD"/>
+          </a:solidFill>
+          <a:ln w="12700">
+            <a:solidFill>
+              <a:srgbClr val="BDBDBD">
+                <a:alpha val="0"/>
+              </a:srgbClr>
+            </a:solidFill>
+            <a:prstDash val="solid"/>
+          </a:ln>
+        </p:spPr>
+      </p:sp>
+      <p:sp>
+        <p:nvSpPr>
+          <p:cNvPr id="11" name="Text 7"/>
+          <p:cNvSpPr txBox="1"/>
+          <p:nvPr/>
+        </p:nvSpPr>
+        <p:spPr>
+          <a:xfrm>
+            <a:off x="777240" y="5404104"/>
+            <a:ext cx="822960" cy="201168"/>
+          </a:xfrm>
+          <a:prstGeom prst="rect">
+            <a:avLst/>
+          </a:prstGeom>
+          <a:noFill/>
+          <a:ln/>
+        </p:spPr>
+        <p:txBody>
+          <a:bodyPr wrap="square" lIns="0" tIns="0" rIns="0" bIns="0" rtlCol="0" anchor="ctr"/>
+          <a:lstStyle/>
+          <a:p>
+            <a:pPr algn="ctr" indent="0" marL="0">
+              <a:buNone/>
+            </a:pPr>
+            <a:r>
+              <a:rPr lang="en-US" sz="950" dirty="0">
+                <a:solidFill>
+                  <a:srgbClr val="8C8C8C"/>
+                </a:solidFill>
+                <a:latin typeface="Calibri" pitchFamily="34" charset="0"/>
+                <a:ea typeface="Calibri" pitchFamily="34" charset="-122"/>
+                <a:cs typeface="Calibri" pitchFamily="34" charset="-120"/>
+              </a:rPr>
+              <a:t>1</a:t>
+            </a:r>
+            <a:endParaRPr lang="en-US" sz="950" dirty="0"/>
+          </a:p>
+        </p:txBody>
+      </p:sp>
+      <p:sp>
+        <p:nvSpPr>
+          <p:cNvPr id="12" name="lt10"/>
+          <p:cNvSpPr/>
+          <p:nvPr/>
+        </p:nvSpPr>
+        <p:spPr>
+          <a:xfrm>
+            <a:off x="3675888" y="5257800"/>
+            <a:ext cx="13716" cy="128016"/>
+          </a:xfrm>
+          <a:prstGeom prst="rect">
+            <a:avLst/>
+          </a:prstGeom>
+          <a:solidFill>
+            <a:srgbClr val="BDBDBD"/>
+          </a:solidFill>
+          <a:ln w="12700">
+            <a:solidFill>
+              <a:srgbClr val="BDBDBD">
+                <a:alpha val="0"/>
+              </a:srgbClr>
+            </a:solidFill>
+            <a:prstDash val="solid"/>
+          </a:ln>
+        </p:spPr>
+      </p:sp>
+      <p:sp>
+        <p:nvSpPr>
+          <p:cNvPr id="13" name="Text 9"/>
+          <p:cNvSpPr txBox="1"/>
+          <p:nvPr/>
+        </p:nvSpPr>
+        <p:spPr>
+          <a:xfrm>
+            <a:off x="3264408" y="5404104"/>
+            <a:ext cx="822960" cy="201168"/>
+          </a:xfrm>
+          <a:prstGeom prst="rect">
+            <a:avLst/>
+          </a:prstGeom>
+          <a:noFill/>
+          <a:ln/>
+        </p:spPr>
+        <p:txBody>
+          <a:bodyPr wrap="square" lIns="0" tIns="0" rIns="0" bIns="0" rtlCol="0" anchor="ctr"/>
+          <a:lstStyle/>
+          <a:p>
+            <a:pPr algn="ctr" indent="0" marL="0">
+              <a:buNone/>
+            </a:pPr>
+            <a:r>
+              <a:rPr lang="en-US" sz="950" dirty="0">
+                <a:solidFill>
+                  <a:srgbClr val="8C8C8C"/>
+                </a:solidFill>
+                <a:latin typeface="Calibri" pitchFamily="34" charset="0"/>
+                <a:ea typeface="Calibri" pitchFamily="34" charset="-122"/>
+                <a:cs typeface="Calibri" pitchFamily="34" charset="-120"/>
+              </a:rPr>
+              <a:t>10</a:t>
+            </a:r>
+            <a:endParaRPr lang="en-US" sz="950" dirty="0"/>
+          </a:p>
+        </p:txBody>
+      </p:sp>
+      <p:sp>
+        <p:nvSpPr>
+          <p:cNvPr id="14" name="lt100"/>
+          <p:cNvSpPr/>
+          <p:nvPr/>
+        </p:nvSpPr>
+        <p:spPr>
+          <a:xfrm>
+            <a:off x="6163056" y="5257800"/>
+            <a:ext cx="13716" cy="128016"/>
+          </a:xfrm>
+          <a:prstGeom prst="rect">
+            <a:avLst/>
+          </a:prstGeom>
+          <a:solidFill>
+            <a:srgbClr val="BDBDBD"/>
+          </a:solidFill>
+          <a:ln w="12700">
+            <a:solidFill>
+              <a:srgbClr val="BDBDBD">
+                <a:alpha val="0"/>
+              </a:srgbClr>
+            </a:solidFill>
+            <a:prstDash val="solid"/>
+          </a:ln>
+        </p:spPr>
+      </p:sp>
+      <p:sp>
+        <p:nvSpPr>
+          <p:cNvPr id="15" name="Text 11"/>
+          <p:cNvSpPr txBox="1"/>
+          <p:nvPr/>
+        </p:nvSpPr>
+        <p:spPr>
+          <a:xfrm>
+            <a:off x="5751576" y="5404104"/>
+            <a:ext cx="822960" cy="201168"/>
+          </a:xfrm>
+          <a:prstGeom prst="rect">
+            <a:avLst/>
+          </a:prstGeom>
+          <a:noFill/>
+          <a:ln/>
+        </p:spPr>
+        <p:txBody>
+          <a:bodyPr wrap="square" lIns="0" tIns="0" rIns="0" bIns="0" rtlCol="0" anchor="ctr"/>
+          <a:lstStyle/>
+          <a:p>
+            <a:pPr algn="ctr" indent="0" marL="0">
+              <a:buNone/>
+            </a:pPr>
+            <a:r>
+              <a:rPr lang="en-US" sz="950" dirty="0">
+                <a:solidFill>
+                  <a:srgbClr val="8C8C8C"/>
+                </a:solidFill>
+                <a:latin typeface="Calibri" pitchFamily="34" charset="0"/>
+                <a:ea typeface="Calibri" pitchFamily="34" charset="-122"/>
+                <a:cs typeface="Calibri" pitchFamily="34" charset="-120"/>
+              </a:rPr>
+              <a:t>100</a:t>
+            </a:r>
+            <a:endParaRPr lang="en-US" sz="950" dirty="0"/>
+          </a:p>
+        </p:txBody>
+      </p:sp>
+      <p:sp>
+        <p:nvSpPr>
+          <p:cNvPr id="16" name="lt1000"/>
+          <p:cNvSpPr/>
+          <p:nvPr/>
+        </p:nvSpPr>
+        <p:spPr>
+          <a:xfrm>
+            <a:off x="8650224" y="5257800"/>
+            <a:ext cx="13716" cy="128016"/>
+          </a:xfrm>
+          <a:prstGeom prst="rect">
+            <a:avLst/>
+          </a:prstGeom>
+          <a:solidFill>
+            <a:srgbClr val="BDBDBD"/>
+          </a:solidFill>
+          <a:ln w="12700">
+            <a:solidFill>
+              <a:srgbClr val="BDBDBD">
+                <a:alpha val="0"/>
+              </a:srgbClr>
+            </a:solidFill>
+            <a:prstDash val="solid"/>
+          </a:ln>
+        </p:spPr>
+      </p:sp>
+      <p:sp>
+        <p:nvSpPr>
+          <p:cNvPr id="17" name="Text 13"/>
+          <p:cNvSpPr txBox="1"/>
+          <p:nvPr/>
+        </p:nvSpPr>
+        <p:spPr>
+          <a:xfrm>
+            <a:off x="8238744" y="5404104"/>
+            <a:ext cx="822960" cy="201168"/>
+          </a:xfrm>
+          <a:prstGeom prst="rect">
+            <a:avLst/>
+          </a:prstGeom>
+          <a:noFill/>
+          <a:ln/>
+        </p:spPr>
+        <p:txBody>
+          <a:bodyPr wrap="square" lIns="0" tIns="0" rIns="0" bIns="0" rtlCol="0" anchor="ctr"/>
+          <a:lstStyle/>
+          <a:p>
+            <a:pPr algn="ctr" indent="0" marL="0">
+              <a:buNone/>
+            </a:pPr>
+            <a:r>
+              <a:rPr lang="en-US" sz="950" dirty="0">
+                <a:solidFill>
+                  <a:srgbClr val="8C8C8C"/>
+                </a:solidFill>
+                <a:latin typeface="Calibri" pitchFamily="34" charset="0"/>
+                <a:ea typeface="Calibri" pitchFamily="34" charset="-122"/>
+                <a:cs typeface="Calibri" pitchFamily="34" charset="-120"/>
+              </a:rPr>
+              <a:t>1,000</a:t>
+            </a:r>
+            <a:endParaRPr lang="en-US" sz="950" dirty="0"/>
+          </a:p>
+        </p:txBody>
+      </p:sp>
+      <p:sp>
+        <p:nvSpPr>
+          <p:cNvPr id="18" name="lt10000"/>
+          <p:cNvSpPr/>
+          <p:nvPr/>
+        </p:nvSpPr>
+        <p:spPr>
+          <a:xfrm>
+            <a:off x="11137392" y="5257800"/>
+            <a:ext cx="13716" cy="128016"/>
+          </a:xfrm>
+          <a:prstGeom prst="rect">
+            <a:avLst/>
+          </a:prstGeom>
+          <a:solidFill>
+            <a:srgbClr val="BDBDBD"/>
+          </a:solidFill>
+          <a:ln w="12700">
+            <a:solidFill>
+              <a:srgbClr val="BDBDBD">
+                <a:alpha val="0"/>
+              </a:srgbClr>
+            </a:solidFill>
+            <a:prstDash val="solid"/>
+          </a:ln>
+        </p:spPr>
+      </p:sp>
+      <p:sp>
+        <p:nvSpPr>
+          <p:cNvPr id="19" name="Text 15"/>
+          <p:cNvSpPr txBox="1"/>
+          <p:nvPr/>
+        </p:nvSpPr>
+        <p:spPr>
+          <a:xfrm>
+            <a:off x="10725912" y="5404104"/>
+            <a:ext cx="822960" cy="201168"/>
+          </a:xfrm>
+          <a:prstGeom prst="rect">
+            <a:avLst/>
+          </a:prstGeom>
+          <a:noFill/>
+          <a:ln/>
+        </p:spPr>
+        <p:txBody>
+          <a:bodyPr wrap="square" lIns="0" tIns="0" rIns="0" bIns="0" rtlCol="0" anchor="ctr"/>
+          <a:lstStyle/>
+          <a:p>
+            <a:pPr algn="ctr" indent="0" marL="0">
+              <a:buNone/>
+            </a:pPr>
+            <a:r>
+              <a:rPr lang="en-US" sz="950" dirty="0">
+                <a:solidFill>
+                  <a:srgbClr val="8C8C8C"/>
+                </a:solidFill>
+                <a:latin typeface="Calibri" pitchFamily="34" charset="0"/>
+                <a:ea typeface="Calibri" pitchFamily="34" charset="-122"/>
+                <a:cs typeface="Calibri" pitchFamily="34" charset="-120"/>
+              </a:rPr>
+              <a:t>10,000</a:t>
+            </a:r>
+            <a:endParaRPr lang="en-US" sz="950" dirty="0"/>
+          </a:p>
+        </p:txBody>
+      </p:sp>
+      <p:sp>
+        <p:nvSpPr>
+          <p:cNvPr id="20" name="lr0"/>
+          <p:cNvSpPr/>
+          <p:nvPr/>
+        </p:nvSpPr>
+        <p:spPr>
+          <a:xfrm>
+            <a:off x="1823626" y="4983480"/>
+            <a:ext cx="1103550" cy="91440"/>
+          </a:xfrm>
+          <a:prstGeom prst="rect">
+            <a:avLst/>
+          </a:prstGeom>
+          <a:solidFill>
+            <a:srgbClr val="8C8C8C">
+              <a:alpha val="55000"/>
+            </a:srgbClr>
+          </a:solidFill>
+          <a:ln w="12700">
+            <a:solidFill>
+              <a:srgbClr val="8C8C8C">
+                <a:alpha val="0"/>
+              </a:srgbClr>
+            </a:solidFill>
+            <a:prstDash val="solid"/>
+          </a:ln>
+        </p:spPr>
+      </p:sp>
+      <p:sp>
+        <p:nvSpPr>
+          <p:cNvPr id="21" name="Text 17"/>
+          <p:cNvSpPr txBox="1"/>
+          <p:nvPr/>
+        </p:nvSpPr>
+        <p:spPr>
+          <a:xfrm>
+            <a:off x="3018616" y="4919472"/>
+            <a:ext cx="1188720" cy="219456"/>
+          </a:xfrm>
+          <a:prstGeom prst="rect">
+            <a:avLst/>
+          </a:prstGeom>
+          <a:noFill/>
+          <a:ln/>
+        </p:spPr>
+        <p:txBody>
+          <a:bodyPr wrap="square" lIns="0" tIns="0" rIns="0" bIns="0" rtlCol="0" anchor="ctr"/>
+          <a:lstStyle/>
+          <a:p>
+            <a:pPr indent="0" marL="0">
+              <a:buNone/>
+            </a:pPr>
+            <a:r>
+              <a:rPr lang="en-US" sz="950" dirty="0">
+                <a:solidFill>
+                  <a:srgbClr val="8C8C8C"/>
+                </a:solidFill>
+                <a:latin typeface="Calibri" pitchFamily="34" charset="0"/>
+                <a:ea typeface="Calibri" pitchFamily="34" charset="-122"/>
+                <a:cs typeface="Calibri" pitchFamily="34" charset="-120"/>
+              </a:rPr>
+              <a:t>Mycelium</a:t>
+            </a:r>
+            <a:endParaRPr lang="en-US" sz="950" dirty="0"/>
+          </a:p>
+        </p:txBody>
+      </p:sp>
+      <p:sp>
+        <p:nvSpPr>
+          <p:cNvPr id="22" name="lr1"/>
+          <p:cNvSpPr/>
+          <p:nvPr/>
+        </p:nvSpPr>
+        <p:spPr>
+          <a:xfrm>
+            <a:off x="6163056" y="4745736"/>
+            <a:ext cx="1186681" cy="91440"/>
+          </a:xfrm>
+          <a:prstGeom prst="rect">
+            <a:avLst/>
+          </a:prstGeom>
+          <a:solidFill>
+            <a:srgbClr val="8C8C8C">
+              <a:alpha val="55000"/>
+            </a:srgbClr>
+          </a:solidFill>
+          <a:ln w="12700">
+            <a:solidFill>
+              <a:srgbClr val="8C8C8C">
+                <a:alpha val="0"/>
+              </a:srgbClr>
+            </a:solidFill>
+            <a:prstDash val="solid"/>
+          </a:ln>
+        </p:spPr>
+      </p:sp>
+      <p:sp>
+        <p:nvSpPr>
+          <p:cNvPr id="23" name="Text 19"/>
+          <p:cNvSpPr txBox="1"/>
+          <p:nvPr/>
+        </p:nvSpPr>
+        <p:spPr>
+          <a:xfrm>
+            <a:off x="7441177" y="4681728"/>
+            <a:ext cx="1188720" cy="219456"/>
+          </a:xfrm>
+          <a:prstGeom prst="rect">
+            <a:avLst/>
+          </a:prstGeom>
+          <a:noFill/>
+          <a:ln/>
+        </p:spPr>
+        <p:txBody>
+          <a:bodyPr wrap="square" lIns="0" tIns="0" rIns="0" bIns="0" rtlCol="0" anchor="ctr"/>
+          <a:lstStyle/>
+          <a:p>
+            <a:pPr indent="0" marL="0">
+              <a:buNone/>
+            </a:pPr>
+            <a:r>
+              <a:rPr lang="en-US" sz="950" dirty="0">
+                <a:solidFill>
+                  <a:srgbClr val="8C8C8C"/>
+                </a:solidFill>
+                <a:latin typeface="Calibri" pitchFamily="34" charset="0"/>
+                <a:ea typeface="Calibri" pitchFamily="34" charset="-122"/>
+                <a:cs typeface="Calibri" pitchFamily="34" charset="-120"/>
+              </a:rPr>
+              <a:t>LDPE</a:t>
+            </a:r>
+            <a:endParaRPr lang="en-US" sz="950" dirty="0"/>
+          </a:p>
+        </p:txBody>
+      </p:sp>
+      <p:sp>
+        <p:nvSpPr>
+          <p:cNvPr id="24" name="lp0"/>
+          <p:cNvSpPr/>
+          <p:nvPr/>
+        </p:nvSpPr>
+        <p:spPr>
+          <a:xfrm>
+            <a:off x="6345119" y="5207508"/>
+            <a:ext cx="100584" cy="100584"/>
+          </a:xfrm>
+          <a:prstGeom prst="ellipse">
+            <a:avLst/>
+          </a:prstGeom>
+          <a:solidFill>
+            <a:srgbClr val="8C8C8C"/>
+          </a:solidFill>
+          <a:ln w="12700">
+            <a:solidFill>
+              <a:srgbClr val="8C8C8C">
+                <a:alpha val="0"/>
+              </a:srgbClr>
+            </a:solidFill>
+            <a:prstDash val="solid"/>
+          </a:ln>
+        </p:spPr>
+      </p:sp>
+      <p:sp>
+        <p:nvSpPr>
+          <p:cNvPr id="25" name="lp1"/>
+          <p:cNvSpPr/>
+          <p:nvPr/>
+        </p:nvSpPr>
+        <p:spPr>
+          <a:xfrm>
+            <a:off x="6850620" y="5207508"/>
+            <a:ext cx="100584" cy="100584"/>
+          </a:xfrm>
+          <a:prstGeom prst="ellipse">
+            <a:avLst/>
+          </a:prstGeom>
+          <a:solidFill>
+            <a:srgbClr val="8C8C8C"/>
+          </a:solidFill>
+          <a:ln w="12700">
+            <a:solidFill>
+              <a:srgbClr val="8C8C8C">
+                <a:alpha val="0"/>
+              </a:srgbClr>
+            </a:solidFill>
+            <a:prstDash val="solid"/>
+          </a:ln>
+        </p:spPr>
+      </p:sp>
+      <p:sp>
+        <p:nvSpPr>
+          <p:cNvPr id="26" name="lp2"/>
+          <p:cNvSpPr/>
+          <p:nvPr/>
+        </p:nvSpPr>
+        <p:spPr>
+          <a:xfrm>
+            <a:off x="11190051" y="5207508"/>
+            <a:ext cx="100584" cy="100584"/>
+          </a:xfrm>
+          <a:prstGeom prst="ellipse">
+            <a:avLst/>
+          </a:prstGeom>
+          <a:solidFill>
+            <a:srgbClr val="8C8C8C"/>
+          </a:solidFill>
+          <a:ln w="12700">
+            <a:solidFill>
+              <a:srgbClr val="8C8C8C">
+                <a:alpha val="0"/>
+              </a:srgbClr>
+            </a:solidFill>
+            <a:prstDash val="solid"/>
+          </a:ln>
+        </p:spPr>
+      </p:sp>
+      <p:sp>
+        <p:nvSpPr>
+          <p:cNvPr id="27" name="Text 23"/>
+          <p:cNvSpPr txBox="1"/>
+          <p:nvPr/>
+        </p:nvSpPr>
+        <p:spPr>
+          <a:xfrm>
+            <a:off x="9640143" y="4946904"/>
+            <a:ext cx="1463040" cy="219456"/>
+          </a:xfrm>
+          <a:prstGeom prst="rect">
+            <a:avLst/>
+          </a:prstGeom>
+          <a:noFill/>
+          <a:ln/>
+        </p:spPr>
+        <p:txBody>
+          <a:bodyPr wrap="square" lIns="0" tIns="0" rIns="0" bIns="0" rtlCol="0" anchor="ctr"/>
+          <a:lstStyle/>
+          <a:p>
+            <a:pPr algn="r" indent="0" marL="0">
+              <a:buNone/>
+            </a:pPr>
+            <a:r>
+              <a:rPr lang="en-US" sz="950" dirty="0">
+                <a:solidFill>
+                  <a:srgbClr val="8C8C8C"/>
+                </a:solidFill>
+                <a:latin typeface="Calibri" pitchFamily="34" charset="0"/>
+                <a:ea typeface="Calibri" pitchFamily="34" charset="-122"/>
+                <a:cs typeface="Calibri" pitchFamily="34" charset="-120"/>
+              </a:rPr>
+              <a:t>Pine</a:t>
+            </a:r>
+            <a:endParaRPr lang="en-US" sz="950" dirty="0"/>
+          </a:p>
+        </p:txBody>
+      </p:sp>
+      <p:sp>
+        <p:nvSpPr>
+          <p:cNvPr id="28" name="lme"/>
+          <p:cNvSpPr/>
+          <p:nvPr/>
+        </p:nvSpPr>
+        <p:spPr>
+          <a:xfrm>
+            <a:off x="6785378" y="5175504"/>
+            <a:ext cx="164592" cy="164592"/>
+          </a:xfrm>
+          <a:prstGeom prst="ellipse">
+            <a:avLst/>
+          </a:prstGeom>
+          <a:solidFill>
+            <a:srgbClr val="B4513A"/>
+          </a:solidFill>
+          <a:ln w="12700">
+            <a:solidFill>
+              <a:srgbClr val="B4513A">
+                <a:alpha val="0"/>
+              </a:srgbClr>
+            </a:solidFill>
+            <a:prstDash val="solid"/>
+          </a:ln>
+        </p:spPr>
+      </p:sp>
+      <p:sp>
+        <p:nvSpPr>
+          <p:cNvPr id="29" name="lml"/>
+          <p:cNvSpPr/>
+          <p:nvPr/>
+        </p:nvSpPr>
+        <p:spPr>
+          <a:xfrm>
+            <a:off x="6860359" y="4690872"/>
+            <a:ext cx="14630" cy="484632"/>
+          </a:xfrm>
+          <a:prstGeom prst="rect">
+            <a:avLst/>
+          </a:prstGeom>
+          <a:solidFill>
+            <a:srgbClr val="B4513A"/>
+          </a:solidFill>
+          <a:ln w="12700">
+            <a:solidFill>
+              <a:srgbClr val="B4513A">
+                <a:alpha val="0"/>
+              </a:srgbClr>
+            </a:solidFill>
+            <a:prstDash val="solid"/>
+          </a:ln>
+        </p:spPr>
+      </p:sp>
+      <p:sp>
+        <p:nvSpPr>
+          <p:cNvPr id="30" name="Text 26"/>
+          <p:cNvSpPr txBox="1"/>
+          <p:nvPr/>
+        </p:nvSpPr>
+        <p:spPr>
+          <a:xfrm>
+            <a:off x="5953274" y="4453128"/>
+            <a:ext cx="1828800" cy="237744"/>
+          </a:xfrm>
+          <a:prstGeom prst="rect">
+            <a:avLst/>
+          </a:prstGeom>
+          <a:noFill/>
+          <a:ln/>
+        </p:spPr>
+        <p:txBody>
+          <a:bodyPr wrap="square" lIns="0" tIns="0" rIns="0" bIns="0" rtlCol="0" anchor="ctr"/>
+          <a:lstStyle/>
+          <a:p>
+            <a:pPr algn="ctr" indent="0" marL="0">
+              <a:buNone/>
+            </a:pPr>
+            <a:r>
+              <a:rPr lang="en-US" sz="1100" b="1" dirty="0">
+                <a:solidFill>
+                  <a:srgbClr val="B4513A"/>
+                </a:solidFill>
+                <a:latin typeface="Calibri" pitchFamily="34" charset="0"/>
+                <a:ea typeface="Calibri" pitchFamily="34" charset="-122"/>
+                <a:cs typeface="Calibri" pitchFamily="34" charset="-120"/>
+              </a:rPr>
+              <a:t>This study  192</a:t>
+            </a:r>
+            <a:endParaRPr lang="en-US" sz="1100" dirty="0"/>
+          </a:p>
+        </p:txBody>
+      </p:sp>
+      <p:sp>
+        <p:nvSpPr>
+          <p:cNvPr id="31" name="Text 27"/>
+          <p:cNvSpPr txBox="1"/>
+          <p:nvPr/>
+        </p:nvSpPr>
+        <p:spPr>
+          <a:xfrm>
+            <a:off x="731520" y="5897880"/>
             <a:ext cx="10698480" cy="457200"/>
           </a:xfrm>
           <a:prstGeom prst="rect">
@@ -25282,56 +28290,14 @@
       </p:sp>
       <p:sp>
         <p:nvSpPr>
-          <p:cNvPr id="9" name="Text 5"/>
+          <p:cNvPr id="32" name="Text 28"/>
           <p:cNvSpPr txBox="1"/>
           <p:nvPr/>
         </p:nvSpPr>
         <p:spPr>
           <a:xfrm>
-            <a:off x="731520" y="4983480"/>
-            <a:ext cx="10698480" cy="1097280"/>
-          </a:xfrm>
-          <a:prstGeom prst="rect">
-            <a:avLst/>
-          </a:prstGeom>
-          <a:noFill/>
-          <a:ln/>
-        </p:spPr>
-        <p:txBody>
-          <a:bodyPr wrap="square" lIns="0" tIns="0" rIns="0" bIns="0" rtlCol="0" anchor="t"/>
-          <a:lstStyle/>
-          <a:p>
-            <a:pPr indent="0" marL="0">
-              <a:lnSpc>
-                <a:spcPts val="1800"/>
-              </a:lnSpc>
-              <a:buNone/>
-            </a:pPr>
-            <a:r>
-              <a:rPr lang="en-US" sz="1200" dirty="0">
-                <a:solidFill>
-                  <a:srgbClr val="3C3C3C"/>
-                </a:solidFill>
-                <a:latin typeface="Calibri" pitchFamily="34" charset="0"/>
-                <a:ea typeface="Calibri" pitchFamily="34" charset="-122"/>
-                <a:cs typeface="Calibri" pitchFamily="34" charset="-120"/>
-              </a:rPr>
-              <a:t>An order of magnitude above the fungal and lime-binder family in compression, and within the bio-polymer band in stiffness — between soy bioplastic and flax-fibre PLA, inside the LDPE range — without an oven, an autoclave or an extruder. Wood remains two orders of magnitude above in modulus.</a:t>
-            </a:r>
-            <a:endParaRPr lang="en-US" sz="1200" dirty="0"/>
-          </a:p>
-        </p:txBody>
-      </p:sp>
-      <p:sp>
-        <p:nvSpPr>
-          <p:cNvPr id="10" name="Text 6"/>
-          <p:cNvSpPr txBox="1"/>
-          <p:nvPr/>
-        </p:nvSpPr>
-        <p:spPr>
-          <a:xfrm>
-            <a:off x="731520" y="6217920"/>
-            <a:ext cx="10698480" cy="457200"/>
+            <a:off x="731520" y="6400800"/>
+            <a:ext cx="10241280" cy="457200"/>
           </a:xfrm>
           <a:prstGeom prst="rect">
             <a:avLst/>
@@ -25358,7 +28324,7 @@
                 <a:ea typeface="Calibri" pitchFamily="34" charset="-122"/>
                 <a:cs typeface="Calibri" pitchFamily="34" charset="-120"/>
               </a:rPr>
-              <a:t>Values from the cited studies are reported as published; specimen geometry and test method differ between sources.</a:t>
+              <a:t>Unlabelled points: soy-based bioplastic 124 MPa, flax-fibre PLA 198 MPa.  ·  An order of magnitude above the fungal and lime-binder family in compression; wood remains two orders of magnitude above in modulus. Values are reported as published; specimen geometry and test method differ between sources.</a:t>
             </a:r>
             <a:endParaRPr lang="en-US" sz="900" dirty="0"/>
           </a:p>
@@ -25366,7 +28332,7 @@
       </p:sp>
       <p:sp>
         <p:nvSpPr>
-          <p:cNvPr id="12" name="Text 0"/>
+          <p:cNvPr id="34" name="Text 0"/>
           <p:cNvSpPr/>
           <p:nvPr>
             <p:ph idx="100" hasCustomPrompt="1"/>
@@ -30502,7 +33468,7 @@
                 <a:gridCol w="2834640"/>
                 <a:gridCol w="3566160"/>
               </a:tblGrid>
-              <a:tr h="356616">
+              <a:tr h="310896">
                 <a:tc>
                   <a:txBody>
                     <a:bodyPr/>
@@ -30708,7 +33674,7 @@
                   </a:tcPr>
                 </a:tc>
               </a:tr>
-              <a:tr h="356616">
+              <a:tr h="310896">
                 <a:tc>
                   <a:txBody>
                     <a:bodyPr/>
@@ -30914,7 +33880,7 @@
                   </a:tcPr>
                 </a:tc>
               </a:tr>
-              <a:tr h="356616">
+              <a:tr h="310896">
                 <a:tc>
                   <a:txBody>
                     <a:bodyPr/>
@@ -31120,7 +34086,7 @@
                   </a:tcPr>
                 </a:tc>
               </a:tr>
-              <a:tr h="356616">
+              <a:tr h="310896">
                 <a:tc>
                   <a:txBody>
                     <a:bodyPr/>
@@ -31326,7 +34292,7 @@
                   </a:tcPr>
                 </a:tc>
               </a:tr>
-              <a:tr h="356616">
+              <a:tr h="310896">
                 <a:tc>
                   <a:txBody>
                     <a:bodyPr/>
@@ -31532,7 +34498,7 @@
                   </a:tcPr>
                 </a:tc>
               </a:tr>
-              <a:tr h="356616">
+              <a:tr h="310896">
                 <a:tc>
                   <a:txBody>
                     <a:bodyPr/>
@@ -31738,7 +34704,7 @@
                   </a:tcPr>
                 </a:tc>
               </a:tr>
-              <a:tr h="356616">
+              <a:tr h="310896">
                 <a:tc>
                   <a:txBody>
                     <a:bodyPr/>
@@ -31944,7 +34910,7 @@
                   </a:tcPr>
                 </a:tc>
               </a:tr>
-              <a:tr h="356616">
+              <a:tr h="310896">
                 <a:tc>
                   <a:txBody>
                     <a:bodyPr/>
@@ -32150,7 +35116,7 @@
                   </a:tcPr>
                 </a:tc>
               </a:tr>
-              <a:tr h="356616">
+              <a:tr h="310896">
                 <a:tc>
                   <a:txBody>
                     <a:bodyPr/>
@@ -32356,7 +35322,7 @@
                   </a:tcPr>
                 </a:tc>
               </a:tr>
-              <a:tr h="356616">
+              <a:tr h="310896">
                 <a:tc>
                   <a:txBody>
                     <a:bodyPr/>
@@ -32562,7 +35528,7 @@
                   </a:tcPr>
                 </a:tc>
               </a:tr>
-              <a:tr h="356616">
+              <a:tr h="310896">
                 <a:tc>
                   <a:txBody>
                     <a:bodyPr/>
@@ -32774,13 +35740,13 @@
       </p:graphicFrame>
       <p:sp>
         <p:nvSpPr>
-          <p:cNvPr id="5" name="ru0.86.25"/>
+          <p:cNvPr id="5" name="ru0.85.72"/>
           <p:cNvSpPr/>
           <p:nvPr/>
         </p:nvSpPr>
         <p:spPr>
           <a:xfrm>
-            <a:off x="731520" y="5715000"/>
+            <a:off x="731520" y="5230368"/>
             <a:ext cx="10698480" cy="9144"/>
           </a:xfrm>
           <a:prstGeom prst="rect">
@@ -32807,8 +35773,8 @@
         </p:nvSpPr>
         <p:spPr>
           <a:xfrm>
-            <a:off x="731520" y="5897880"/>
-            <a:ext cx="10241280" cy="457200"/>
+            <a:off x="731520" y="5376672"/>
+            <a:ext cx="10698480" cy="274320"/>
           </a:xfrm>
           <a:prstGeom prst="rect">
             <a:avLst/>
@@ -32817,17 +35783,14 @@
           <a:ln/>
         </p:spPr>
         <p:txBody>
-          <a:bodyPr wrap="square" lIns="0" tIns="0" rIns="0" bIns="0" rtlCol="0" anchor="t"/>
+          <a:bodyPr wrap="square" lIns="0" tIns="0" rIns="0" bIns="0" rtlCol="0" anchor="ctr"/>
           <a:lstStyle/>
           <a:p>
             <a:pPr indent="0" marL="0">
-              <a:lnSpc>
-                <a:spcPts val="1800"/>
-              </a:lnSpc>
               <a:buNone/>
             </a:pPr>
             <a:r>
-              <a:rPr lang="en-US" sz="1200" b="1" dirty="0">
+              <a:rPr lang="en-US" sz="1300" b="1" dirty="0">
                 <a:solidFill>
                   <a:srgbClr val="141414"/>
                 </a:solidFill>
@@ -32835,15 +35798,147 @@
                 <a:ea typeface="Calibri" pitchFamily="34" charset="-122"/>
                 <a:cs typeface="Calibri" pitchFamily="34" charset="-120"/>
               </a:rPr>
-              <a:t>In every case the mineral is recovered from waste and the binding phase remains cementitious, ceramic or petrochemical.</a:t>
-            </a:r>
-            <a:endParaRPr lang="en-US" sz="1200" dirty="0"/>
-          </a:p>
-        </p:txBody>
-      </p:sp>
-      <p:sp>
-        <p:nvSpPr>
-          <p:cNvPr id="8" name="Text 0"/>
+              <a:t>What every row above has in common</a:t>
+            </a:r>
+            <a:endParaRPr lang="en-US" sz="1300" dirty="0"/>
+          </a:p>
+        </p:txBody>
+      </p:sp>
+      <p:sp>
+        <p:nvSpPr>
+          <p:cNvPr id="7" name="ph1"/>
+          <p:cNvSpPr/>
+          <p:nvPr/>
+        </p:nvSpPr>
+        <p:spPr>
+          <a:xfrm>
+            <a:off x="731520" y="5623560"/>
+            <a:ext cx="10698480" cy="347472"/>
+          </a:xfrm>
+          <a:prstGeom prst="rect">
+            <a:avLst/>
+          </a:prstGeom>
+          <a:solidFill>
+            <a:srgbClr val="B4513A"/>
+          </a:solidFill>
+          <a:ln w="12700">
+            <a:solidFill>
+              <a:srgbClr val="B4513A">
+                <a:alpha val="0"/>
+              </a:srgbClr>
+            </a:solidFill>
+            <a:prstDash val="solid"/>
+          </a:ln>
+        </p:spPr>
+      </p:sp>
+      <p:sp>
+        <p:nvSpPr>
+          <p:cNvPr id="8" name="Text 5"/>
+          <p:cNvSpPr txBox="1"/>
+          <p:nvPr/>
+        </p:nvSpPr>
+        <p:spPr>
+          <a:xfrm>
+            <a:off x="914400" y="5623560"/>
+            <a:ext cx="10332720" cy="347472"/>
+          </a:xfrm>
+          <a:prstGeom prst="rect">
+            <a:avLst/>
+          </a:prstGeom>
+          <a:noFill/>
+          <a:ln/>
+        </p:spPr>
+        <p:txBody>
+          <a:bodyPr wrap="square" lIns="0" tIns="0" rIns="0" bIns="0" rtlCol="0" anchor="ctr"/>
+          <a:lstStyle/>
+          <a:p>
+            <a:pPr indent="0" marL="0">
+              <a:buNone/>
+            </a:pPr>
+            <a:r>
+              <a:rPr lang="en-US" sz="1100" b="1" spc="40" kern="0" dirty="0">
+                <a:solidFill>
+                  <a:srgbClr val="FFFFFF"/>
+                </a:solidFill>
+                <a:latin typeface="Calibri" pitchFamily="34" charset="0"/>
+                <a:ea typeface="Calibri" pitchFamily="34" charset="-122"/>
+                <a:cs typeface="Calibri" pitchFamily="34" charset="-120"/>
+              </a:rPr>
+              <a:t>MINERAL PHASE   ·   recovered from waste in every study above</a:t>
+            </a:r>
+            <a:endParaRPr lang="en-US" sz="1100" dirty="0"/>
+          </a:p>
+        </p:txBody>
+      </p:sp>
+      <p:sp>
+        <p:nvSpPr>
+          <p:cNvPr id="9" name="ph2"/>
+          <p:cNvSpPr/>
+          <p:nvPr/>
+        </p:nvSpPr>
+        <p:spPr>
+          <a:xfrm>
+            <a:off x="731520" y="5971032"/>
+            <a:ext cx="10698480" cy="347472"/>
+          </a:xfrm>
+          <a:prstGeom prst="rect">
+            <a:avLst/>
+          </a:prstGeom>
+          <a:solidFill>
+            <a:srgbClr val="141414"/>
+          </a:solidFill>
+          <a:ln w="12700">
+            <a:solidFill>
+              <a:srgbClr val="141414">
+                <a:alpha val="0"/>
+              </a:srgbClr>
+            </a:solidFill>
+            <a:prstDash val="solid"/>
+          </a:ln>
+        </p:spPr>
+      </p:sp>
+      <p:sp>
+        <p:nvSpPr>
+          <p:cNvPr id="10" name="Text 7"/>
+          <p:cNvSpPr txBox="1"/>
+          <p:nvPr/>
+        </p:nvSpPr>
+        <p:spPr>
+          <a:xfrm>
+            <a:off x="914400" y="5971032"/>
+            <a:ext cx="10332720" cy="347472"/>
+          </a:xfrm>
+          <a:prstGeom prst="rect">
+            <a:avLst/>
+          </a:prstGeom>
+          <a:noFill/>
+          <a:ln/>
+        </p:spPr>
+        <p:txBody>
+          <a:bodyPr wrap="square" lIns="0" tIns="0" rIns="0" bIns="0" rtlCol="0" anchor="ctr"/>
+          <a:lstStyle/>
+          <a:p>
+            <a:pPr indent="0" marL="0">
+              <a:buNone/>
+            </a:pPr>
+            <a:r>
+              <a:rPr lang="en-US" sz="1100" b="1" spc="40" kern="0" dirty="0">
+                <a:solidFill>
+                  <a:srgbClr val="FFFFFF"/>
+                </a:solidFill>
+                <a:latin typeface="Calibri" pitchFamily="34" charset="0"/>
+                <a:ea typeface="Calibri" pitchFamily="34" charset="-122"/>
+                <a:cs typeface="Calibri" pitchFamily="34" charset="-120"/>
+              </a:rPr>
+              <a:t>BINDING PHASE   ·   cementitious, ceramic or petrochemical in every study above</a:t>
+            </a:r>
+            <a:endParaRPr lang="en-US" sz="1100" dirty="0"/>
+          </a:p>
+        </p:txBody>
+      </p:sp>
+      <p:sp>
+        <p:nvSpPr>
+          <p:cNvPr id="12" name="Text 0"/>
           <p:cNvSpPr/>
           <p:nvPr>
             <p:ph idx="100" hasCustomPrompt="1"/>
@@ -33184,7 +36279,7 @@
                 <a:ea typeface="Calibri" pitchFamily="34" charset="-122"/>
                 <a:cs typeface="Calibri" pitchFamily="34" charset="-120"/>
               </a:rPr>
-              <a:t>Selection rationale</a:t>
+              <a:t>Thermoreversible setting</a:t>
             </a:r>
             <a:endParaRPr lang="en-US" sz="1300" dirty="0"/>
           </a:p>
@@ -33192,14 +36287,39 @@
       </p:sp>
       <p:sp>
         <p:nvSpPr>
-          <p:cNvPr id="10" name="Text 8"/>
+          <p:cNvPr id="10" name="nd0.95.95"/>
+          <p:cNvSpPr/>
+          <p:nvPr/>
+        </p:nvSpPr>
+        <p:spPr>
+          <a:xfrm>
+            <a:off x="822960" y="5440680"/>
+            <a:ext cx="1554480" cy="411480"/>
+          </a:xfrm>
+          <a:prstGeom prst="rect">
+            <a:avLst/>
+          </a:prstGeom>
+          <a:solidFill>
+            <a:srgbClr val="F7F6F4"/>
+          </a:solidFill>
+          <a:ln w="12700">
+            <a:solidFill>
+              <a:srgbClr val="F7F6F4"/>
+            </a:solidFill>
+            <a:prstDash val="solid"/>
+          </a:ln>
+        </p:spPr>
+      </p:sp>
+      <p:sp>
+        <p:nvSpPr>
+          <p:cNvPr id="11" name="Text 9"/>
           <p:cNvSpPr txBox="1"/>
           <p:nvPr/>
         </p:nvSpPr>
         <p:spPr>
           <a:xfrm>
-            <a:off x="731520" y="5394960"/>
-            <a:ext cx="5029200" cy="1097280"/>
+            <a:off x="932688" y="5440680"/>
+            <a:ext cx="1335024" cy="411480"/>
           </a:xfrm>
           <a:prstGeom prst="rect">
             <a:avLst/>
@@ -33208,17 +36328,258 @@
           <a:ln/>
         </p:spPr>
         <p:txBody>
+          <a:bodyPr wrap="square" lIns="0" tIns="0" rIns="0" bIns="0" rtlCol="0" anchor="ctr"/>
+          <a:lstStyle/>
+          <a:p>
+            <a:pPr algn="ctr" indent="0" marL="0">
+              <a:lnSpc>
+                <a:spcPts val="1400"/>
+              </a:lnSpc>
+              <a:buNone/>
+            </a:pPr>
+            <a:r>
+              <a:rPr lang="en-US" sz="1100" b="1" dirty="0">
+                <a:solidFill>
+                  <a:srgbClr val="141414"/>
+                </a:solidFill>
+                <a:latin typeface="Calibri" pitchFamily="34" charset="0"/>
+                <a:ea typeface="Calibri" pitchFamily="34" charset="-122"/>
+                <a:cs typeface="Calibri" pitchFamily="34" charset="-120"/>
+              </a:rPr>
+              <a:t>Gel — solid</a:t>
+            </a:r>
+            <a:endParaRPr lang="en-US" sz="1100" dirty="0"/>
+          </a:p>
+        </p:txBody>
+      </p:sp>
+      <p:sp>
+        <p:nvSpPr>
+          <p:cNvPr id="12" name="nd45.95"/>
+          <p:cNvSpPr/>
+          <p:nvPr/>
+        </p:nvSpPr>
+        <p:spPr>
+          <a:xfrm>
+            <a:off x="3657600" y="5440680"/>
+            <a:ext cx="1554480" cy="411480"/>
+          </a:xfrm>
+          <a:prstGeom prst="rect">
+            <a:avLst/>
+          </a:prstGeom>
+          <a:solidFill>
+            <a:srgbClr val="F7F6F4"/>
+          </a:solidFill>
+          <a:ln w="12700">
+            <a:solidFill>
+              <a:srgbClr val="F7F6F4"/>
+            </a:solidFill>
+            <a:prstDash val="solid"/>
+          </a:ln>
+        </p:spPr>
+      </p:sp>
+      <p:sp>
+        <p:nvSpPr>
+          <p:cNvPr id="13" name="Text 11"/>
+          <p:cNvSpPr txBox="1"/>
+          <p:nvPr/>
+        </p:nvSpPr>
+        <p:spPr>
+          <a:xfrm>
+            <a:off x="3767328" y="5440680"/>
+            <a:ext cx="1335024" cy="411480"/>
+          </a:xfrm>
+          <a:prstGeom prst="rect">
+            <a:avLst/>
+          </a:prstGeom>
+          <a:noFill/>
+          <a:ln/>
+        </p:spPr>
+        <p:txBody>
+          <a:bodyPr wrap="square" lIns="0" tIns="0" rIns="0" bIns="0" rtlCol="0" anchor="ctr"/>
+          <a:lstStyle/>
+          <a:p>
+            <a:pPr algn="ctr" indent="0" marL="0">
+              <a:lnSpc>
+                <a:spcPts val="1400"/>
+              </a:lnSpc>
+              <a:buNone/>
+            </a:pPr>
+            <a:r>
+              <a:rPr lang="en-US" sz="1100" b="1" dirty="0">
+                <a:solidFill>
+                  <a:srgbClr val="141414"/>
+                </a:solidFill>
+                <a:latin typeface="Calibri" pitchFamily="34" charset="0"/>
+                <a:ea typeface="Calibri" pitchFamily="34" charset="-122"/>
+                <a:cs typeface="Calibri" pitchFamily="34" charset="-120"/>
+              </a:rPr>
+              <a:t>Sol — in solution</a:t>
+            </a:r>
+            <a:endParaRPr lang="en-US" sz="1100" dirty="0"/>
+          </a:p>
+        </p:txBody>
+      </p:sp>
+      <p:sp>
+        <p:nvSpPr>
+          <p:cNvPr id="14" name="cyh"/>
+          <p:cNvSpPr/>
+          <p:nvPr/>
+        </p:nvSpPr>
+        <p:spPr>
+          <a:xfrm>
+            <a:off x="2487168" y="5468112"/>
+            <a:ext cx="1060704" cy="137160"/>
+          </a:xfrm>
+          <a:prstGeom prst="rightArrow">
+            <a:avLst/>
+          </a:prstGeom>
+          <a:solidFill>
+            <a:srgbClr val="B4513A"/>
+          </a:solidFill>
+          <a:ln w="12700">
+            <a:solidFill>
+              <a:srgbClr val="B4513A">
+                <a:alpha val="0"/>
+              </a:srgbClr>
+            </a:solidFill>
+            <a:prstDash val="solid"/>
+          </a:ln>
+        </p:spPr>
+      </p:sp>
+      <p:sp>
+        <p:nvSpPr>
+          <p:cNvPr id="15" name="cyc"/>
+          <p:cNvSpPr/>
+          <p:nvPr/>
+        </p:nvSpPr>
+        <p:spPr>
+          <a:xfrm>
+            <a:off x="2487168" y="5733288"/>
+            <a:ext cx="1060704" cy="137160"/>
+          </a:xfrm>
+          <a:prstGeom prst="leftArrow">
+            <a:avLst/>
+          </a:prstGeom>
+          <a:solidFill>
+            <a:srgbClr val="141414"/>
+          </a:solidFill>
+          <a:ln w="12700">
+            <a:solidFill>
+              <a:srgbClr val="141414">
+                <a:alpha val="0"/>
+              </a:srgbClr>
+            </a:solidFill>
+            <a:prstDash val="solid"/>
+          </a:ln>
+        </p:spPr>
+      </p:sp>
+      <p:sp>
+        <p:nvSpPr>
+          <p:cNvPr id="16" name="Text 14"/>
+          <p:cNvSpPr txBox="1"/>
+          <p:nvPr/>
+        </p:nvSpPr>
+        <p:spPr>
+          <a:xfrm>
+            <a:off x="2377440" y="5230368"/>
+            <a:ext cx="1280160" cy="219456"/>
+          </a:xfrm>
+          <a:prstGeom prst="rect">
+            <a:avLst/>
+          </a:prstGeom>
+          <a:noFill/>
+          <a:ln/>
+        </p:spPr>
+        <p:txBody>
+          <a:bodyPr wrap="square" lIns="0" tIns="0" rIns="0" bIns="0" rtlCol="0" anchor="ctr"/>
+          <a:lstStyle/>
+          <a:p>
+            <a:pPr algn="ctr" indent="0" marL="0">
+              <a:buNone/>
+            </a:pPr>
+            <a:r>
+              <a:rPr lang="en-US" sz="950" dirty="0">
+                <a:solidFill>
+                  <a:srgbClr val="B4513A"/>
+                </a:solidFill>
+                <a:latin typeface="Calibri" pitchFamily="34" charset="0"/>
+                <a:ea typeface="Calibri" pitchFamily="34" charset="-122"/>
+                <a:cs typeface="Calibri" pitchFamily="34" charset="-120"/>
+              </a:rPr>
+              <a:t>heat, 95 °C</a:t>
+            </a:r>
+            <a:endParaRPr lang="en-US" sz="950" dirty="0"/>
+          </a:p>
+        </p:txBody>
+      </p:sp>
+      <p:sp>
+        <p:nvSpPr>
+          <p:cNvPr id="17" name="Text 15"/>
+          <p:cNvSpPr txBox="1"/>
+          <p:nvPr/>
+        </p:nvSpPr>
+        <p:spPr>
+          <a:xfrm>
+            <a:off x="2377440" y="5888736"/>
+            <a:ext cx="1280160" cy="219456"/>
+          </a:xfrm>
+          <a:prstGeom prst="rect">
+            <a:avLst/>
+          </a:prstGeom>
+          <a:noFill/>
+          <a:ln/>
+        </p:spPr>
+        <p:txBody>
+          <a:bodyPr wrap="square" lIns="0" tIns="0" rIns="0" bIns="0" rtlCol="0" anchor="ctr"/>
+          <a:lstStyle/>
+          <a:p>
+            <a:pPr algn="ctr" indent="0" marL="0">
+              <a:buNone/>
+            </a:pPr>
+            <a:r>
+              <a:rPr lang="en-US" sz="950" dirty="0">
+                <a:solidFill>
+                  <a:srgbClr val="8C8C8C"/>
+                </a:solidFill>
+                <a:latin typeface="Calibri" pitchFamily="34" charset="0"/>
+                <a:ea typeface="Calibri" pitchFamily="34" charset="-122"/>
+                <a:cs typeface="Calibri" pitchFamily="34" charset="-120"/>
+              </a:rPr>
+              <a:t>cool, ambient</a:t>
+            </a:r>
+            <a:endParaRPr lang="en-US" sz="950" dirty="0"/>
+          </a:p>
+        </p:txBody>
+      </p:sp>
+      <p:sp>
+        <p:nvSpPr>
+          <p:cNvPr id="18" name="Text 16"/>
+          <p:cNvSpPr txBox="1"/>
+          <p:nvPr/>
+        </p:nvSpPr>
+        <p:spPr>
+          <a:xfrm>
+            <a:off x="731520" y="6217920"/>
+            <a:ext cx="5029200" cy="457200"/>
+          </a:xfrm>
+          <a:prstGeom prst="rect">
+            <a:avLst/>
+          </a:prstGeom>
+          <a:noFill/>
+          <a:ln/>
+        </p:spPr>
+        <p:txBody>
           <a:bodyPr wrap="square" lIns="0" tIns="0" rIns="0" bIns="0" rtlCol="0" anchor="t"/>
           <a:lstStyle/>
           <a:p>
             <a:pPr indent="0" marL="0">
               <a:lnSpc>
-                <a:spcPts val="1800"/>
+                <a:spcPts val="1750"/>
               </a:lnSpc>
               <a:buNone/>
             </a:pPr>
             <a:r>
-              <a:rPr lang="en-US" sz="1200" dirty="0">
+              <a:rPr lang="en-US" sz="1150" dirty="0">
                 <a:solidFill>
                   <a:srgbClr val="3C3C3C"/>
                 </a:solidFill>
@@ -33226,15 +36587,15 @@
                 <a:ea typeface="Calibri" pitchFamily="34" charset="-122"/>
                 <a:cs typeface="Calibri" pitchFamily="34" charset="-120"/>
               </a:rPr>
-              <a:t>Thermoreversible setting requires no reactive hardener and no elevated-temperature cure, so a hotplate and a mould suffice. At 66% mineral loading no coupling agent was required.</a:t>
-            </a:r>
-            <a:endParaRPr lang="en-US" sz="1200" dirty="0"/>
-          </a:p>
-        </p:txBody>
-      </p:sp>
-      <p:sp>
-        <p:nvSpPr>
-          <p:cNvPr id="11" name="vr6.71.45"/>
+              <a:t>The transition is physical, not chemical: no reactive hardener, no cure temperature, and at 66% mineral loading no coupling agent.</a:t>
+            </a:r>
+            <a:endParaRPr lang="en-US" sz="1150" dirty="0"/>
+          </a:p>
+        </p:txBody>
+      </p:sp>
+      <p:sp>
+        <p:nvSpPr>
+          <p:cNvPr id="19" name="vr6.71.45"/>
           <p:cNvSpPr/>
           <p:nvPr/>
         </p:nvSpPr>
@@ -33261,7 +36622,7 @@
       </p:sp>
       <p:sp>
         <p:nvSpPr>
-          <p:cNvPr id="12" name="Text 10"/>
+          <p:cNvPr id="20" name="Text 18"/>
           <p:cNvSpPr txBox="1"/>
           <p:nvPr/>
         </p:nvSpPr>
@@ -34361,7 +37722,7 @@
       </p:graphicFrame>
       <p:sp>
         <p:nvSpPr>
-          <p:cNvPr id="14" name="Text 11"/>
+          <p:cNvPr id="22" name="Text 19"/>
           <p:cNvSpPr txBox="1"/>
           <p:nvPr/>
         </p:nvSpPr>
@@ -34403,7 +37764,7 @@
       </p:sp>
       <p:sp>
         <p:nvSpPr>
-          <p:cNvPr id="15" name="Text 12"/>
+          <p:cNvPr id="23" name="Text 20"/>
           <p:cNvSpPr txBox="1"/>
           <p:nvPr/>
         </p:nvSpPr>
@@ -34445,7 +37806,7 @@
       </p:sp>
       <p:sp>
         <p:nvSpPr>
-          <p:cNvPr id="17" name="Text 0"/>
+          <p:cNvPr id="25" name="Text 0"/>
           <p:cNvSpPr/>
           <p:nvPr>
             <p:ph idx="100" hasCustomPrompt="1"/>
@@ -36029,7 +39390,7 @@
                 <a:gridCol w="1737360"/>
                 <a:gridCol w="4663440"/>
               </a:tblGrid>
-              <a:tr h="512064">
+              <a:tr h="457200">
                 <a:tc>
                   <a:txBody>
                     <a:bodyPr/>
@@ -36167,7 +39528,7 @@
                   </a:tcPr>
                 </a:tc>
               </a:tr>
-              <a:tr h="512064">
+              <a:tr h="457200">
                 <a:tc>
                   <a:txBody>
                     <a:bodyPr/>
@@ -36305,7 +39666,7 @@
                   </a:tcPr>
                 </a:tc>
               </a:tr>
-              <a:tr h="512064">
+              <a:tr h="457200">
                 <a:tc>
                   <a:txBody>
                     <a:bodyPr/>
@@ -36443,7 +39804,7 @@
                   </a:tcPr>
                 </a:tc>
               </a:tr>
-              <a:tr h="512064">
+              <a:tr h="457200">
                 <a:tc>
                   <a:txBody>
                     <a:bodyPr/>
@@ -36581,7 +39942,7 @@
                   </a:tcPr>
                 </a:tc>
               </a:tr>
-              <a:tr h="512064">
+              <a:tr h="457200">
                 <a:tc>
                   <a:txBody>
                     <a:bodyPr/>
@@ -36719,7 +40080,7 @@
                   </a:tcPr>
                 </a:tc>
               </a:tr>
-              <a:tr h="512064">
+              <a:tr h="457200">
                 <a:tc>
                   <a:txBody>
                     <a:bodyPr/>
@@ -36857,7 +40218,7 @@
                   </a:tcPr>
                 </a:tc>
               </a:tr>
-              <a:tr h="512064">
+              <a:tr h="457200">
                 <a:tc>
                   <a:txBody>
                     <a:bodyPr/>
@@ -37008,7 +40369,7 @@
         <p:spPr>
           <a:xfrm>
             <a:off x="7680960" y="1325880"/>
-            <a:ext cx="13716" cy="4846320"/>
+            <a:ext cx="13716" cy="3566160"/>
           </a:xfrm>
           <a:prstGeom prst="rect">
             <a:avLst/>
@@ -37074,7 +40435,7 @@
         <p:spPr>
           <a:xfrm>
             <a:off x="8138160" y="1691640"/>
-            <a:ext cx="3291840" cy="2011680"/>
+            <a:ext cx="3291840" cy="1645920"/>
           </a:xfrm>
           <a:prstGeom prst="rect">
             <a:avLst/>
@@ -37083,116 +40444,82 @@
           <a:ln/>
         </p:spPr>
         <p:txBody>
-          <a:bodyPr wrap="square" lIns="0" tIns="0" rIns="0" bIns="0" rtlCol="0" anchor="ctr"/>
-          <a:lstStyle/>
-          <a:p>
-            <a:pPr marL="342900" indent="-342900">
+          <a:bodyPr wrap="square" lIns="0" tIns="0" rIns="0" bIns="0" rtlCol="0" anchor="t"/>
+          <a:lstStyle/>
+          <a:p>
+            <a:pPr indent="0" marL="0">
               <a:lnSpc>
-                <a:spcPts val="1700"/>
+                <a:spcPts val="1800"/>
               </a:lnSpc>
-              <a:spcAft>
-                <a:spcPts val="600"/>
-              </a:spcAft>
-              <a:buSzPct val="100000"/>
-              <a:buChar char="–"/>
-            </a:pPr>
-            <a:r>
-              <a:rPr lang="en-US" sz="1200" dirty="0">
+              <a:buNone/>
+            </a:pPr>
+            <a:r>
+              <a:rPr lang="en-US" sz="1200" b="1" i="1" dirty="0">
                 <a:solidFill>
-                  <a:srgbClr val="3C3C3C"/>
+                  <a:srgbClr val="141414"/>
                 </a:solidFill>
                 <a:latin typeface="Calibri" pitchFamily="34" charset="0"/>
                 <a:ea typeface="Calibri" pitchFamily="34" charset="-122"/>
                 <a:cs typeface="Calibri" pitchFamily="34" charset="-120"/>
               </a:rPr>
-              <a:t>Structural or loadbearing use</a:t>
+              <a:t>No durability, classification or life-cycle data were generated. The results reported here are characterisation data, not a performance specification.</a:t>
             </a:r>
             <a:endParaRPr lang="en-US" sz="1200" dirty="0"/>
           </a:p>
-          <a:p>
-            <a:pPr marL="342900" indent="-342900">
+        </p:txBody>
+      </p:sp>
+      <p:sp>
+        <p:nvSpPr>
+          <p:cNvPr id="8" name="Text 5"/>
+          <p:cNvSpPr txBox="1"/>
+          <p:nvPr/>
+        </p:nvSpPr>
+        <p:spPr>
+          <a:xfrm>
+            <a:off x="8138160" y="3566160"/>
+            <a:ext cx="3291840" cy="457200"/>
+          </a:xfrm>
+          <a:prstGeom prst="rect">
+            <a:avLst/>
+          </a:prstGeom>
+          <a:noFill/>
+          <a:ln/>
+        </p:spPr>
+        <p:txBody>
+          <a:bodyPr wrap="square" lIns="0" tIns="0" rIns="0" bIns="0" rtlCol="0" anchor="t"/>
+          <a:lstStyle/>
+          <a:p>
+            <a:pPr indent="0" marL="0">
               <a:lnSpc>
-                <a:spcPts val="1700"/>
+                <a:spcPts val="1250"/>
               </a:lnSpc>
-              <a:spcAft>
-                <a:spcPts val="600"/>
-              </a:spcAft>
-              <a:buSzPct val="100000"/>
-              <a:buChar char="–"/>
-            </a:pPr>
-            <a:r>
-              <a:rPr lang="en-US" sz="1200" dirty="0">
+              <a:buNone/>
+            </a:pPr>
+            <a:r>
+              <a:rPr lang="en-US" sz="900" dirty="0">
                 <a:solidFill>
-                  <a:srgbClr val="3C3C3C"/>
+                  <a:srgbClr val="BDBDBD"/>
                 </a:solidFill>
                 <a:latin typeface="Calibri" pitchFamily="34" charset="0"/>
                 <a:ea typeface="Calibri" pitchFamily="34" charset="-122"/>
                 <a:cs typeface="Calibri" pitchFamily="34" charset="-120"/>
               </a:rPr>
-              <a:t>Durability and accelerated ageing</a:t>
-            </a:r>
-            <a:endParaRPr lang="en-US" sz="1200" dirty="0"/>
-          </a:p>
-          <a:p>
-            <a:pPr marL="342900" indent="-342900">
-              <a:lnSpc>
-                <a:spcPts val="1700"/>
-              </a:lnSpc>
-              <a:spcAft>
-                <a:spcPts val="600"/>
-              </a:spcAft>
-              <a:buSzPct val="100000"/>
-              <a:buChar char="–"/>
-            </a:pPr>
-            <a:r>
-              <a:rPr lang="en-US" sz="1200" dirty="0">
-                <a:solidFill>
-                  <a:srgbClr val="3C3C3C"/>
-                </a:solidFill>
-                <a:latin typeface="Calibri" pitchFamily="34" charset="0"/>
-                <a:ea typeface="Calibri" pitchFamily="34" charset="-122"/>
-                <a:cs typeface="Calibri" pitchFamily="34" charset="-120"/>
-              </a:rPr>
-              <a:t>Reaction-to-fire classification</a:t>
-            </a:r>
-            <a:endParaRPr lang="en-US" sz="1200" dirty="0"/>
-          </a:p>
-          <a:p>
-            <a:pPr marL="342900" indent="-342900">
-              <a:lnSpc>
-                <a:spcPts val="1700"/>
-              </a:lnSpc>
-              <a:spcAft>
-                <a:spcPts val="600"/>
-              </a:spcAft>
-              <a:buSzPct val="100000"/>
-              <a:buChar char="–"/>
-            </a:pPr>
-            <a:r>
-              <a:rPr lang="en-US" sz="1200" dirty="0">
-                <a:solidFill>
-                  <a:srgbClr val="3C3C3C"/>
-                </a:solidFill>
-                <a:latin typeface="Calibri" pitchFamily="34" charset="0"/>
-                <a:ea typeface="Calibri" pitchFamily="34" charset="-122"/>
-                <a:cs typeface="Calibri" pitchFamily="34" charset="-120"/>
-              </a:rPr>
-              <a:t>Life-cycle assessment</a:t>
-            </a:r>
-            <a:endParaRPr lang="en-US" sz="1200" dirty="0"/>
-          </a:p>
-        </p:txBody>
-      </p:sp>
-      <p:sp>
-        <p:nvSpPr>
-          <p:cNvPr id="8" name="ru8.94.2"/>
+              <a:t>Each exclusion is revisited as a defined next experiment in the closing section.</a:t>
+            </a:r>
+            <a:endParaRPr lang="en-US" sz="900" dirty="0"/>
+          </a:p>
+        </p:txBody>
+      </p:sp>
+      <p:sp>
+        <p:nvSpPr>
+          <p:cNvPr id="9" name="ru0.85.6"/>
           <p:cNvSpPr/>
           <p:nvPr/>
         </p:nvSpPr>
         <p:spPr>
           <a:xfrm>
-            <a:off x="8138160" y="3840480"/>
-            <a:ext cx="3291840" cy="9144"/>
+            <a:off x="731520" y="5120640"/>
+            <a:ext cx="10698480" cy="9144"/>
           </a:xfrm>
           <a:prstGeom prst="rect">
             <a:avLst/>
@@ -37212,14 +40539,14 @@
       </p:sp>
       <p:sp>
         <p:nvSpPr>
-          <p:cNvPr id="9" name="Text 6"/>
+          <p:cNvPr id="10" name="Text 7"/>
           <p:cNvSpPr txBox="1"/>
           <p:nvPr/>
         </p:nvSpPr>
         <p:spPr>
           <a:xfrm>
-            <a:off x="8138160" y="4023360"/>
-            <a:ext cx="3291840" cy="1280160"/>
+            <a:off x="731520" y="5285232"/>
+            <a:ext cx="10698480" cy="274320"/>
           </a:xfrm>
           <a:prstGeom prst="rect">
             <a:avLst/>
@@ -37228,17 +40555,14 @@
           <a:ln/>
         </p:spPr>
         <p:txBody>
-          <a:bodyPr wrap="square" lIns="0" tIns="0" rIns="0" bIns="0" rtlCol="0" anchor="t"/>
+          <a:bodyPr wrap="square" lIns="0" tIns="0" rIns="0" bIns="0" rtlCol="0" anchor="ctr"/>
           <a:lstStyle/>
           <a:p>
             <a:pPr indent="0" marL="0">
-              <a:lnSpc>
-                <a:spcPts val="1800"/>
-              </a:lnSpc>
               <a:buNone/>
             </a:pPr>
             <a:r>
-              <a:rPr lang="en-US" sz="1200" b="1" i="1" dirty="0">
+              <a:rPr lang="en-US" sz="1300" b="1" dirty="0">
                 <a:solidFill>
                   <a:srgbClr val="141414"/>
                 </a:solidFill>
@@ -37246,34 +40570,32 @@
                 <a:ea typeface="Calibri" pitchFamily="34" charset="-122"/>
                 <a:cs typeface="Calibri" pitchFamily="34" charset="-120"/>
               </a:rPr>
-              <a:t>No durability, classification or life-cycle data were generated. The results reported here are characterisation data, not a performance specification.</a:t>
-            </a:r>
-            <a:endParaRPr lang="en-US" sz="1200" dirty="0"/>
-          </a:p>
-        </p:txBody>
-      </p:sp>
-      <p:sp>
-        <p:nvSpPr>
-          <p:cNvPr id="10" name="ru0.86.15"/>
+              <a:t>Property coverage</a:t>
+            </a:r>
+            <a:endParaRPr lang="en-US" sz="1300" dirty="0"/>
+          </a:p>
+        </p:txBody>
+      </p:sp>
+      <p:sp>
+        <p:nvSpPr>
+          <p:cNvPr id="11" name="ch0"/>
           <p:cNvSpPr/>
           <p:nvPr/>
         </p:nvSpPr>
         <p:spPr>
           <a:xfrm>
-            <a:off x="731520" y="5623560"/>
-            <a:ext cx="6400800" cy="9144"/>
+            <a:off x="731520" y="5669280"/>
+            <a:ext cx="1097280" cy="475488"/>
           </a:xfrm>
           <a:prstGeom prst="rect">
             <a:avLst/>
           </a:prstGeom>
           <a:solidFill>
-            <a:srgbClr val="E4E4E4"/>
+            <a:srgbClr val="141414"/>
           </a:solidFill>
           <a:ln w="12700">
             <a:solidFill>
-              <a:srgbClr val="E4E4E4">
-                <a:alpha val="0"/>
-              </a:srgbClr>
+              <a:srgbClr val="141414"/>
             </a:solidFill>
             <a:prstDash val="solid"/>
           </a:ln>
@@ -37281,14 +40603,592 @@
       </p:sp>
       <p:sp>
         <p:nvSpPr>
-          <p:cNvPr id="11" name="Text 8"/>
+          <p:cNvPr id="12" name="Text 9"/>
           <p:cNvSpPr txBox="1"/>
           <p:nvPr/>
         </p:nvSpPr>
         <p:spPr>
           <a:xfrm>
-            <a:off x="731520" y="5806440"/>
-            <a:ext cx="6400800" cy="457200"/>
+            <a:off x="786384" y="5669280"/>
+            <a:ext cx="987552" cy="475488"/>
+          </a:xfrm>
+          <a:prstGeom prst="rect">
+            <a:avLst/>
+          </a:prstGeom>
+          <a:noFill/>
+          <a:ln/>
+        </p:spPr>
+        <p:txBody>
+          <a:bodyPr wrap="square" lIns="0" tIns="0" rIns="0" bIns="0" rtlCol="0" anchor="ctr"/>
+          <a:lstStyle/>
+          <a:p>
+            <a:pPr algn="ctr" indent="0" marL="0">
+              <a:lnSpc>
+                <a:spcPts val="1150"/>
+              </a:lnSpc>
+              <a:buNone/>
+            </a:pPr>
+            <a:r>
+              <a:rPr lang="en-US" sz="950" b="1" dirty="0">
+                <a:solidFill>
+                  <a:srgbClr val="FFFFFF"/>
+                </a:solidFill>
+                <a:latin typeface="Calibri" pitchFamily="34" charset="0"/>
+                <a:ea typeface="Calibri" pitchFamily="34" charset="-122"/>
+                <a:cs typeface="Calibri" pitchFamily="34" charset="-120"/>
+              </a:rPr>
+              <a:t>Compression</a:t>
+            </a:r>
+            <a:endParaRPr lang="en-US" sz="950" dirty="0"/>
+          </a:p>
+        </p:txBody>
+      </p:sp>
+      <p:sp>
+        <p:nvSpPr>
+          <p:cNvPr id="13" name="ch1"/>
+          <p:cNvSpPr/>
+          <p:nvPr/>
+        </p:nvSpPr>
+        <p:spPr>
+          <a:xfrm>
+            <a:off x="1929384" y="5669280"/>
+            <a:ext cx="1097280" cy="475488"/>
+          </a:xfrm>
+          <a:prstGeom prst="rect">
+            <a:avLst/>
+          </a:prstGeom>
+          <a:solidFill>
+            <a:srgbClr val="141414"/>
+          </a:solidFill>
+          <a:ln w="12700">
+            <a:solidFill>
+              <a:srgbClr val="141414"/>
+            </a:solidFill>
+            <a:prstDash val="solid"/>
+          </a:ln>
+        </p:spPr>
+      </p:sp>
+      <p:sp>
+        <p:nvSpPr>
+          <p:cNvPr id="14" name="Text 11"/>
+          <p:cNvSpPr txBox="1"/>
+          <p:nvPr/>
+        </p:nvSpPr>
+        <p:spPr>
+          <a:xfrm>
+            <a:off x="1984248" y="5669280"/>
+            <a:ext cx="987552" cy="475488"/>
+          </a:xfrm>
+          <a:prstGeom prst="rect">
+            <a:avLst/>
+          </a:prstGeom>
+          <a:noFill/>
+          <a:ln/>
+        </p:spPr>
+        <p:txBody>
+          <a:bodyPr wrap="square" lIns="0" tIns="0" rIns="0" bIns="0" rtlCol="0" anchor="ctr"/>
+          <a:lstStyle/>
+          <a:p>
+            <a:pPr algn="ctr" indent="0" marL="0">
+              <a:lnSpc>
+                <a:spcPts val="1150"/>
+              </a:lnSpc>
+              <a:buNone/>
+            </a:pPr>
+            <a:r>
+              <a:rPr lang="en-US" sz="950" b="1" dirty="0">
+                <a:solidFill>
+                  <a:srgbClr val="FFFFFF"/>
+                </a:solidFill>
+                <a:latin typeface="Calibri" pitchFamily="34" charset="0"/>
+                <a:ea typeface="Calibri" pitchFamily="34" charset="-122"/>
+                <a:cs typeface="Calibri" pitchFamily="34" charset="-120"/>
+              </a:rPr>
+              <a:t>Flexure</a:t>
+            </a:r>
+            <a:endParaRPr lang="en-US" sz="950" dirty="0"/>
+          </a:p>
+        </p:txBody>
+      </p:sp>
+      <p:sp>
+        <p:nvSpPr>
+          <p:cNvPr id="15" name="ch2"/>
+          <p:cNvSpPr/>
+          <p:nvPr/>
+        </p:nvSpPr>
+        <p:spPr>
+          <a:xfrm>
+            <a:off x="3127248" y="5669280"/>
+            <a:ext cx="1097280" cy="475488"/>
+          </a:xfrm>
+          <a:prstGeom prst="rect">
+            <a:avLst/>
+          </a:prstGeom>
+          <a:solidFill>
+            <a:srgbClr val="141414"/>
+          </a:solidFill>
+          <a:ln w="12700">
+            <a:solidFill>
+              <a:srgbClr val="141414"/>
+            </a:solidFill>
+            <a:prstDash val="solid"/>
+          </a:ln>
+        </p:spPr>
+      </p:sp>
+      <p:sp>
+        <p:nvSpPr>
+          <p:cNvPr id="16" name="Text 13"/>
+          <p:cNvSpPr txBox="1"/>
+          <p:nvPr/>
+        </p:nvSpPr>
+        <p:spPr>
+          <a:xfrm>
+            <a:off x="3182112" y="5669280"/>
+            <a:ext cx="987552" cy="475488"/>
+          </a:xfrm>
+          <a:prstGeom prst="rect">
+            <a:avLst/>
+          </a:prstGeom>
+          <a:noFill/>
+          <a:ln/>
+        </p:spPr>
+        <p:txBody>
+          <a:bodyPr wrap="square" lIns="0" tIns="0" rIns="0" bIns="0" rtlCol="0" anchor="ctr"/>
+          <a:lstStyle/>
+          <a:p>
+            <a:pPr algn="ctr" indent="0" marL="0">
+              <a:lnSpc>
+                <a:spcPts val="1150"/>
+              </a:lnSpc>
+              <a:buNone/>
+            </a:pPr>
+            <a:r>
+              <a:rPr lang="en-US" sz="950" b="1" dirty="0">
+                <a:solidFill>
+                  <a:srgbClr val="FFFFFF"/>
+                </a:solidFill>
+                <a:latin typeface="Calibri" pitchFamily="34" charset="0"/>
+                <a:ea typeface="Calibri" pitchFamily="34" charset="-122"/>
+                <a:cs typeface="Calibri" pitchFamily="34" charset="-120"/>
+              </a:rPr>
+              <a:t>Ignitability</a:t>
+            </a:r>
+            <a:endParaRPr lang="en-US" sz="950" dirty="0"/>
+          </a:p>
+        </p:txBody>
+      </p:sp>
+      <p:sp>
+        <p:nvSpPr>
+          <p:cNvPr id="17" name="ch3"/>
+          <p:cNvSpPr/>
+          <p:nvPr/>
+        </p:nvSpPr>
+        <p:spPr>
+          <a:xfrm>
+            <a:off x="4325112" y="5669280"/>
+            <a:ext cx="1097280" cy="475488"/>
+          </a:xfrm>
+          <a:prstGeom prst="rect">
+            <a:avLst/>
+          </a:prstGeom>
+          <a:solidFill>
+            <a:srgbClr val="141414"/>
+          </a:solidFill>
+          <a:ln w="12700">
+            <a:solidFill>
+              <a:srgbClr val="141414"/>
+            </a:solidFill>
+            <a:prstDash val="solid"/>
+          </a:ln>
+        </p:spPr>
+      </p:sp>
+      <p:sp>
+        <p:nvSpPr>
+          <p:cNvPr id="18" name="Text 15"/>
+          <p:cNvSpPr txBox="1"/>
+          <p:nvPr/>
+        </p:nvSpPr>
+        <p:spPr>
+          <a:xfrm>
+            <a:off x="4379976" y="5669280"/>
+            <a:ext cx="987552" cy="475488"/>
+          </a:xfrm>
+          <a:prstGeom prst="rect">
+            <a:avLst/>
+          </a:prstGeom>
+          <a:noFill/>
+          <a:ln/>
+        </p:spPr>
+        <p:txBody>
+          <a:bodyPr wrap="square" lIns="0" tIns="0" rIns="0" bIns="0" rtlCol="0" anchor="ctr"/>
+          <a:lstStyle/>
+          <a:p>
+            <a:pPr algn="ctr" indent="0" marL="0">
+              <a:lnSpc>
+                <a:spcPts val="1150"/>
+              </a:lnSpc>
+              <a:buNone/>
+            </a:pPr>
+            <a:r>
+              <a:rPr lang="en-US" sz="950" b="1" dirty="0">
+                <a:solidFill>
+                  <a:srgbClr val="FFFFFF"/>
+                </a:solidFill>
+                <a:latin typeface="Calibri" pitchFamily="34" charset="0"/>
+                <a:ea typeface="Calibri" pitchFamily="34" charset="-122"/>
+                <a:cs typeface="Calibri" pitchFamily="34" charset="-120"/>
+              </a:rPr>
+              <a:t>Water absorption</a:t>
+            </a:r>
+            <a:endParaRPr lang="en-US" sz="950" dirty="0"/>
+          </a:p>
+        </p:txBody>
+      </p:sp>
+      <p:sp>
+        <p:nvSpPr>
+          <p:cNvPr id="19" name="ch4"/>
+          <p:cNvSpPr/>
+          <p:nvPr/>
+        </p:nvSpPr>
+        <p:spPr>
+          <a:xfrm>
+            <a:off x="5522976" y="5669280"/>
+            <a:ext cx="1097280" cy="475488"/>
+          </a:xfrm>
+          <a:prstGeom prst="rect">
+            <a:avLst/>
+          </a:prstGeom>
+          <a:solidFill>
+            <a:srgbClr val="141414"/>
+          </a:solidFill>
+          <a:ln w="12700">
+            <a:solidFill>
+              <a:srgbClr val="141414"/>
+            </a:solidFill>
+            <a:prstDash val="solid"/>
+          </a:ln>
+        </p:spPr>
+      </p:sp>
+      <p:sp>
+        <p:nvSpPr>
+          <p:cNvPr id="20" name="Text 17"/>
+          <p:cNvSpPr txBox="1"/>
+          <p:nvPr/>
+        </p:nvSpPr>
+        <p:spPr>
+          <a:xfrm>
+            <a:off x="5577840" y="5669280"/>
+            <a:ext cx="987552" cy="475488"/>
+          </a:xfrm>
+          <a:prstGeom prst="rect">
+            <a:avLst/>
+          </a:prstGeom>
+          <a:noFill/>
+          <a:ln/>
+        </p:spPr>
+        <p:txBody>
+          <a:bodyPr wrap="square" lIns="0" tIns="0" rIns="0" bIns="0" rtlCol="0" anchor="ctr"/>
+          <a:lstStyle/>
+          <a:p>
+            <a:pPr algn="ctr" indent="0" marL="0">
+              <a:lnSpc>
+                <a:spcPts val="1150"/>
+              </a:lnSpc>
+              <a:buNone/>
+            </a:pPr>
+            <a:r>
+              <a:rPr lang="en-US" sz="950" b="1" dirty="0">
+                <a:solidFill>
+                  <a:srgbClr val="FFFFFF"/>
+                </a:solidFill>
+                <a:latin typeface="Calibri" pitchFamily="34" charset="0"/>
+                <a:ea typeface="Calibri" pitchFamily="34" charset="-122"/>
+                <a:cs typeface="Calibri" pitchFamily="34" charset="-120"/>
+              </a:rPr>
+              <a:t>Bulk density</a:t>
+            </a:r>
+            <a:endParaRPr lang="en-US" sz="950" dirty="0"/>
+          </a:p>
+        </p:txBody>
+      </p:sp>
+      <p:sp>
+        <p:nvSpPr>
+          <p:cNvPr id="21" name="ch5"/>
+          <p:cNvSpPr/>
+          <p:nvPr/>
+        </p:nvSpPr>
+        <p:spPr>
+          <a:xfrm>
+            <a:off x="6720840" y="5669280"/>
+            <a:ext cx="1097280" cy="475488"/>
+          </a:xfrm>
+          <a:prstGeom prst="rect">
+            <a:avLst/>
+          </a:prstGeom>
+          <a:solidFill>
+            <a:srgbClr val="FFFFFF"/>
+          </a:solidFill>
+          <a:ln w="12700">
+            <a:solidFill>
+              <a:srgbClr val="BDBDBD"/>
+            </a:solidFill>
+            <a:prstDash val="solid"/>
+          </a:ln>
+        </p:spPr>
+      </p:sp>
+      <p:sp>
+        <p:nvSpPr>
+          <p:cNvPr id="22" name="Text 19"/>
+          <p:cNvSpPr txBox="1"/>
+          <p:nvPr/>
+        </p:nvSpPr>
+        <p:spPr>
+          <a:xfrm>
+            <a:off x="6775704" y="5669280"/>
+            <a:ext cx="987552" cy="475488"/>
+          </a:xfrm>
+          <a:prstGeom prst="rect">
+            <a:avLst/>
+          </a:prstGeom>
+          <a:noFill/>
+          <a:ln/>
+        </p:spPr>
+        <p:txBody>
+          <a:bodyPr wrap="square" lIns="0" tIns="0" rIns="0" bIns="0" rtlCol="0" anchor="ctr"/>
+          <a:lstStyle/>
+          <a:p>
+            <a:pPr algn="ctr" indent="0" marL="0">
+              <a:lnSpc>
+                <a:spcPts val="1150"/>
+              </a:lnSpc>
+              <a:buNone/>
+            </a:pPr>
+            <a:r>
+              <a:rPr lang="en-US" sz="950" b="1" dirty="0">
+                <a:solidFill>
+                  <a:srgbClr val="BDBDBD"/>
+                </a:solidFill>
+                <a:latin typeface="Calibri" pitchFamily="34" charset="0"/>
+                <a:ea typeface="Calibri" pitchFamily="34" charset="-122"/>
+                <a:cs typeface="Calibri" pitchFamily="34" charset="-120"/>
+              </a:rPr>
+              <a:t>Durability</a:t>
+            </a:r>
+            <a:endParaRPr lang="en-US" sz="950" dirty="0"/>
+          </a:p>
+        </p:txBody>
+      </p:sp>
+      <p:sp>
+        <p:nvSpPr>
+          <p:cNvPr id="23" name="ch6"/>
+          <p:cNvSpPr/>
+          <p:nvPr/>
+        </p:nvSpPr>
+        <p:spPr>
+          <a:xfrm>
+            <a:off x="7918704" y="5669280"/>
+            <a:ext cx="1097280" cy="475488"/>
+          </a:xfrm>
+          <a:prstGeom prst="rect">
+            <a:avLst/>
+          </a:prstGeom>
+          <a:solidFill>
+            <a:srgbClr val="FFFFFF"/>
+          </a:solidFill>
+          <a:ln w="12700">
+            <a:solidFill>
+              <a:srgbClr val="BDBDBD"/>
+            </a:solidFill>
+            <a:prstDash val="solid"/>
+          </a:ln>
+        </p:spPr>
+      </p:sp>
+      <p:sp>
+        <p:nvSpPr>
+          <p:cNvPr id="24" name="Text 21"/>
+          <p:cNvSpPr txBox="1"/>
+          <p:nvPr/>
+        </p:nvSpPr>
+        <p:spPr>
+          <a:xfrm>
+            <a:off x="7973568" y="5669280"/>
+            <a:ext cx="987552" cy="475488"/>
+          </a:xfrm>
+          <a:prstGeom prst="rect">
+            <a:avLst/>
+          </a:prstGeom>
+          <a:noFill/>
+          <a:ln/>
+        </p:spPr>
+        <p:txBody>
+          <a:bodyPr wrap="square" lIns="0" tIns="0" rIns="0" bIns="0" rtlCol="0" anchor="ctr"/>
+          <a:lstStyle/>
+          <a:p>
+            <a:pPr algn="ctr" indent="0" marL="0">
+              <a:lnSpc>
+                <a:spcPts val="1150"/>
+              </a:lnSpc>
+              <a:buNone/>
+            </a:pPr>
+            <a:r>
+              <a:rPr lang="en-US" sz="950" b="1" dirty="0">
+                <a:solidFill>
+                  <a:srgbClr val="BDBDBD"/>
+                </a:solidFill>
+                <a:latin typeface="Calibri" pitchFamily="34" charset="0"/>
+                <a:ea typeface="Calibri" pitchFamily="34" charset="-122"/>
+                <a:cs typeface="Calibri" pitchFamily="34" charset="-120"/>
+              </a:rPr>
+              <a:t>Fire classification</a:t>
+            </a:r>
+            <a:endParaRPr lang="en-US" sz="950" dirty="0"/>
+          </a:p>
+        </p:txBody>
+      </p:sp>
+      <p:sp>
+        <p:nvSpPr>
+          <p:cNvPr id="25" name="ch7"/>
+          <p:cNvSpPr/>
+          <p:nvPr/>
+        </p:nvSpPr>
+        <p:spPr>
+          <a:xfrm>
+            <a:off x="9116568" y="5669280"/>
+            <a:ext cx="1097280" cy="475488"/>
+          </a:xfrm>
+          <a:prstGeom prst="rect">
+            <a:avLst/>
+          </a:prstGeom>
+          <a:solidFill>
+            <a:srgbClr val="FFFFFF"/>
+          </a:solidFill>
+          <a:ln w="12700">
+            <a:solidFill>
+              <a:srgbClr val="BDBDBD"/>
+            </a:solidFill>
+            <a:prstDash val="solid"/>
+          </a:ln>
+        </p:spPr>
+      </p:sp>
+      <p:sp>
+        <p:nvSpPr>
+          <p:cNvPr id="26" name="Text 23"/>
+          <p:cNvSpPr txBox="1"/>
+          <p:nvPr/>
+        </p:nvSpPr>
+        <p:spPr>
+          <a:xfrm>
+            <a:off x="9171432" y="5669280"/>
+            <a:ext cx="987552" cy="475488"/>
+          </a:xfrm>
+          <a:prstGeom prst="rect">
+            <a:avLst/>
+          </a:prstGeom>
+          <a:noFill/>
+          <a:ln/>
+        </p:spPr>
+        <p:txBody>
+          <a:bodyPr wrap="square" lIns="0" tIns="0" rIns="0" bIns="0" rtlCol="0" anchor="ctr"/>
+          <a:lstStyle/>
+          <a:p>
+            <a:pPr algn="ctr" indent="0" marL="0">
+              <a:lnSpc>
+                <a:spcPts val="1150"/>
+              </a:lnSpc>
+              <a:buNone/>
+            </a:pPr>
+            <a:r>
+              <a:rPr lang="en-US" sz="950" b="1" dirty="0">
+                <a:solidFill>
+                  <a:srgbClr val="BDBDBD"/>
+                </a:solidFill>
+                <a:latin typeface="Calibri" pitchFamily="34" charset="0"/>
+                <a:ea typeface="Calibri" pitchFamily="34" charset="-122"/>
+                <a:cs typeface="Calibri" pitchFamily="34" charset="-120"/>
+              </a:rPr>
+              <a:t>Life-cycle</a:t>
+            </a:r>
+            <a:endParaRPr lang="en-US" sz="950" dirty="0"/>
+          </a:p>
+        </p:txBody>
+      </p:sp>
+      <p:sp>
+        <p:nvSpPr>
+          <p:cNvPr id="27" name="ch8"/>
+          <p:cNvSpPr/>
+          <p:nvPr/>
+        </p:nvSpPr>
+        <p:spPr>
+          <a:xfrm>
+            <a:off x="10314432" y="5669280"/>
+            <a:ext cx="1097280" cy="475488"/>
+          </a:xfrm>
+          <a:prstGeom prst="rect">
+            <a:avLst/>
+          </a:prstGeom>
+          <a:solidFill>
+            <a:srgbClr val="FFFFFF"/>
+          </a:solidFill>
+          <a:ln w="12700">
+            <a:solidFill>
+              <a:srgbClr val="BDBDBD"/>
+            </a:solidFill>
+            <a:prstDash val="solid"/>
+          </a:ln>
+        </p:spPr>
+      </p:sp>
+      <p:sp>
+        <p:nvSpPr>
+          <p:cNvPr id="28" name="Text 25"/>
+          <p:cNvSpPr txBox="1"/>
+          <p:nvPr/>
+        </p:nvSpPr>
+        <p:spPr>
+          <a:xfrm>
+            <a:off x="10369296" y="5669280"/>
+            <a:ext cx="987552" cy="475488"/>
+          </a:xfrm>
+          <a:prstGeom prst="rect">
+            <a:avLst/>
+          </a:prstGeom>
+          <a:noFill/>
+          <a:ln/>
+        </p:spPr>
+        <p:txBody>
+          <a:bodyPr wrap="square" lIns="0" tIns="0" rIns="0" bIns="0" rtlCol="0" anchor="ctr"/>
+          <a:lstStyle/>
+          <a:p>
+            <a:pPr algn="ctr" indent="0" marL="0">
+              <a:lnSpc>
+                <a:spcPts val="1150"/>
+              </a:lnSpc>
+              <a:buNone/>
+            </a:pPr>
+            <a:r>
+              <a:rPr lang="en-US" sz="950" b="1" dirty="0">
+                <a:solidFill>
+                  <a:srgbClr val="BDBDBD"/>
+                </a:solidFill>
+                <a:latin typeface="Calibri" pitchFamily="34" charset="0"/>
+                <a:ea typeface="Calibri" pitchFamily="34" charset="-122"/>
+                <a:cs typeface="Calibri" pitchFamily="34" charset="-120"/>
+              </a:rPr>
+              <a:t>Structural use</a:t>
+            </a:r>
+            <a:endParaRPr lang="en-US" sz="950" dirty="0"/>
+          </a:p>
+        </p:txBody>
+      </p:sp>
+      <p:sp>
+        <p:nvSpPr>
+          <p:cNvPr id="29" name="Text 26"/>
+          <p:cNvSpPr txBox="1"/>
+          <p:nvPr/>
+        </p:nvSpPr>
+        <p:spPr>
+          <a:xfrm>
+            <a:off x="731520" y="6263640"/>
+            <a:ext cx="10241280" cy="457200"/>
           </a:xfrm>
           <a:prstGeom prst="rect">
             <a:avLst/>
@@ -37315,7 +41215,7 @@
                 <a:ea typeface="Calibri" pitchFamily="34" charset="-122"/>
                 <a:cs typeface="Calibri" pitchFamily="34" charset="-120"/>
               </a:rPr>
-              <a:t>Each exclusion is revisited as a defined next experiment in the closing section.</a:t>
+              <a:t>Filled: determined in this study. Outlined: not determined, and therefore outside every claim made in this presentation.</a:t>
             </a:r>
             <a:endParaRPr lang="en-US" sz="900" dirty="0"/>
           </a:p>
@@ -37323,7 +41223,7 @@
       </p:sp>
       <p:sp>
         <p:nvSpPr>
-          <p:cNvPr id="13" name="Text 0"/>
+          <p:cNvPr id="31" name="Text 0"/>
           <p:cNvSpPr/>
           <p:nvPr>
             <p:ph idx="100" hasCustomPrompt="1"/>

--- a/konferans-bildirisi/06-sunum/ICSMMEP26_Presentation_Unal.pptx
+++ b/konferans-bildirisi/06-sunum/ICSMMEP26_Presentation_Unal.pptx
@@ -135,12 +135,12 @@
   <p:extLst>
     <p:ext uri="{521415D9-36F7-43E2-AB2F-B90AF26B5E84}">
       <p14:sectionLst xmlns:p14="http://schemas.microsoft.com/office/powerpoint/2010/main">
-        <p14:section name="Opening" id="{12ac3792-cb7b-e9e0-6659-21daf5986bf9}">
+        <p14:section name="Opening" id="{397214f9-63db-2d32-00d4-29a8bbe9f5ff}">
           <p14:sldIdLst>
             <p14:sldId id="256"/>
           </p14:sldIdLst>
         </p14:section>
-        <p14:section name="Introduction" id="{9a858043-7780-b306-7d91-24230eed7f0f}">
+        <p14:section name="Introduction" id="{337221d9-b467-6165-22a7-5d19c944d3d7}">
           <p14:sldIdLst>
             <p14:sldId id="257"/>
             <p14:sldId id="258"/>
@@ -148,7 +148,7 @@
             <p14:sldId id="260"/>
           </p14:sldIdLst>
         </p14:section>
-        <p14:section name="Framework" id="{a8ff9875-f65d-738d-69fe-74f3872d6459}">
+        <p14:section name="Framework" id="{6a3cf9dd-062d-1fe7-a971-0a0aa9a92355}">
           <p14:sldIdLst>
             <p14:sldId id="261"/>
             <p14:sldId id="262"/>
@@ -157,12 +157,12 @@
             <p14:sldId id="265"/>
           </p14:sldIdLst>
         </p14:section>
-        <p14:section name="Material" id="{b3f59cbf-8eee-e84f-e4a0-c306eac95d72}">
+        <p14:section name="Material" id="{b8b1ff2a-9c4a-5edc-8f28-ff3160c2d808}">
           <p14:sldIdLst>
             <p14:sldId id="266"/>
           </p14:sldIdLst>
         </p14:section>
-        <p14:section name="Protocol" id="{bec91c56-db1a-8389-9b86-6060ded7e7bd}">
+        <p14:section name="Protocol" id="{2f006985-e425-d19e-ac65-354f9f594e72}">
           <p14:sldIdLst>
             <p14:sldId id="267"/>
             <p14:sldId id="268"/>
@@ -170,7 +170,7 @@
             <p14:sldId id="270"/>
           </p14:sldIdLst>
         </p14:section>
-        <p14:section name="Results" id="{3d91e074-7716-1f7b-2139-449fc9232fd6}">
+        <p14:section name="Results" id="{4da5eac6-2d23-53ce-847b-d41ad25e71cd}">
           <p14:sldIdLst>
             <p14:sldId id="271"/>
             <p14:sldId id="272"/>
@@ -180,19 +180,19 @@
             <p14:sldId id="276"/>
           </p14:sldIdLst>
         </p14:section>
-        <p14:section name="Benchmark" id="{73ed3ad2-ea9c-7949-3bfc-915b66f3a8a2}">
+        <p14:section name="Benchmark" id="{84bdedea-bd1d-9f2c-f50c-6547c5d2cbfd}">
           <p14:sldIdLst>
             <p14:sldId id="277"/>
             <p14:sldId id="278"/>
             <p14:sldId id="279"/>
           </p14:sldIdLst>
         </p14:section>
-        <p14:section name="Application" id="{231fb476-83ab-81db-c1c3-e411485cba15}">
+        <p14:section name="Application" id="{3fa16bb6-48b4-071d-a465-b1b2675eb507}">
           <p14:sldIdLst>
             <p14:sldId id="280"/>
           </p14:sldIdLst>
         </p14:section>
-        <p14:section name="Closing" id="{8437cb03-1ba0-747a-5fad-2f39015abab4}">
+        <p14:section name="Closing" id="{d64d1fa4-a350-4c31-97fb-a5c78130beed}">
           <p14:sldIdLst>
             <p14:sldId id="281"/>
             <p14:sldId id="282"/>
@@ -18840,7 +18840,7 @@
           <a:ln/>
         </p:spPr>
         <p:txBody>
-          <a:bodyPr wrap="square" lIns="0" tIns="0" rIns="0" bIns="0" rtlCol="0" anchor="ctr"/>
+          <a:bodyPr wrap="square" lIns="0" tIns="0" rIns="0" bIns="0" rtlCol="0" anchor="t"/>
           <a:lstStyle/>
           <a:p>
             <a:pPr marL="342900" indent="-342900">
@@ -22186,7 +22186,7 @@
         <p:spPr>
           <a:xfrm>
             <a:off x="3182112" y="0"/>
-            <a:ext cx="4572000" cy="3429000"/>
+            <a:ext cx="4096512" cy="3072384"/>
           </a:xfrm>
           <a:prstGeom prst="rect">
             <a:avLst/>
@@ -22195,7 +22195,7 @@
       </p:pic>
       <p:pic>
         <p:nvPicPr>
-          <p:cNvPr id="4" name="b3" descr="/home/user/sanat-ve-mekan/konferans-bildirisi/03-gorseller/08b-yivli-panel-kemer.jpg">    </p:cNvPr>
+          <p:cNvPr id="4" name="b3" descr="/home/user/sanat-ve-mekan/konferans-bildirisi/03-gorseller/08c-kemer.jpg">    </p:cNvPr>
           <p:cNvPicPr>
             <a:picLocks noChangeAspect="1"/>
           </p:cNvPicPr>
@@ -22210,7 +22210,7 @@
         <p:spPr>
           <a:xfrm>
             <a:off x="3182112" y="3520440"/>
-            <a:ext cx="4572000" cy="3337560"/>
+            <a:ext cx="4096512" cy="3337560"/>
           </a:xfrm>
           <a:prstGeom prst="rect">
             <a:avLst/>
@@ -22225,8 +22225,8 @@
         </p:nvSpPr>
         <p:spPr>
           <a:xfrm>
-            <a:off x="7845552" y="0"/>
-            <a:ext cx="4343400" cy="6858000"/>
+            <a:off x="7278624" y="0"/>
+            <a:ext cx="4910328" cy="6858000"/>
           </a:xfrm>
           <a:prstGeom prst="rect">
             <a:avLst/>
@@ -22252,8 +22252,8 @@
         </p:nvSpPr>
         <p:spPr>
           <a:xfrm>
-            <a:off x="8321040" y="1280160"/>
-            <a:ext cx="3383280" cy="457200"/>
+            <a:off x="7726680" y="1280160"/>
+            <a:ext cx="3840480" cy="457200"/>
           </a:xfrm>
           <a:prstGeom prst="rect">
             <a:avLst/>
@@ -22291,8 +22291,8 @@
         </p:nvSpPr>
         <p:spPr>
           <a:xfrm>
-            <a:off x="8321040" y="1920240"/>
-            <a:ext cx="3383280" cy="2560320"/>
+            <a:off x="7726680" y="1920240"/>
+            <a:ext cx="3840480" cy="2468880"/>
           </a:xfrm>
           <a:prstGeom prst="rect">
             <a:avLst/>
@@ -22362,8 +22362,8 @@
         </p:nvSpPr>
         <p:spPr>
           <a:xfrm>
-            <a:off x="8321040" y="4663440"/>
-            <a:ext cx="3383280" cy="822960"/>
+            <a:off x="7726680" y="4572000"/>
+            <a:ext cx="3840480" cy="822960"/>
           </a:xfrm>
           <a:prstGeom prst="rect">
             <a:avLst/>
@@ -22404,8 +22404,8 @@
         </p:nvSpPr>
         <p:spPr>
           <a:xfrm>
-            <a:off x="8321040" y="5715000"/>
-            <a:ext cx="3383280" cy="457200"/>
+            <a:off x="7726680" y="5760720"/>
+            <a:ext cx="3840480" cy="457200"/>
           </a:xfrm>
           <a:prstGeom prst="rect">
             <a:avLst/>
@@ -22745,7 +22745,7 @@
           <a:ln/>
         </p:spPr>
         <p:txBody>
-          <a:bodyPr wrap="square" lIns="0" tIns="0" rIns="0" bIns="0" rtlCol="0" anchor="ctr"/>
+          <a:bodyPr wrap="square" lIns="0" tIns="0" rIns="0" bIns="0" rtlCol="0" anchor="t"/>
           <a:lstStyle/>
           <a:p>
             <a:pPr marL="342900" indent="-342900">
@@ -30101,8 +30101,8 @@
         </p:nvSpPr>
         <p:spPr>
           <a:xfrm>
-            <a:off x="731520" y="2377440"/>
-            <a:ext cx="3291840" cy="2743200"/>
+            <a:off x="731520" y="2359152"/>
+            <a:ext cx="3291840" cy="2926080"/>
           </a:xfrm>
           <a:prstGeom prst="rect">
             <a:avLst/>
@@ -30111,7 +30111,7 @@
           <a:ln/>
         </p:spPr>
         <p:txBody>
-          <a:bodyPr wrap="square" lIns="0" tIns="0" rIns="0" bIns="0" rtlCol="0" anchor="ctr"/>
+          <a:bodyPr wrap="square" lIns="0" tIns="0" rIns="0" bIns="0" rtlCol="0" anchor="t"/>
           <a:lstStyle/>
           <a:p>
             <a:pPr marL="342900" indent="-342900">
@@ -30261,8 +30261,8 @@
         </p:nvSpPr>
         <p:spPr>
           <a:xfrm>
-            <a:off x="4389120" y="2377440"/>
-            <a:ext cx="3291840" cy="2743200"/>
+            <a:off x="4389120" y="2359152"/>
+            <a:ext cx="3291840" cy="2926080"/>
           </a:xfrm>
           <a:prstGeom prst="rect">
             <a:avLst/>
@@ -30271,7 +30271,7 @@
           <a:ln/>
         </p:spPr>
         <p:txBody>
-          <a:bodyPr wrap="square" lIns="0" tIns="0" rIns="0" bIns="0" rtlCol="0" anchor="ctr"/>
+          <a:bodyPr wrap="square" lIns="0" tIns="0" rIns="0" bIns="0" rtlCol="0" anchor="t"/>
           <a:lstStyle/>
           <a:p>
             <a:pPr marL="342900" indent="-342900">
@@ -30421,8 +30421,8 @@
         </p:nvSpPr>
         <p:spPr>
           <a:xfrm>
-            <a:off x="8046720" y="2377440"/>
-            <a:ext cx="3291840" cy="2743200"/>
+            <a:off x="8046720" y="2359152"/>
+            <a:ext cx="3291840" cy="2926080"/>
           </a:xfrm>
           <a:prstGeom prst="rect">
             <a:avLst/>
@@ -30431,7 +30431,7 @@
           <a:ln/>
         </p:spPr>
         <p:txBody>
-          <a:bodyPr wrap="square" lIns="0" tIns="0" rIns="0" bIns="0" rtlCol="0" anchor="ctr"/>
+          <a:bodyPr wrap="square" lIns="0" tIns="0" rIns="0" bIns="0" rtlCol="0" anchor="t"/>
           <a:lstStyle/>
           <a:p>
             <a:pPr marL="342900" indent="-342900">

--- a/konferans-bildirisi/06-sunum/ICSMMEP26_Presentation_Unal.pptx
+++ b/konferans-bildirisi/06-sunum/ICSMMEP26_Presentation_Unal.pptx
@@ -133,12 +133,12 @@
   <p:extLst>
     <p:ext uri="{521415D9-36F7-43E2-AB2F-B90AF26B5E84}">
       <p14:sectionLst xmlns:p14="http://schemas.microsoft.com/office/powerpoint/2010/main">
-        <p14:section name="Opening" id="{83522892-8058-46af-2bcf-f89f6d23ec92}">
+        <p14:section name="Opening" id="{2b42375b-a05a-1109-3d16-f97a92c1bed3}">
           <p14:sldIdLst>
             <p14:sldId id="256"/>
           </p14:sldIdLst>
         </p14:section>
-        <p14:section name="Introduction" id="{d3e3db9d-8905-1cbf-93e0-ba55bc9d1eed}">
+        <p14:section name="Introduction" id="{9377a455-dcce-9151-95e9-1c541672c8e3}">
           <p14:sldIdLst>
             <p14:sldId id="257"/>
             <p14:sldId id="258"/>
@@ -146,7 +146,7 @@
             <p14:sldId id="260"/>
           </p14:sldIdLst>
         </p14:section>
-        <p14:section name="Framework" id="{12e672a2-25d8-d0a6-031d-30d5e1669357}">
+        <p14:section name="Framework" id="{0457e436-839e-4e23-42df-7c70342edf4d}">
           <p14:sldIdLst>
             <p14:sldId id="261"/>
             <p14:sldId id="262"/>
@@ -155,7 +155,7 @@
             <p14:sldId id="265"/>
           </p14:sldIdLst>
         </p14:section>
-        <p14:section name="Protocol" id="{96cbed27-9dbe-0e12-9755-6b3882323c94}">
+        <p14:section name="Protocol" id="{31bcd4c8-9ec2-a33d-f084-a220ad5ccab7}">
           <p14:sldIdLst>
             <p14:sldId id="266"/>
             <p14:sldId id="267"/>
@@ -163,7 +163,7 @@
             <p14:sldId id="269"/>
           </p14:sldIdLst>
         </p14:section>
-        <p14:section name="Results" id="{7df4e7b1-21b8-5754-6a23-805a975f3468}">
+        <p14:section name="Results" id="{8b2f5c2e-a813-c02d-20d3-e87570d3e9d1}">
           <p14:sldIdLst>
             <p14:sldId id="270"/>
             <p14:sldId id="271"/>
@@ -173,19 +173,19 @@
             <p14:sldId id="275"/>
           </p14:sldIdLst>
         </p14:section>
-        <p14:section name="Benchmark" id="{ad674ddf-a3f6-e94c-7d02-89a4c44ed805}">
+        <p14:section name="Benchmark" id="{6a9909b2-fc2a-502e-e024-371c5b1bba83}">
           <p14:sldIdLst>
             <p14:sldId id="276"/>
             <p14:sldId id="277"/>
             <p14:sldId id="278"/>
           </p14:sldIdLst>
         </p14:section>
-        <p14:section name="Application" id="{fb6a8011-9648-d6f5-c1bd-fef49a4d7078}">
+        <p14:section name="Application" id="{aa91c2ba-4a00-9eb0-4b84-9a2d62d8ace3}">
           <p14:sldIdLst>
             <p14:sldId id="279"/>
           </p14:sldIdLst>
         </p14:section>
-        <p14:section name="Closing" id="{5bd55812-bfad-f204-0c4d-a23fa6b69c6d}">
+        <p14:section name="Closing" id="{b0f40cd2-36d8-e657-1ad3-3e5f34ccc477}">
           <p14:sldIdLst>
             <p14:sldId id="280"/>
             <p14:sldId id="281"/>
@@ -4953,7 +4953,7 @@
         <p:spPr>
           <a:xfrm>
             <a:off x="731520" y="5806440"/>
-            <a:ext cx="10698480" cy="457200"/>
+            <a:ext cx="10241280" cy="457200"/>
           </a:xfrm>
           <a:prstGeom prst="rect">
             <a:avLst/>
@@ -4980,7 +4980,7 @@
                 <a:ea typeface="Calibri" pitchFamily="34" charset="-122"/>
                 <a:cs typeface="Calibri" pitchFamily="34" charset="-120"/>
               </a:rPr>
-              <a:t>Provenance. The dissertation from which this work derives states a broader hypothesis framed on spatial resilience in interior design. The formulation above is the materials-engineering component of it, restated within the scope of the tests reported here.</a:t>
+              <a:t>On provenance: the dissertation states a broader hypothesis framed on spatial resilience. This is its materials-engineering component, restated within the scope of these tests.</a:t>
             </a:r>
             <a:endParaRPr lang="en-US" sz="900" dirty="0"/>
           </a:p>
@@ -5987,7 +5987,49 @@
         </p:nvSpPr>
         <p:spPr>
           <a:xfrm>
-            <a:off x="731520" y="4572000"/>
+            <a:off x="731520" y="4526280"/>
+            <a:ext cx="10241280" cy="548640"/>
+          </a:xfrm>
+          <a:prstGeom prst="rect">
+            <a:avLst/>
+          </a:prstGeom>
+          <a:noFill/>
+          <a:ln/>
+        </p:spPr>
+        <p:txBody>
+          <a:bodyPr wrap="square" lIns="0" tIns="0" rIns="0" bIns="0" rtlCol="0" anchor="t"/>
+          <a:lstStyle/>
+          <a:p>
+            <a:pPr indent="0" marL="0">
+              <a:lnSpc>
+                <a:spcPts val="1800"/>
+              </a:lnSpc>
+              <a:buNone/>
+            </a:pPr>
+            <a:r>
+              <a:rPr lang="en-US" sz="1200" dirty="0">
+                <a:solidFill>
+                  <a:srgbClr val="3C3C3C"/>
+                </a:solidFill>
+                <a:latin typeface="Calibri" pitchFamily="34" charset="0"/>
+                <a:ea typeface="Calibri" pitchFamily="34" charset="-122"/>
+                <a:cs typeface="Calibri" pitchFamily="34" charset="-120"/>
+              </a:rPr>
+              <a:t>That particle size was chosen to match the eggshell polymer-composite literature, so the mineral phase here is comparable with that work.</a:t>
+            </a:r>
+            <a:endParaRPr lang="en-US" sz="1200" dirty="0"/>
+          </a:p>
+        </p:txBody>
+      </p:sp>
+      <p:sp>
+        <p:nvSpPr>
+          <p:cNvPr id="30" name="Text 28"/>
+          <p:cNvSpPr txBox="1"/>
+          <p:nvPr/>
+        </p:nvSpPr>
+        <p:spPr>
+          <a:xfrm>
+            <a:off x="731520" y="5303520"/>
             <a:ext cx="10241280" cy="457200"/>
           </a:xfrm>
           <a:prstGeom prst="rect">
@@ -6015,7 +6057,7 @@
                 <a:ea typeface="Calibri" pitchFamily="34" charset="-122"/>
                 <a:cs typeface="Calibri" pitchFamily="34" charset="-120"/>
               </a:rPr>
-              <a:t>150 µm chosen to match the particle size used in the eggshell polymer-composite literature.  ·  The 120 °C step is decontamination and drying, not sterilisation: sterility was not verified.</a:t>
+              <a:t>The 120 °C step is decontamination and drying, not sterilisation: sterility was not verified.</a:t>
             </a:r>
             <a:endParaRPr lang="en-US" sz="900" dirty="0"/>
           </a:p>
@@ -6023,7 +6065,7 @@
       </p:sp>
       <p:sp>
         <p:nvSpPr>
-          <p:cNvPr id="31" name="Text 0"/>
+          <p:cNvPr id="32" name="Text 0"/>
           <p:cNvSpPr/>
           <p:nvPr>
             <p:ph idx="100" hasCustomPrompt="1"/>
@@ -7015,7 +7057,49 @@
         </p:nvSpPr>
         <p:spPr>
           <a:xfrm>
-            <a:off x="731520" y="5715000"/>
+            <a:off x="731520" y="5532120"/>
+            <a:ext cx="10241280" cy="548640"/>
+          </a:xfrm>
+          <a:prstGeom prst="rect">
+            <a:avLst/>
+          </a:prstGeom>
+          <a:noFill/>
+          <a:ln/>
+        </p:spPr>
+        <p:txBody>
+          <a:bodyPr wrap="square" lIns="0" tIns="0" rIns="0" bIns="0" rtlCol="0" anchor="t"/>
+          <a:lstStyle/>
+          <a:p>
+            <a:pPr indent="0" marL="0">
+              <a:lnSpc>
+                <a:spcPts val="1800"/>
+              </a:lnSpc>
+              <a:buNone/>
+            </a:pPr>
+            <a:r>
+              <a:rPr lang="en-US" sz="1200" dirty="0">
+                <a:solidFill>
+                  <a:srgbClr val="3C3C3C"/>
+                </a:solidFill>
+                <a:latin typeface="Calibri" pitchFamily="34" charset="0"/>
+                <a:ea typeface="Calibri" pitchFamily="34" charset="-122"/>
+                <a:cs typeface="Calibri" pitchFamily="34" charset="-120"/>
+              </a:rPr>
+              <a:t>Agar is added incrementally under continuous stirring; bulk addition forms agglomerates that do not redisperse.</a:t>
+            </a:r>
+            <a:endParaRPr lang="en-US" sz="1200" dirty="0"/>
+          </a:p>
+        </p:txBody>
+      </p:sp>
+      <p:sp>
+        <p:nvSpPr>
+          <p:cNvPr id="31" name="Text 29"/>
+          <p:cNvSpPr txBox="1"/>
+          <p:nvPr/>
+        </p:nvSpPr>
+        <p:spPr>
+          <a:xfrm>
+            <a:off x="731520" y="6172200"/>
             <a:ext cx="10241280" cy="457200"/>
           </a:xfrm>
           <a:prstGeom prst="rect">
@@ -7043,7 +7127,7 @@
                 <a:ea typeface="Calibri" pitchFamily="34" charset="-122"/>
                 <a:cs typeface="Calibri" pitchFamily="34" charset="-120"/>
               </a:rPr>
-              <a:t>Schematic. The two set points and the total heating time are recorded; intermediate ramp rates are not. Stirring was manual, so shear rate is not a controlled quantity.</a:t>
+              <a:t>Schematic. The two set points and the total heating time are recorded; intermediate ramp rates are not. Stirring was manual.</a:t>
             </a:r>
             <a:endParaRPr lang="en-US" sz="900" dirty="0"/>
           </a:p>
@@ -7051,7 +7135,7 @@
       </p:sp>
       <p:sp>
         <p:nvSpPr>
-          <p:cNvPr id="32" name="Text 0"/>
+          <p:cNvPr id="33" name="Text 0"/>
           <p:cNvSpPr/>
           <p:nvPr>
             <p:ph idx="100" hasCustomPrompt="1"/>
@@ -7711,13 +7795,13 @@
       </p:sp>
       <p:sp>
         <p:nvSpPr>
-          <p:cNvPr id="19" name="ru0.84.5"/>
+          <p:cNvPr id="19" name="ru0.84.45"/>
           <p:cNvSpPr/>
           <p:nvPr/>
         </p:nvSpPr>
         <p:spPr>
           <a:xfrm>
-            <a:off x="731520" y="4114800"/>
+            <a:off x="731520" y="4069080"/>
             <a:ext cx="10698480" cy="9144"/>
           </a:xfrm>
           <a:prstGeom prst="rect">
@@ -7744,7 +7828,49 @@
         </p:nvSpPr>
         <p:spPr>
           <a:xfrm>
-            <a:off x="731520" y="4297680"/>
+            <a:off x="731520" y="4251960"/>
+            <a:ext cx="10241280" cy="457200"/>
+          </a:xfrm>
+          <a:prstGeom prst="rect">
+            <a:avLst/>
+          </a:prstGeom>
+          <a:noFill/>
+          <a:ln/>
+        </p:spPr>
+        <p:txBody>
+          <a:bodyPr wrap="square" lIns="0" tIns="0" rIns="0" bIns="0" rtlCol="0" anchor="t"/>
+          <a:lstStyle/>
+          <a:p>
+            <a:pPr indent="0" marL="0">
+              <a:lnSpc>
+                <a:spcPts val="1800"/>
+              </a:lnSpc>
+              <a:buNone/>
+            </a:pPr>
+            <a:r>
+              <a:rPr lang="en-US" sz="1200" dirty="0">
+                <a:solidFill>
+                  <a:srgbClr val="3C3C3C"/>
+                </a:solidFill>
+                <a:latin typeface="Calibri" pitchFamily="34" charset="0"/>
+                <a:ea typeface="Calibri" pitchFamily="34" charset="-122"/>
+                <a:cs typeface="Calibri" pitchFamily="34" charset="-120"/>
+              </a:rPr>
+              <a:t>No thermal input after the 55-minute preparation: the entire cure is at room temperature.</a:t>
+            </a:r>
+            <a:endParaRPr lang="en-US" sz="1200" dirty="0"/>
+          </a:p>
+        </p:txBody>
+      </p:sp>
+      <p:sp>
+        <p:nvSpPr>
+          <p:cNvPr id="21" name="Text 19"/>
+          <p:cNvSpPr txBox="1"/>
+          <p:nvPr/>
+        </p:nvSpPr>
+        <p:spPr>
+          <a:xfrm>
+            <a:off x="731520" y="4800600"/>
             <a:ext cx="10241280" cy="457200"/>
           </a:xfrm>
           <a:prstGeom prst="rect">
@@ -7780,14 +7906,14 @@
       </p:sp>
       <p:sp>
         <p:nvSpPr>
-          <p:cNvPr id="21" name="disc"/>
+          <p:cNvPr id="22" name="disc"/>
           <p:cNvSpPr/>
           <p:nvPr/>
         </p:nvSpPr>
         <p:spPr>
           <a:xfrm>
-            <a:off x="731520" y="5029200"/>
-            <a:ext cx="10698480" cy="731520"/>
+            <a:off x="731520" y="5349240"/>
+            <a:ext cx="10698480" cy="777240"/>
           </a:xfrm>
           <a:prstGeom prst="rect">
             <a:avLst/>
@@ -7807,14 +7933,14 @@
       </p:sp>
       <p:sp>
         <p:nvSpPr>
-          <p:cNvPr id="22" name="Text 20"/>
+          <p:cNvPr id="23" name="Text 21"/>
           <p:cNvSpPr txBox="1"/>
           <p:nvPr/>
         </p:nvSpPr>
         <p:spPr>
           <a:xfrm>
-            <a:off x="1051560" y="5166360"/>
-            <a:ext cx="10058400" cy="457200"/>
+            <a:off x="1051560" y="5486400"/>
+            <a:ext cx="10058400" cy="502920"/>
           </a:xfrm>
           <a:prstGeom prst="rect">
             <a:avLst/>
@@ -7858,7 +7984,7 @@
                 <a:ea typeface="Calibri" pitchFamily="34" charset="-122"/>
                 <a:cs typeface="Calibri" pitchFamily="34" charset="-120"/>
               </a:rPr>
-              <a:t>the composite shrinks as water evaporates, and post-drying dimensions were not logged. Every dimension quoted is a mould dimension.</a:t>
+              <a:t>the composite shrinks as water evaporates, and post-drying dimensions were not logged, so every dimension I quote is a mould dimension.</a:t>
             </a:r>
             <a:endParaRPr lang="en-US" sz="1200" dirty="0"/>
           </a:p>
@@ -7866,7 +7992,7 @@
       </p:sp>
       <p:sp>
         <p:nvSpPr>
-          <p:cNvPr id="24" name="Text 0"/>
+          <p:cNvPr id="25" name="Text 0"/>
           <p:cNvSpPr/>
           <p:nvPr>
             <p:ph idx="100" hasCustomPrompt="1"/>
@@ -12592,7 +12718,7 @@
                 <a:ea typeface="Calibri" pitchFamily="34" charset="-122"/>
                 <a:cs typeface="Calibri" pitchFamily="34" charset="-120"/>
               </a:rPr>
-              <a:t>Shell : binder fixed at 2.00. Solids concentration is the only variable in the C series.</a:t>
+              <a:t>Solids concentration is the only variable — the water band shortens from C1 to C3.</a:t>
             </a:r>
             <a:endParaRPr lang="en-US" sz="1200" dirty="0"/>
           </a:p>
@@ -13424,7 +13550,7 @@
                 <a:ea typeface="Calibri" pitchFamily="34" charset="-122"/>
                 <a:cs typeface="Calibri" pitchFamily="34" charset="-120"/>
               </a:rPr>
-              <a:t>Mechanical values are means of three specimens. No standard deviations: individual values were not retained.</a:t>
+              <a:t>Mechanical values are means of three specimens; individual values were not retained, so I cannot give standard deviations.</a:t>
             </a:r>
             <a:endParaRPr lang="en-US" sz="1200" dirty="0"/>
           </a:p>
@@ -15216,8 +15342,8 @@
         </p:nvSpPr>
         <p:spPr>
           <a:xfrm>
-            <a:off x="731520" y="3566160"/>
-            <a:ext cx="4206240" cy="1097280"/>
+            <a:off x="731520" y="3520440"/>
+            <a:ext cx="4206240" cy="731520"/>
           </a:xfrm>
           <a:prstGeom prst="rect">
             <a:avLst/>
@@ -15244,7 +15370,7 @@
                 <a:ea typeface="Calibri" pitchFamily="34" charset="-122"/>
                 <a:cs typeface="Calibri" pitchFamily="34" charset="-120"/>
               </a:rPr>
-              <a:t>Strength rises with solids concentration, not with mineral content.</a:t>
+              <a:t>Strength is governed by packing density, not by mineral content.</a:t>
             </a:r>
             <a:endParaRPr lang="en-US" sz="1200" dirty="0"/>
           </a:p>
@@ -15258,7 +15384,49 @@
         </p:nvSpPr>
         <p:spPr>
           <a:xfrm>
-            <a:off x="731520" y="4297680"/>
+            <a:off x="731520" y="4160520"/>
+            <a:ext cx="4206240" cy="822960"/>
+          </a:xfrm>
+          <a:prstGeom prst="rect">
+            <a:avLst/>
+          </a:prstGeom>
+          <a:noFill/>
+          <a:ln/>
+        </p:spPr>
+        <p:txBody>
+          <a:bodyPr wrap="square" lIns="0" tIns="0" rIns="0" bIns="0" rtlCol="0" anchor="t"/>
+          <a:lstStyle/>
+          <a:p>
+            <a:pPr indent="0" marL="0">
+              <a:lnSpc>
+                <a:spcPts val="1800"/>
+              </a:lnSpc>
+              <a:buNone/>
+            </a:pPr>
+            <a:r>
+              <a:rPr lang="en-US" sz="1200" dirty="0">
+                <a:solidFill>
+                  <a:srgbClr val="3C3C3C"/>
+                </a:solidFill>
+                <a:latin typeface="Calibri" pitchFamily="34" charset="0"/>
+                <a:ea typeface="Calibri" pitchFamily="34" charset="-122"/>
+                <a:cs typeface="Calibri" pitchFamily="34" charset="-120"/>
+              </a:rPr>
+              <a:t>The route to a stronger composite is to remove water, not to add shell.</a:t>
+            </a:r>
+            <a:endParaRPr lang="en-US" sz="1200" dirty="0"/>
+          </a:p>
+        </p:txBody>
+      </p:sp>
+      <p:sp>
+        <p:nvSpPr>
+          <p:cNvPr id="8" name="Text 5"/>
+          <p:cNvSpPr txBox="1"/>
+          <p:nvPr/>
+        </p:nvSpPr>
+        <p:spPr>
+          <a:xfrm>
+            <a:off x="731520" y="5257800"/>
             <a:ext cx="4206240" cy="457200"/>
           </a:xfrm>
           <a:prstGeom prst="rect">
@@ -15294,7 +15462,7 @@
       </p:sp>
       <p:graphicFrame>
         <p:nvGraphicFramePr>
-          <p:cNvPr id="8" name="cc" descr=""/>
+          <p:cNvPr id="9" name="cc" descr=""/>
           <p:cNvGraphicFramePr/>
           <p:nvPr/>
         </p:nvGraphicFramePr>
@@ -15310,7 +15478,7 @@
       </p:graphicFrame>
       <p:sp>
         <p:nvSpPr>
-          <p:cNvPr id="9" name="Text 5"/>
+          <p:cNvPr id="10" name="Text 6"/>
           <p:cNvSpPr txBox="1"/>
           <p:nvPr/>
         </p:nvSpPr>
@@ -15352,7 +15520,7 @@
       </p:sp>
       <p:sp>
         <p:nvSpPr>
-          <p:cNvPr id="11" name="Text 0"/>
+          <p:cNvPr id="12" name="Text 0"/>
           <p:cNvSpPr/>
           <p:nvPr>
             <p:ph idx="100" hasCustomPrompt="1"/>
@@ -15769,7 +15937,7 @@
         <p:spPr>
           <a:xfrm>
             <a:off x="9144000" y="3200400"/>
-            <a:ext cx="2286000" cy="1097280"/>
+            <a:ext cx="2286000" cy="1463040"/>
           </a:xfrm>
           <a:prstGeom prst="rect">
             <a:avLst/>
@@ -15796,7 +15964,7 @@
                 <a:ea typeface="Calibri" pitchFamily="34" charset="-122"/>
                 <a:cs typeface="Calibri" pitchFamily="34" charset="-120"/>
               </a:rPr>
-              <a:t>Energy absorbed, not released. Still a single body after test.</a:t>
+              <a:t>The cube has barrelled. It is shorter and wider, and still a single body.</a:t>
             </a:r>
             <a:endParaRPr lang="en-US" sz="1200" dirty="0"/>
           </a:p>
@@ -17340,7 +17508,7 @@
         <p:spPr>
           <a:xfrm>
             <a:off x="5303520" y="3611880"/>
-            <a:ext cx="2286000" cy="1097280"/>
+            <a:ext cx="2286000" cy="1280160"/>
           </a:xfrm>
           <a:prstGeom prst="rect">
             <a:avLst/>
@@ -17367,7 +17535,7 @@
                 <a:ea typeface="Calibri" pitchFamily="34" charset="-122"/>
                 <a:cs typeface="Calibri" pitchFamily="34" charset="-120"/>
               </a:rPr>
-              <a:t>The transition lies between these two values.</a:t>
+              <a:t>The transition is sharp, and it lies between those two values.</a:t>
             </a:r>
             <a:endParaRPr lang="en-US" sz="1200" dirty="0"/>
           </a:p>
@@ -17863,7 +18031,7 @@
                 <a:ea typeface="Calibri" pitchFamily="34" charset="-122"/>
                 <a:cs typeface="Calibri" pitchFamily="34" charset="-120"/>
               </a:rPr>
-              <a:t>Substantial deformation with retained integrity, in both test programmes.</a:t>
+              <a:t>Both test programmes gave the same result: substantial deformation with retained integrity.</a:t>
             </a:r>
             <a:endParaRPr lang="en-US" sz="1200" dirty="0"/>
           </a:p>
@@ -18684,7 +18852,7 @@
         <p:spPr>
           <a:xfrm>
             <a:off x="6309360" y="4846320"/>
-            <a:ext cx="5120640" cy="914400"/>
+            <a:ext cx="5120640" cy="1097280"/>
           </a:xfrm>
           <a:prstGeom prst="rect">
             <a:avLst/>
@@ -18711,7 +18879,7 @@
                 <a:ea typeface="Calibri" pitchFamily="34" charset="-122"/>
                 <a:cs typeface="Calibri" pitchFamily="34" charset="-120"/>
               </a:rPr>
-              <a:t>The mineral phase is settled. This paper is about the binder.</a:t>
+              <a:t>The case for eggshell as a mineral phase is settled. This paper is about the binder.</a:t>
             </a:r>
             <a:endParaRPr lang="en-US" sz="1200" dirty="0"/>
           </a:p>
@@ -19138,7 +19306,49 @@
         </p:nvSpPr>
         <p:spPr>
           <a:xfrm>
-            <a:off x="3200400" y="5303520"/>
+            <a:off x="3200400" y="5257800"/>
+            <a:ext cx="3017520" cy="731520"/>
+          </a:xfrm>
+          <a:prstGeom prst="rect">
+            <a:avLst/>
+          </a:prstGeom>
+          <a:noFill/>
+          <a:ln/>
+        </p:spPr>
+        <p:txBody>
+          <a:bodyPr wrap="square" lIns="0" tIns="0" rIns="0" bIns="0" rtlCol="0" anchor="t"/>
+          <a:lstStyle/>
+          <a:p>
+            <a:pPr indent="0" marL="0">
+              <a:lnSpc>
+                <a:spcPts val="1800"/>
+              </a:lnSpc>
+              <a:buNone/>
+            </a:pPr>
+            <a:r>
+              <a:rPr lang="en-US" sz="1200" dirty="0">
+                <a:solidFill>
+                  <a:srgbClr val="3C3C3C"/>
+                </a:solidFill>
+                <a:latin typeface="Calibri" pitchFamily="34" charset="0"/>
+                <a:ea typeface="Calibri" pitchFamily="34" charset="-122"/>
+                <a:cs typeface="Calibri" pitchFamily="34" charset="-120"/>
+              </a:rPr>
+              <a:t>This is an ignitability test; there is no Euroclass classification.</a:t>
+            </a:r>
+            <a:endParaRPr lang="en-US" sz="1200" dirty="0"/>
+          </a:p>
+        </p:txBody>
+      </p:sp>
+      <p:sp>
+        <p:nvSpPr>
+          <p:cNvPr id="11" name="Text 8"/>
+          <p:cNvSpPr txBox="1"/>
+          <p:nvPr/>
+        </p:nvSpPr>
+        <p:spPr>
+          <a:xfrm>
+            <a:off x="3200400" y="6080760"/>
             <a:ext cx="3017520" cy="457200"/>
           </a:xfrm>
           <a:prstGeom prst="rect">
@@ -19166,7 +19376,7 @@
                 <a:ea typeface="Calibri" pitchFamily="34" charset="-122"/>
                 <a:cs typeface="Calibri" pitchFamily="34" charset="-120"/>
               </a:rPr>
-              <a:t>ISO 11925-2:2020. Ignitability only: no Euroclass classification, cone calorimetry, smoke or toxicity data.</a:t>
+              <a:t>ISO 11925-2:2020. No cone calorimetry, smoke or toxicity data.</a:t>
             </a:r>
             <a:endParaRPr lang="en-US" sz="900" dirty="0"/>
           </a:p>
@@ -19174,7 +19384,7 @@
       </p:sp>
       <p:sp>
         <p:nvSpPr>
-          <p:cNvPr id="11" name="vr7.31.45"/>
+          <p:cNvPr id="12" name="vr7.31.45"/>
           <p:cNvSpPr/>
           <p:nvPr/>
         </p:nvSpPr>
@@ -19201,7 +19411,7 @@
       </p:sp>
       <p:sp>
         <p:nvSpPr>
-          <p:cNvPr id="12" name="Text 9"/>
+          <p:cNvPr id="13" name="Text 10"/>
           <p:cNvSpPr txBox="1"/>
           <p:nvPr/>
         </p:nvSpPr>
@@ -19240,7 +19450,7 @@
       </p:sp>
       <p:sp>
         <p:nvSpPr>
-          <p:cNvPr id="13" name="Text 10"/>
+          <p:cNvPr id="14" name="Text 11"/>
           <p:cNvSpPr txBox="1"/>
           <p:nvPr/>
         </p:nvSpPr>
@@ -19279,7 +19489,7 @@
       </p:sp>
       <p:sp>
         <p:nvSpPr>
-          <p:cNvPr id="14" name="Text 11"/>
+          <p:cNvPr id="15" name="Text 12"/>
           <p:cNvSpPr txBox="1"/>
           <p:nvPr/>
         </p:nvSpPr>
@@ -19321,7 +19531,7 @@
       </p:sp>
       <p:sp>
         <p:nvSpPr>
-          <p:cNvPr id="15" name="ru7.83.2"/>
+          <p:cNvPr id="16" name="ru7.83.2"/>
           <p:cNvSpPr/>
           <p:nvPr/>
         </p:nvSpPr>
@@ -19348,7 +19558,7 @@
       </p:sp>
       <p:sp>
         <p:nvSpPr>
-          <p:cNvPr id="16" name="Text 13"/>
+          <p:cNvPr id="17" name="Text 14"/>
           <p:cNvSpPr txBox="1"/>
           <p:nvPr/>
         </p:nvSpPr>
@@ -20242,7 +20452,7 @@
       </p:graphicFrame>
       <p:sp>
         <p:nvSpPr>
-          <p:cNvPr id="18" name="Text 14"/>
+          <p:cNvPr id="19" name="Text 15"/>
           <p:cNvSpPr txBox="1"/>
           <p:nvPr/>
         </p:nvSpPr>
@@ -20284,7 +20494,7 @@
       </p:sp>
       <p:sp>
         <p:nvSpPr>
-          <p:cNvPr id="20" name="Text 0"/>
+          <p:cNvPr id="21" name="Text 0"/>
           <p:cNvSpPr/>
           <p:nvPr>
             <p:ph idx="100" hasCustomPrompt="1"/>
@@ -20536,7 +20746,7 @@
                 <a:ea typeface="Calibri" pitchFamily="34" charset="-122"/>
                 <a:cs typeface="Calibri" pitchFamily="34" charset="-120"/>
               </a:rPr>
-              <a:t>On strength alone the composite is not competitive with engineered wood or stone.</a:t>
+              <a:t>On strength alone this composite is not competitive with engineered wood or stone.</a:t>
             </a:r>
             <a:endParaRPr lang="en-US" sz="1200" dirty="0"/>
           </a:p>
@@ -22888,7 +23098,7 @@
                 <a:ea typeface="Calibri" pitchFamily="34" charset="-122"/>
                 <a:cs typeface="Calibri" pitchFamily="34" charset="-120"/>
               </a:rPr>
-              <a:t>Water-cast and ambient-dried, the composite attains the stiffness range of melt-processed bio-polymers.</a:t>
+              <a:t>Water-cast, dried at room temperature, no oven, no autoclave, no extruder — and it reaches the stiffness of melt-processed bio-polymers.</a:t>
             </a:r>
             <a:endParaRPr lang="en-US" sz="1200" dirty="0"/>
           </a:p>
@@ -23464,8 +23674,8 @@
         </p:nvSpPr>
         <p:spPr>
           <a:xfrm>
-            <a:off x="6217920" y="3520440"/>
-            <a:ext cx="2926080" cy="1097280"/>
+            <a:off x="6217920" y="3474720"/>
+            <a:ext cx="2926080" cy="822960"/>
           </a:xfrm>
           <a:prstGeom prst="rect">
             <a:avLst/>
@@ -23492,7 +23702,7 @@
                 <a:ea typeface="Calibri" pitchFamily="34" charset="-122"/>
                 <a:cs typeface="Calibri" pitchFamily="34" charset="-120"/>
               </a:rPr>
-              <a:t>Elastic modulus appears in the denominator.</a:t>
+              <a:t>Notice where the modulus sits: in the denominator.</a:t>
             </a:r>
             <a:endParaRPr lang="en-US" sz="1200" dirty="0"/>
           </a:p>
@@ -23506,8 +23716,8 @@
         </p:nvSpPr>
         <p:spPr>
           <a:xfrm>
-            <a:off x="6217920" y="4572000"/>
-            <a:ext cx="2926080" cy="1097280"/>
+            <a:off x="6217920" y="4389120"/>
+            <a:ext cx="2926080" cy="1737360"/>
           </a:xfrm>
           <a:prstGeom prst="rect">
             <a:avLst/>
@@ -23534,7 +23744,7 @@
                 <a:ea typeface="Calibri" pitchFamily="34" charset="-122"/>
                 <a:cs typeface="Calibri" pitchFamily="34" charset="-120"/>
               </a:rPr>
-              <a:t>The low modulus that counted against the material is what raises this quantity.</a:t>
+              <a:t>Strength records the load at which a material stops performing, not whether it then fails gracefully or catastrophically.</a:t>
             </a:r>
             <a:endParaRPr lang="en-US" sz="1200" dirty="0"/>
           </a:p>
@@ -24398,8 +24608,8 @@
         </p:nvSpPr>
         <p:spPr>
           <a:xfrm>
-            <a:off x="731520" y="5806440"/>
-            <a:ext cx="4206240" cy="457200"/>
+            <a:off x="731520" y="5760720"/>
+            <a:ext cx="4206240" cy="731520"/>
           </a:xfrm>
           <a:prstGeom prst="rect">
             <a:avLst/>
@@ -24413,22 +24623,22 @@
           <a:p>
             <a:pPr indent="0" marL="0">
               <a:lnSpc>
-                <a:spcPts val="1250"/>
+                <a:spcPts val="1750"/>
               </a:lnSpc>
               <a:buNone/>
             </a:pPr>
             <a:r>
-              <a:rPr lang="en-US" sz="900" dirty="0">
+              <a:rPr lang="en-US" sz="1150" dirty="0">
                 <a:solidFill>
-                  <a:srgbClr val="BDBDBD"/>
+                  <a:srgbClr val="3C3C3C"/>
                 </a:solidFill>
                 <a:latin typeface="Calibri" pitchFamily="34" charset="0"/>
                 <a:ea typeface="Calibri" pitchFamily="34" charset="-122"/>
                 <a:cs typeface="Calibri" pitchFamily="34" charset="-120"/>
               </a:rPr>
-              <a:t>No life-cycle assessment was carried out. These are qualitative potentials grounded in the protocol, not quantified claims.</a:t>
-            </a:r>
-            <a:endParaRPr lang="en-US" sz="900" dirty="0"/>
+              <a:t>No life-cycle assessment was carried out, so these are qualitative potentials.</a:t>
+            </a:r>
+            <a:endParaRPr lang="en-US" sz="1150" dirty="0"/>
           </a:p>
         </p:txBody>
       </p:sp>
@@ -25624,7 +25834,7 @@
                 <a:ea typeface="Calibri" pitchFamily="34" charset="-122"/>
                 <a:cs typeface="Calibri" pitchFamily="34" charset="-120"/>
               </a:rPr>
-              <a:t>Every value reported today is a lower bound. None of these limitations is unknown, and each one has a defined next experiment.</a:t>
+              <a:t>Every value I reported today is a lower bound. I would rather set these out than have them found.</a:t>
             </a:r>
             <a:endParaRPr lang="en-US" sz="1200" dirty="0"/>
           </a:p>
@@ -30026,7 +30236,7 @@
         <p:spPr>
           <a:xfrm>
             <a:off x="731520" y="5376672"/>
-            <a:ext cx="10698480" cy="274320"/>
+            <a:ext cx="10241280" cy="365760"/>
           </a:xfrm>
           <a:prstGeom prst="rect">
             <a:avLst/>
@@ -30035,14 +30245,17 @@
           <a:ln/>
         </p:spPr>
         <p:txBody>
-          <a:bodyPr wrap="square" lIns="0" tIns="0" rIns="0" bIns="0" rtlCol="0" anchor="ctr"/>
+          <a:bodyPr wrap="square" lIns="0" tIns="0" rIns="0" bIns="0" rtlCol="0" anchor="t"/>
           <a:lstStyle/>
           <a:p>
             <a:pPr indent="0" marL="0">
-              <a:buNone/>
-            </a:pPr>
-            <a:r>
-              <a:rPr lang="en-US" sz="1300" b="1" dirty="0">
+              <a:lnSpc>
+                <a:spcPts val="1800"/>
+              </a:lnSpc>
+              <a:buNone/>
+            </a:pPr>
+            <a:r>
+              <a:rPr lang="en-US" sz="1200" b="1" dirty="0">
                 <a:solidFill>
                   <a:srgbClr val="141414"/>
                 </a:solidFill>
@@ -30050,9 +30263,9 @@
                 <a:ea typeface="Calibri" pitchFamily="34" charset="-122"/>
                 <a:cs typeface="Calibri" pitchFamily="34" charset="-120"/>
               </a:rPr>
-              <a:t>What every row above has in common</a:t>
-            </a:r>
-            <a:endParaRPr lang="en-US" sz="1300" dirty="0"/>
+              <a:t>The burden is carried by the binder, and the binder is untouched.</a:t>
+            </a:r>
+            <a:endParaRPr lang="en-US" sz="1200" dirty="0"/>
           </a:p>
         </p:txBody>
       </p:sp>
@@ -31680,7 +31893,7 @@
         <p:spPr>
           <a:xfrm>
             <a:off x="6583680" y="4206240"/>
-            <a:ext cx="4846320" cy="914400"/>
+            <a:ext cx="4846320" cy="1097280"/>
           </a:xfrm>
           <a:prstGeom prst="rect">
             <a:avLst/>
@@ -31707,7 +31920,7 @@
                 <a:ea typeface="Calibri" pitchFamily="34" charset="-122"/>
                 <a:cs typeface="Calibri" pitchFamily="34" charset="-120"/>
               </a:rPr>
-              <a:t>The compositional logic transfers. The loading case does not.</a:t>
+              <a:t>The compositional logic transfers. The loading case does not, and for an interior surface that is bending.</a:t>
             </a:r>
             <a:endParaRPr lang="en-US" sz="1200" dirty="0"/>
           </a:p>
@@ -32332,7 +32545,7 @@
                 <a:ea typeface="Calibri" pitchFamily="34" charset="-122"/>
                 <a:cs typeface="Calibri" pitchFamily="34" charset="-120"/>
               </a:rPr>
-              <a:t>The contribution is therefore a documented protocol and a single coherent property set, not a novel constituent.</a:t>
+              <a:t>It is not a novel constituent. It is a documented protocol and a single coherent property set.</a:t>
             </a:r>
             <a:endParaRPr lang="en-US" sz="1200" dirty="0"/>
           </a:p>
@@ -32899,7 +33112,49 @@
         </p:nvSpPr>
         <p:spPr>
           <a:xfrm>
-            <a:off x="731520" y="5120640"/>
+            <a:off x="731520" y="4800600"/>
+            <a:ext cx="10241280" cy="457200"/>
+          </a:xfrm>
+          <a:prstGeom prst="rect">
+            <a:avLst/>
+          </a:prstGeom>
+          <a:noFill/>
+          <a:ln/>
+        </p:spPr>
+        <p:txBody>
+          <a:bodyPr wrap="square" lIns="0" tIns="0" rIns="0" bIns="0" rtlCol="0" anchor="t"/>
+          <a:lstStyle/>
+          <a:p>
+            <a:pPr indent="0" marL="0">
+              <a:lnSpc>
+                <a:spcPts val="1800"/>
+              </a:lnSpc>
+              <a:buNone/>
+            </a:pPr>
+            <a:r>
+              <a:rPr lang="en-US" sz="1200" b="1" i="1" dirty="0">
+                <a:solidFill>
+                  <a:srgbClr val="141414"/>
+                </a:solidFill>
+                <a:latin typeface="Calibri" pitchFamily="34" charset="0"/>
+                <a:ea typeface="Calibri" pitchFamily="34" charset="-122"/>
+                <a:cs typeface="Calibri" pitchFamily="34" charset="-120"/>
+              </a:rPr>
+              <a:t>The fourth — deriving an evaluation criterion for this material class — is where I will spend most time.</a:t>
+            </a:r>
+            <a:endParaRPr lang="en-US" sz="1200" dirty="0"/>
+          </a:p>
+        </p:txBody>
+      </p:sp>
+      <p:sp>
+        <p:nvSpPr>
+          <p:cNvPr id="16" name="Text 14"/>
+          <p:cNvSpPr txBox="1"/>
+          <p:nvPr/>
+        </p:nvSpPr>
+        <p:spPr>
+          <a:xfrm>
+            <a:off x="731520" y="5486400"/>
             <a:ext cx="10241280" cy="457200"/>
           </a:xfrm>
           <a:prstGeom prst="rect">
@@ -32935,7 +33190,7 @@
       </p:sp>
       <p:sp>
         <p:nvSpPr>
-          <p:cNvPr id="17" name="Text 0"/>
+          <p:cNvPr id="18" name="Text 0"/>
           <p:cNvSpPr/>
           <p:nvPr>
             <p:ph idx="100" hasCustomPrompt="1"/>
@@ -34848,7 +35103,7 @@
         <p:spPr>
           <a:xfrm>
             <a:off x="731520" y="6263640"/>
-            <a:ext cx="10241280" cy="457200"/>
+            <a:ext cx="10241280" cy="365760"/>
           </a:xfrm>
           <a:prstGeom prst="rect">
             <a:avLst/>
@@ -34862,22 +35117,22 @@
           <a:p>
             <a:pPr indent="0" marL="0">
               <a:lnSpc>
-                <a:spcPts val="1250"/>
+                <a:spcPts val="1800"/>
               </a:lnSpc>
               <a:buNone/>
             </a:pPr>
             <a:r>
-              <a:rPr lang="en-US" sz="900" dirty="0">
+              <a:rPr lang="en-US" sz="1200" b="1" dirty="0">
                 <a:solidFill>
-                  <a:srgbClr val="BDBDBD"/>
+                  <a:srgbClr val="141414"/>
                 </a:solidFill>
                 <a:latin typeface="Calibri" pitchFamily="34" charset="0"/>
                 <a:ea typeface="Calibri" pitchFamily="34" charset="-122"/>
                 <a:cs typeface="Calibri" pitchFamily="34" charset="-120"/>
               </a:rPr>
-              <a:t>Filled: determined in this study. Outlined: not determined, and therefore outside every claim made in this presentation.</a:t>
-            </a:r>
-            <a:endParaRPr lang="en-US" sz="900" dirty="0"/>
+              <a:t>The filled boxes are what was determined. The outlined boxes are what was not.</a:t>
+            </a:r>
+            <a:endParaRPr lang="en-US" sz="1200" dirty="0"/>
           </a:p>
         </p:txBody>
       </p:sp>
@@ -35738,7 +35993,7 @@
                 <a:ea typeface="Calibri" pitchFamily="34" charset="-122"/>
                 <a:cs typeface="Calibri" pitchFamily="34" charset="-120"/>
               </a:rPr>
-              <a:t>Properties first, application envelope second — not the reverse.</a:t>
+              <a:t>Properties first, application envelope second.</a:t>
             </a:r>
             <a:endParaRPr lang="en-US" sz="1200" dirty="0"/>
           </a:p>
@@ -36644,7 +36899,49 @@
       </p:sp>
       <p:sp>
         <p:nvSpPr>
-          <p:cNvPr id="25" name="Text 0"/>
+          <p:cNvPr id="24" name="Text 22"/>
+          <p:cNvSpPr txBox="1"/>
+          <p:nvPr/>
+        </p:nvSpPr>
+        <p:spPr>
+          <a:xfrm>
+            <a:off x="731520" y="6126480"/>
+            <a:ext cx="10241280" cy="365760"/>
+          </a:xfrm>
+          <a:prstGeom prst="rect">
+            <a:avLst/>
+          </a:prstGeom>
+          <a:noFill/>
+          <a:ln/>
+        </p:spPr>
+        <p:txBody>
+          <a:bodyPr wrap="square" lIns="0" tIns="0" rIns="0" bIns="0" rtlCol="0" anchor="t"/>
+          <a:lstStyle/>
+          <a:p>
+            <a:pPr indent="0" marL="0">
+              <a:lnSpc>
+                <a:spcPts val="1800"/>
+              </a:lnSpc>
+              <a:buNone/>
+            </a:pPr>
+            <a:r>
+              <a:rPr lang="en-US" sz="1200" b="1" i="1" dirty="0">
+                <a:solidFill>
+                  <a:srgbClr val="141414"/>
+                </a:solidFill>
+                <a:latin typeface="Calibri" pitchFamily="34" charset="0"/>
+                <a:ea typeface="Calibri" pitchFamily="34" charset="-122"/>
+                <a:cs typeface="Calibri" pitchFamily="34" charset="-120"/>
+              </a:rPr>
+              <a:t>One to four are answered by measurement. Five is answered by argument.</a:t>
+            </a:r>
+            <a:endParaRPr lang="en-US" sz="1200" dirty="0"/>
+          </a:p>
+        </p:txBody>
+      </p:sp>
+      <p:sp>
+        <p:nvSpPr>
+          <p:cNvPr id="26" name="Text 0"/>
           <p:cNvSpPr/>
           <p:nvPr>
             <p:ph idx="100" hasCustomPrompt="1"/>

--- a/konferans-bildirisi/06-sunum/ICSMMEP26_Presentation_Unal.pptx
+++ b/konferans-bildirisi/06-sunum/ICSMMEP26_Presentation_Unal.pptx
@@ -132,19 +132,19 @@
   <p:extLst>
     <p:ext uri="{521415D9-36F7-43E2-AB2F-B90AF26B5E84}">
       <p14:sectionLst xmlns:p14="http://schemas.microsoft.com/office/powerpoint/2010/main">
-        <p14:section name="Opening" id="{ecb7be42-574a-41e6-2489-3d8976eae78d}">
+        <p14:section name="Opening" id="{c3e3b2c3-779c-41bb-f9c8-625e07b71d16}">
           <p14:sldIdLst>
             <p14:sldId id="256"/>
           </p14:sldIdLst>
         </p14:section>
-        <p14:section name="Introduction" id="{3b4a9a4a-3bc0-2d6a-0969-a3a58ed69c1f}">
+        <p14:section name="Introduction" id="{3299aa7f-e63e-26a5-0d66-53e0eeea235d}">
           <p14:sldIdLst>
             <p14:sldId id="257"/>
             <p14:sldId id="258"/>
             <p14:sldId id="259"/>
           </p14:sldIdLst>
         </p14:section>
-        <p14:section name="Framework" id="{73eef4b4-8968-5ea6-1695-72a7aee9c38d}">
+        <p14:section name="Framework" id="{a8621a09-bd2c-8ce0-392c-55607839cbf7}">
           <p14:sldIdLst>
             <p14:sldId id="260"/>
             <p14:sldId id="261"/>
@@ -153,7 +153,7 @@
             <p14:sldId id="264"/>
           </p14:sldIdLst>
         </p14:section>
-        <p14:section name="Protocol" id="{a11a7e4b-df17-c634-3e77-946e762c35ab}">
+        <p14:section name="Protocol" id="{18847ec7-a132-8810-b865-f68fa0a05008}">
           <p14:sldIdLst>
             <p14:sldId id="265"/>
             <p14:sldId id="266"/>
@@ -161,7 +161,7 @@
             <p14:sldId id="268"/>
           </p14:sldIdLst>
         </p14:section>
-        <p14:section name="Results" id="{4221b996-676d-17b8-f2d8-5087c6c0cc81}">
+        <p14:section name="Results" id="{9e69a1a5-5f58-5588-7d48-7a66dc7e49c6}">
           <p14:sldIdLst>
             <p14:sldId id="269"/>
             <p14:sldId id="270"/>
@@ -171,19 +171,19 @@
             <p14:sldId id="274"/>
           </p14:sldIdLst>
         </p14:section>
-        <p14:section name="Benchmark" id="{a6f3b86a-a6a7-3a0e-8d88-c5d455037dd0}">
+        <p14:section name="Benchmark" id="{7612a3ff-9d15-d7ab-8edd-07a924d9af31}">
           <p14:sldIdLst>
             <p14:sldId id="275"/>
             <p14:sldId id="276"/>
             <p14:sldId id="277"/>
           </p14:sldIdLst>
         </p14:section>
-        <p14:section name="Application" id="{232fec8e-2609-dc28-9bcf-31d90ee285bc}">
+        <p14:section name="Application" id="{6c2c4233-59d3-52dd-7013-4544b88d143a}">
           <p14:sldIdLst>
             <p14:sldId id="278"/>
           </p14:sldIdLst>
         </p14:section>
-        <p14:section name="Closing" id="{572432be-297f-275d-fa52-de9c5cc62436}">
+        <p14:section name="Closing" id="{6fb1cfa8-10b0-3246-1877-ffd9fc52c2c7}">
           <p14:sldIdLst>
             <p14:sldId id="279"/>
             <p14:sldId id="280"/>
@@ -3592,48 +3592,6 @@
           <a:chExt cx="0" cy="0"/>
         </a:xfrm>
       </p:grpSpPr>
-      <p:sp>
-        <p:nvSpPr>
-          <p:cNvPr id="2" name="Text 0"/>
-          <p:cNvSpPr/>
-          <p:nvPr>
-            <p:ph idx="100" hasCustomPrompt="1"/>
-          </p:nvPr>
-        </p:nvSpPr>
-        <p:spPr>
-          <a:xfrm>
-            <a:off x="11292840" y="6355080"/>
-            <a:ext cx="365760" cy="237744"/>
-          </a:xfrm>
-          <a:prstGeom prst="rect">
-            <a:avLst/>
-          </a:prstGeom>
-          <a:noFill/>
-          <a:ln/>
-        </p:spPr>
-        <p:txBody>
-          <a:bodyPr wrap="square" rtlCol="0"/>
-          <a:lstStyle>
-            <a:lvl1pPr algn="r" indent="0" marL="0">
-              <a:buNone/>
-              <a:defRPr lang="en-US" sz="850" dirty="0">
-                <a:solidFill>
-                  <a:srgbClr val="BDBDBD"/>
-                </a:solidFill>
-                <a:latin typeface="Calibri" pitchFamily="34" charset="0"/>
-                <a:ea typeface="Calibri" pitchFamily="34" charset="-122"/>
-                <a:cs typeface="Calibri" pitchFamily="34" charset="-120"/>
-              </a:defRPr>
-            </a:lvl1pPr>
-          </a:lstStyle>
-          <a:p>
-            <a:pPr algn="r" indent="0" marL="0">
-              <a:buNone/>
-            </a:pPr>
-            <a:endParaRPr lang="en-US" sz="850" dirty="0"/>
-          </a:p>
-        </p:txBody>
-      </p:sp>
     </p:spTree>
   </p:cSld>
   <p:clrMapOvr>
@@ -3666,48 +3624,6 @@
           <a:chExt cx="0" cy="0"/>
         </a:xfrm>
       </p:grpSpPr>
-      <p:sp>
-        <p:nvSpPr>
-          <p:cNvPr id="2" name="Text 0"/>
-          <p:cNvSpPr/>
-          <p:nvPr>
-            <p:ph idx="100" hasCustomPrompt="1"/>
-          </p:nvPr>
-        </p:nvSpPr>
-        <p:spPr>
-          <a:xfrm>
-            <a:off x="11292840" y="6355080"/>
-            <a:ext cx="365760" cy="237744"/>
-          </a:xfrm>
-          <a:prstGeom prst="rect">
-            <a:avLst/>
-          </a:prstGeom>
-          <a:noFill/>
-          <a:ln/>
-        </p:spPr>
-        <p:txBody>
-          <a:bodyPr wrap="square" rtlCol="0"/>
-          <a:lstStyle>
-            <a:lvl1pPr algn="r" indent="0" marL="0">
-              <a:buNone/>
-              <a:defRPr lang="en-US" sz="850" dirty="0">
-                <a:solidFill>
-                  <a:srgbClr val="5A5A5A"/>
-                </a:solidFill>
-                <a:latin typeface="Calibri" pitchFamily="34" charset="0"/>
-                <a:ea typeface="Calibri" pitchFamily="34" charset="-122"/>
-                <a:cs typeface="Calibri" pitchFamily="34" charset="-120"/>
-              </a:defRPr>
-            </a:lvl1pPr>
-          </a:lstStyle>
-          <a:p>
-            <a:pPr algn="r" indent="0" marL="0">
-              <a:buNone/>
-            </a:pPr>
-            <a:endParaRPr lang="en-US" sz="850" dirty="0"/>
-          </a:p>
-        </p:txBody>
-      </p:sp>
     </p:spTree>
   </p:cSld>
   <p:clrMapOvr>
@@ -4013,9 +3929,48 @@
           <a:chExt cx="0" cy="0"/>
         </a:xfrm>
       </p:grpSpPr>
+      <p:sp>
+        <p:nvSpPr>
+          <p:cNvPr id="2" name="Text 0"/>
+          <p:cNvSpPr txBox="1"/>
+          <p:nvPr/>
+        </p:nvSpPr>
+        <p:spPr>
+          <a:xfrm>
+            <a:off x="10972800" y="6217920"/>
+            <a:ext cx="685800" cy="365760"/>
+          </a:xfrm>
+          <a:prstGeom prst="rect">
+            <a:avLst/>
+          </a:prstGeom>
+          <a:noFill/>
+          <a:ln/>
+        </p:spPr>
+        <p:txBody>
+          <a:bodyPr wrap="square" lIns="0" tIns="0" rIns="0" bIns="0" rtlCol="0" anchor="ctr"/>
+          <a:lstStyle/>
+          <a:p>
+            <a:pPr algn="r" indent="0" marL="0">
+              <a:buNone/>
+            </a:pPr>
+            <a:r>
+              <a:rPr lang="en-US" sz="1300" b="1" dirty="0">
+                <a:solidFill>
+                  <a:srgbClr val="6E6E6E"/>
+                </a:solidFill>
+                <a:latin typeface="Calibri" pitchFamily="34" charset="0"/>
+                <a:ea typeface="Calibri" pitchFamily="34" charset="-122"/>
+                <a:cs typeface="Calibri" pitchFamily="34" charset="-120"/>
+              </a:rPr>
+              <a:t>1</a:t>
+            </a:r>
+            <a:endParaRPr lang="en-US" sz="1300" dirty="0"/>
+          </a:p>
+        </p:txBody>
+      </p:sp>
       <p:pic>
         <p:nvPicPr>
-          <p:cNvPr id="2" name="cov" descr="/home/user/sanat-ve-mekan/konferans-bildirisi/03-gorseller/02-panel-elde.png">    </p:cNvPr>
+          <p:cNvPr id="3" name="cov" descr="/home/user/sanat-ve-mekan/konferans-bildirisi/03-gorseller/02-panel-elde.png">    </p:cNvPr>
           <p:cNvPicPr>
             <a:picLocks noChangeAspect="1"/>
           </p:cNvPicPr>
@@ -4039,7 +3994,7 @@
       </p:pic>
       <p:sp>
         <p:nvSpPr>
-          <p:cNvPr id="3" name="panel"/>
+          <p:cNvPr id="4" name="panel"/>
           <p:cNvSpPr/>
           <p:nvPr/>
         </p:nvSpPr>
@@ -4066,7 +4021,7 @@
       </p:sp>
       <p:sp>
         <p:nvSpPr>
-          <p:cNvPr id="4" name="Text 1"/>
+          <p:cNvPr id="5" name="Text 2"/>
           <p:cNvSpPr txBox="1"/>
           <p:nvPr/>
         </p:nvSpPr>
@@ -4128,7 +4083,7 @@
       </p:sp>
       <p:sp>
         <p:nvSpPr>
-          <p:cNvPr id="5" name="Text 2"/>
+          <p:cNvPr id="6" name="Text 3"/>
           <p:cNvSpPr txBox="1"/>
           <p:nvPr/>
         </p:nvSpPr>
@@ -4170,7 +4125,7 @@
       </p:sp>
       <p:sp>
         <p:nvSpPr>
-          <p:cNvPr id="6" name="ru0.854.95"/>
+          <p:cNvPr id="7" name="ru0.854.95"/>
           <p:cNvSpPr/>
           <p:nvPr/>
         </p:nvSpPr>
@@ -4197,7 +4152,7 @@
       </p:sp>
       <p:sp>
         <p:nvSpPr>
-          <p:cNvPr id="7" name="Text 4"/>
+          <p:cNvPr id="8" name="Text 5"/>
           <p:cNvSpPr txBox="1"/>
           <p:nvPr/>
         </p:nvSpPr>
@@ -4270,7 +4225,7 @@
       </p:sp>
       <p:sp>
         <p:nvSpPr>
-          <p:cNvPr id="8" name="Text 5"/>
+          <p:cNvPr id="9" name="Text 6"/>
           <p:cNvSpPr txBox="1"/>
           <p:nvPr/>
         </p:nvSpPr>
@@ -4340,6 +4295,45 @@
         </p:nvSpPr>
         <p:spPr>
           <a:xfrm>
+            <a:off x="10972800" y="6217920"/>
+            <a:ext cx="685800" cy="365760"/>
+          </a:xfrm>
+          <a:prstGeom prst="rect">
+            <a:avLst/>
+          </a:prstGeom>
+          <a:noFill/>
+          <a:ln/>
+        </p:spPr>
+        <p:txBody>
+          <a:bodyPr wrap="square" lIns="0" tIns="0" rIns="0" bIns="0" rtlCol="0" anchor="ctr"/>
+          <a:lstStyle/>
+          <a:p>
+            <a:pPr algn="r" indent="0" marL="0">
+              <a:buNone/>
+            </a:pPr>
+            <a:r>
+              <a:rPr lang="en-US" sz="1300" b="1" dirty="0">
+                <a:solidFill>
+                  <a:srgbClr val="8C8C8C"/>
+                </a:solidFill>
+                <a:latin typeface="Calibri" pitchFamily="34" charset="0"/>
+                <a:ea typeface="Calibri" pitchFamily="34" charset="-122"/>
+                <a:cs typeface="Calibri" pitchFamily="34" charset="-120"/>
+              </a:rPr>
+              <a:t>10</a:t>
+            </a:r>
+            <a:endParaRPr lang="en-US" sz="1300" dirty="0"/>
+          </a:p>
+        </p:txBody>
+      </p:sp>
+      <p:sp>
+        <p:nvSpPr>
+          <p:cNvPr id="3" name="Text 1"/>
+          <p:cNvSpPr txBox="1"/>
+          <p:nvPr/>
+        </p:nvSpPr>
+        <p:spPr>
+          <a:xfrm>
             <a:off x="731520" y="502920"/>
             <a:ext cx="10698480" cy="457200"/>
           </a:xfrm>
@@ -4373,7 +4367,7 @@
       </p:sp>
       <p:sp>
         <p:nvSpPr>
-          <p:cNvPr id="3" name="Text 1"/>
+          <p:cNvPr id="4" name="Text 2"/>
           <p:cNvSpPr txBox="1"/>
           <p:nvPr/>
         </p:nvSpPr>
@@ -4412,7 +4406,7 @@
       </p:sp>
       <p:sp>
         <p:nvSpPr>
-          <p:cNvPr id="4" name="pc0"/>
+          <p:cNvPr id="5" name="pc0"/>
           <p:cNvSpPr/>
           <p:nvPr/>
         </p:nvSpPr>
@@ -4437,7 +4431,7 @@
       </p:sp>
       <p:sp>
         <p:nvSpPr>
-          <p:cNvPr id="5" name="Text 3"/>
+          <p:cNvPr id="6" name="Text 4"/>
           <p:cNvSpPr txBox="1"/>
           <p:nvPr/>
         </p:nvSpPr>
@@ -4476,7 +4470,7 @@
       </p:sp>
       <p:sp>
         <p:nvSpPr>
-          <p:cNvPr id="6" name="Text 4"/>
+          <p:cNvPr id="7" name="Text 5"/>
           <p:cNvSpPr txBox="1"/>
           <p:nvPr/>
         </p:nvSpPr>
@@ -4518,7 +4512,7 @@
       </p:sp>
       <p:sp>
         <p:nvSpPr>
-          <p:cNvPr id="7" name="Text 5"/>
+          <p:cNvPr id="8" name="Text 6"/>
           <p:cNvSpPr txBox="1"/>
           <p:nvPr/>
         </p:nvSpPr>
@@ -4557,7 +4551,7 @@
       </p:sp>
       <p:sp>
         <p:nvSpPr>
-          <p:cNvPr id="8" name="pa0"/>
+          <p:cNvPr id="9" name="pa0"/>
           <p:cNvSpPr/>
           <p:nvPr/>
         </p:nvSpPr>
@@ -4584,7 +4578,7 @@
       </p:sp>
       <p:sp>
         <p:nvSpPr>
-          <p:cNvPr id="9" name="pc1"/>
+          <p:cNvPr id="10" name="pc1"/>
           <p:cNvSpPr/>
           <p:nvPr/>
         </p:nvSpPr>
@@ -4609,7 +4603,7 @@
       </p:sp>
       <p:sp>
         <p:nvSpPr>
-          <p:cNvPr id="10" name="Text 8"/>
+          <p:cNvPr id="11" name="Text 9"/>
           <p:cNvSpPr txBox="1"/>
           <p:nvPr/>
         </p:nvSpPr>
@@ -4648,7 +4642,7 @@
       </p:sp>
       <p:sp>
         <p:nvSpPr>
-          <p:cNvPr id="11" name="Text 9"/>
+          <p:cNvPr id="12" name="Text 10"/>
           <p:cNvSpPr txBox="1"/>
           <p:nvPr/>
         </p:nvSpPr>
@@ -4690,7 +4684,7 @@
       </p:sp>
       <p:sp>
         <p:nvSpPr>
-          <p:cNvPr id="12" name="Text 10"/>
+          <p:cNvPr id="13" name="Text 11"/>
           <p:cNvSpPr txBox="1"/>
           <p:nvPr/>
         </p:nvSpPr>
@@ -4729,7 +4723,7 @@
       </p:sp>
       <p:sp>
         <p:nvSpPr>
-          <p:cNvPr id="13" name="pa1"/>
+          <p:cNvPr id="14" name="pa1"/>
           <p:cNvSpPr/>
           <p:nvPr/>
         </p:nvSpPr>
@@ -4756,7 +4750,7 @@
       </p:sp>
       <p:sp>
         <p:nvSpPr>
-          <p:cNvPr id="14" name="pc2"/>
+          <p:cNvPr id="15" name="pc2"/>
           <p:cNvSpPr/>
           <p:nvPr/>
         </p:nvSpPr>
@@ -4781,7 +4775,7 @@
       </p:sp>
       <p:sp>
         <p:nvSpPr>
-          <p:cNvPr id="15" name="Text 13"/>
+          <p:cNvPr id="16" name="Text 14"/>
           <p:cNvSpPr txBox="1"/>
           <p:nvPr/>
         </p:nvSpPr>
@@ -4820,7 +4814,7 @@
       </p:sp>
       <p:sp>
         <p:nvSpPr>
-          <p:cNvPr id="16" name="Text 14"/>
+          <p:cNvPr id="17" name="Text 15"/>
           <p:cNvSpPr txBox="1"/>
           <p:nvPr/>
         </p:nvSpPr>
@@ -4862,7 +4856,7 @@
       </p:sp>
       <p:sp>
         <p:nvSpPr>
-          <p:cNvPr id="17" name="Text 15"/>
+          <p:cNvPr id="18" name="Text 16"/>
           <p:cNvSpPr txBox="1"/>
           <p:nvPr/>
         </p:nvSpPr>
@@ -4901,7 +4895,7 @@
       </p:sp>
       <p:sp>
         <p:nvSpPr>
-          <p:cNvPr id="18" name="pa2"/>
+          <p:cNvPr id="19" name="pa2"/>
           <p:cNvSpPr/>
           <p:nvPr/>
         </p:nvSpPr>
@@ -4928,7 +4922,7 @@
       </p:sp>
       <p:sp>
         <p:nvSpPr>
-          <p:cNvPr id="19" name="pc3"/>
+          <p:cNvPr id="20" name="pc3"/>
           <p:cNvSpPr/>
           <p:nvPr/>
         </p:nvSpPr>
@@ -4953,7 +4947,7 @@
       </p:sp>
       <p:sp>
         <p:nvSpPr>
-          <p:cNvPr id="20" name="Text 18"/>
+          <p:cNvPr id="21" name="Text 19"/>
           <p:cNvSpPr txBox="1"/>
           <p:nvPr/>
         </p:nvSpPr>
@@ -4992,7 +4986,7 @@
       </p:sp>
       <p:sp>
         <p:nvSpPr>
-          <p:cNvPr id="21" name="Text 19"/>
+          <p:cNvPr id="22" name="Text 20"/>
           <p:cNvSpPr txBox="1"/>
           <p:nvPr/>
         </p:nvSpPr>
@@ -5034,7 +5028,7 @@
       </p:sp>
       <p:sp>
         <p:nvSpPr>
-          <p:cNvPr id="22" name="Text 20"/>
+          <p:cNvPr id="23" name="Text 21"/>
           <p:cNvSpPr txBox="1"/>
           <p:nvPr/>
         </p:nvSpPr>
@@ -5073,7 +5067,7 @@
       </p:sp>
       <p:sp>
         <p:nvSpPr>
-          <p:cNvPr id="23" name="pa3"/>
+          <p:cNvPr id="24" name="pa3"/>
           <p:cNvSpPr/>
           <p:nvPr/>
         </p:nvSpPr>
@@ -5100,7 +5094,7 @@
       </p:sp>
       <p:sp>
         <p:nvSpPr>
-          <p:cNvPr id="24" name="pc4"/>
+          <p:cNvPr id="25" name="pc4"/>
           <p:cNvSpPr/>
           <p:nvPr/>
         </p:nvSpPr>
@@ -5125,7 +5119,7 @@
       </p:sp>
       <p:sp>
         <p:nvSpPr>
-          <p:cNvPr id="25" name="Text 23"/>
+          <p:cNvPr id="26" name="Text 24"/>
           <p:cNvSpPr txBox="1"/>
           <p:nvPr/>
         </p:nvSpPr>
@@ -5164,7 +5158,7 @@
       </p:sp>
       <p:sp>
         <p:nvSpPr>
-          <p:cNvPr id="26" name="Text 24"/>
+          <p:cNvPr id="27" name="Text 25"/>
           <p:cNvSpPr txBox="1"/>
           <p:nvPr/>
         </p:nvSpPr>
@@ -5206,7 +5200,7 @@
       </p:sp>
       <p:sp>
         <p:nvSpPr>
-          <p:cNvPr id="27" name="Text 25"/>
+          <p:cNvPr id="28" name="Text 26"/>
           <p:cNvSpPr txBox="1"/>
           <p:nvPr/>
         </p:nvSpPr>
@@ -5245,7 +5239,7 @@
       </p:sp>
       <p:sp>
         <p:nvSpPr>
-          <p:cNvPr id="28" name="ru0.84.75"/>
+          <p:cNvPr id="29" name="ru0.84.75"/>
           <p:cNvSpPr/>
           <p:nvPr/>
         </p:nvSpPr>
@@ -5272,7 +5266,7 @@
       </p:sp>
       <p:sp>
         <p:nvSpPr>
-          <p:cNvPr id="29" name="Text 27"/>
+          <p:cNvPr id="30" name="Text 28"/>
           <p:cNvSpPr txBox="1"/>
           <p:nvPr/>
         </p:nvSpPr>
@@ -5306,7 +5300,7 @@
                 <a:ea typeface="Calibri" pitchFamily="34" charset="-122"/>
                 <a:cs typeface="Calibri" pitchFamily="34" charset="-120"/>
               </a:rPr>
-              <a:t>I chose 150 µm so that the mineral phase here would be comparable with the eggshell polymer-composite literature.</a:t>
+              <a:t>The 150 µm fraction was selected so that the mineral phase would be comparable with the eggshell polymer-composite literature.</a:t>
             </a:r>
             <a:endParaRPr lang="en-US" sz="1200" dirty="0"/>
           </a:p>
@@ -5314,7 +5308,7 @@
       </p:sp>
       <p:sp>
         <p:nvSpPr>
-          <p:cNvPr id="30" name="Text 28"/>
+          <p:cNvPr id="31" name="Text 29"/>
           <p:cNvSpPr txBox="1"/>
           <p:nvPr/>
         </p:nvSpPr>
@@ -5351,36 +5345,6 @@
               <a:t>The heat step is decontamination and drying rather than sterilisation, because sterility was never verified.</a:t>
             </a:r>
             <a:endParaRPr lang="en-US" sz="1200" dirty="0"/>
-          </a:p>
-        </p:txBody>
-      </p:sp>
-      <p:sp>
-        <p:nvSpPr>
-          <p:cNvPr id="32" name="Text 0"/>
-          <p:cNvSpPr/>
-          <p:nvPr>
-            <p:ph idx="100" hasCustomPrompt="1"/>
-          </p:nvPr>
-        </p:nvSpPr>
-        <p:spPr>
-          <a:xfrm>
-            <a:off x="11292840" y="6355080"/>
-            <a:ext cx="365760" cy="237744"/>
-          </a:xfrm>
-          <a:prstGeom prst="rect">
-            <a:avLst/>
-          </a:prstGeom>
-          <a:noFill/>
-          <a:ln/>
-        </p:spPr>
-        <p:txBody>
-          <a:bodyPr wrap="square" rtlCol="0"/>
-          <a:lstStyle/>
-          <a:p>
-            <a:pPr algn="r" indent="0" marL="0">
-              <a:buNone/>
-            </a:pPr>
-            <a:endParaRPr lang="en-US" sz="850" dirty="0"/>
           </a:p>
         </p:txBody>
       </p:sp>
@@ -5417,6 +5381,45 @@
         </p:nvSpPr>
         <p:spPr>
           <a:xfrm>
+            <a:off x="10972800" y="6217920"/>
+            <a:ext cx="685800" cy="365760"/>
+          </a:xfrm>
+          <a:prstGeom prst="rect">
+            <a:avLst/>
+          </a:prstGeom>
+          <a:noFill/>
+          <a:ln/>
+        </p:spPr>
+        <p:txBody>
+          <a:bodyPr wrap="square" lIns="0" tIns="0" rIns="0" bIns="0" rtlCol="0" anchor="ctr"/>
+          <a:lstStyle/>
+          <a:p>
+            <a:pPr algn="r" indent="0" marL="0">
+              <a:buNone/>
+            </a:pPr>
+            <a:r>
+              <a:rPr lang="en-US" sz="1300" b="1" dirty="0">
+                <a:solidFill>
+                  <a:srgbClr val="8C8C8C"/>
+                </a:solidFill>
+                <a:latin typeface="Calibri" pitchFamily="34" charset="0"/>
+                <a:ea typeface="Calibri" pitchFamily="34" charset="-122"/>
+                <a:cs typeface="Calibri" pitchFamily="34" charset="-120"/>
+              </a:rPr>
+              <a:t>11</a:t>
+            </a:r>
+            <a:endParaRPr lang="en-US" sz="1300" dirty="0"/>
+          </a:p>
+        </p:txBody>
+      </p:sp>
+      <p:sp>
+        <p:nvSpPr>
+          <p:cNvPr id="3" name="Text 1"/>
+          <p:cNvSpPr txBox="1"/>
+          <p:nvPr/>
+        </p:nvSpPr>
+        <p:spPr>
+          <a:xfrm>
             <a:off x="731520" y="502920"/>
             <a:ext cx="10698480" cy="457200"/>
           </a:xfrm>
@@ -5450,7 +5453,7 @@
       </p:sp>
       <p:sp>
         <p:nvSpPr>
-          <p:cNvPr id="3" name="Text 1"/>
+          <p:cNvPr id="4" name="Text 2"/>
           <p:cNvSpPr txBox="1"/>
           <p:nvPr/>
         </p:nvSpPr>
@@ -5489,7 +5492,7 @@
       </p:sp>
       <p:sp>
         <p:nvSpPr>
-          <p:cNvPr id="4" name="tv"/>
+          <p:cNvPr id="5" name="tv"/>
           <p:cNvSpPr/>
           <p:nvPr/>
         </p:nvSpPr>
@@ -5516,7 +5519,7 @@
       </p:sp>
       <p:sp>
         <p:nvSpPr>
-          <p:cNvPr id="5" name="th"/>
+          <p:cNvPr id="6" name="th"/>
           <p:cNvSpPr/>
           <p:nvPr/>
         </p:nvSpPr>
@@ -5543,7 +5546,7 @@
       </p:sp>
       <p:sp>
         <p:nvSpPr>
-          <p:cNvPr id="6" name="ramp"/>
+          <p:cNvPr id="7" name="ramp"/>
           <p:cNvSpPr/>
           <p:nvPr/>
         </p:nvSpPr>
@@ -5566,7 +5569,7 @@
       </p:sp>
       <p:sp>
         <p:nvSpPr>
-          <p:cNvPr id="7" name="pl95"/>
+          <p:cNvPr id="8" name="pl95"/>
           <p:cNvSpPr/>
           <p:nvPr/>
         </p:nvSpPr>
@@ -5593,7 +5596,7 @@
       </p:sp>
       <p:sp>
         <p:nvSpPr>
-          <p:cNvPr id="8" name="drop"/>
+          <p:cNvPr id="9" name="drop"/>
           <p:cNvSpPr/>
           <p:nvPr/>
         </p:nvSpPr>
@@ -5616,7 +5619,7 @@
       </p:sp>
       <p:sp>
         <p:nvSpPr>
-          <p:cNvPr id="9" name="pl80"/>
+          <p:cNvPr id="10" name="pl80"/>
           <p:cNvSpPr/>
           <p:nvPr/>
         </p:nvSpPr>
@@ -5643,7 +5646,7 @@
       </p:sp>
       <p:sp>
         <p:nvSpPr>
-          <p:cNvPr id="10" name="Text 8"/>
+          <p:cNvPr id="11" name="Text 9"/>
           <p:cNvSpPr txBox="1"/>
           <p:nvPr/>
         </p:nvSpPr>
@@ -5682,7 +5685,7 @@
       </p:sp>
       <p:sp>
         <p:nvSpPr>
-          <p:cNvPr id="11" name="Text 9"/>
+          <p:cNvPr id="12" name="Text 10"/>
           <p:cNvSpPr txBox="1"/>
           <p:nvPr/>
         </p:nvSpPr>
@@ -5721,7 +5724,7 @@
       </p:sp>
       <p:sp>
         <p:nvSpPr>
-          <p:cNvPr id="12" name="Text 10"/>
+          <p:cNvPr id="13" name="Text 11"/>
           <p:cNvSpPr txBox="1"/>
           <p:nvPr/>
         </p:nvSpPr>
@@ -5763,7 +5766,7 @@
       </p:sp>
       <p:sp>
         <p:nvSpPr>
-          <p:cNvPr id="13" name="Text 11"/>
+          <p:cNvPr id="14" name="Text 12"/>
           <p:cNvSpPr txBox="1"/>
           <p:nvPr/>
         </p:nvSpPr>
@@ -5802,7 +5805,7 @@
       </p:sp>
       <p:sp>
         <p:nvSpPr>
-          <p:cNvPr id="14" name="mk0"/>
+          <p:cNvPr id="15" name="mk0"/>
           <p:cNvSpPr/>
           <p:nvPr/>
         </p:nvSpPr>
@@ -5829,7 +5832,7 @@
       </p:sp>
       <p:sp>
         <p:nvSpPr>
-          <p:cNvPr id="15" name="Text 13"/>
+          <p:cNvPr id="16" name="Text 14"/>
           <p:cNvSpPr txBox="1"/>
           <p:nvPr/>
         </p:nvSpPr>
@@ -5868,7 +5871,7 @@
       </p:sp>
       <p:sp>
         <p:nvSpPr>
-          <p:cNvPr id="16" name="Text 14"/>
+          <p:cNvPr id="17" name="Text 15"/>
           <p:cNvSpPr txBox="1"/>
           <p:nvPr/>
         </p:nvSpPr>
@@ -5910,7 +5913,7 @@
       </p:sp>
       <p:sp>
         <p:nvSpPr>
-          <p:cNvPr id="17" name="dl0"/>
+          <p:cNvPr id="18" name="dl0"/>
           <p:cNvSpPr/>
           <p:nvPr/>
         </p:nvSpPr>
@@ -5937,7 +5940,7 @@
       </p:sp>
       <p:sp>
         <p:nvSpPr>
-          <p:cNvPr id="18" name="mk1"/>
+          <p:cNvPr id="19" name="mk1"/>
           <p:cNvSpPr/>
           <p:nvPr/>
         </p:nvSpPr>
@@ -5964,7 +5967,7 @@
       </p:sp>
       <p:sp>
         <p:nvSpPr>
-          <p:cNvPr id="19" name="Text 17"/>
+          <p:cNvPr id="20" name="Text 18"/>
           <p:cNvSpPr txBox="1"/>
           <p:nvPr/>
         </p:nvSpPr>
@@ -6003,7 +6006,7 @@
       </p:sp>
       <p:sp>
         <p:nvSpPr>
-          <p:cNvPr id="20" name="Text 18"/>
+          <p:cNvPr id="21" name="Text 19"/>
           <p:cNvSpPr txBox="1"/>
           <p:nvPr/>
         </p:nvSpPr>
@@ -6045,7 +6048,7 @@
       </p:sp>
       <p:sp>
         <p:nvSpPr>
-          <p:cNvPr id="21" name="dl1"/>
+          <p:cNvPr id="22" name="dl1"/>
           <p:cNvSpPr/>
           <p:nvPr/>
         </p:nvSpPr>
@@ -6072,7 +6075,7 @@
       </p:sp>
       <p:sp>
         <p:nvSpPr>
-          <p:cNvPr id="22" name="mk2"/>
+          <p:cNvPr id="23" name="mk2"/>
           <p:cNvSpPr/>
           <p:nvPr/>
         </p:nvSpPr>
@@ -6099,7 +6102,7 @@
       </p:sp>
       <p:sp>
         <p:nvSpPr>
-          <p:cNvPr id="23" name="Text 21"/>
+          <p:cNvPr id="24" name="Text 22"/>
           <p:cNvSpPr txBox="1"/>
           <p:nvPr/>
         </p:nvSpPr>
@@ -6138,7 +6141,7 @@
       </p:sp>
       <p:sp>
         <p:nvSpPr>
-          <p:cNvPr id="24" name="Text 22"/>
+          <p:cNvPr id="25" name="Text 23"/>
           <p:cNvSpPr txBox="1"/>
           <p:nvPr/>
         </p:nvSpPr>
@@ -6180,7 +6183,7 @@
       </p:sp>
       <p:sp>
         <p:nvSpPr>
-          <p:cNvPr id="25" name="dl2"/>
+          <p:cNvPr id="26" name="dl2"/>
           <p:cNvSpPr/>
           <p:nvPr/>
         </p:nvSpPr>
@@ -6207,7 +6210,7 @@
       </p:sp>
       <p:sp>
         <p:nvSpPr>
-          <p:cNvPr id="26" name="mk3"/>
+          <p:cNvPr id="27" name="mk3"/>
           <p:cNvSpPr/>
           <p:nvPr/>
         </p:nvSpPr>
@@ -6234,7 +6237,7 @@
       </p:sp>
       <p:sp>
         <p:nvSpPr>
-          <p:cNvPr id="27" name="Text 25"/>
+          <p:cNvPr id="28" name="Text 26"/>
           <p:cNvSpPr txBox="1"/>
           <p:nvPr/>
         </p:nvSpPr>
@@ -6273,7 +6276,7 @@
       </p:sp>
       <p:sp>
         <p:nvSpPr>
-          <p:cNvPr id="28" name="Text 26"/>
+          <p:cNvPr id="29" name="Text 27"/>
           <p:cNvSpPr txBox="1"/>
           <p:nvPr/>
         </p:nvSpPr>
@@ -6315,7 +6318,7 @@
       </p:sp>
       <p:sp>
         <p:nvSpPr>
-          <p:cNvPr id="29" name="dl3"/>
+          <p:cNvPr id="30" name="dl3"/>
           <p:cNvSpPr/>
           <p:nvPr/>
         </p:nvSpPr>
@@ -6342,7 +6345,7 @@
       </p:sp>
       <p:sp>
         <p:nvSpPr>
-          <p:cNvPr id="30" name="Text 28"/>
+          <p:cNvPr id="31" name="Text 29"/>
           <p:cNvSpPr txBox="1"/>
           <p:nvPr/>
         </p:nvSpPr>
@@ -6376,7 +6379,7 @@
                 <a:ea typeface="Calibri" pitchFamily="34" charset="-122"/>
                 <a:cs typeface="Calibri" pitchFamily="34" charset="-120"/>
               </a:rPr>
-              <a:t>Agar is thermoreversible: it melts when you heat it and sets again as it cools, so no hardener and no cure temperature are needed.</a:t>
+              <a:t>Agar is thermoreversible: it melts on heating and sets again on cooling, so no hardener and no cure temperature are needed.</a:t>
             </a:r>
             <a:endParaRPr lang="en-US" sz="1200" dirty="0"/>
           </a:p>
@@ -6384,7 +6387,7 @@
       </p:sp>
       <p:sp>
         <p:nvSpPr>
-          <p:cNvPr id="31" name="Text 29"/>
+          <p:cNvPr id="32" name="Text 30"/>
           <p:cNvSpPr txBox="1"/>
           <p:nvPr/>
         </p:nvSpPr>
@@ -6426,14 +6429,14 @@
       </p:sp>
       <p:sp>
         <p:nvSpPr>
-          <p:cNvPr id="32" name="Text 30"/>
+          <p:cNvPr id="33" name="Text 31"/>
           <p:cNvSpPr txBox="1"/>
           <p:nvPr/>
         </p:nvSpPr>
         <p:spPr>
           <a:xfrm>
             <a:off x="731520" y="6583680"/>
-            <a:ext cx="10241280" cy="457200"/>
+            <a:ext cx="10058400" cy="457200"/>
           </a:xfrm>
           <a:prstGeom prst="rect">
             <a:avLst/>
@@ -6463,36 +6466,6 @@
               <a:t>Schematic. The set points and the total time are recorded; the ramp rates are not, and stirring was manual.</a:t>
             </a:r>
             <a:endParaRPr lang="en-US" sz="900" dirty="0"/>
-          </a:p>
-        </p:txBody>
-      </p:sp>
-      <p:sp>
-        <p:nvSpPr>
-          <p:cNvPr id="34" name="Text 0"/>
-          <p:cNvSpPr/>
-          <p:nvPr>
-            <p:ph idx="100" hasCustomPrompt="1"/>
-          </p:nvPr>
-        </p:nvSpPr>
-        <p:spPr>
-          <a:xfrm>
-            <a:off x="11292840" y="6355080"/>
-            <a:ext cx="365760" cy="237744"/>
-          </a:xfrm>
-          <a:prstGeom prst="rect">
-            <a:avLst/>
-          </a:prstGeom>
-          <a:noFill/>
-          <a:ln/>
-        </p:spPr>
-        <p:txBody>
-          <a:bodyPr wrap="square" rtlCol="0"/>
-          <a:lstStyle/>
-          <a:p>
-            <a:pPr algn="r" indent="0" marL="0">
-              <a:buNone/>
-            </a:pPr>
-            <a:endParaRPr lang="en-US" sz="850" dirty="0"/>
           </a:p>
         </p:txBody>
       </p:sp>
@@ -6529,6 +6502,45 @@
         </p:nvSpPr>
         <p:spPr>
           <a:xfrm>
+            <a:off x="10972800" y="6217920"/>
+            <a:ext cx="685800" cy="365760"/>
+          </a:xfrm>
+          <a:prstGeom prst="rect">
+            <a:avLst/>
+          </a:prstGeom>
+          <a:noFill/>
+          <a:ln/>
+        </p:spPr>
+        <p:txBody>
+          <a:bodyPr wrap="square" lIns="0" tIns="0" rIns="0" bIns="0" rtlCol="0" anchor="ctr"/>
+          <a:lstStyle/>
+          <a:p>
+            <a:pPr algn="r" indent="0" marL="0">
+              <a:buNone/>
+            </a:pPr>
+            <a:r>
+              <a:rPr lang="en-US" sz="1300" b="1" dirty="0">
+                <a:solidFill>
+                  <a:srgbClr val="8C8C8C"/>
+                </a:solidFill>
+                <a:latin typeface="Calibri" pitchFamily="34" charset="0"/>
+                <a:ea typeface="Calibri" pitchFamily="34" charset="-122"/>
+                <a:cs typeface="Calibri" pitchFamily="34" charset="-120"/>
+              </a:rPr>
+              <a:t>12</a:t>
+            </a:r>
+            <a:endParaRPr lang="en-US" sz="1300" dirty="0"/>
+          </a:p>
+        </p:txBody>
+      </p:sp>
+      <p:sp>
+        <p:nvSpPr>
+          <p:cNvPr id="3" name="Text 1"/>
+          <p:cNvSpPr txBox="1"/>
+          <p:nvPr/>
+        </p:nvSpPr>
+        <p:spPr>
+          <a:xfrm>
             <a:off x="731520" y="502920"/>
             <a:ext cx="10698480" cy="457200"/>
           </a:xfrm>
@@ -6562,7 +6574,7 @@
       </p:sp>
       <p:sp>
         <p:nvSpPr>
-          <p:cNvPr id="3" name="Text 1"/>
+          <p:cNvPr id="4" name="Text 2"/>
           <p:cNvSpPr txBox="1"/>
           <p:nvPr/>
         </p:nvSpPr>
@@ -6601,7 +6613,7 @@
       </p:sp>
       <p:sp>
         <p:nvSpPr>
-          <p:cNvPr id="4" name="c1"/>
+          <p:cNvPr id="5" name="c1"/>
           <p:cNvSpPr/>
           <p:nvPr/>
         </p:nvSpPr>
@@ -6626,7 +6638,7 @@
       </p:sp>
       <p:sp>
         <p:nvSpPr>
-          <p:cNvPr id="5" name="c2"/>
+          <p:cNvPr id="6" name="c2"/>
           <p:cNvSpPr/>
           <p:nvPr/>
         </p:nvSpPr>
@@ -6651,7 +6663,7 @@
       </p:sp>
       <p:sp>
         <p:nvSpPr>
-          <p:cNvPr id="6" name="Text 4"/>
+          <p:cNvPr id="7" name="Text 5"/>
           <p:cNvSpPr txBox="1"/>
           <p:nvPr/>
         </p:nvSpPr>
@@ -6690,7 +6702,7 @@
       </p:sp>
       <p:sp>
         <p:nvSpPr>
-          <p:cNvPr id="7" name="Text 5"/>
+          <p:cNvPr id="8" name="Text 6"/>
           <p:cNvSpPr txBox="1"/>
           <p:nvPr/>
         </p:nvSpPr>
@@ -6732,7 +6744,7 @@
       </p:sp>
       <p:sp>
         <p:nvSpPr>
-          <p:cNvPr id="8" name="Text 6"/>
+          <p:cNvPr id="9" name="Text 7"/>
           <p:cNvSpPr txBox="1"/>
           <p:nvPr/>
         </p:nvSpPr>
@@ -6771,7 +6783,7 @@
       </p:sp>
       <p:sp>
         <p:nvSpPr>
-          <p:cNvPr id="9" name="Text 7"/>
+          <p:cNvPr id="10" name="Text 8"/>
           <p:cNvSpPr txBox="1"/>
           <p:nvPr/>
         </p:nvSpPr>
@@ -6813,7 +6825,7 @@
       </p:sp>
       <p:sp>
         <p:nvSpPr>
-          <p:cNvPr id="10" name="tk0"/>
+          <p:cNvPr id="11" name="tk0"/>
           <p:cNvSpPr/>
           <p:nvPr/>
         </p:nvSpPr>
@@ -6840,7 +6852,7 @@
       </p:sp>
       <p:sp>
         <p:nvSpPr>
-          <p:cNvPr id="11" name="Text 9"/>
+          <p:cNvPr id="12" name="Text 10"/>
           <p:cNvSpPr txBox="1"/>
           <p:nvPr/>
         </p:nvSpPr>
@@ -6879,7 +6891,7 @@
       </p:sp>
       <p:sp>
         <p:nvSpPr>
-          <p:cNvPr id="12" name="Text 10"/>
+          <p:cNvPr id="13" name="Text 11"/>
           <p:cNvSpPr txBox="1"/>
           <p:nvPr/>
         </p:nvSpPr>
@@ -6918,7 +6930,7 @@
       </p:sp>
       <p:sp>
         <p:nvSpPr>
-          <p:cNvPr id="13" name="tk1"/>
+          <p:cNvPr id="14" name="tk1"/>
           <p:cNvSpPr/>
           <p:nvPr/>
         </p:nvSpPr>
@@ -6945,7 +6957,7 @@
       </p:sp>
       <p:sp>
         <p:nvSpPr>
-          <p:cNvPr id="14" name="Text 12"/>
+          <p:cNvPr id="15" name="Text 13"/>
           <p:cNvSpPr txBox="1"/>
           <p:nvPr/>
         </p:nvSpPr>
@@ -6984,7 +6996,7 @@
       </p:sp>
       <p:sp>
         <p:nvSpPr>
-          <p:cNvPr id="15" name="Text 13"/>
+          <p:cNvPr id="16" name="Text 14"/>
           <p:cNvSpPr txBox="1"/>
           <p:nvPr/>
         </p:nvSpPr>
@@ -7023,7 +7035,7 @@
       </p:sp>
       <p:sp>
         <p:nvSpPr>
-          <p:cNvPr id="16" name="tk2"/>
+          <p:cNvPr id="17" name="tk2"/>
           <p:cNvSpPr/>
           <p:nvPr/>
         </p:nvSpPr>
@@ -7050,7 +7062,7 @@
       </p:sp>
       <p:sp>
         <p:nvSpPr>
-          <p:cNvPr id="17" name="Text 15"/>
+          <p:cNvPr id="18" name="Text 16"/>
           <p:cNvSpPr txBox="1"/>
           <p:nvPr/>
         </p:nvSpPr>
@@ -7089,7 +7101,7 @@
       </p:sp>
       <p:sp>
         <p:nvSpPr>
-          <p:cNvPr id="18" name="Text 16"/>
+          <p:cNvPr id="19" name="Text 17"/>
           <p:cNvSpPr txBox="1"/>
           <p:nvPr/>
         </p:nvSpPr>
@@ -7128,7 +7140,7 @@
       </p:sp>
       <p:sp>
         <p:nvSpPr>
-          <p:cNvPr id="19" name="ru0.84.45"/>
+          <p:cNvPr id="20" name="ru0.84.45"/>
           <p:cNvSpPr/>
           <p:nvPr/>
         </p:nvSpPr>
@@ -7155,7 +7167,7 @@
       </p:sp>
       <p:sp>
         <p:nvSpPr>
-          <p:cNvPr id="20" name="Text 18"/>
+          <p:cNvPr id="21" name="Text 19"/>
           <p:cNvSpPr txBox="1"/>
           <p:nvPr/>
         </p:nvSpPr>
@@ -7197,7 +7209,7 @@
       </p:sp>
       <p:sp>
         <p:nvSpPr>
-          <p:cNvPr id="21" name="Text 19"/>
+          <p:cNvPr id="22" name="Text 20"/>
           <p:cNvSpPr txBox="1"/>
           <p:nvPr/>
         </p:nvSpPr>
@@ -7239,7 +7251,7 @@
       </p:sp>
       <p:sp>
         <p:nvSpPr>
-          <p:cNvPr id="22" name="disc"/>
+          <p:cNvPr id="23" name="disc"/>
           <p:cNvSpPr/>
           <p:nvPr/>
         </p:nvSpPr>
@@ -7266,7 +7278,7 @@
       </p:sp>
       <p:sp>
         <p:nvSpPr>
-          <p:cNvPr id="23" name="Text 21"/>
+          <p:cNvPr id="24" name="Text 22"/>
           <p:cNvSpPr txBox="1"/>
           <p:nvPr/>
         </p:nvSpPr>
@@ -7317,39 +7329,9 @@
                 <a:ea typeface="Calibri" pitchFamily="34" charset="-122"/>
                 <a:cs typeface="Calibri" pitchFamily="34" charset="-120"/>
               </a:rPr>
-              <a:t>the composite shrinks as the water evaporates, and I did not log the dried dimensions, so every dimension I quote today is a mould dimension.</a:t>
+              <a:t>the composite shrinks as the water evaporates, and the dried dimensions were not logged, so every dimension reported here is a mould dimension.</a:t>
             </a:r>
             <a:endParaRPr lang="en-US" sz="1200" dirty="0"/>
-          </a:p>
-        </p:txBody>
-      </p:sp>
-      <p:sp>
-        <p:nvSpPr>
-          <p:cNvPr id="25" name="Text 0"/>
-          <p:cNvSpPr/>
-          <p:nvPr>
-            <p:ph idx="100" hasCustomPrompt="1"/>
-          </p:nvPr>
-        </p:nvSpPr>
-        <p:spPr>
-          <a:xfrm>
-            <a:off x="11292840" y="6355080"/>
-            <a:ext cx="365760" cy="237744"/>
-          </a:xfrm>
-          <a:prstGeom prst="rect">
-            <a:avLst/>
-          </a:prstGeom>
-          <a:noFill/>
-          <a:ln/>
-        </p:spPr>
-        <p:txBody>
-          <a:bodyPr wrap="square" rtlCol="0"/>
-          <a:lstStyle/>
-          <a:p>
-            <a:pPr algn="r" indent="0" marL="0">
-              <a:buNone/>
-            </a:pPr>
-            <a:endParaRPr lang="en-US" sz="850" dirty="0"/>
           </a:p>
         </p:txBody>
       </p:sp>
@@ -7386,6 +7368,45 @@
         </p:nvSpPr>
         <p:spPr>
           <a:xfrm>
+            <a:off x="10972800" y="6217920"/>
+            <a:ext cx="685800" cy="365760"/>
+          </a:xfrm>
+          <a:prstGeom prst="rect">
+            <a:avLst/>
+          </a:prstGeom>
+          <a:noFill/>
+          <a:ln/>
+        </p:spPr>
+        <p:txBody>
+          <a:bodyPr wrap="square" lIns="0" tIns="0" rIns="0" bIns="0" rtlCol="0" anchor="ctr"/>
+          <a:lstStyle/>
+          <a:p>
+            <a:pPr algn="r" indent="0" marL="0">
+              <a:buNone/>
+            </a:pPr>
+            <a:r>
+              <a:rPr lang="en-US" sz="1300" b="1" dirty="0">
+                <a:solidFill>
+                  <a:srgbClr val="8C8C8C"/>
+                </a:solidFill>
+                <a:latin typeface="Calibri" pitchFamily="34" charset="0"/>
+                <a:ea typeface="Calibri" pitchFamily="34" charset="-122"/>
+                <a:cs typeface="Calibri" pitchFamily="34" charset="-120"/>
+              </a:rPr>
+              <a:t>13</a:t>
+            </a:r>
+            <a:endParaRPr lang="en-US" sz="1300" dirty="0"/>
+          </a:p>
+        </p:txBody>
+      </p:sp>
+      <p:sp>
+        <p:nvSpPr>
+          <p:cNvPr id="3" name="Text 1"/>
+          <p:cNvSpPr txBox="1"/>
+          <p:nvPr/>
+        </p:nvSpPr>
+        <p:spPr>
+          <a:xfrm>
             <a:off x="731520" y="502920"/>
             <a:ext cx="10698480" cy="457200"/>
           </a:xfrm>
@@ -7419,7 +7440,7 @@
       </p:sp>
       <p:sp>
         <p:nvSpPr>
-          <p:cNvPr id="3" name="Text 1"/>
+          <p:cNvPr id="4" name="Text 2"/>
           <p:cNvSpPr txBox="1"/>
           <p:nvPr/>
         </p:nvSpPr>
@@ -10770,7 +10791,7 @@
       </p:graphicFrame>
       <p:sp>
         <p:nvSpPr>
-          <p:cNvPr id="5" name="ru0.84.45"/>
+          <p:cNvPr id="6" name="ru0.84.45"/>
           <p:cNvSpPr/>
           <p:nvPr/>
         </p:nvSpPr>
@@ -10797,7 +10818,7 @@
       </p:sp>
       <p:sp>
         <p:nvSpPr>
-          <p:cNvPr id="6" name="Text 3"/>
+          <p:cNvPr id="7" name="Text 4"/>
           <p:cNvSpPr txBox="1"/>
           <p:nvPr/>
         </p:nvSpPr>
@@ -10836,7 +10857,7 @@
       </p:sp>
       <p:sp>
         <p:nvSpPr>
-          <p:cNvPr id="7" name="sw0.85.02"/>
+          <p:cNvPr id="8" name="sw0.85.02"/>
           <p:cNvSpPr/>
           <p:nvPr/>
         </p:nvSpPr>
@@ -10863,7 +10884,7 @@
       </p:sp>
       <p:sp>
         <p:nvSpPr>
-          <p:cNvPr id="8" name="Text 5"/>
+          <p:cNvPr id="9" name="Text 6"/>
           <p:cNvSpPr txBox="1"/>
           <p:nvPr/>
         </p:nvSpPr>
@@ -10902,7 +10923,7 @@
       </p:sp>
       <p:sp>
         <p:nvSpPr>
-          <p:cNvPr id="9" name="sw25.02"/>
+          <p:cNvPr id="10" name="sw25.02"/>
           <p:cNvSpPr/>
           <p:nvPr/>
         </p:nvSpPr>
@@ -10929,7 +10950,7 @@
       </p:sp>
       <p:sp>
         <p:nvSpPr>
-          <p:cNvPr id="10" name="Text 7"/>
+          <p:cNvPr id="11" name="Text 8"/>
           <p:cNvSpPr txBox="1"/>
           <p:nvPr/>
         </p:nvSpPr>
@@ -10968,7 +10989,7 @@
       </p:sp>
       <p:sp>
         <p:nvSpPr>
-          <p:cNvPr id="11" name="sw3.25.02"/>
+          <p:cNvPr id="12" name="sw3.25.02"/>
           <p:cNvSpPr/>
           <p:nvPr/>
         </p:nvSpPr>
@@ -10995,7 +11016,7 @@
       </p:sp>
       <p:sp>
         <p:nvSpPr>
-          <p:cNvPr id="12" name="Text 9"/>
+          <p:cNvPr id="13" name="Text 10"/>
           <p:cNvSpPr txBox="1"/>
           <p:nvPr/>
         </p:nvSpPr>
@@ -11034,7 +11055,7 @@
       </p:sp>
       <p:sp>
         <p:nvSpPr>
-          <p:cNvPr id="13" name="sw4.45.02"/>
+          <p:cNvPr id="14" name="sw4.45.02"/>
           <p:cNvSpPr/>
           <p:nvPr/>
         </p:nvSpPr>
@@ -11061,7 +11082,7 @@
       </p:sp>
       <p:sp>
         <p:nvSpPr>
-          <p:cNvPr id="14" name="Text 11"/>
+          <p:cNvPr id="15" name="Text 12"/>
           <p:cNvSpPr txBox="1"/>
           <p:nvPr/>
         </p:nvSpPr>
@@ -11100,7 +11121,7 @@
       </p:sp>
       <p:sp>
         <p:nvSpPr>
-          <p:cNvPr id="15" name="Text 12"/>
+          <p:cNvPr id="16" name="Text 13"/>
           <p:cNvSpPr txBox="1"/>
           <p:nvPr/>
         </p:nvSpPr>
@@ -11139,7 +11160,7 @@
       </p:sp>
       <p:sp>
         <p:nvSpPr>
-          <p:cNvPr id="16" name="sb1.355.380"/>
+          <p:cNvPr id="17" name="sb1.355.380"/>
           <p:cNvSpPr/>
           <p:nvPr/>
         </p:nvSpPr>
@@ -11164,7 +11185,7 @@
       </p:sp>
       <p:sp>
         <p:nvSpPr>
-          <p:cNvPr id="17" name="sb1.355.381"/>
+          <p:cNvPr id="18" name="sb1.355.381"/>
           <p:cNvSpPr/>
           <p:nvPr/>
         </p:nvSpPr>
@@ -11189,7 +11210,7 @@
       </p:sp>
       <p:sp>
         <p:nvSpPr>
-          <p:cNvPr id="18" name="sb1.355.382"/>
+          <p:cNvPr id="19" name="sb1.355.382"/>
           <p:cNvSpPr/>
           <p:nvPr/>
         </p:nvSpPr>
@@ -11214,7 +11235,7 @@
       </p:sp>
       <p:sp>
         <p:nvSpPr>
-          <p:cNvPr id="19" name="sb1.355.383"/>
+          <p:cNvPr id="20" name="sb1.355.383"/>
           <p:cNvSpPr/>
           <p:nvPr/>
         </p:nvSpPr>
@@ -11239,7 +11260,7 @@
       </p:sp>
       <p:sp>
         <p:nvSpPr>
-          <p:cNvPr id="20" name="Text 17"/>
+          <p:cNvPr id="21" name="Text 18"/>
           <p:cNvSpPr txBox="1"/>
           <p:nvPr/>
         </p:nvSpPr>
@@ -11278,7 +11299,7 @@
       </p:sp>
       <p:sp>
         <p:nvSpPr>
-          <p:cNvPr id="21" name="Text 18"/>
+          <p:cNvPr id="22" name="Text 19"/>
           <p:cNvSpPr txBox="1"/>
           <p:nvPr/>
         </p:nvSpPr>
@@ -11317,7 +11338,7 @@
       </p:sp>
       <p:sp>
         <p:nvSpPr>
-          <p:cNvPr id="22" name="sb1.355.680"/>
+          <p:cNvPr id="23" name="sb1.355.680"/>
           <p:cNvSpPr/>
           <p:nvPr/>
         </p:nvSpPr>
@@ -11342,7 +11363,7 @@
       </p:sp>
       <p:sp>
         <p:nvSpPr>
-          <p:cNvPr id="23" name="sb1.355.681"/>
+          <p:cNvPr id="24" name="sb1.355.681"/>
           <p:cNvSpPr/>
           <p:nvPr/>
         </p:nvSpPr>
@@ -11367,7 +11388,7 @@
       </p:sp>
       <p:sp>
         <p:nvSpPr>
-          <p:cNvPr id="24" name="sb1.355.682"/>
+          <p:cNvPr id="25" name="sb1.355.682"/>
           <p:cNvSpPr/>
           <p:nvPr/>
         </p:nvSpPr>
@@ -11392,7 +11413,7 @@
       </p:sp>
       <p:sp>
         <p:nvSpPr>
-          <p:cNvPr id="25" name="sb1.355.683"/>
+          <p:cNvPr id="26" name="sb1.355.683"/>
           <p:cNvSpPr/>
           <p:nvPr/>
         </p:nvSpPr>
@@ -11417,7 +11438,7 @@
       </p:sp>
       <p:sp>
         <p:nvSpPr>
-          <p:cNvPr id="26" name="Text 23"/>
+          <p:cNvPr id="27" name="Text 24"/>
           <p:cNvSpPr txBox="1"/>
           <p:nvPr/>
         </p:nvSpPr>
@@ -11456,7 +11477,7 @@
       </p:sp>
       <p:sp>
         <p:nvSpPr>
-          <p:cNvPr id="27" name="Text 24"/>
+          <p:cNvPr id="28" name="Text 25"/>
           <p:cNvSpPr txBox="1"/>
           <p:nvPr/>
         </p:nvSpPr>
@@ -11495,7 +11516,7 @@
       </p:sp>
       <p:sp>
         <p:nvSpPr>
-          <p:cNvPr id="28" name="sb1.355.97999999999999950"/>
+          <p:cNvPr id="29" name="sb1.355.97999999999999950"/>
           <p:cNvSpPr/>
           <p:nvPr/>
         </p:nvSpPr>
@@ -11520,7 +11541,7 @@
       </p:sp>
       <p:sp>
         <p:nvSpPr>
-          <p:cNvPr id="29" name="sb1.355.97999999999999951"/>
+          <p:cNvPr id="30" name="sb1.355.97999999999999951"/>
           <p:cNvSpPr/>
           <p:nvPr/>
         </p:nvSpPr>
@@ -11545,7 +11566,7 @@
       </p:sp>
       <p:sp>
         <p:nvSpPr>
-          <p:cNvPr id="30" name="sb1.355.97999999999999952"/>
+          <p:cNvPr id="31" name="sb1.355.97999999999999952"/>
           <p:cNvSpPr/>
           <p:nvPr/>
         </p:nvSpPr>
@@ -11570,7 +11591,7 @@
       </p:sp>
       <p:sp>
         <p:nvSpPr>
-          <p:cNvPr id="31" name="sb1.355.97999999999999953"/>
+          <p:cNvPr id="32" name="sb1.355.97999999999999953"/>
           <p:cNvSpPr/>
           <p:nvPr/>
         </p:nvSpPr>
@@ -11595,7 +11616,7 @@
       </p:sp>
       <p:sp>
         <p:nvSpPr>
-          <p:cNvPr id="32" name="Text 29"/>
+          <p:cNvPr id="33" name="Text 30"/>
           <p:cNvSpPr txBox="1"/>
           <p:nvPr/>
         </p:nvSpPr>
@@ -11634,7 +11655,7 @@
       </p:sp>
       <p:sp>
         <p:nvSpPr>
-          <p:cNvPr id="33" name="Text 30"/>
+          <p:cNvPr id="34" name="Text 31"/>
           <p:cNvSpPr txBox="1"/>
           <p:nvPr/>
         </p:nvSpPr>
@@ -11673,7 +11694,7 @@
       </p:sp>
       <p:sp>
         <p:nvSpPr>
-          <p:cNvPr id="34" name="sb1.356.2799999999999990"/>
+          <p:cNvPr id="35" name="sb1.356.2799999999999990"/>
           <p:cNvSpPr/>
           <p:nvPr/>
         </p:nvSpPr>
@@ -11698,7 +11719,7 @@
       </p:sp>
       <p:sp>
         <p:nvSpPr>
-          <p:cNvPr id="35" name="sb1.356.2799999999999991"/>
+          <p:cNvPr id="36" name="sb1.356.2799999999999991"/>
           <p:cNvSpPr/>
           <p:nvPr/>
         </p:nvSpPr>
@@ -11723,7 +11744,7 @@
       </p:sp>
       <p:sp>
         <p:nvSpPr>
-          <p:cNvPr id="36" name="sb1.356.2799999999999992"/>
+          <p:cNvPr id="37" name="sb1.356.2799999999999992"/>
           <p:cNvSpPr/>
           <p:nvPr/>
         </p:nvSpPr>
@@ -11748,7 +11769,7 @@
       </p:sp>
       <p:sp>
         <p:nvSpPr>
-          <p:cNvPr id="37" name="sb1.356.2799999999999993"/>
+          <p:cNvPr id="38" name="sb1.356.2799999999999993"/>
           <p:cNvSpPr/>
           <p:nvPr/>
         </p:nvSpPr>
@@ -11773,7 +11794,7 @@
       </p:sp>
       <p:sp>
         <p:nvSpPr>
-          <p:cNvPr id="38" name="Text 35"/>
+          <p:cNvPr id="39" name="Text 36"/>
           <p:cNvSpPr txBox="1"/>
           <p:nvPr/>
         </p:nvSpPr>
@@ -11812,7 +11833,7 @@
       </p:sp>
       <p:sp>
         <p:nvSpPr>
-          <p:cNvPr id="39" name="Text 36"/>
+          <p:cNvPr id="40" name="Text 37"/>
           <p:cNvSpPr txBox="1"/>
           <p:nvPr/>
         </p:nvSpPr>
@@ -11851,7 +11872,7 @@
       </p:sp>
       <p:sp>
         <p:nvSpPr>
-          <p:cNvPr id="40" name="sb1.356.580"/>
+          <p:cNvPr id="41" name="sb1.356.580"/>
           <p:cNvSpPr/>
           <p:nvPr/>
         </p:nvSpPr>
@@ -11876,7 +11897,7 @@
       </p:sp>
       <p:sp>
         <p:nvSpPr>
-          <p:cNvPr id="41" name="sb1.356.581"/>
+          <p:cNvPr id="42" name="sb1.356.581"/>
           <p:cNvSpPr/>
           <p:nvPr/>
         </p:nvSpPr>
@@ -11901,7 +11922,7 @@
       </p:sp>
       <p:sp>
         <p:nvSpPr>
-          <p:cNvPr id="42" name="sb1.356.582"/>
+          <p:cNvPr id="43" name="sb1.356.582"/>
           <p:cNvSpPr/>
           <p:nvPr/>
         </p:nvSpPr>
@@ -11926,7 +11947,7 @@
       </p:sp>
       <p:sp>
         <p:nvSpPr>
-          <p:cNvPr id="43" name="sb1.356.583"/>
+          <p:cNvPr id="44" name="sb1.356.583"/>
           <p:cNvSpPr/>
           <p:nvPr/>
         </p:nvSpPr>
@@ -11951,7 +11972,7 @@
       </p:sp>
       <p:sp>
         <p:nvSpPr>
-          <p:cNvPr id="44" name="Text 41"/>
+          <p:cNvPr id="45" name="Text 42"/>
           <p:cNvSpPr txBox="1"/>
           <p:nvPr/>
         </p:nvSpPr>
@@ -11990,7 +12011,7 @@
       </p:sp>
       <p:sp>
         <p:nvSpPr>
-          <p:cNvPr id="45" name="vr84.45"/>
+          <p:cNvPr id="46" name="vr84.45"/>
           <p:cNvSpPr/>
           <p:nvPr/>
         </p:nvSpPr>
@@ -12017,7 +12038,7 @@
       </p:sp>
       <p:sp>
         <p:nvSpPr>
-          <p:cNvPr id="46" name="Text 43"/>
+          <p:cNvPr id="47" name="Text 44"/>
           <p:cNvSpPr txBox="1"/>
           <p:nvPr/>
         </p:nvSpPr>
@@ -12051,7 +12072,7 @@
                 <a:ea typeface="Calibri" pitchFamily="34" charset="-122"/>
                 <a:cs typeface="Calibri" pitchFamily="34" charset="-120"/>
               </a:rPr>
-              <a:t>Solids concentration is the only variable, and you can see it in the bars: the water band gets shorter from C1 to C3.</a:t>
+              <a:t>Solids concentration is the only variable, and the bars show it: the water band gets shorter from C1 to C3.</a:t>
             </a:r>
             <a:endParaRPr lang="en-US" sz="1200" dirty="0"/>
           </a:p>
@@ -12059,7 +12080,7 @@
       </p:sp>
       <p:sp>
         <p:nvSpPr>
-          <p:cNvPr id="47" name="Text 44"/>
+          <p:cNvPr id="48" name="Text 45"/>
           <p:cNvSpPr txBox="1"/>
           <p:nvPr/>
         </p:nvSpPr>
@@ -12096,36 +12117,6 @@
               <a:t>The glycerol was halved while the batch mass stayed the same, so the water rose to compensate.</a:t>
             </a:r>
             <a:endParaRPr lang="en-US" sz="1150" dirty="0"/>
-          </a:p>
-        </p:txBody>
-      </p:sp>
-      <p:sp>
-        <p:nvSpPr>
-          <p:cNvPr id="49" name="Text 0"/>
-          <p:cNvSpPr/>
-          <p:nvPr>
-            <p:ph idx="100" hasCustomPrompt="1"/>
-          </p:nvPr>
-        </p:nvSpPr>
-        <p:spPr>
-          <a:xfrm>
-            <a:off x="11292840" y="6355080"/>
-            <a:ext cx="365760" cy="237744"/>
-          </a:xfrm>
-          <a:prstGeom prst="rect">
-            <a:avLst/>
-          </a:prstGeom>
-          <a:noFill/>
-          <a:ln/>
-        </p:spPr>
-        <p:txBody>
-          <a:bodyPr wrap="square" rtlCol="0"/>
-          <a:lstStyle/>
-          <a:p>
-            <a:pPr algn="r" indent="0" marL="0">
-              <a:buNone/>
-            </a:pPr>
-            <a:endParaRPr lang="en-US" sz="850" dirty="0"/>
           </a:p>
         </p:txBody>
       </p:sp>
@@ -12162,6 +12153,45 @@
         </p:nvSpPr>
         <p:spPr>
           <a:xfrm>
+            <a:off x="10972800" y="6217920"/>
+            <a:ext cx="685800" cy="365760"/>
+          </a:xfrm>
+          <a:prstGeom prst="rect">
+            <a:avLst/>
+          </a:prstGeom>
+          <a:noFill/>
+          <a:ln/>
+        </p:spPr>
+        <p:txBody>
+          <a:bodyPr wrap="square" lIns="0" tIns="0" rIns="0" bIns="0" rtlCol="0" anchor="ctr"/>
+          <a:lstStyle/>
+          <a:p>
+            <a:pPr algn="r" indent="0" marL="0">
+              <a:buNone/>
+            </a:pPr>
+            <a:r>
+              <a:rPr lang="en-US" sz="1300" b="1" dirty="0">
+                <a:solidFill>
+                  <a:srgbClr val="8C8C8C"/>
+                </a:solidFill>
+                <a:latin typeface="Calibri" pitchFamily="34" charset="0"/>
+                <a:ea typeface="Calibri" pitchFamily="34" charset="-122"/>
+                <a:cs typeface="Calibri" pitchFamily="34" charset="-120"/>
+              </a:rPr>
+              <a:t>14</a:t>
+            </a:r>
+            <a:endParaRPr lang="en-US" sz="1300" dirty="0"/>
+          </a:p>
+        </p:txBody>
+      </p:sp>
+      <p:sp>
+        <p:nvSpPr>
+          <p:cNvPr id="3" name="Text 1"/>
+          <p:cNvSpPr txBox="1"/>
+          <p:nvPr/>
+        </p:nvSpPr>
+        <p:spPr>
+          <a:xfrm>
             <a:off x="731520" y="502920"/>
             <a:ext cx="10698480" cy="457200"/>
           </a:xfrm>
@@ -12195,7 +12225,7 @@
       </p:sp>
       <p:sp>
         <p:nvSpPr>
-          <p:cNvPr id="3" name="Text 1"/>
+          <p:cNvPr id="4" name="Text 2"/>
           <p:cNvSpPr txBox="1"/>
           <p:nvPr/>
         </p:nvSpPr>
@@ -12234,7 +12264,7 @@
       </p:sp>
       <p:sp>
         <p:nvSpPr>
-          <p:cNvPr id="4" name="ru0.81.85"/>
+          <p:cNvPr id="5" name="ru0.81.85"/>
           <p:cNvSpPr/>
           <p:nvPr/>
         </p:nvSpPr>
@@ -12261,7 +12291,7 @@
       </p:sp>
       <p:sp>
         <p:nvSpPr>
-          <p:cNvPr id="5" name="Text 3"/>
+          <p:cNvPr id="6" name="Text 4"/>
           <p:cNvSpPr txBox="1"/>
           <p:nvPr/>
         </p:nvSpPr>
@@ -12300,7 +12330,7 @@
       </p:sp>
       <p:sp>
         <p:nvSpPr>
-          <p:cNvPr id="6" name="Text 4"/>
+          <p:cNvPr id="7" name="Text 5"/>
           <p:cNvSpPr txBox="1"/>
           <p:nvPr/>
         </p:nvSpPr>
@@ -12342,7 +12372,7 @@
       </p:sp>
       <p:sp>
         <p:nvSpPr>
-          <p:cNvPr id="7" name="Text 5"/>
+          <p:cNvPr id="8" name="Text 6"/>
           <p:cNvSpPr txBox="1"/>
           <p:nvPr/>
         </p:nvSpPr>
@@ -12381,7 +12411,7 @@
       </p:sp>
       <p:sp>
         <p:nvSpPr>
-          <p:cNvPr id="8" name="sp0"/>
+          <p:cNvPr id="9" name="sp0"/>
           <p:cNvSpPr/>
           <p:nvPr/>
         </p:nvSpPr>
@@ -12408,7 +12438,7 @@
       </p:sp>
       <p:sp>
         <p:nvSpPr>
-          <p:cNvPr id="9" name="Text 7"/>
+          <p:cNvPr id="10" name="Text 8"/>
           <p:cNvSpPr txBox="1"/>
           <p:nvPr/>
         </p:nvSpPr>
@@ -12447,7 +12477,7 @@
       </p:sp>
       <p:sp>
         <p:nvSpPr>
-          <p:cNvPr id="10" name="Text 8"/>
+          <p:cNvPr id="11" name="Text 9"/>
           <p:cNvSpPr txBox="1"/>
           <p:nvPr/>
         </p:nvSpPr>
@@ -12489,7 +12519,7 @@
       </p:sp>
       <p:sp>
         <p:nvSpPr>
-          <p:cNvPr id="11" name="Text 9"/>
+          <p:cNvPr id="12" name="Text 10"/>
           <p:cNvSpPr txBox="1"/>
           <p:nvPr/>
         </p:nvSpPr>
@@ -12528,7 +12558,7 @@
       </p:sp>
       <p:sp>
         <p:nvSpPr>
-          <p:cNvPr id="12" name="sp1"/>
+          <p:cNvPr id="13" name="sp1"/>
           <p:cNvSpPr/>
           <p:nvPr/>
         </p:nvSpPr>
@@ -12555,7 +12585,7 @@
       </p:sp>
       <p:sp>
         <p:nvSpPr>
-          <p:cNvPr id="13" name="Text 11"/>
+          <p:cNvPr id="14" name="Text 12"/>
           <p:cNvSpPr txBox="1"/>
           <p:nvPr/>
         </p:nvSpPr>
@@ -12594,7 +12624,7 @@
       </p:sp>
       <p:sp>
         <p:nvSpPr>
-          <p:cNvPr id="14" name="Text 12"/>
+          <p:cNvPr id="15" name="Text 13"/>
           <p:cNvSpPr txBox="1"/>
           <p:nvPr/>
         </p:nvSpPr>
@@ -12636,7 +12666,7 @@
       </p:sp>
       <p:sp>
         <p:nvSpPr>
-          <p:cNvPr id="15" name="Text 13"/>
+          <p:cNvPr id="16" name="Text 14"/>
           <p:cNvSpPr txBox="1"/>
           <p:nvPr/>
         </p:nvSpPr>
@@ -12675,7 +12705,7 @@
       </p:sp>
       <p:sp>
         <p:nvSpPr>
-          <p:cNvPr id="16" name="sp2"/>
+          <p:cNvPr id="17" name="sp2"/>
           <p:cNvSpPr/>
           <p:nvPr/>
         </p:nvSpPr>
@@ -12702,7 +12732,7 @@
       </p:sp>
       <p:sp>
         <p:nvSpPr>
-          <p:cNvPr id="17" name="Text 15"/>
+          <p:cNvPr id="18" name="Text 16"/>
           <p:cNvSpPr txBox="1"/>
           <p:nvPr/>
         </p:nvSpPr>
@@ -12741,7 +12771,7 @@
       </p:sp>
       <p:sp>
         <p:nvSpPr>
-          <p:cNvPr id="18" name="Text 16"/>
+          <p:cNvPr id="19" name="Text 17"/>
           <p:cNvSpPr txBox="1"/>
           <p:nvPr/>
         </p:nvSpPr>
@@ -12783,7 +12813,7 @@
       </p:sp>
       <p:sp>
         <p:nvSpPr>
-          <p:cNvPr id="19" name="Text 17"/>
+          <p:cNvPr id="20" name="Text 18"/>
           <p:cNvSpPr txBox="1"/>
           <p:nvPr/>
         </p:nvSpPr>
@@ -12822,7 +12852,7 @@
       </p:sp>
       <p:sp>
         <p:nvSpPr>
-          <p:cNvPr id="20" name="ru0.85.7"/>
+          <p:cNvPr id="21" name="ru0.85.7"/>
           <p:cNvSpPr/>
           <p:nvPr/>
         </p:nvSpPr>
@@ -12849,7 +12879,7 @@
       </p:sp>
       <p:sp>
         <p:nvSpPr>
-          <p:cNvPr id="21" name="Text 19"/>
+          <p:cNvPr id="22" name="Text 20"/>
           <p:cNvSpPr txBox="1"/>
           <p:nvPr/>
         </p:nvSpPr>
@@ -12883,7 +12913,7 @@
                 <a:ea typeface="Calibri" pitchFamily="34" charset="-122"/>
                 <a:cs typeface="Calibri" pitchFamily="34" charset="-120"/>
               </a:rPr>
-              <a:t>The mechanical values are means of three specimens, and because I did not retain the individual values, I cannot give you standard deviations.</a:t>
+              <a:t>The mechanical values are means of three specimens, and since the individual values were not retained, standard deviations cannot be reported.</a:t>
             </a:r>
             <a:endParaRPr lang="en-US" sz="1200" dirty="0"/>
           </a:p>
@@ -12891,7 +12921,7 @@
       </p:sp>
       <p:sp>
         <p:nvSpPr>
-          <p:cNvPr id="22" name="cl1"/>
+          <p:cNvPr id="23" name="cl1"/>
           <p:cNvSpPr/>
           <p:nvPr/>
         </p:nvSpPr>
@@ -12918,7 +12948,7 @@
       </p:sp>
       <p:sp>
         <p:nvSpPr>
-          <p:cNvPr id="23" name="pt1"/>
+          <p:cNvPr id="24" name="pt1"/>
           <p:cNvSpPr/>
           <p:nvPr/>
         </p:nvSpPr>
@@ -12945,7 +12975,7 @@
       </p:sp>
       <p:sp>
         <p:nvSpPr>
-          <p:cNvPr id="24" name="cb1"/>
+          <p:cNvPr id="25" name="cb1"/>
           <p:cNvSpPr/>
           <p:nvPr/>
         </p:nvSpPr>
@@ -12970,7 +13000,7 @@
       </p:sp>
       <p:sp>
         <p:nvSpPr>
-          <p:cNvPr id="25" name="pt2"/>
+          <p:cNvPr id="26" name="pt2"/>
           <p:cNvSpPr/>
           <p:nvPr/>
         </p:nvSpPr>
@@ -12997,7 +13027,7 @@
       </p:sp>
       <p:sp>
         <p:nvSpPr>
-          <p:cNvPr id="26" name="cl2"/>
+          <p:cNvPr id="27" name="cl2"/>
           <p:cNvSpPr/>
           <p:nvPr/>
         </p:nvSpPr>
@@ -13024,7 +13054,7 @@
       </p:sp>
       <p:sp>
         <p:nvSpPr>
-          <p:cNvPr id="27" name="bm"/>
+          <p:cNvPr id="28" name="bm"/>
           <p:cNvSpPr/>
           <p:nvPr/>
         </p:nvSpPr>
@@ -13049,7 +13079,7 @@
       </p:sp>
       <p:sp>
         <p:nvSpPr>
-          <p:cNvPr id="28" name="su1"/>
+          <p:cNvPr id="29" name="su1"/>
           <p:cNvSpPr/>
           <p:nvPr/>
         </p:nvSpPr>
@@ -13076,7 +13106,7 @@
       </p:sp>
       <p:sp>
         <p:nvSpPr>
-          <p:cNvPr id="29" name="su2"/>
+          <p:cNvPr id="30" name="su2"/>
           <p:cNvSpPr/>
           <p:nvPr/>
         </p:nvSpPr>
@@ -13103,7 +13133,7 @@
       </p:sp>
       <p:sp>
         <p:nvSpPr>
-          <p:cNvPr id="30" name="spn"/>
+          <p:cNvPr id="31" name="spn"/>
           <p:cNvSpPr/>
           <p:nvPr/>
         </p:nvSpPr>
@@ -13130,7 +13160,7 @@
       </p:sp>
       <p:sp>
         <p:nvSpPr>
-          <p:cNvPr id="31" name="Text 29"/>
+          <p:cNvPr id="32" name="Text 30"/>
           <p:cNvSpPr txBox="1"/>
           <p:nvPr/>
         </p:nvSpPr>
@@ -13169,7 +13199,7 @@
       </p:sp>
       <p:sp>
         <p:nvSpPr>
-          <p:cNvPr id="32" name="fs"/>
+          <p:cNvPr id="33" name="fs"/>
           <p:cNvSpPr/>
           <p:nvPr/>
         </p:nvSpPr>
@@ -13194,7 +13224,7 @@
       </p:sp>
       <p:sp>
         <p:nvSpPr>
-          <p:cNvPr id="33" name="fm"/>
+          <p:cNvPr id="34" name="fm"/>
           <p:cNvSpPr/>
           <p:nvPr/>
         </p:nvSpPr>
@@ -13221,7 +13251,7 @@
       </p:sp>
       <p:sp>
         <p:nvSpPr>
-          <p:cNvPr id="34" name="Text 32"/>
+          <p:cNvPr id="35" name="Text 33"/>
           <p:cNvSpPr txBox="1"/>
           <p:nvPr/>
         </p:nvSpPr>
@@ -13260,7 +13290,7 @@
       </p:sp>
       <p:sp>
         <p:nvSpPr>
-          <p:cNvPr id="35" name="vs"/>
+          <p:cNvPr id="36" name="vs"/>
           <p:cNvSpPr/>
           <p:nvPr/>
         </p:nvSpPr>
@@ -13285,7 +13315,7 @@
       </p:sp>
       <p:sp>
         <p:nvSpPr>
-          <p:cNvPr id="36" name="wt"/>
+          <p:cNvPr id="37" name="wt"/>
           <p:cNvSpPr/>
           <p:nvPr/>
         </p:nvSpPr>
@@ -13314,7 +13344,7 @@
       </p:sp>
       <p:sp>
         <p:nvSpPr>
-          <p:cNvPr id="37" name="cp"/>
+          <p:cNvPr id="38" name="cp"/>
           <p:cNvSpPr/>
           <p:nvPr/>
         </p:nvSpPr>
@@ -13339,7 +13369,7 @@
       </p:sp>
       <p:sp>
         <p:nvSpPr>
-          <p:cNvPr id="38" name="Text 36"/>
+          <p:cNvPr id="39" name="Text 37"/>
           <p:cNvSpPr txBox="1"/>
           <p:nvPr/>
         </p:nvSpPr>
@@ -13381,14 +13411,14 @@
       </p:sp>
       <p:sp>
         <p:nvSpPr>
-          <p:cNvPr id="39" name="Text 37"/>
+          <p:cNvPr id="40" name="Text 38"/>
           <p:cNvSpPr txBox="1"/>
           <p:nvPr/>
         </p:nvSpPr>
         <p:spPr>
           <a:xfrm>
             <a:off x="731520" y="6400800"/>
-            <a:ext cx="10241280" cy="457200"/>
+            <a:ext cx="10058400" cy="457200"/>
           </a:xfrm>
           <a:prstGeom prst="rect">
             <a:avLst/>
@@ -13418,36 +13448,6 @@
               <a:t>All testing: Advanced Construction Materials Research Laboratory, Hacettepe University.  ·  Schematic, not to scale.</a:t>
             </a:r>
             <a:endParaRPr lang="en-US" sz="900" dirty="0"/>
-          </a:p>
-        </p:txBody>
-      </p:sp>
-      <p:sp>
-        <p:nvSpPr>
-          <p:cNvPr id="41" name="Text 0"/>
-          <p:cNvSpPr/>
-          <p:nvPr>
-            <p:ph idx="100" hasCustomPrompt="1"/>
-          </p:nvPr>
-        </p:nvSpPr>
-        <p:spPr>
-          <a:xfrm>
-            <a:off x="11292840" y="6355080"/>
-            <a:ext cx="365760" cy="237744"/>
-          </a:xfrm>
-          <a:prstGeom prst="rect">
-            <a:avLst/>
-          </a:prstGeom>
-          <a:noFill/>
-          <a:ln/>
-        </p:spPr>
-        <p:txBody>
-          <a:bodyPr wrap="square" rtlCol="0"/>
-          <a:lstStyle/>
-          <a:p>
-            <a:pPr algn="r" indent="0" marL="0">
-              <a:buNone/>
-            </a:pPr>
-            <a:endParaRPr lang="en-US" sz="850" dirty="0"/>
           </a:p>
         </p:txBody>
       </p:sp>
@@ -13484,6 +13484,45 @@
         </p:nvSpPr>
         <p:spPr>
           <a:xfrm>
+            <a:off x="10972800" y="6217920"/>
+            <a:ext cx="685800" cy="365760"/>
+          </a:xfrm>
+          <a:prstGeom prst="rect">
+            <a:avLst/>
+          </a:prstGeom>
+          <a:noFill/>
+          <a:ln/>
+        </p:spPr>
+        <p:txBody>
+          <a:bodyPr wrap="square" lIns="0" tIns="0" rIns="0" bIns="0" rtlCol="0" anchor="ctr"/>
+          <a:lstStyle/>
+          <a:p>
+            <a:pPr algn="r" indent="0" marL="0">
+              <a:buNone/>
+            </a:pPr>
+            <a:r>
+              <a:rPr lang="en-US" sz="1300" b="1" dirty="0">
+                <a:solidFill>
+                  <a:srgbClr val="8C8C8C"/>
+                </a:solidFill>
+                <a:latin typeface="Calibri" pitchFamily="34" charset="0"/>
+                <a:ea typeface="Calibri" pitchFamily="34" charset="-122"/>
+                <a:cs typeface="Calibri" pitchFamily="34" charset="-120"/>
+              </a:rPr>
+              <a:t>15</a:t>
+            </a:r>
+            <a:endParaRPr lang="en-US" sz="1300" dirty="0"/>
+          </a:p>
+        </p:txBody>
+      </p:sp>
+      <p:sp>
+        <p:nvSpPr>
+          <p:cNvPr id="3" name="Text 1"/>
+          <p:cNvSpPr txBox="1"/>
+          <p:nvPr/>
+        </p:nvSpPr>
+        <p:spPr>
+          <a:xfrm>
             <a:off x="731520" y="502920"/>
             <a:ext cx="10698480" cy="457200"/>
           </a:xfrm>
@@ -13517,7 +13556,7 @@
       </p:sp>
       <p:sp>
         <p:nvSpPr>
-          <p:cNvPr id="3" name="Text 1"/>
+          <p:cNvPr id="4" name="Text 2"/>
           <p:cNvSpPr txBox="1"/>
           <p:nvPr/>
         </p:nvSpPr>
@@ -14684,7 +14723,7 @@
       </p:graphicFrame>
       <p:sp>
         <p:nvSpPr>
-          <p:cNvPr id="5" name="ru0.83.7"/>
+          <p:cNvPr id="6" name="ru0.83.7"/>
           <p:cNvSpPr/>
           <p:nvPr/>
         </p:nvSpPr>
@@ -14711,7 +14750,7 @@
       </p:sp>
       <p:sp>
         <p:nvSpPr>
-          <p:cNvPr id="6" name="Text 3"/>
+          <p:cNvPr id="7" name="Text 4"/>
           <p:cNvSpPr txBox="1"/>
           <p:nvPr/>
         </p:nvSpPr>
@@ -14753,7 +14792,7 @@
       </p:sp>
       <p:sp>
         <p:nvSpPr>
-          <p:cNvPr id="7" name="Text 4"/>
+          <p:cNvPr id="8" name="Text 5"/>
           <p:cNvSpPr txBox="1"/>
           <p:nvPr/>
         </p:nvSpPr>
@@ -14795,7 +14834,7 @@
       </p:sp>
       <p:sp>
         <p:nvSpPr>
-          <p:cNvPr id="8" name="Text 5"/>
+          <p:cNvPr id="9" name="Text 6"/>
           <p:cNvSpPr txBox="1"/>
           <p:nvPr/>
         </p:nvSpPr>
@@ -14837,7 +14876,7 @@
       </p:sp>
       <p:graphicFrame>
         <p:nvGraphicFramePr>
-          <p:cNvPr id="9" name="cc" descr=""/>
+          <p:cNvPr id="10" name="cc" descr=""/>
           <p:cNvGraphicFramePr/>
           <p:nvPr/>
         </p:nvGraphicFramePr>
@@ -14853,7 +14892,7 @@
       </p:graphicFrame>
       <p:sp>
         <p:nvSpPr>
-          <p:cNvPr id="10" name="Text 6"/>
+          <p:cNvPr id="11" name="Text 7"/>
           <p:cNvSpPr txBox="1"/>
           <p:nvPr/>
         </p:nvSpPr>
@@ -14890,36 +14929,6 @@
               <a:t>Solids : water ratio shown beneath each formulation identifier.</a:t>
             </a:r>
             <a:endParaRPr lang="en-US" sz="900" dirty="0"/>
-          </a:p>
-        </p:txBody>
-      </p:sp>
-      <p:sp>
-        <p:nvSpPr>
-          <p:cNvPr id="12" name="Text 0"/>
-          <p:cNvSpPr/>
-          <p:nvPr>
-            <p:ph idx="100" hasCustomPrompt="1"/>
-          </p:nvPr>
-        </p:nvSpPr>
-        <p:spPr>
-          <a:xfrm>
-            <a:off x="11292840" y="6355080"/>
-            <a:ext cx="365760" cy="237744"/>
-          </a:xfrm>
-          <a:prstGeom prst="rect">
-            <a:avLst/>
-          </a:prstGeom>
-          <a:noFill/>
-          <a:ln/>
-        </p:spPr>
-        <p:txBody>
-          <a:bodyPr wrap="square" rtlCol="0"/>
-          <a:lstStyle/>
-          <a:p>
-            <a:pPr algn="r" indent="0" marL="0">
-              <a:buNone/>
-            </a:pPr>
-            <a:endParaRPr lang="en-US" sz="850" dirty="0"/>
           </a:p>
         </p:txBody>
       </p:sp>
@@ -14956,6 +14965,45 @@
         </p:nvSpPr>
         <p:spPr>
           <a:xfrm>
+            <a:off x="10972800" y="6217920"/>
+            <a:ext cx="685800" cy="365760"/>
+          </a:xfrm>
+          <a:prstGeom prst="rect">
+            <a:avLst/>
+          </a:prstGeom>
+          <a:noFill/>
+          <a:ln/>
+        </p:spPr>
+        <p:txBody>
+          <a:bodyPr wrap="square" lIns="0" tIns="0" rIns="0" bIns="0" rtlCol="0" anchor="ctr"/>
+          <a:lstStyle/>
+          <a:p>
+            <a:pPr algn="r" indent="0" marL="0">
+              <a:buNone/>
+            </a:pPr>
+            <a:r>
+              <a:rPr lang="en-US" sz="1300" b="1" dirty="0">
+                <a:solidFill>
+                  <a:srgbClr val="8C8C8C"/>
+                </a:solidFill>
+                <a:latin typeface="Calibri" pitchFamily="34" charset="0"/>
+                <a:ea typeface="Calibri" pitchFamily="34" charset="-122"/>
+                <a:cs typeface="Calibri" pitchFamily="34" charset="-120"/>
+              </a:rPr>
+              <a:t>16</a:t>
+            </a:r>
+            <a:endParaRPr lang="en-US" sz="1300" dirty="0"/>
+          </a:p>
+        </p:txBody>
+      </p:sp>
+      <p:sp>
+        <p:nvSpPr>
+          <p:cNvPr id="3" name="Text 1"/>
+          <p:cNvSpPr txBox="1"/>
+          <p:nvPr/>
+        </p:nvSpPr>
+        <p:spPr>
+          <a:xfrm>
             <a:off x="731520" y="502920"/>
             <a:ext cx="10698480" cy="457200"/>
           </a:xfrm>
@@ -14989,7 +15037,7 @@
       </p:sp>
       <p:pic>
         <p:nvPicPr>
-          <p:cNvPr id="3" name="cube" descr="/home/user/sanat-ve-mekan/konferans-bildirisi/03-gorseller/04-basma-ficilasmis-kup.jpeg">    </p:cNvPr>
+          <p:cNvPr id="4" name="cube" descr="/home/user/sanat-ve-mekan/konferans-bildirisi/03-gorseller/04-basma-ficilasmis-kup.jpeg">    </p:cNvPr>
           <p:cNvPicPr>
             <a:picLocks noChangeAspect="1"/>
           </p:cNvPicPr>
@@ -15013,7 +15061,7 @@
       </p:pic>
       <p:sp>
         <p:nvSpPr>
-          <p:cNvPr id="4" name="Text 1"/>
+          <p:cNvPr id="5" name="Text 2"/>
           <p:cNvSpPr txBox="1"/>
           <p:nvPr/>
         </p:nvSpPr>
@@ -15052,7 +15100,7 @@
       </p:sp>
       <p:pic>
         <p:nvPicPr>
-          <p:cNvPr id="5" name="curve" descr="/home/user/sanat-ve-mekan/konferans-bildirisi/03-gorseller/05b-basma-egrisi.png">    </p:cNvPr>
+          <p:cNvPr id="6" name="curve" descr="/home/user/sanat-ve-mekan/konferans-bildirisi/03-gorseller/05b-basma-egrisi.png">    </p:cNvPr>
           <p:cNvPicPr>
             <a:picLocks noChangeAspect="1"/>
           </p:cNvPicPr>
@@ -15076,7 +15124,7 @@
       </p:pic>
       <p:sp>
         <p:nvSpPr>
-          <p:cNvPr id="6" name="Text 2"/>
+          <p:cNvPr id="7" name="Text 3"/>
           <p:cNvSpPr txBox="1"/>
           <p:nvPr/>
         </p:nvSpPr>
@@ -15115,7 +15163,7 @@
       </p:sp>
       <p:sp>
         <p:nvSpPr>
-          <p:cNvPr id="7" name="Text 3"/>
+          <p:cNvPr id="8" name="Text 4"/>
           <p:cNvSpPr txBox="1"/>
           <p:nvPr/>
         </p:nvSpPr>
@@ -15209,7 +15257,7 @@
       </p:sp>
       <p:sp>
         <p:nvSpPr>
-          <p:cNvPr id="8" name="vr9.51.5"/>
+          <p:cNvPr id="9" name="vr9.51.5"/>
           <p:cNvSpPr/>
           <p:nvPr/>
         </p:nvSpPr>
@@ -15236,7 +15284,7 @@
       </p:sp>
       <p:sp>
         <p:nvSpPr>
-          <p:cNvPr id="9" name="Text 5"/>
+          <p:cNvPr id="10" name="Text 6"/>
           <p:cNvSpPr txBox="1"/>
           <p:nvPr/>
         </p:nvSpPr>
@@ -15278,7 +15326,7 @@
       </p:sp>
       <p:sp>
         <p:nvSpPr>
-          <p:cNvPr id="10" name="ru103.3"/>
+          <p:cNvPr id="11" name="ru103.3"/>
           <p:cNvSpPr/>
           <p:nvPr/>
         </p:nvSpPr>
@@ -15305,7 +15353,7 @@
       </p:sp>
       <p:sp>
         <p:nvSpPr>
-          <p:cNvPr id="11" name="Text 7"/>
+          <p:cNvPr id="12" name="Text 8"/>
           <p:cNvSpPr txBox="1"/>
           <p:nvPr/>
         </p:nvSpPr>
@@ -15339,7 +15387,7 @@
                 <a:ea typeface="Calibri" pitchFamily="34" charset="-122"/>
                 <a:cs typeface="Calibri" pitchFamily="34" charset="-120"/>
               </a:rPr>
-              <a:t>It has barrelled, it is shorter and wider, and it is still a single body.</a:t>
+              <a:t>The cube has barrelled: shorter, wider, and still a single body.</a:t>
             </a:r>
             <a:endParaRPr lang="en-US" sz="1200" dirty="0"/>
           </a:p>
@@ -15347,14 +15395,14 @@
       </p:sp>
       <p:sp>
         <p:nvSpPr>
-          <p:cNvPr id="12" name="Text 8"/>
+          <p:cNvPr id="13" name="Text 9"/>
           <p:cNvSpPr txBox="1"/>
           <p:nvPr/>
         </p:nvSpPr>
         <p:spPr>
           <a:xfrm>
             <a:off x="731520" y="6400800"/>
-            <a:ext cx="10241280" cy="457200"/>
+            <a:ext cx="10058400" cy="457200"/>
           </a:xfrm>
           <a:prstGeom prst="rect">
             <a:avLst/>
@@ -15384,36 +15432,6 @@
               <a:t>The strain scale assumes ten per cent deformation from observation, not instrumented measurement.  ·  Bulk density 1.38 g/cm³, mould-volume basis.</a:t>
             </a:r>
             <a:endParaRPr lang="en-US" sz="900" dirty="0"/>
-          </a:p>
-        </p:txBody>
-      </p:sp>
-      <p:sp>
-        <p:nvSpPr>
-          <p:cNvPr id="14" name="Text 0"/>
-          <p:cNvSpPr/>
-          <p:nvPr>
-            <p:ph idx="100" hasCustomPrompt="1"/>
-          </p:nvPr>
-        </p:nvSpPr>
-        <p:spPr>
-          <a:xfrm>
-            <a:off x="11292840" y="6355080"/>
-            <a:ext cx="365760" cy="237744"/>
-          </a:xfrm>
-          <a:prstGeom prst="rect">
-            <a:avLst/>
-          </a:prstGeom>
-          <a:noFill/>
-          <a:ln/>
-        </p:spPr>
-        <p:txBody>
-          <a:bodyPr wrap="square" rtlCol="0"/>
-          <a:lstStyle/>
-          <a:p>
-            <a:pPr algn="r" indent="0" marL="0">
-              <a:buNone/>
-            </a:pPr>
-            <a:endParaRPr lang="en-US" sz="850" dirty="0"/>
           </a:p>
         </p:txBody>
       </p:sp>
@@ -15450,6 +15468,45 @@
         </p:nvSpPr>
         <p:spPr>
           <a:xfrm>
+            <a:off x="10972800" y="6217920"/>
+            <a:ext cx="685800" cy="365760"/>
+          </a:xfrm>
+          <a:prstGeom prst="rect">
+            <a:avLst/>
+          </a:prstGeom>
+          <a:noFill/>
+          <a:ln/>
+        </p:spPr>
+        <p:txBody>
+          <a:bodyPr wrap="square" lIns="0" tIns="0" rIns="0" bIns="0" rtlCol="0" anchor="ctr"/>
+          <a:lstStyle/>
+          <a:p>
+            <a:pPr algn="r" indent="0" marL="0">
+              <a:buNone/>
+            </a:pPr>
+            <a:r>
+              <a:rPr lang="en-US" sz="1300" b="1" dirty="0">
+                <a:solidFill>
+                  <a:srgbClr val="8C8C8C"/>
+                </a:solidFill>
+                <a:latin typeface="Calibri" pitchFamily="34" charset="0"/>
+                <a:ea typeface="Calibri" pitchFamily="34" charset="-122"/>
+                <a:cs typeface="Calibri" pitchFamily="34" charset="-120"/>
+              </a:rPr>
+              <a:t>17</a:t>
+            </a:r>
+            <a:endParaRPr lang="en-US" sz="1300" dirty="0"/>
+          </a:p>
+        </p:txBody>
+      </p:sp>
+      <p:sp>
+        <p:nvSpPr>
+          <p:cNvPr id="3" name="Text 1"/>
+          <p:cNvSpPr txBox="1"/>
+          <p:nvPr/>
+        </p:nvSpPr>
+        <p:spPr>
+          <a:xfrm>
             <a:off x="731520" y="502920"/>
             <a:ext cx="10698480" cy="457200"/>
           </a:xfrm>
@@ -15483,7 +15540,7 @@
       </p:sp>
       <p:sp>
         <p:nvSpPr>
-          <p:cNvPr id="3" name="Text 1"/>
+          <p:cNvPr id="4" name="Text 2"/>
           <p:cNvSpPr txBox="1"/>
           <p:nvPr/>
         </p:nvSpPr>
@@ -16786,7 +16843,7 @@
       </p:graphicFrame>
       <p:sp>
         <p:nvSpPr>
-          <p:cNvPr id="5" name="ru0.83.35"/>
+          <p:cNvPr id="6" name="ru0.83.35"/>
           <p:cNvSpPr/>
           <p:nvPr/>
         </p:nvSpPr>
@@ -16813,7 +16870,7 @@
       </p:sp>
       <p:sp>
         <p:nvSpPr>
-          <p:cNvPr id="6" name="Text 3"/>
+          <p:cNvPr id="7" name="Text 4"/>
           <p:cNvSpPr txBox="1"/>
           <p:nvPr/>
         </p:nvSpPr>
@@ -16852,7 +16909,7 @@
       </p:sp>
       <p:pic>
         <p:nvPicPr>
-          <p:cNvPr id="7" name="fc" descr="/home/user/sanat-ve-mekan/konferans-bildirisi/03-gorseller/09b-egilme-egrisi.png">    </p:cNvPr>
+          <p:cNvPr id="8" name="fc" descr="/home/user/sanat-ve-mekan/konferans-bildirisi/03-gorseller/09b-egilme-egrisi.png">    </p:cNvPr>
           <p:cNvPicPr>
             <a:picLocks noChangeAspect="1"/>
           </p:cNvPicPr>
@@ -16876,7 +16933,7 @@
       </p:pic>
       <p:sp>
         <p:nvSpPr>
-          <p:cNvPr id="8" name="Text 4"/>
+          <p:cNvPr id="9" name="Text 5"/>
           <p:cNvSpPr txBox="1"/>
           <p:nvPr/>
         </p:nvSpPr>
@@ -16918,7 +16975,7 @@
       </p:sp>
       <p:sp>
         <p:nvSpPr>
-          <p:cNvPr id="9" name="vr8.61.45"/>
+          <p:cNvPr id="10" name="vr8.61.45"/>
           <p:cNvSpPr/>
           <p:nvPr/>
         </p:nvSpPr>
@@ -16945,7 +17002,7 @@
       </p:sp>
       <p:sp>
         <p:nvSpPr>
-          <p:cNvPr id="10" name="Text 6"/>
+          <p:cNvPr id="11" name="Text 7"/>
           <p:cNvSpPr txBox="1"/>
           <p:nvPr/>
         </p:nvSpPr>
@@ -16984,7 +17041,7 @@
       </p:sp>
       <p:sp>
         <p:nvSpPr>
-          <p:cNvPr id="11" name="Text 7"/>
+          <p:cNvPr id="12" name="Text 8"/>
           <p:cNvSpPr txBox="1"/>
           <p:nvPr/>
         </p:nvSpPr>
@@ -17018,7 +17075,7 @@
                 <a:ea typeface="Calibri" pitchFamily="34" charset="-122"/>
                 <a:cs typeface="Calibri" pitchFamily="34" charset="-120"/>
               </a:rPr>
-              <a:t>The specimen is kerfed on its tension face while the standard assumes a solid rectangle, so the modulus I am quoting is a lower bound.</a:t>
+              <a:t>The specimen is kerfed on its tension face while the standard assumes a solid rectangle, so the modulus reported here is a lower bound.</a:t>
             </a:r>
             <a:endParaRPr lang="en-US" sz="1200" dirty="0"/>
           </a:p>
@@ -17026,7 +17083,7 @@
       </p:sp>
       <p:sp>
         <p:nvSpPr>
-          <p:cNvPr id="12" name="Text 8"/>
+          <p:cNvPr id="13" name="Text 9"/>
           <p:cNvSpPr txBox="1"/>
           <p:nvPr/>
         </p:nvSpPr>
@@ -17068,7 +17125,7 @@
       </p:sp>
       <p:sp>
         <p:nvSpPr>
-          <p:cNvPr id="13" name="Text 9"/>
+          <p:cNvPr id="14" name="Text 10"/>
           <p:cNvSpPr txBox="1"/>
           <p:nvPr/>
         </p:nvSpPr>
@@ -17105,36 +17162,6 @@
               <a:t>Flexural strength computed as σꜰ = 3FL / 2bd² on the full rectangular section.</a:t>
             </a:r>
             <a:endParaRPr lang="en-US" sz="900" dirty="0"/>
-          </a:p>
-        </p:txBody>
-      </p:sp>
-      <p:sp>
-        <p:nvSpPr>
-          <p:cNvPr id="15" name="Text 0"/>
-          <p:cNvSpPr/>
-          <p:nvPr>
-            <p:ph idx="100" hasCustomPrompt="1"/>
-          </p:nvPr>
-        </p:nvSpPr>
-        <p:spPr>
-          <a:xfrm>
-            <a:off x="11292840" y="6355080"/>
-            <a:ext cx="365760" cy="237744"/>
-          </a:xfrm>
-          <a:prstGeom prst="rect">
-            <a:avLst/>
-          </a:prstGeom>
-          <a:noFill/>
-          <a:ln/>
-        </p:spPr>
-        <p:txBody>
-          <a:bodyPr wrap="square" rtlCol="0"/>
-          <a:lstStyle/>
-          <a:p>
-            <a:pPr algn="r" indent="0" marL="0">
-              <a:buNone/>
-            </a:pPr>
-            <a:endParaRPr lang="en-US" sz="850" dirty="0"/>
           </a:p>
         </p:txBody>
       </p:sp>
@@ -17163,9 +17190,48 @@
           <a:chExt cx="0" cy="0"/>
         </a:xfrm>
       </p:grpSpPr>
+      <p:sp>
+        <p:nvSpPr>
+          <p:cNvPr id="2" name="Text 0"/>
+          <p:cNvSpPr txBox="1"/>
+          <p:nvPr/>
+        </p:nvSpPr>
+        <p:spPr>
+          <a:xfrm>
+            <a:off x="10972800" y="6217920"/>
+            <a:ext cx="685800" cy="365760"/>
+          </a:xfrm>
+          <a:prstGeom prst="rect">
+            <a:avLst/>
+          </a:prstGeom>
+          <a:noFill/>
+          <a:ln/>
+        </p:spPr>
+        <p:txBody>
+          <a:bodyPr wrap="square" lIns="0" tIns="0" rIns="0" bIns="0" rtlCol="0" anchor="ctr"/>
+          <a:lstStyle/>
+          <a:p>
+            <a:pPr algn="r" indent="0" marL="0">
+              <a:buNone/>
+            </a:pPr>
+            <a:r>
+              <a:rPr lang="en-US" sz="1300" b="1" dirty="0">
+                <a:solidFill>
+                  <a:srgbClr val="9E9E9E"/>
+                </a:solidFill>
+                <a:latin typeface="Calibri" pitchFamily="34" charset="0"/>
+                <a:ea typeface="Calibri" pitchFamily="34" charset="-122"/>
+                <a:cs typeface="Calibri" pitchFamily="34" charset="-120"/>
+              </a:rPr>
+              <a:t>18</a:t>
+            </a:r>
+            <a:endParaRPr lang="en-US" sz="1300" dirty="0"/>
+          </a:p>
+        </p:txBody>
+      </p:sp>
       <p:pic>
         <p:nvPicPr>
-          <p:cNvPr id="2" name="b1" descr="/home/user/sanat-ve-mekan/konferans-bildirisi/03-gorseller/06-egilme-buyuk-sehim.jpg">    </p:cNvPr>
+          <p:cNvPr id="3" name="b1" descr="/home/user/sanat-ve-mekan/konferans-bildirisi/03-gorseller/06-egilme-buyuk-sehim.jpg">    </p:cNvPr>
           <p:cNvPicPr>
             <a:picLocks noChangeAspect="1"/>
           </p:cNvPicPr>
@@ -17189,7 +17255,7 @@
       </p:pic>
       <p:pic>
         <p:nvPicPr>
-          <p:cNvPr id="3" name="b2" descr="/home/user/sanat-ve-mekan/konferans-bildirisi/03-gorseller/07-egilme-yakin-yiv.jpeg">    </p:cNvPr>
+          <p:cNvPr id="4" name="b2" descr="/home/user/sanat-ve-mekan/konferans-bildirisi/03-gorseller/07-egilme-yakin-yiv.jpeg">    </p:cNvPr>
           <p:cNvPicPr>
             <a:picLocks noChangeAspect="1"/>
           </p:cNvPicPr>
@@ -17213,7 +17279,7 @@
       </p:pic>
       <p:pic>
         <p:nvPicPr>
-          <p:cNvPr id="4" name="b3" descr="/home/user/sanat-ve-mekan/konferans-bildirisi/03-gorseller/08c-kemer.jpg">    </p:cNvPr>
+          <p:cNvPr id="5" name="b3" descr="/home/user/sanat-ve-mekan/konferans-bildirisi/03-gorseller/08c-kemer.jpg">    </p:cNvPr>
           <p:cNvPicPr>
             <a:picLocks noChangeAspect="1"/>
           </p:cNvPicPr>
@@ -17237,7 +17303,7 @@
       </p:pic>
       <p:sp>
         <p:nvSpPr>
-          <p:cNvPr id="5" name="pane"/>
+          <p:cNvPr id="6" name="pane"/>
           <p:cNvSpPr/>
           <p:nvPr/>
         </p:nvSpPr>
@@ -17264,7 +17330,7 @@
       </p:sp>
       <p:sp>
         <p:nvSpPr>
-          <p:cNvPr id="6" name="Text 1"/>
+          <p:cNvPr id="7" name="Text 2"/>
           <p:cNvSpPr txBox="1"/>
           <p:nvPr/>
         </p:nvSpPr>
@@ -17303,7 +17369,7 @@
       </p:sp>
       <p:sp>
         <p:nvSpPr>
-          <p:cNvPr id="7" name="Text 2"/>
+          <p:cNvPr id="8" name="Text 3"/>
           <p:cNvSpPr txBox="1"/>
           <p:nvPr/>
         </p:nvSpPr>
@@ -17337,7 +17403,7 @@
                 <a:ea typeface="Calibri" pitchFamily="34" charset="-122"/>
                 <a:cs typeface="Calibri" pitchFamily="34" charset="-120"/>
               </a:rPr>
-              <a:t>Both test programmes gave me the same result: substantial deformation with the integrity retained.</a:t>
+              <a:t>Both test programmes gave the same result: substantial deformation with the integrity retained.</a:t>
             </a:r>
             <a:endParaRPr lang="en-US" sz="1200" dirty="0"/>
           </a:p>
@@ -17345,7 +17411,7 @@
       </p:sp>
       <p:sp>
         <p:nvSpPr>
-          <p:cNvPr id="8" name="Text 3"/>
+          <p:cNvPr id="9" name="Text 4"/>
           <p:cNvSpPr txBox="1"/>
           <p:nvPr/>
         </p:nvSpPr>
@@ -17387,7 +17453,7 @@
       </p:sp>
       <p:sp>
         <p:nvSpPr>
-          <p:cNvPr id="9" name="Text 4"/>
+          <p:cNvPr id="10" name="Text 5"/>
           <p:cNvSpPr txBox="1"/>
           <p:nvPr/>
         </p:nvSpPr>
@@ -17460,6 +17526,45 @@
         </p:nvSpPr>
         <p:spPr>
           <a:xfrm>
+            <a:off x="10972800" y="6217920"/>
+            <a:ext cx="685800" cy="365760"/>
+          </a:xfrm>
+          <a:prstGeom prst="rect">
+            <a:avLst/>
+          </a:prstGeom>
+          <a:noFill/>
+          <a:ln/>
+        </p:spPr>
+        <p:txBody>
+          <a:bodyPr wrap="square" lIns="0" tIns="0" rIns="0" bIns="0" rtlCol="0" anchor="ctr"/>
+          <a:lstStyle/>
+          <a:p>
+            <a:pPr algn="r" indent="0" marL="0">
+              <a:buNone/>
+            </a:pPr>
+            <a:r>
+              <a:rPr lang="en-US" sz="1300" b="1" dirty="0">
+                <a:solidFill>
+                  <a:srgbClr val="8C8C8C"/>
+                </a:solidFill>
+                <a:latin typeface="Calibri" pitchFamily="34" charset="0"/>
+                <a:ea typeface="Calibri" pitchFamily="34" charset="-122"/>
+                <a:cs typeface="Calibri" pitchFamily="34" charset="-120"/>
+              </a:rPr>
+              <a:t>19</a:t>
+            </a:r>
+            <a:endParaRPr lang="en-US" sz="1300" dirty="0"/>
+          </a:p>
+        </p:txBody>
+      </p:sp>
+      <p:sp>
+        <p:nvSpPr>
+          <p:cNvPr id="3" name="Text 1"/>
+          <p:cNvSpPr txBox="1"/>
+          <p:nvPr/>
+        </p:nvSpPr>
+        <p:spPr>
+          <a:xfrm>
             <a:off x="731520" y="502920"/>
             <a:ext cx="10698480" cy="457200"/>
           </a:xfrm>
@@ -17493,7 +17598,7 @@
       </p:sp>
       <p:pic>
         <p:nvPicPr>
-          <p:cNvPr id="3" name="fl" descr="/home/user/sanat-ve-mekan/konferans-bildirisi/03-gorseller/10-alev-testi.png">    </p:cNvPr>
+          <p:cNvPr id="4" name="fl" descr="/home/user/sanat-ve-mekan/konferans-bildirisi/03-gorseller/10-alev-testi.png">    </p:cNvPr>
           <p:cNvPicPr>
             <a:picLocks noChangeAspect="1"/>
           </p:cNvPicPr>
@@ -17517,7 +17622,7 @@
       </p:pic>
       <p:sp>
         <p:nvSpPr>
-          <p:cNvPr id="4" name="Text 1"/>
+          <p:cNvPr id="5" name="Text 2"/>
           <p:cNvSpPr txBox="1"/>
           <p:nvPr/>
         </p:nvSpPr>
@@ -17556,7 +17661,7 @@
       </p:sp>
       <p:sp>
         <p:nvSpPr>
-          <p:cNvPr id="5" name="Text 2"/>
+          <p:cNvPr id="6" name="Text 3"/>
           <p:cNvSpPr txBox="1"/>
           <p:nvPr/>
         </p:nvSpPr>
@@ -17595,7 +17700,7 @@
       </p:sp>
       <p:sp>
         <p:nvSpPr>
-          <p:cNvPr id="6" name="Text 3"/>
+          <p:cNvPr id="7" name="Text 4"/>
           <p:cNvSpPr txBox="1"/>
           <p:nvPr/>
         </p:nvSpPr>
@@ -17637,7 +17742,7 @@
       </p:sp>
       <p:sp>
         <p:nvSpPr>
-          <p:cNvPr id="7" name="Text 4"/>
+          <p:cNvPr id="8" name="Text 5"/>
           <p:cNvSpPr txBox="1"/>
           <p:nvPr/>
         </p:nvSpPr>
@@ -17676,7 +17781,7 @@
       </p:sp>
       <p:sp>
         <p:nvSpPr>
-          <p:cNvPr id="8" name="Text 5"/>
+          <p:cNvPr id="9" name="Text 6"/>
           <p:cNvSpPr txBox="1"/>
           <p:nvPr/>
         </p:nvSpPr>
@@ -17718,7 +17823,7 @@
       </p:sp>
       <p:sp>
         <p:nvSpPr>
-          <p:cNvPr id="9" name="Text 6"/>
+          <p:cNvPr id="10" name="Text 7"/>
           <p:cNvSpPr txBox="1"/>
           <p:nvPr/>
         </p:nvSpPr>
@@ -17812,7 +17917,7 @@
       </p:sp>
       <p:sp>
         <p:nvSpPr>
-          <p:cNvPr id="10" name="Text 7"/>
+          <p:cNvPr id="11" name="Text 8"/>
           <p:cNvSpPr txBox="1"/>
           <p:nvPr/>
         </p:nvSpPr>
@@ -17854,7 +17959,7 @@
       </p:sp>
       <p:sp>
         <p:nvSpPr>
-          <p:cNvPr id="11" name="Text 8"/>
+          <p:cNvPr id="12" name="Text 9"/>
           <p:cNvSpPr txBox="1"/>
           <p:nvPr/>
         </p:nvSpPr>
@@ -17896,7 +18001,7 @@
       </p:sp>
       <p:sp>
         <p:nvSpPr>
-          <p:cNvPr id="12" name="vr7.31.45"/>
+          <p:cNvPr id="13" name="vr7.31.45"/>
           <p:cNvSpPr/>
           <p:nvPr/>
         </p:nvSpPr>
@@ -17923,7 +18028,7 @@
       </p:sp>
       <p:sp>
         <p:nvSpPr>
-          <p:cNvPr id="13" name="Text 10"/>
+          <p:cNvPr id="14" name="Text 11"/>
           <p:cNvSpPr txBox="1"/>
           <p:nvPr/>
         </p:nvSpPr>
@@ -17962,7 +18067,7 @@
       </p:sp>
       <p:sp>
         <p:nvSpPr>
-          <p:cNvPr id="14" name="Text 11"/>
+          <p:cNvPr id="15" name="Text 12"/>
           <p:cNvSpPr txBox="1"/>
           <p:nvPr/>
         </p:nvSpPr>
@@ -18001,7 +18106,7 @@
       </p:sp>
       <p:sp>
         <p:nvSpPr>
-          <p:cNvPr id="15" name="Text 12"/>
+          <p:cNvPr id="16" name="Text 13"/>
           <p:cNvSpPr txBox="1"/>
           <p:nvPr/>
         </p:nvSpPr>
@@ -18043,7 +18148,7 @@
       </p:sp>
       <p:sp>
         <p:nvSpPr>
-          <p:cNvPr id="16" name="ru7.83.2"/>
+          <p:cNvPr id="17" name="ru7.83.2"/>
           <p:cNvSpPr/>
           <p:nvPr/>
         </p:nvSpPr>
@@ -18070,7 +18175,7 @@
       </p:sp>
       <p:sp>
         <p:nvSpPr>
-          <p:cNvPr id="17" name="Text 14"/>
+          <p:cNvPr id="18" name="Text 15"/>
           <p:cNvSpPr txBox="1"/>
           <p:nvPr/>
         </p:nvSpPr>
@@ -18964,7 +19069,7 @@
       </p:graphicFrame>
       <p:sp>
         <p:nvSpPr>
-          <p:cNvPr id="19" name="Text 15"/>
+          <p:cNvPr id="20" name="Text 16"/>
           <p:cNvSpPr txBox="1"/>
           <p:nvPr/>
         </p:nvSpPr>
@@ -19001,36 +19106,6 @@
               <a:t>Mould-volume basis, therefore a lower bound.</a:t>
             </a:r>
             <a:endParaRPr lang="en-US" sz="900" dirty="0"/>
-          </a:p>
-        </p:txBody>
-      </p:sp>
-      <p:sp>
-        <p:nvSpPr>
-          <p:cNvPr id="21" name="Text 0"/>
-          <p:cNvSpPr/>
-          <p:nvPr>
-            <p:ph idx="100" hasCustomPrompt="1"/>
-          </p:nvPr>
-        </p:nvSpPr>
-        <p:spPr>
-          <a:xfrm>
-            <a:off x="11292840" y="6355080"/>
-            <a:ext cx="365760" cy="237744"/>
-          </a:xfrm>
-          <a:prstGeom prst="rect">
-            <a:avLst/>
-          </a:prstGeom>
-          <a:noFill/>
-          <a:ln/>
-        </p:spPr>
-        <p:txBody>
-          <a:bodyPr wrap="square" rtlCol="0"/>
-          <a:lstStyle/>
-          <a:p>
-            <a:pPr algn="r" indent="0" marL="0">
-              <a:buNone/>
-            </a:pPr>
-            <a:endParaRPr lang="en-US" sz="850" dirty="0"/>
           </a:p>
         </p:txBody>
       </p:sp>
@@ -19067,6 +19142,45 @@
         </p:nvSpPr>
         <p:spPr>
           <a:xfrm>
+            <a:off x="10972800" y="6217920"/>
+            <a:ext cx="685800" cy="365760"/>
+          </a:xfrm>
+          <a:prstGeom prst="rect">
+            <a:avLst/>
+          </a:prstGeom>
+          <a:noFill/>
+          <a:ln/>
+        </p:spPr>
+        <p:txBody>
+          <a:bodyPr wrap="square" lIns="0" tIns="0" rIns="0" bIns="0" rtlCol="0" anchor="ctr"/>
+          <a:lstStyle/>
+          <a:p>
+            <a:pPr algn="r" indent="0" marL="0">
+              <a:buNone/>
+            </a:pPr>
+            <a:r>
+              <a:rPr lang="en-US" sz="1300" b="1" dirty="0">
+                <a:solidFill>
+                  <a:srgbClr val="8C8C8C"/>
+                </a:solidFill>
+                <a:latin typeface="Calibri" pitchFamily="34" charset="0"/>
+                <a:ea typeface="Calibri" pitchFamily="34" charset="-122"/>
+                <a:cs typeface="Calibri" pitchFamily="34" charset="-120"/>
+              </a:rPr>
+              <a:t>2</a:t>
+            </a:r>
+            <a:endParaRPr lang="en-US" sz="1300" dirty="0"/>
+          </a:p>
+        </p:txBody>
+      </p:sp>
+      <p:sp>
+        <p:nvSpPr>
+          <p:cNvPr id="3" name="Text 1"/>
+          <p:cNvSpPr txBox="1"/>
+          <p:nvPr/>
+        </p:nvSpPr>
+        <p:spPr>
+          <a:xfrm>
             <a:off x="731520" y="502920"/>
             <a:ext cx="10698480" cy="457200"/>
           </a:xfrm>
@@ -19100,7 +19214,7 @@
       </p:sp>
       <p:sp>
         <p:nvSpPr>
-          <p:cNvPr id="3" name="Text 1"/>
+          <p:cNvPr id="4" name="Text 2"/>
           <p:cNvSpPr txBox="1"/>
           <p:nvPr/>
         </p:nvSpPr>
@@ -19139,7 +19253,7 @@
       </p:sp>
       <p:sp>
         <p:nvSpPr>
-          <p:cNvPr id="4" name="Text 2"/>
+          <p:cNvPr id="5" name="Text 3"/>
           <p:cNvSpPr txBox="1"/>
           <p:nvPr/>
         </p:nvSpPr>
@@ -19178,7 +19292,7 @@
       </p:sp>
       <p:sp>
         <p:nvSpPr>
-          <p:cNvPr id="5" name="Text 3"/>
+          <p:cNvPr id="6" name="Text 4"/>
           <p:cNvSpPr txBox="1"/>
           <p:nvPr/>
         </p:nvSpPr>
@@ -19220,7 +19334,7 @@
       </p:sp>
       <p:sp>
         <p:nvSpPr>
-          <p:cNvPr id="6" name="Text 4"/>
+          <p:cNvPr id="7" name="Text 5"/>
           <p:cNvSpPr txBox="1"/>
           <p:nvPr/>
         </p:nvSpPr>
@@ -19259,7 +19373,7 @@
       </p:sp>
       <p:sp>
         <p:nvSpPr>
-          <p:cNvPr id="7" name="Text 5"/>
+          <p:cNvPr id="8" name="Text 6"/>
           <p:cNvSpPr txBox="1"/>
           <p:nvPr/>
         </p:nvSpPr>
@@ -19301,7 +19415,7 @@
       </p:sp>
       <p:sp>
         <p:nvSpPr>
-          <p:cNvPr id="8" name="Text 6"/>
+          <p:cNvPr id="9" name="Text 7"/>
           <p:cNvSpPr txBox="1"/>
           <p:nvPr/>
         </p:nvSpPr>
@@ -19343,7 +19457,7 @@
       </p:sp>
       <p:sp>
         <p:nvSpPr>
-          <p:cNvPr id="9" name="vr6.31.5"/>
+          <p:cNvPr id="10" name="vr6.31.5"/>
           <p:cNvSpPr/>
           <p:nvPr/>
         </p:nvSpPr>
@@ -19370,7 +19484,7 @@
       </p:sp>
       <p:sp>
         <p:nvSpPr>
-          <p:cNvPr id="10" name="Text 8"/>
+          <p:cNvPr id="11" name="Text 9"/>
           <p:cNvSpPr txBox="1"/>
           <p:nvPr/>
         </p:nvSpPr>
@@ -19409,7 +19523,7 @@
       </p:sp>
       <p:sp>
         <p:nvSpPr>
-          <p:cNvPr id="11" name="nd6.92.3"/>
+          <p:cNvPr id="12" name="nd6.92.3"/>
           <p:cNvSpPr/>
           <p:nvPr/>
         </p:nvSpPr>
@@ -19434,7 +19548,7 @@
       </p:sp>
       <p:sp>
         <p:nvSpPr>
-          <p:cNvPr id="12" name="Text 10"/>
+          <p:cNvPr id="13" name="Text 11"/>
           <p:cNvSpPr txBox="1"/>
           <p:nvPr/>
         </p:nvSpPr>
@@ -19476,7 +19590,7 @@
       </p:sp>
       <p:sp>
         <p:nvSpPr>
-          <p:cNvPr id="13" name="d1"/>
+          <p:cNvPr id="14" name="d1"/>
           <p:cNvSpPr/>
           <p:nvPr/>
         </p:nvSpPr>
@@ -19503,7 +19617,7 @@
       </p:sp>
       <p:sp>
         <p:nvSpPr>
-          <p:cNvPr id="14" name="nd6.93.3"/>
+          <p:cNvPr id="15" name="nd6.93.3"/>
           <p:cNvSpPr/>
           <p:nvPr/>
         </p:nvSpPr>
@@ -19528,7 +19642,7 @@
       </p:sp>
       <p:sp>
         <p:nvSpPr>
-          <p:cNvPr id="15" name="Text 13"/>
+          <p:cNvPr id="16" name="Text 14"/>
           <p:cNvSpPr txBox="1"/>
           <p:nvPr/>
         </p:nvSpPr>
@@ -19570,7 +19684,7 @@
       </p:sp>
       <p:sp>
         <p:nvSpPr>
-          <p:cNvPr id="16" name="d2"/>
+          <p:cNvPr id="17" name="d2"/>
           <p:cNvSpPr/>
           <p:nvPr/>
         </p:nvSpPr>
@@ -19597,7 +19711,7 @@
       </p:sp>
       <p:sp>
         <p:nvSpPr>
-          <p:cNvPr id="17" name="d3"/>
+          <p:cNvPr id="18" name="d3"/>
           <p:cNvSpPr/>
           <p:nvPr/>
         </p:nvSpPr>
@@ -19624,7 +19738,7 @@
       </p:sp>
       <p:sp>
         <p:nvSpPr>
-          <p:cNvPr id="18" name="nd6.94.3"/>
+          <p:cNvPr id="19" name="nd6.94.3"/>
           <p:cNvSpPr/>
           <p:nvPr/>
         </p:nvSpPr>
@@ -19649,7 +19763,7 @@
       </p:sp>
       <p:sp>
         <p:nvSpPr>
-          <p:cNvPr id="19" name="Text 17"/>
+          <p:cNvPr id="20" name="Text 18"/>
           <p:cNvSpPr txBox="1"/>
           <p:nvPr/>
         </p:nvSpPr>
@@ -19691,7 +19805,7 @@
       </p:sp>
       <p:sp>
         <p:nvSpPr>
-          <p:cNvPr id="20" name="nd9.94.3"/>
+          <p:cNvPr id="21" name="nd9.94.3"/>
           <p:cNvSpPr/>
           <p:nvPr/>
         </p:nvSpPr>
@@ -19716,7 +19830,7 @@
       </p:sp>
       <p:sp>
         <p:nvSpPr>
-          <p:cNvPr id="21" name="Text 19"/>
+          <p:cNvPr id="22" name="Text 20"/>
           <p:cNvSpPr txBox="1"/>
           <p:nvPr/>
         </p:nvSpPr>
@@ -19758,7 +19872,7 @@
       </p:sp>
       <p:sp>
         <p:nvSpPr>
-          <p:cNvPr id="22" name="Text 20"/>
+          <p:cNvPr id="23" name="Text 21"/>
           <p:cNvSpPr txBox="1"/>
           <p:nvPr/>
         </p:nvSpPr>
@@ -19795,36 +19909,6 @@
               <a:t>The case for eggshell as a mineral phase is settled. This paper is about the phase that binds it.</a:t>
             </a:r>
             <a:endParaRPr lang="en-US" sz="1200" dirty="0"/>
-          </a:p>
-        </p:txBody>
-      </p:sp>
-      <p:sp>
-        <p:nvSpPr>
-          <p:cNvPr id="24" name="Text 0"/>
-          <p:cNvSpPr/>
-          <p:nvPr>
-            <p:ph idx="100" hasCustomPrompt="1"/>
-          </p:nvPr>
-        </p:nvSpPr>
-        <p:spPr>
-          <a:xfrm>
-            <a:off x="11292840" y="6355080"/>
-            <a:ext cx="365760" cy="237744"/>
-          </a:xfrm>
-          <a:prstGeom prst="rect">
-            <a:avLst/>
-          </a:prstGeom>
-          <a:noFill/>
-          <a:ln/>
-        </p:spPr>
-        <p:txBody>
-          <a:bodyPr wrap="square" rtlCol="0"/>
-          <a:lstStyle/>
-          <a:p>
-            <a:pPr algn="r" indent="0" marL="0">
-              <a:buNone/>
-            </a:pPr>
-            <a:endParaRPr lang="en-US" sz="850" dirty="0"/>
           </a:p>
         </p:txBody>
       </p:sp>
@@ -19861,6 +19945,45 @@
         </p:nvSpPr>
         <p:spPr>
           <a:xfrm>
+            <a:off x="10972800" y="6217920"/>
+            <a:ext cx="685800" cy="365760"/>
+          </a:xfrm>
+          <a:prstGeom prst="rect">
+            <a:avLst/>
+          </a:prstGeom>
+          <a:noFill/>
+          <a:ln/>
+        </p:spPr>
+        <p:txBody>
+          <a:bodyPr wrap="square" lIns="0" tIns="0" rIns="0" bIns="0" rtlCol="0" anchor="ctr"/>
+          <a:lstStyle/>
+          <a:p>
+            <a:pPr algn="r" indent="0" marL="0">
+              <a:buNone/>
+            </a:pPr>
+            <a:r>
+              <a:rPr lang="en-US" sz="1300" b="1" dirty="0">
+                <a:solidFill>
+                  <a:srgbClr val="8C8C8C"/>
+                </a:solidFill>
+                <a:latin typeface="Calibri" pitchFamily="34" charset="0"/>
+                <a:ea typeface="Calibri" pitchFamily="34" charset="-122"/>
+                <a:cs typeface="Calibri" pitchFamily="34" charset="-120"/>
+              </a:rPr>
+              <a:t>20</a:t>
+            </a:r>
+            <a:endParaRPr lang="en-US" sz="1300" dirty="0"/>
+          </a:p>
+        </p:txBody>
+      </p:sp>
+      <p:sp>
+        <p:nvSpPr>
+          <p:cNvPr id="3" name="Text 1"/>
+          <p:cNvSpPr txBox="1"/>
+          <p:nvPr/>
+        </p:nvSpPr>
+        <p:spPr>
+          <a:xfrm>
             <a:off x="731520" y="502920"/>
             <a:ext cx="10698480" cy="457200"/>
           </a:xfrm>
@@ -19894,7 +20017,7 @@
       </p:sp>
       <p:sp>
         <p:nvSpPr>
-          <p:cNvPr id="3" name="Text 1"/>
+          <p:cNvPr id="4" name="Text 2"/>
           <p:cNvSpPr txBox="1"/>
           <p:nvPr/>
         </p:nvSpPr>
@@ -19933,7 +20056,7 @@
       </p:sp>
       <p:graphicFrame>
         <p:nvGraphicFramePr>
-          <p:cNvPr id="4" name="bc1" descr=""/>
+          <p:cNvPr id="5" name="bc1" descr=""/>
           <p:cNvGraphicFramePr/>
           <p:nvPr/>
         </p:nvGraphicFramePr>
@@ -19949,7 +20072,7 @@
       </p:graphicFrame>
       <p:sp>
         <p:nvSpPr>
-          <p:cNvPr id="5" name="Text 2"/>
+          <p:cNvPr id="6" name="Text 3"/>
           <p:cNvSpPr txBox="1"/>
           <p:nvPr/>
         </p:nvSpPr>
@@ -19991,7 +20114,7 @@
       </p:sp>
       <p:sp>
         <p:nvSpPr>
-          <p:cNvPr id="6" name="vr9.51.45"/>
+          <p:cNvPr id="7" name="vr9.51.45"/>
           <p:cNvSpPr/>
           <p:nvPr/>
         </p:nvSpPr>
@@ -20018,7 +20141,7 @@
       </p:sp>
       <p:sp>
         <p:nvSpPr>
-          <p:cNvPr id="7" name="Text 4"/>
+          <p:cNvPr id="8" name="Text 5"/>
           <p:cNvSpPr txBox="1"/>
           <p:nvPr/>
         </p:nvSpPr>
@@ -20060,7 +20183,7 @@
       </p:sp>
       <p:sp>
         <p:nvSpPr>
-          <p:cNvPr id="8" name="ru103.6"/>
+          <p:cNvPr id="9" name="ru103.6"/>
           <p:cNvSpPr/>
           <p:nvPr/>
         </p:nvSpPr>
@@ -20087,7 +20210,7 @@
       </p:sp>
       <p:sp>
         <p:nvSpPr>
-          <p:cNvPr id="9" name="Text 6"/>
+          <p:cNvPr id="10" name="Text 7"/>
           <p:cNvSpPr txBox="1"/>
           <p:nvPr/>
         </p:nvSpPr>
@@ -20124,36 +20247,6 @@
               <a:t>It has one sixth the compressive strength of MDF and one twentieth that of travertine.</a:t>
             </a:r>
             <a:endParaRPr lang="en-US" sz="1200" dirty="0"/>
-          </a:p>
-        </p:txBody>
-      </p:sp>
-      <p:sp>
-        <p:nvSpPr>
-          <p:cNvPr id="11" name="Text 0"/>
-          <p:cNvSpPr/>
-          <p:nvPr>
-            <p:ph idx="100" hasCustomPrompt="1"/>
-          </p:nvPr>
-        </p:nvSpPr>
-        <p:spPr>
-          <a:xfrm>
-            <a:off x="11292840" y="6355080"/>
-            <a:ext cx="365760" cy="237744"/>
-          </a:xfrm>
-          <a:prstGeom prst="rect">
-            <a:avLst/>
-          </a:prstGeom>
-          <a:noFill/>
-          <a:ln/>
-        </p:spPr>
-        <p:txBody>
-          <a:bodyPr wrap="square" rtlCol="0"/>
-          <a:lstStyle/>
-          <a:p>
-            <a:pPr algn="r" indent="0" marL="0">
-              <a:buNone/>
-            </a:pPr>
-            <a:endParaRPr lang="en-US" sz="850" dirty="0"/>
           </a:p>
         </p:txBody>
       </p:sp>
@@ -20190,6 +20283,45 @@
         </p:nvSpPr>
         <p:spPr>
           <a:xfrm>
+            <a:off x="10972800" y="6217920"/>
+            <a:ext cx="685800" cy="365760"/>
+          </a:xfrm>
+          <a:prstGeom prst="rect">
+            <a:avLst/>
+          </a:prstGeom>
+          <a:noFill/>
+          <a:ln/>
+        </p:spPr>
+        <p:txBody>
+          <a:bodyPr wrap="square" lIns="0" tIns="0" rIns="0" bIns="0" rtlCol="0" anchor="ctr"/>
+          <a:lstStyle/>
+          <a:p>
+            <a:pPr algn="r" indent="0" marL="0">
+              <a:buNone/>
+            </a:pPr>
+            <a:r>
+              <a:rPr lang="en-US" sz="1300" b="1" dirty="0">
+                <a:solidFill>
+                  <a:srgbClr val="8C8C8C"/>
+                </a:solidFill>
+                <a:latin typeface="Calibri" pitchFamily="34" charset="0"/>
+                <a:ea typeface="Calibri" pitchFamily="34" charset="-122"/>
+                <a:cs typeface="Calibri" pitchFamily="34" charset="-120"/>
+              </a:rPr>
+              <a:t>21</a:t>
+            </a:r>
+            <a:endParaRPr lang="en-US" sz="1300" dirty="0"/>
+          </a:p>
+        </p:txBody>
+      </p:sp>
+      <p:sp>
+        <p:nvSpPr>
+          <p:cNvPr id="3" name="Text 1"/>
+          <p:cNvSpPr txBox="1"/>
+          <p:nvPr/>
+        </p:nvSpPr>
+        <p:spPr>
+          <a:xfrm>
             <a:off x="731520" y="502920"/>
             <a:ext cx="10698480" cy="457200"/>
           </a:xfrm>
@@ -20223,7 +20355,7 @@
       </p:sp>
       <p:sp>
         <p:nvSpPr>
-          <p:cNvPr id="3" name="Text 1"/>
+          <p:cNvPr id="4" name="Text 2"/>
           <p:cNvSpPr txBox="1"/>
           <p:nvPr/>
         </p:nvSpPr>
@@ -21529,7 +21661,7 @@
       </p:graphicFrame>
       <p:sp>
         <p:nvSpPr>
-          <p:cNvPr id="5" name="Text 2"/>
+          <p:cNvPr id="6" name="Text 3"/>
           <p:cNvSpPr txBox="1"/>
           <p:nvPr/>
         </p:nvSpPr>
@@ -21568,7 +21700,7 @@
       </p:sp>
       <p:sp>
         <p:nvSpPr>
-          <p:cNvPr id="6" name="vr6.51.42"/>
+          <p:cNvPr id="7" name="vr6.51.42"/>
           <p:cNvSpPr/>
           <p:nvPr/>
         </p:nvSpPr>
@@ -21595,7 +21727,7 @@
       </p:sp>
       <p:sp>
         <p:nvSpPr>
-          <p:cNvPr id="7" name="lax"/>
+          <p:cNvPr id="8" name="lax"/>
           <p:cNvSpPr/>
           <p:nvPr/>
         </p:nvSpPr>
@@ -21622,7 +21754,7 @@
       </p:sp>
       <p:sp>
         <p:nvSpPr>
-          <p:cNvPr id="8" name="lt1"/>
+          <p:cNvPr id="9" name="lt1"/>
           <p:cNvSpPr/>
           <p:nvPr/>
         </p:nvSpPr>
@@ -21649,7 +21781,7 @@
       </p:sp>
       <p:sp>
         <p:nvSpPr>
-          <p:cNvPr id="9" name="Text 6"/>
+          <p:cNvPr id="10" name="Text 7"/>
           <p:cNvSpPr txBox="1"/>
           <p:nvPr/>
         </p:nvSpPr>
@@ -21688,7 +21820,7 @@
       </p:sp>
       <p:sp>
         <p:nvSpPr>
-          <p:cNvPr id="10" name="lt10"/>
+          <p:cNvPr id="11" name="lt10"/>
           <p:cNvSpPr/>
           <p:nvPr/>
         </p:nvSpPr>
@@ -21715,7 +21847,7 @@
       </p:sp>
       <p:sp>
         <p:nvSpPr>
-          <p:cNvPr id="11" name="Text 8"/>
+          <p:cNvPr id="12" name="Text 9"/>
           <p:cNvSpPr txBox="1"/>
           <p:nvPr/>
         </p:nvSpPr>
@@ -21754,7 +21886,7 @@
       </p:sp>
       <p:sp>
         <p:nvSpPr>
-          <p:cNvPr id="12" name="lt100"/>
+          <p:cNvPr id="13" name="lt100"/>
           <p:cNvSpPr/>
           <p:nvPr/>
         </p:nvSpPr>
@@ -21781,7 +21913,7 @@
       </p:sp>
       <p:sp>
         <p:nvSpPr>
-          <p:cNvPr id="13" name="Text 10"/>
+          <p:cNvPr id="14" name="Text 11"/>
           <p:cNvSpPr txBox="1"/>
           <p:nvPr/>
         </p:nvSpPr>
@@ -21820,7 +21952,7 @@
       </p:sp>
       <p:sp>
         <p:nvSpPr>
-          <p:cNvPr id="14" name="lt1000"/>
+          <p:cNvPr id="15" name="lt1000"/>
           <p:cNvSpPr/>
           <p:nvPr/>
         </p:nvSpPr>
@@ -21847,7 +21979,7 @@
       </p:sp>
       <p:sp>
         <p:nvSpPr>
-          <p:cNvPr id="15" name="Text 12"/>
+          <p:cNvPr id="16" name="Text 13"/>
           <p:cNvSpPr txBox="1"/>
           <p:nvPr/>
         </p:nvSpPr>
@@ -21886,7 +22018,7 @@
       </p:sp>
       <p:sp>
         <p:nvSpPr>
-          <p:cNvPr id="16" name="lt10000"/>
+          <p:cNvPr id="17" name="lt10000"/>
           <p:cNvSpPr/>
           <p:nvPr/>
         </p:nvSpPr>
@@ -21913,7 +22045,7 @@
       </p:sp>
       <p:sp>
         <p:nvSpPr>
-          <p:cNvPr id="17" name="Text 14"/>
+          <p:cNvPr id="18" name="Text 15"/>
           <p:cNvSpPr txBox="1"/>
           <p:nvPr/>
         </p:nvSpPr>
@@ -21952,7 +22084,7 @@
       </p:sp>
       <p:sp>
         <p:nvSpPr>
-          <p:cNvPr id="18" name="lr0"/>
+          <p:cNvPr id="19" name="lr0"/>
           <p:cNvSpPr/>
           <p:nvPr/>
         </p:nvSpPr>
@@ -21981,7 +22113,7 @@
       </p:sp>
       <p:sp>
         <p:nvSpPr>
-          <p:cNvPr id="19" name="Text 16"/>
+          <p:cNvPr id="20" name="Text 17"/>
           <p:cNvSpPr txBox="1"/>
           <p:nvPr/>
         </p:nvSpPr>
@@ -22020,7 +22152,7 @@
       </p:sp>
       <p:sp>
         <p:nvSpPr>
-          <p:cNvPr id="20" name="lr1"/>
+          <p:cNvPr id="21" name="lr1"/>
           <p:cNvSpPr/>
           <p:nvPr/>
         </p:nvSpPr>
@@ -22049,7 +22181,7 @@
       </p:sp>
       <p:sp>
         <p:nvSpPr>
-          <p:cNvPr id="21" name="Text 18"/>
+          <p:cNvPr id="22" name="Text 19"/>
           <p:cNvSpPr txBox="1"/>
           <p:nvPr/>
         </p:nvSpPr>
@@ -22088,7 +22220,7 @@
       </p:sp>
       <p:sp>
         <p:nvSpPr>
-          <p:cNvPr id="22" name="lp0"/>
+          <p:cNvPr id="23" name="lp0"/>
           <p:cNvSpPr/>
           <p:nvPr/>
         </p:nvSpPr>
@@ -22115,7 +22247,7 @@
       </p:sp>
       <p:sp>
         <p:nvSpPr>
-          <p:cNvPr id="23" name="lp1"/>
+          <p:cNvPr id="24" name="lp1"/>
           <p:cNvSpPr/>
           <p:nvPr/>
         </p:nvSpPr>
@@ -22142,7 +22274,7 @@
       </p:sp>
       <p:sp>
         <p:nvSpPr>
-          <p:cNvPr id="24" name="lp2"/>
+          <p:cNvPr id="25" name="lp2"/>
           <p:cNvSpPr/>
           <p:nvPr/>
         </p:nvSpPr>
@@ -22169,7 +22301,7 @@
       </p:sp>
       <p:sp>
         <p:nvSpPr>
-          <p:cNvPr id="25" name="Text 22"/>
+          <p:cNvPr id="26" name="Text 23"/>
           <p:cNvSpPr txBox="1"/>
           <p:nvPr/>
         </p:nvSpPr>
@@ -22208,7 +22340,7 @@
       </p:sp>
       <p:sp>
         <p:nvSpPr>
-          <p:cNvPr id="26" name="lme"/>
+          <p:cNvPr id="27" name="lme"/>
           <p:cNvSpPr/>
           <p:nvPr/>
         </p:nvSpPr>
@@ -22235,7 +22367,7 @@
       </p:sp>
       <p:sp>
         <p:nvSpPr>
-          <p:cNvPr id="27" name="lml"/>
+          <p:cNvPr id="28" name="lml"/>
           <p:cNvSpPr/>
           <p:nvPr/>
         </p:nvSpPr>
@@ -22262,7 +22394,7 @@
       </p:sp>
       <p:sp>
         <p:nvSpPr>
-          <p:cNvPr id="28" name="Text 25"/>
+          <p:cNvPr id="29" name="Text 26"/>
           <p:cNvSpPr txBox="1"/>
           <p:nvPr/>
         </p:nvSpPr>
@@ -22301,7 +22433,7 @@
       </p:sp>
       <p:sp>
         <p:nvSpPr>
-          <p:cNvPr id="29" name="Text 26"/>
+          <p:cNvPr id="30" name="Text 27"/>
           <p:cNvSpPr txBox="1"/>
           <p:nvPr/>
         </p:nvSpPr>
@@ -22343,7 +22475,7 @@
       </p:sp>
       <p:sp>
         <p:nvSpPr>
-          <p:cNvPr id="30" name="ru0.84.6"/>
+          <p:cNvPr id="31" name="ru0.84.6"/>
           <p:cNvSpPr/>
           <p:nvPr/>
         </p:nvSpPr>
@@ -22370,7 +22502,7 @@
       </p:sp>
       <p:sp>
         <p:nvSpPr>
-          <p:cNvPr id="31" name="Text 28"/>
+          <p:cNvPr id="32" name="Text 29"/>
           <p:cNvSpPr txBox="1"/>
           <p:nvPr/>
         </p:nvSpPr>
@@ -22412,7 +22544,7 @@
       </p:sp>
       <p:sp>
         <p:nvSpPr>
-          <p:cNvPr id="32" name="Text 29"/>
+          <p:cNvPr id="33" name="Text 30"/>
           <p:cNvSpPr txBox="1"/>
           <p:nvPr/>
         </p:nvSpPr>
@@ -22449,36 +22581,6 @@
               <a:t>An order of magnitude above the fungal and lime-binder family in compression; wood remains two orders of magnitude above.  ·  Values are reported as published; specimen geometry and test method differ between sources.</a:t>
             </a:r>
             <a:endParaRPr lang="en-US" sz="900" dirty="0"/>
-          </a:p>
-        </p:txBody>
-      </p:sp>
-      <p:sp>
-        <p:nvSpPr>
-          <p:cNvPr id="34" name="Text 0"/>
-          <p:cNvSpPr/>
-          <p:nvPr>
-            <p:ph idx="100" hasCustomPrompt="1"/>
-          </p:nvPr>
-        </p:nvSpPr>
-        <p:spPr>
-          <a:xfrm>
-            <a:off x="11292840" y="6355080"/>
-            <a:ext cx="365760" cy="237744"/>
-          </a:xfrm>
-          <a:prstGeom prst="rect">
-            <a:avLst/>
-          </a:prstGeom>
-          <a:noFill/>
-          <a:ln/>
-        </p:spPr>
-        <p:txBody>
-          <a:bodyPr wrap="square" rtlCol="0"/>
-          <a:lstStyle/>
-          <a:p>
-            <a:pPr algn="r" indent="0" marL="0">
-              <a:buNone/>
-            </a:pPr>
-            <a:endParaRPr lang="en-US" sz="850" dirty="0"/>
           </a:p>
         </p:txBody>
       </p:sp>
@@ -22515,6 +22617,45 @@
         </p:nvSpPr>
         <p:spPr>
           <a:xfrm>
+            <a:off x="10972800" y="6217920"/>
+            <a:ext cx="685800" cy="365760"/>
+          </a:xfrm>
+          <a:prstGeom prst="rect">
+            <a:avLst/>
+          </a:prstGeom>
+          <a:noFill/>
+          <a:ln/>
+        </p:spPr>
+        <p:txBody>
+          <a:bodyPr wrap="square" lIns="0" tIns="0" rIns="0" bIns="0" rtlCol="0" anchor="ctr"/>
+          <a:lstStyle/>
+          <a:p>
+            <a:pPr algn="r" indent="0" marL="0">
+              <a:buNone/>
+            </a:pPr>
+            <a:r>
+              <a:rPr lang="en-US" sz="1300" b="1" dirty="0">
+                <a:solidFill>
+                  <a:srgbClr val="9E9E9E"/>
+                </a:solidFill>
+                <a:latin typeface="Calibri" pitchFamily="34" charset="0"/>
+                <a:ea typeface="Calibri" pitchFamily="34" charset="-122"/>
+                <a:cs typeface="Calibri" pitchFamily="34" charset="-120"/>
+              </a:rPr>
+              <a:t>22</a:t>
+            </a:r>
+            <a:endParaRPr lang="en-US" sz="1300" dirty="0"/>
+          </a:p>
+        </p:txBody>
+      </p:sp>
+      <p:sp>
+        <p:nvSpPr>
+          <p:cNvPr id="3" name="Text 1"/>
+          <p:cNvSpPr txBox="1"/>
+          <p:nvPr/>
+        </p:nvSpPr>
+        <p:spPr>
+          <a:xfrm>
             <a:off x="731520" y="502920"/>
             <a:ext cx="10698480" cy="457200"/>
           </a:xfrm>
@@ -22548,7 +22689,7 @@
       </p:sp>
       <p:sp>
         <p:nvSpPr>
-          <p:cNvPr id="3" name="Text 1"/>
+          <p:cNvPr id="4" name="Text 2"/>
           <p:cNvSpPr txBox="1"/>
           <p:nvPr/>
         </p:nvSpPr>
@@ -22587,7 +22728,7 @@
       </p:sp>
       <p:sp>
         <p:nvSpPr>
-          <p:cNvPr id="4" name="vx"/>
+          <p:cNvPr id="5" name="vx"/>
           <p:cNvSpPr/>
           <p:nvPr/>
         </p:nvSpPr>
@@ -22614,7 +22755,7 @@
       </p:sp>
       <p:sp>
         <p:nvSpPr>
-          <p:cNvPr id="5" name="hx"/>
+          <p:cNvPr id="6" name="hx"/>
           <p:cNvSpPr/>
           <p:nvPr/>
         </p:nvSpPr>
@@ -22641,7 +22782,7 @@
       </p:sp>
       <p:sp>
         <p:nvSpPr>
-          <p:cNvPr id="6" name="area"/>
+          <p:cNvPr id="7" name="area"/>
           <p:cNvSpPr/>
           <p:nvPr/>
         </p:nvSpPr>
@@ -22668,7 +22809,7 @@
       </p:sp>
       <p:sp>
         <p:nvSpPr>
-          <p:cNvPr id="7" name="Text 5"/>
+          <p:cNvPr id="8" name="Text 6"/>
           <p:cNvSpPr txBox="1"/>
           <p:nvPr/>
         </p:nvSpPr>
@@ -22707,7 +22848,7 @@
       </p:sp>
       <p:sp>
         <p:nvSpPr>
-          <p:cNvPr id="8" name="Text 6"/>
+          <p:cNvPr id="9" name="Text 7"/>
           <p:cNvSpPr txBox="1"/>
           <p:nvPr/>
         </p:nvSpPr>
@@ -22746,7 +22887,7 @@
       </p:sp>
       <p:sp>
         <p:nvSpPr>
-          <p:cNvPr id="9" name="Text 7"/>
+          <p:cNvPr id="10" name="Text 8"/>
           <p:cNvSpPr txBox="1"/>
           <p:nvPr/>
         </p:nvSpPr>
@@ -22785,7 +22926,7 @@
       </p:sp>
       <p:sp>
         <p:nvSpPr>
-          <p:cNvPr id="10" name="Text 8"/>
+          <p:cNvPr id="11" name="Text 9"/>
           <p:cNvSpPr txBox="1"/>
           <p:nvPr/>
         </p:nvSpPr>
@@ -22827,7 +22968,7 @@
       </p:sp>
       <p:sp>
         <p:nvSpPr>
-          <p:cNvPr id="11" name="vr6.31.42"/>
+          <p:cNvPr id="12" name="vr6.31.42"/>
           <p:cNvSpPr/>
           <p:nvPr/>
         </p:nvSpPr>
@@ -22854,7 +22995,7 @@
       </p:sp>
       <p:sp>
         <p:nvSpPr>
-          <p:cNvPr id="12" name="Text 10"/>
+          <p:cNvPr id="13" name="Text 11"/>
           <p:cNvSpPr txBox="1"/>
           <p:nvPr/>
         </p:nvSpPr>
@@ -22893,7 +23034,7 @@
       </p:sp>
       <p:sp>
         <p:nvSpPr>
-          <p:cNvPr id="13" name="Text 11"/>
+          <p:cNvPr id="14" name="Text 12"/>
           <p:cNvSpPr txBox="1"/>
           <p:nvPr/>
         </p:nvSpPr>
@@ -22932,7 +23073,7 @@
       </p:sp>
       <p:sp>
         <p:nvSpPr>
-          <p:cNvPr id="14" name="Text 12"/>
+          <p:cNvPr id="15" name="Text 13"/>
           <p:cNvSpPr txBox="1"/>
           <p:nvPr/>
         </p:nvSpPr>
@@ -22974,14 +23115,14 @@
       </p:sp>
       <p:sp>
         <p:nvSpPr>
-          <p:cNvPr id="15" name="Text 13"/>
+          <p:cNvPr id="16" name="Text 14"/>
           <p:cNvSpPr txBox="1"/>
           <p:nvPr/>
         </p:nvSpPr>
         <p:spPr>
           <a:xfrm>
             <a:off x="6217920" y="3474720"/>
-            <a:ext cx="2926080" cy="914400"/>
+            <a:ext cx="2926080" cy="822960"/>
           </a:xfrm>
           <a:prstGeom prst="rect">
             <a:avLst/>
@@ -23008,7 +23149,7 @@
                 <a:ea typeface="Calibri" pitchFamily="34" charset="-122"/>
                 <a:cs typeface="Calibri" pitchFamily="34" charset="-120"/>
               </a:rPr>
-              <a:t>Notice where the modulus sits in that expression: it is in the denominator.</a:t>
+              <a:t>The modulus sits in the denominator.</a:t>
             </a:r>
             <a:endParaRPr lang="en-US" sz="1200" dirty="0"/>
           </a:p>
@@ -23016,13 +23157,13 @@
       </p:sp>
       <p:sp>
         <p:nvSpPr>
-          <p:cNvPr id="16" name="Text 14"/>
+          <p:cNvPr id="17" name="Text 15"/>
           <p:cNvSpPr txBox="1"/>
           <p:nvPr/>
         </p:nvSpPr>
         <p:spPr>
           <a:xfrm>
-            <a:off x="6217920" y="4572000"/>
+            <a:off x="6217920" y="4480560"/>
             <a:ext cx="2926080" cy="1737360"/>
           </a:xfrm>
           <a:prstGeom prst="rect">
@@ -23050,7 +23191,7 @@
                 <a:ea typeface="Calibri" pitchFamily="34" charset="-122"/>
                 <a:cs typeface="Calibri" pitchFamily="34" charset="-120"/>
               </a:rPr>
-              <a:t>Strength tells you the load at which a material stops performing. It does not tell you whether it then fails gracefully or catastrophically.</a:t>
+              <a:t>Strength records the load at which a material stops performing. It does not record whether failure is then graceful or catastrophic.</a:t>
             </a:r>
             <a:endParaRPr lang="en-US" sz="1200" dirty="0"/>
           </a:p>
@@ -23058,7 +23199,7 @@
       </p:sp>
       <p:sp>
         <p:nvSpPr>
-          <p:cNvPr id="17" name="Text 15"/>
+          <p:cNvPr id="18" name="Text 16"/>
           <p:cNvSpPr txBox="1"/>
           <p:nvPr/>
         </p:nvSpPr>
@@ -23097,7 +23238,7 @@
       </p:sp>
       <p:sp>
         <p:nvSpPr>
-          <p:cNvPr id="18" name="Text 16"/>
+          <p:cNvPr id="19" name="Text 17"/>
           <p:cNvSpPr txBox="1"/>
           <p:nvPr/>
         </p:nvSpPr>
@@ -23131,7 +23272,7 @@
                 <a:ea typeface="Calibri" pitchFamily="34" charset="-122"/>
                 <a:cs typeface="Calibri" pitchFamily="34" charset="-120"/>
               </a:rPr>
-              <a:t>I cannot give you a comparative table, because the literature reports strength and modulus in separate studies.</a:t>
+              <a:t>A comparative table cannot be assembled, because the literature reports strength and modulus in separate studies.</a:t>
             </a:r>
             <a:endParaRPr lang="en-US" sz="1150" dirty="0"/>
           </a:p>
@@ -23139,7 +23280,7 @@
       </p:sp>
       <p:sp>
         <p:nvSpPr>
-          <p:cNvPr id="19" name="Text 17"/>
+          <p:cNvPr id="20" name="Text 18"/>
           <p:cNvSpPr txBox="1"/>
           <p:nvPr/>
         </p:nvSpPr>
@@ -23176,36 +23317,6 @@
               <a:t>Resilience as a property of systems that absorb disturbance and retain function, after Holling (1973).</a:t>
             </a:r>
             <a:endParaRPr lang="en-US" sz="900" dirty="0"/>
-          </a:p>
-        </p:txBody>
-      </p:sp>
-      <p:sp>
-        <p:nvSpPr>
-          <p:cNvPr id="21" name="Text 0"/>
-          <p:cNvSpPr/>
-          <p:nvPr>
-            <p:ph idx="100" hasCustomPrompt="1"/>
-          </p:nvPr>
-        </p:nvSpPr>
-        <p:spPr>
-          <a:xfrm>
-            <a:off x="11292840" y="6355080"/>
-            <a:ext cx="365760" cy="237744"/>
-          </a:xfrm>
-          <a:prstGeom prst="rect">
-            <a:avLst/>
-          </a:prstGeom>
-          <a:noFill/>
-          <a:ln/>
-        </p:spPr>
-        <p:txBody>
-          <a:bodyPr wrap="square" rtlCol="0"/>
-          <a:lstStyle/>
-          <a:p>
-            <a:pPr algn="r" indent="0" marL="0">
-              <a:buNone/>
-            </a:pPr>
-            <a:endParaRPr lang="en-US" sz="850" dirty="0"/>
           </a:p>
         </p:txBody>
       </p:sp>
@@ -23242,6 +23353,45 @@
         </p:nvSpPr>
         <p:spPr>
           <a:xfrm>
+            <a:off x="10972800" y="6217920"/>
+            <a:ext cx="685800" cy="365760"/>
+          </a:xfrm>
+          <a:prstGeom prst="rect">
+            <a:avLst/>
+          </a:prstGeom>
+          <a:noFill/>
+          <a:ln/>
+        </p:spPr>
+        <p:txBody>
+          <a:bodyPr wrap="square" lIns="0" tIns="0" rIns="0" bIns="0" rtlCol="0" anchor="ctr"/>
+          <a:lstStyle/>
+          <a:p>
+            <a:pPr algn="r" indent="0" marL="0">
+              <a:buNone/>
+            </a:pPr>
+            <a:r>
+              <a:rPr lang="en-US" sz="1300" b="1" dirty="0">
+                <a:solidFill>
+                  <a:srgbClr val="8C8C8C"/>
+                </a:solidFill>
+                <a:latin typeface="Calibri" pitchFamily="34" charset="0"/>
+                <a:ea typeface="Calibri" pitchFamily="34" charset="-122"/>
+                <a:cs typeface="Calibri" pitchFamily="34" charset="-120"/>
+              </a:rPr>
+              <a:t>23</a:t>
+            </a:r>
+            <a:endParaRPr lang="en-US" sz="1300" dirty="0"/>
+          </a:p>
+        </p:txBody>
+      </p:sp>
+      <p:sp>
+        <p:nvSpPr>
+          <p:cNvPr id="3" name="Text 1"/>
+          <p:cNvSpPr txBox="1"/>
+          <p:nvPr/>
+        </p:nvSpPr>
+        <p:spPr>
+          <a:xfrm>
             <a:off x="731520" y="502920"/>
             <a:ext cx="10698480" cy="457200"/>
           </a:xfrm>
@@ -23275,7 +23425,7 @@
       </p:sp>
       <p:sp>
         <p:nvSpPr>
-          <p:cNvPr id="3" name="Text 1"/>
+          <p:cNvPr id="4" name="Text 2"/>
           <p:cNvSpPr txBox="1"/>
           <p:nvPr/>
         </p:nvSpPr>
@@ -23314,7 +23464,7 @@
       </p:sp>
       <p:pic>
         <p:nvPicPr>
-          <p:cNvPr id="4" name="ren" descr="/home/user/sanat-ve-mekan/konferans-bildirisi/03-gorseller/12-ic-mekan-render.jpeg">    </p:cNvPr>
+          <p:cNvPr id="5" name="ren" descr="/home/user/sanat-ve-mekan/konferans-bildirisi/03-gorseller/12-ic-mekan-render.jpeg">    </p:cNvPr>
           <p:cNvPicPr>
             <a:picLocks noChangeAspect="1"/>
           </p:cNvPicPr>
@@ -23338,7 +23488,7 @@
       </p:pic>
       <p:sp>
         <p:nvSpPr>
-          <p:cNvPr id="5" name="Text 2"/>
+          <p:cNvPr id="6" name="Text 3"/>
           <p:cNvSpPr txBox="1"/>
           <p:nvPr/>
         </p:nvSpPr>
@@ -23380,7 +23530,7 @@
       </p:sp>
       <p:sp>
         <p:nvSpPr>
-          <p:cNvPr id="6" name="vr5.61.42"/>
+          <p:cNvPr id="7" name="vr5.61.42"/>
           <p:cNvSpPr/>
           <p:nvPr/>
         </p:nvSpPr>
@@ -23407,7 +23557,7 @@
       </p:sp>
       <p:sp>
         <p:nvSpPr>
-          <p:cNvPr id="7" name="Text 4"/>
+          <p:cNvPr id="8" name="Text 5"/>
           <p:cNvSpPr txBox="1"/>
           <p:nvPr/>
         </p:nvSpPr>
@@ -23446,7 +23596,7 @@
       </p:sp>
       <p:sp>
         <p:nvSpPr>
-          <p:cNvPr id="8" name="Text 5"/>
+          <p:cNvPr id="9" name="Text 6"/>
           <p:cNvSpPr txBox="1"/>
           <p:nvPr/>
         </p:nvSpPr>
@@ -23485,7 +23635,7 @@
       </p:sp>
       <p:sp>
         <p:nvSpPr>
-          <p:cNvPr id="9" name="Text 6"/>
+          <p:cNvPr id="10" name="Text 7"/>
           <p:cNvSpPr txBox="1"/>
           <p:nvPr/>
         </p:nvSpPr>
@@ -23524,7 +23674,7 @@
       </p:sp>
       <p:sp>
         <p:nvSpPr>
-          <p:cNvPr id="10" name="ru6.12.62"/>
+          <p:cNvPr id="11" name="ru6.12.62"/>
           <p:cNvSpPr/>
           <p:nvPr/>
         </p:nvSpPr>
@@ -23551,7 +23701,7 @@
       </p:sp>
       <p:sp>
         <p:nvSpPr>
-          <p:cNvPr id="11" name="Text 8"/>
+          <p:cNvPr id="12" name="Text 9"/>
           <p:cNvSpPr txBox="1"/>
           <p:nvPr/>
         </p:nvSpPr>
@@ -23590,7 +23740,7 @@
       </p:sp>
       <p:sp>
         <p:nvSpPr>
-          <p:cNvPr id="12" name="Text 9"/>
+          <p:cNvPr id="13" name="Text 10"/>
           <p:cNvSpPr txBox="1"/>
           <p:nvPr/>
         </p:nvSpPr>
@@ -23629,7 +23779,7 @@
       </p:sp>
       <p:sp>
         <p:nvSpPr>
-          <p:cNvPr id="13" name="ru6.13.5"/>
+          <p:cNvPr id="14" name="ru6.13.5"/>
           <p:cNvSpPr/>
           <p:nvPr/>
         </p:nvSpPr>
@@ -23656,7 +23806,7 @@
       </p:sp>
       <p:sp>
         <p:nvSpPr>
-          <p:cNvPr id="14" name="Text 11"/>
+          <p:cNvPr id="15" name="Text 12"/>
           <p:cNvSpPr txBox="1"/>
           <p:nvPr/>
         </p:nvSpPr>
@@ -23695,7 +23845,7 @@
       </p:sp>
       <p:sp>
         <p:nvSpPr>
-          <p:cNvPr id="15" name="Text 12"/>
+          <p:cNvPr id="16" name="Text 13"/>
           <p:cNvSpPr txBox="1"/>
           <p:nvPr/>
         </p:nvSpPr>
@@ -23734,7 +23884,7 @@
       </p:sp>
       <p:sp>
         <p:nvSpPr>
-          <p:cNvPr id="16" name="ru6.14.38"/>
+          <p:cNvPr id="17" name="ru6.14.38"/>
           <p:cNvSpPr/>
           <p:nvPr/>
         </p:nvSpPr>
@@ -23761,7 +23911,7 @@
       </p:sp>
       <p:sp>
         <p:nvSpPr>
-          <p:cNvPr id="17" name="Text 14"/>
+          <p:cNvPr id="18" name="Text 15"/>
           <p:cNvSpPr txBox="1"/>
           <p:nvPr/>
         </p:nvSpPr>
@@ -23800,7 +23950,7 @@
       </p:sp>
       <p:sp>
         <p:nvSpPr>
-          <p:cNvPr id="18" name="Text 15"/>
+          <p:cNvPr id="19" name="Text 16"/>
           <p:cNvSpPr txBox="1"/>
           <p:nvPr/>
         </p:nvSpPr>
@@ -23839,7 +23989,7 @@
       </p:sp>
       <p:sp>
         <p:nvSpPr>
-          <p:cNvPr id="19" name="ru6.15.5"/>
+          <p:cNvPr id="20" name="ru6.15.5"/>
           <p:cNvSpPr/>
           <p:nvPr/>
         </p:nvSpPr>
@@ -23866,7 +24016,7 @@
       </p:sp>
       <p:sp>
         <p:nvSpPr>
-          <p:cNvPr id="20" name="Text 17"/>
+          <p:cNvPr id="21" name="Text 18"/>
           <p:cNvSpPr txBox="1"/>
           <p:nvPr/>
         </p:nvSpPr>
@@ -23908,7 +24058,7 @@
       </p:sp>
       <p:sp>
         <p:nvSpPr>
-          <p:cNvPr id="21" name="Text 18"/>
+          <p:cNvPr id="22" name="Text 19"/>
           <p:cNvSpPr txBox="1"/>
           <p:nvPr/>
         </p:nvSpPr>
@@ -23942,39 +24092,9 @@
                 <a:ea typeface="Calibri" pitchFamily="34" charset="-122"/>
                 <a:cs typeface="Calibri" pitchFamily="34" charset="-120"/>
               </a:rPr>
-              <a:t>I did not carry out a life-cycle assessment, so these are qualitative potentials rather than quantified claims.</a:t>
+              <a:t>No life-cycle assessment was carried out, so these are qualitative potentials rather than quantified claims.</a:t>
             </a:r>
             <a:endParaRPr lang="en-US" sz="1150" dirty="0"/>
-          </a:p>
-        </p:txBody>
-      </p:sp>
-      <p:sp>
-        <p:nvSpPr>
-          <p:cNvPr id="23" name="Text 0"/>
-          <p:cNvSpPr/>
-          <p:nvPr>
-            <p:ph idx="100" hasCustomPrompt="1"/>
-          </p:nvPr>
-        </p:nvSpPr>
-        <p:spPr>
-          <a:xfrm>
-            <a:off x="11292840" y="6355080"/>
-            <a:ext cx="365760" cy="237744"/>
-          </a:xfrm>
-          <a:prstGeom prst="rect">
-            <a:avLst/>
-          </a:prstGeom>
-          <a:noFill/>
-          <a:ln/>
-        </p:spPr>
-        <p:txBody>
-          <a:bodyPr wrap="square" rtlCol="0"/>
-          <a:lstStyle/>
-          <a:p>
-            <a:pPr algn="r" indent="0" marL="0">
-              <a:buNone/>
-            </a:pPr>
-            <a:endParaRPr lang="en-US" sz="850" dirty="0"/>
           </a:p>
         </p:txBody>
       </p:sp>
@@ -24011,6 +24131,45 @@
         </p:nvSpPr>
         <p:spPr>
           <a:xfrm>
+            <a:off x="10972800" y="6217920"/>
+            <a:ext cx="685800" cy="365760"/>
+          </a:xfrm>
+          <a:prstGeom prst="rect">
+            <a:avLst/>
+          </a:prstGeom>
+          <a:noFill/>
+          <a:ln/>
+        </p:spPr>
+        <p:txBody>
+          <a:bodyPr wrap="square" lIns="0" tIns="0" rIns="0" bIns="0" rtlCol="0" anchor="ctr"/>
+          <a:lstStyle/>
+          <a:p>
+            <a:pPr algn="r" indent="0" marL="0">
+              <a:buNone/>
+            </a:pPr>
+            <a:r>
+              <a:rPr lang="en-US" sz="1300" b="1" dirty="0">
+                <a:solidFill>
+                  <a:srgbClr val="8C8C8C"/>
+                </a:solidFill>
+                <a:latin typeface="Calibri" pitchFamily="34" charset="0"/>
+                <a:ea typeface="Calibri" pitchFamily="34" charset="-122"/>
+                <a:cs typeface="Calibri" pitchFamily="34" charset="-120"/>
+              </a:rPr>
+              <a:t>24</a:t>
+            </a:r>
+            <a:endParaRPr lang="en-US" sz="1300" dirty="0"/>
+          </a:p>
+        </p:txBody>
+      </p:sp>
+      <p:sp>
+        <p:nvSpPr>
+          <p:cNvPr id="3" name="Text 1"/>
+          <p:cNvSpPr txBox="1"/>
+          <p:nvPr/>
+        </p:nvSpPr>
+        <p:spPr>
+          <a:xfrm>
             <a:off x="731520" y="502920"/>
             <a:ext cx="10698480" cy="457200"/>
           </a:xfrm>
@@ -24044,7 +24203,7 @@
       </p:sp>
       <p:sp>
         <p:nvSpPr>
-          <p:cNvPr id="3" name="Text 1"/>
+          <p:cNvPr id="4" name="Text 2"/>
           <p:cNvSpPr txBox="1"/>
           <p:nvPr/>
         </p:nvSpPr>
@@ -25079,7 +25238,7 @@
       </p:graphicFrame>
       <p:sp>
         <p:nvSpPr>
-          <p:cNvPr id="5" name="ru0.86.1"/>
+          <p:cNvPr id="6" name="ru0.86.1"/>
           <p:cNvSpPr/>
           <p:nvPr/>
         </p:nvSpPr>
@@ -25106,7 +25265,7 @@
       </p:sp>
       <p:sp>
         <p:nvSpPr>
-          <p:cNvPr id="6" name="Text 3"/>
+          <p:cNvPr id="7" name="Text 4"/>
           <p:cNvSpPr txBox="1"/>
           <p:nvPr/>
         </p:nvSpPr>
@@ -25140,39 +25299,9 @@
                 <a:ea typeface="Calibri" pitchFamily="34" charset="-122"/>
                 <a:cs typeface="Calibri" pitchFamily="34" charset="-120"/>
               </a:rPr>
-              <a:t>Every value I have given you today is a lower bound, and I would rather set that out myself than have you find it.</a:t>
+              <a:t>Every value reported here is a lower bound.</a:t>
             </a:r>
             <a:endParaRPr lang="en-US" sz="1200" dirty="0"/>
-          </a:p>
-        </p:txBody>
-      </p:sp>
-      <p:sp>
-        <p:nvSpPr>
-          <p:cNvPr id="8" name="Text 0"/>
-          <p:cNvSpPr/>
-          <p:nvPr>
-            <p:ph idx="100" hasCustomPrompt="1"/>
-          </p:nvPr>
-        </p:nvSpPr>
-        <p:spPr>
-          <a:xfrm>
-            <a:off x="11292840" y="6355080"/>
-            <a:ext cx="365760" cy="237744"/>
-          </a:xfrm>
-          <a:prstGeom prst="rect">
-            <a:avLst/>
-          </a:prstGeom>
-          <a:noFill/>
-          <a:ln/>
-        </p:spPr>
-        <p:txBody>
-          <a:bodyPr wrap="square" rtlCol="0"/>
-          <a:lstStyle/>
-          <a:p>
-            <a:pPr algn="r" indent="0" marL="0">
-              <a:buNone/>
-            </a:pPr>
-            <a:endParaRPr lang="en-US" sz="850" dirty="0"/>
           </a:p>
         </p:txBody>
       </p:sp>
@@ -25209,6 +25338,45 @@
         </p:nvSpPr>
         <p:spPr>
           <a:xfrm>
+            <a:off x="10972800" y="6217920"/>
+            <a:ext cx="685800" cy="365760"/>
+          </a:xfrm>
+          <a:prstGeom prst="rect">
+            <a:avLst/>
+          </a:prstGeom>
+          <a:noFill/>
+          <a:ln/>
+        </p:spPr>
+        <p:txBody>
+          <a:bodyPr wrap="square" lIns="0" tIns="0" rIns="0" bIns="0" rtlCol="0" anchor="ctr"/>
+          <a:lstStyle/>
+          <a:p>
+            <a:pPr algn="r" indent="0" marL="0">
+              <a:buNone/>
+            </a:pPr>
+            <a:r>
+              <a:rPr lang="en-US" sz="1300" b="1" dirty="0">
+                <a:solidFill>
+                  <a:srgbClr val="9E9E9E"/>
+                </a:solidFill>
+                <a:latin typeface="Calibri" pitchFamily="34" charset="0"/>
+                <a:ea typeface="Calibri" pitchFamily="34" charset="-122"/>
+                <a:cs typeface="Calibri" pitchFamily="34" charset="-120"/>
+              </a:rPr>
+              <a:t>25</a:t>
+            </a:r>
+            <a:endParaRPr lang="en-US" sz="1300" dirty="0"/>
+          </a:p>
+        </p:txBody>
+      </p:sp>
+      <p:sp>
+        <p:nvSpPr>
+          <p:cNvPr id="3" name="Text 1"/>
+          <p:cNvSpPr txBox="1"/>
+          <p:nvPr/>
+        </p:nvSpPr>
+        <p:spPr>
+          <a:xfrm>
             <a:off x="731520" y="502920"/>
             <a:ext cx="10698480" cy="457200"/>
           </a:xfrm>
@@ -25242,7 +25410,7 @@
       </p:sp>
       <p:sp>
         <p:nvSpPr>
-          <p:cNvPr id="3" name="Text 1"/>
+          <p:cNvPr id="4" name="Text 2"/>
           <p:cNvSpPr txBox="1"/>
           <p:nvPr/>
         </p:nvSpPr>
@@ -25281,7 +25449,7 @@
       </p:sp>
       <p:sp>
         <p:nvSpPr>
-          <p:cNvPr id="4" name="Text 2"/>
+          <p:cNvPr id="5" name="Text 3"/>
           <p:cNvSpPr txBox="1"/>
           <p:nvPr/>
         </p:nvSpPr>
@@ -25320,7 +25488,7 @@
       </p:sp>
       <p:sp>
         <p:nvSpPr>
-          <p:cNvPr id="5" name="Text 3"/>
+          <p:cNvPr id="6" name="Text 4"/>
           <p:cNvSpPr txBox="1"/>
           <p:nvPr/>
         </p:nvSpPr>
@@ -25359,7 +25527,7 @@
       </p:sp>
       <p:sp>
         <p:nvSpPr>
-          <p:cNvPr id="6" name="ru0.82.47"/>
+          <p:cNvPr id="7" name="ru0.82.47"/>
           <p:cNvSpPr/>
           <p:nvPr/>
         </p:nvSpPr>
@@ -25386,7 +25554,7 @@
       </p:sp>
       <p:sp>
         <p:nvSpPr>
-          <p:cNvPr id="7" name="Text 5"/>
+          <p:cNvPr id="8" name="Text 6"/>
           <p:cNvSpPr txBox="1"/>
           <p:nvPr/>
         </p:nvSpPr>
@@ -25425,7 +25593,7 @@
       </p:sp>
       <p:sp>
         <p:nvSpPr>
-          <p:cNvPr id="8" name="Text 6"/>
+          <p:cNvPr id="9" name="Text 7"/>
           <p:cNvSpPr txBox="1"/>
           <p:nvPr/>
         </p:nvSpPr>
@@ -25464,7 +25632,7 @@
       </p:sp>
       <p:sp>
         <p:nvSpPr>
-          <p:cNvPr id="9" name="Text 7"/>
+          <p:cNvPr id="10" name="Text 8"/>
           <p:cNvSpPr txBox="1"/>
           <p:nvPr/>
         </p:nvSpPr>
@@ -25503,7 +25671,7 @@
       </p:sp>
       <p:sp>
         <p:nvSpPr>
-          <p:cNvPr id="10" name="ru0.83.39"/>
+          <p:cNvPr id="11" name="ru0.83.39"/>
           <p:cNvSpPr/>
           <p:nvPr/>
         </p:nvSpPr>
@@ -25530,7 +25698,7 @@
       </p:sp>
       <p:sp>
         <p:nvSpPr>
-          <p:cNvPr id="11" name="Text 9"/>
+          <p:cNvPr id="12" name="Text 10"/>
           <p:cNvSpPr txBox="1"/>
           <p:nvPr/>
         </p:nvSpPr>
@@ -25569,7 +25737,7 @@
       </p:sp>
       <p:sp>
         <p:nvSpPr>
-          <p:cNvPr id="12" name="Text 10"/>
+          <p:cNvPr id="13" name="Text 11"/>
           <p:cNvSpPr txBox="1"/>
           <p:nvPr/>
         </p:nvSpPr>
@@ -25608,7 +25776,7 @@
       </p:sp>
       <p:sp>
         <p:nvSpPr>
-          <p:cNvPr id="13" name="Text 11"/>
+          <p:cNvPr id="14" name="Text 12"/>
           <p:cNvSpPr txBox="1"/>
           <p:nvPr/>
         </p:nvSpPr>
@@ -25647,7 +25815,7 @@
       </p:sp>
       <p:sp>
         <p:nvSpPr>
-          <p:cNvPr id="14" name="ru0.84.3100000000000005"/>
+          <p:cNvPr id="15" name="ru0.84.3100000000000005"/>
           <p:cNvSpPr/>
           <p:nvPr/>
         </p:nvSpPr>
@@ -25674,7 +25842,7 @@
       </p:sp>
       <p:sp>
         <p:nvSpPr>
-          <p:cNvPr id="15" name="Text 13"/>
+          <p:cNvPr id="16" name="Text 14"/>
           <p:cNvSpPr txBox="1"/>
           <p:nvPr/>
         </p:nvSpPr>
@@ -25713,7 +25881,7 @@
       </p:sp>
       <p:sp>
         <p:nvSpPr>
-          <p:cNvPr id="16" name="Text 14"/>
+          <p:cNvPr id="17" name="Text 15"/>
           <p:cNvSpPr txBox="1"/>
           <p:nvPr/>
         </p:nvSpPr>
@@ -25752,7 +25920,7 @@
       </p:sp>
       <p:sp>
         <p:nvSpPr>
-          <p:cNvPr id="17" name="Text 15"/>
+          <p:cNvPr id="18" name="Text 16"/>
           <p:cNvSpPr txBox="1"/>
           <p:nvPr/>
         </p:nvSpPr>
@@ -25791,7 +25959,7 @@
       </p:sp>
       <p:sp>
         <p:nvSpPr>
-          <p:cNvPr id="18" name="ru0.85.23"/>
+          <p:cNvPr id="19" name="ru0.85.23"/>
           <p:cNvSpPr/>
           <p:nvPr/>
         </p:nvSpPr>
@@ -25818,7 +25986,7 @@
       </p:sp>
       <p:sp>
         <p:nvSpPr>
-          <p:cNvPr id="19" name="Text 17"/>
+          <p:cNvPr id="20" name="Text 18"/>
           <p:cNvSpPr txBox="1"/>
           <p:nvPr/>
         </p:nvSpPr>
@@ -25857,7 +26025,7 @@
       </p:sp>
       <p:sp>
         <p:nvSpPr>
-          <p:cNvPr id="20" name="Text 18"/>
+          <p:cNvPr id="21" name="Text 19"/>
           <p:cNvSpPr txBox="1"/>
           <p:nvPr/>
         </p:nvSpPr>
@@ -25896,7 +26064,7 @@
       </p:sp>
       <p:sp>
         <p:nvSpPr>
-          <p:cNvPr id="21" name="Text 19"/>
+          <p:cNvPr id="22" name="Text 20"/>
           <p:cNvSpPr txBox="1"/>
           <p:nvPr/>
         </p:nvSpPr>
@@ -25935,7 +26103,7 @@
       </p:sp>
       <p:sp>
         <p:nvSpPr>
-          <p:cNvPr id="22" name="ru0.86.15"/>
+          <p:cNvPr id="23" name="ru0.86.15"/>
           <p:cNvSpPr/>
           <p:nvPr/>
         </p:nvSpPr>
@@ -25962,7 +26130,7 @@
       </p:sp>
       <p:sp>
         <p:nvSpPr>
-          <p:cNvPr id="23" name="Text 21"/>
+          <p:cNvPr id="24" name="Text 22"/>
           <p:cNvSpPr txBox="1"/>
           <p:nvPr/>
         </p:nvSpPr>
@@ -26001,7 +26169,7 @@
       </p:sp>
       <p:sp>
         <p:nvSpPr>
-          <p:cNvPr id="24" name="Text 22"/>
+          <p:cNvPr id="25" name="Text 23"/>
           <p:cNvSpPr txBox="1"/>
           <p:nvPr/>
         </p:nvSpPr>
@@ -26038,36 +26206,6 @@
               <a:t>Testing: Advanced Construction Materials Research Laboratory, Hacettepe University, with thanks to Dr Hüseyin İlcan. Derived from the author's doctoral dissertation, Hacettepe University, 2025.</a:t>
             </a:r>
             <a:endParaRPr lang="en-US" sz="900" dirty="0"/>
-          </a:p>
-        </p:txBody>
-      </p:sp>
-      <p:sp>
-        <p:nvSpPr>
-          <p:cNvPr id="26" name="Text 0"/>
-          <p:cNvSpPr/>
-          <p:nvPr>
-            <p:ph idx="100" hasCustomPrompt="1"/>
-          </p:nvPr>
-        </p:nvSpPr>
-        <p:spPr>
-          <a:xfrm>
-            <a:off x="11292840" y="6355080"/>
-            <a:ext cx="365760" cy="237744"/>
-          </a:xfrm>
-          <a:prstGeom prst="rect">
-            <a:avLst/>
-          </a:prstGeom>
-          <a:noFill/>
-          <a:ln/>
-        </p:spPr>
-        <p:txBody>
-          <a:bodyPr wrap="square" rtlCol="0"/>
-          <a:lstStyle/>
-          <a:p>
-            <a:pPr algn="r" indent="0" marL="0">
-              <a:buNone/>
-            </a:pPr>
-            <a:endParaRPr lang="en-US" sz="850" dirty="0"/>
           </a:p>
         </p:txBody>
       </p:sp>
@@ -26104,6 +26242,45 @@
         </p:nvSpPr>
         <p:spPr>
           <a:xfrm>
+            <a:off x="10972800" y="6217920"/>
+            <a:ext cx="685800" cy="365760"/>
+          </a:xfrm>
+          <a:prstGeom prst="rect">
+            <a:avLst/>
+          </a:prstGeom>
+          <a:noFill/>
+          <a:ln/>
+        </p:spPr>
+        <p:txBody>
+          <a:bodyPr wrap="square" lIns="0" tIns="0" rIns="0" bIns="0" rtlCol="0" anchor="ctr"/>
+          <a:lstStyle/>
+          <a:p>
+            <a:pPr algn="r" indent="0" marL="0">
+              <a:buNone/>
+            </a:pPr>
+            <a:r>
+              <a:rPr lang="en-US" sz="1300" b="1" dirty="0">
+                <a:solidFill>
+                  <a:srgbClr val="8C8C8C"/>
+                </a:solidFill>
+                <a:latin typeface="Calibri" pitchFamily="34" charset="0"/>
+                <a:ea typeface="Calibri" pitchFamily="34" charset="-122"/>
+                <a:cs typeface="Calibri" pitchFamily="34" charset="-120"/>
+              </a:rPr>
+              <a:t>26</a:t>
+            </a:r>
+            <a:endParaRPr lang="en-US" sz="1300" dirty="0"/>
+          </a:p>
+        </p:txBody>
+      </p:sp>
+      <p:sp>
+        <p:nvSpPr>
+          <p:cNvPr id="3" name="Text 1"/>
+          <p:cNvSpPr txBox="1"/>
+          <p:nvPr/>
+        </p:nvSpPr>
+        <p:spPr>
+          <a:xfrm>
             <a:off x="731520" y="502920"/>
             <a:ext cx="10698480" cy="457200"/>
           </a:xfrm>
@@ -26137,7 +26314,7 @@
       </p:sp>
       <p:sp>
         <p:nvSpPr>
-          <p:cNvPr id="3" name="Text 1"/>
+          <p:cNvPr id="4" name="Text 2"/>
           <p:cNvSpPr txBox="1"/>
           <p:nvPr/>
         </p:nvSpPr>
@@ -26573,7 +26750,7 @@
       </p:sp>
       <p:sp>
         <p:nvSpPr>
-          <p:cNvPr id="4" name="Text 2"/>
+          <p:cNvPr id="5" name="Text 3"/>
           <p:cNvSpPr txBox="1"/>
           <p:nvPr/>
         </p:nvSpPr>
@@ -27009,7 +27186,7 @@
       </p:sp>
       <p:sp>
         <p:nvSpPr>
-          <p:cNvPr id="5" name="vr6.61.35"/>
+          <p:cNvPr id="6" name="vr6.61.35"/>
           <p:cNvSpPr/>
           <p:nvPr/>
         </p:nvSpPr>
@@ -27036,14 +27213,14 @@
       </p:sp>
       <p:sp>
         <p:nvSpPr>
-          <p:cNvPr id="6" name="Text 4"/>
+          <p:cNvPr id="7" name="Text 5"/>
           <p:cNvSpPr txBox="1"/>
           <p:nvPr/>
         </p:nvSpPr>
         <p:spPr>
           <a:xfrm>
             <a:off x="731520" y="6583680"/>
-            <a:ext cx="10698480" cy="457200"/>
+            <a:ext cx="10058400" cy="457200"/>
           </a:xfrm>
           <a:prstGeom prst="rect">
             <a:avLst/>
@@ -27073,36 +27250,6 @@
               <a:t>Standards applied: ASTM D790-17 · ISO 11925-2:2020 · ASTM D570-98(2018).</a:t>
             </a:r>
             <a:endParaRPr lang="en-US" sz="900" dirty="0"/>
-          </a:p>
-        </p:txBody>
-      </p:sp>
-      <p:sp>
-        <p:nvSpPr>
-          <p:cNvPr id="8" name="Text 0"/>
-          <p:cNvSpPr/>
-          <p:nvPr>
-            <p:ph idx="100" hasCustomPrompt="1"/>
-          </p:nvPr>
-        </p:nvSpPr>
-        <p:spPr>
-          <a:xfrm>
-            <a:off x="11292840" y="6355080"/>
-            <a:ext cx="365760" cy="237744"/>
-          </a:xfrm>
-          <a:prstGeom prst="rect">
-            <a:avLst/>
-          </a:prstGeom>
-          <a:noFill/>
-          <a:ln/>
-        </p:spPr>
-        <p:txBody>
-          <a:bodyPr wrap="square" rtlCol="0"/>
-          <a:lstStyle/>
-          <a:p>
-            <a:pPr algn="r" indent="0" marL="0">
-              <a:buNone/>
-            </a:pPr>
-            <a:endParaRPr lang="en-US" sz="850" dirty="0"/>
           </a:p>
         </p:txBody>
       </p:sp>
@@ -27139,6 +27286,45 @@
         </p:nvSpPr>
         <p:spPr>
           <a:xfrm>
+            <a:off x="10972800" y="6217920"/>
+            <a:ext cx="685800" cy="365760"/>
+          </a:xfrm>
+          <a:prstGeom prst="rect">
+            <a:avLst/>
+          </a:prstGeom>
+          <a:noFill/>
+          <a:ln/>
+        </p:spPr>
+        <p:txBody>
+          <a:bodyPr wrap="square" lIns="0" tIns="0" rIns="0" bIns="0" rtlCol="0" anchor="ctr"/>
+          <a:lstStyle/>
+          <a:p>
+            <a:pPr algn="r" indent="0" marL="0">
+              <a:buNone/>
+            </a:pPr>
+            <a:r>
+              <a:rPr lang="en-US" sz="1300" b="1" dirty="0">
+                <a:solidFill>
+                  <a:srgbClr val="8C8C8C"/>
+                </a:solidFill>
+                <a:latin typeface="Calibri" pitchFamily="34" charset="0"/>
+                <a:ea typeface="Calibri" pitchFamily="34" charset="-122"/>
+                <a:cs typeface="Calibri" pitchFamily="34" charset="-120"/>
+              </a:rPr>
+              <a:t>3</a:t>
+            </a:r>
+            <a:endParaRPr lang="en-US" sz="1300" dirty="0"/>
+          </a:p>
+        </p:txBody>
+      </p:sp>
+      <p:sp>
+        <p:nvSpPr>
+          <p:cNvPr id="3" name="Text 1"/>
+          <p:cNvSpPr txBox="1"/>
+          <p:nvPr/>
+        </p:nvSpPr>
+        <p:spPr>
+          <a:xfrm>
             <a:off x="731520" y="502920"/>
             <a:ext cx="10698480" cy="457200"/>
           </a:xfrm>
@@ -27172,7 +27358,7 @@
       </p:sp>
       <p:sp>
         <p:nvSpPr>
-          <p:cNvPr id="3" name="Text 1"/>
+          <p:cNvPr id="4" name="Text 2"/>
           <p:cNvSpPr txBox="1"/>
           <p:nvPr/>
         </p:nvSpPr>
@@ -29508,7 +29694,7 @@
       </p:graphicFrame>
       <p:sp>
         <p:nvSpPr>
-          <p:cNvPr id="5" name="ru0.85.72"/>
+          <p:cNvPr id="6" name="ru0.85.72"/>
           <p:cNvSpPr/>
           <p:nvPr/>
         </p:nvSpPr>
@@ -29535,7 +29721,7 @@
       </p:sp>
       <p:sp>
         <p:nvSpPr>
-          <p:cNvPr id="6" name="Text 3"/>
+          <p:cNvPr id="7" name="Text 4"/>
           <p:cNvSpPr txBox="1"/>
           <p:nvPr/>
         </p:nvSpPr>
@@ -29577,7 +29763,7 @@
       </p:sp>
       <p:sp>
         <p:nvSpPr>
-          <p:cNvPr id="7" name="ph1"/>
+          <p:cNvPr id="8" name="ph1"/>
           <p:cNvSpPr/>
           <p:nvPr/>
         </p:nvSpPr>
@@ -29604,7 +29790,7 @@
       </p:sp>
       <p:sp>
         <p:nvSpPr>
-          <p:cNvPr id="8" name="Text 5"/>
+          <p:cNvPr id="9" name="Text 6"/>
           <p:cNvSpPr txBox="1"/>
           <p:nvPr/>
         </p:nvSpPr>
@@ -29643,7 +29829,7 @@
       </p:sp>
       <p:sp>
         <p:nvSpPr>
-          <p:cNvPr id="9" name="ph2"/>
+          <p:cNvPr id="10" name="ph2"/>
           <p:cNvSpPr/>
           <p:nvPr/>
         </p:nvSpPr>
@@ -29670,7 +29856,7 @@
       </p:sp>
       <p:sp>
         <p:nvSpPr>
-          <p:cNvPr id="10" name="Text 7"/>
+          <p:cNvPr id="11" name="Text 8"/>
           <p:cNvSpPr txBox="1"/>
           <p:nvPr/>
         </p:nvSpPr>
@@ -29704,36 +29890,6 @@
               <a:t>BINDING PHASE   ·   cementitious, ceramic or petrochemical</a:t>
             </a:r>
             <a:endParaRPr lang="en-US" sz="1100" dirty="0"/>
-          </a:p>
-        </p:txBody>
-      </p:sp>
-      <p:sp>
-        <p:nvSpPr>
-          <p:cNvPr id="12" name="Text 0"/>
-          <p:cNvSpPr/>
-          <p:nvPr>
-            <p:ph idx="100" hasCustomPrompt="1"/>
-          </p:nvPr>
-        </p:nvSpPr>
-        <p:spPr>
-          <a:xfrm>
-            <a:off x="11292840" y="6355080"/>
-            <a:ext cx="365760" cy="237744"/>
-          </a:xfrm>
-          <a:prstGeom prst="rect">
-            <a:avLst/>
-          </a:prstGeom>
-          <a:noFill/>
-          <a:ln/>
-        </p:spPr>
-        <p:txBody>
-          <a:bodyPr wrap="square" rtlCol="0"/>
-          <a:lstStyle/>
-          <a:p>
-            <a:pPr algn="r" indent="0" marL="0">
-              <a:buNone/>
-            </a:pPr>
-            <a:endParaRPr lang="en-US" sz="850" dirty="0"/>
           </a:p>
         </p:txBody>
       </p:sp>
@@ -29770,6 +29926,45 @@
         </p:nvSpPr>
         <p:spPr>
           <a:xfrm>
+            <a:off x="10972800" y="6217920"/>
+            <a:ext cx="685800" cy="365760"/>
+          </a:xfrm>
+          <a:prstGeom prst="rect">
+            <a:avLst/>
+          </a:prstGeom>
+          <a:noFill/>
+          <a:ln/>
+        </p:spPr>
+        <p:txBody>
+          <a:bodyPr wrap="square" lIns="0" tIns="0" rIns="0" bIns="0" rtlCol="0" anchor="ctr"/>
+          <a:lstStyle/>
+          <a:p>
+            <a:pPr algn="r" indent="0" marL="0">
+              <a:buNone/>
+            </a:pPr>
+            <a:r>
+              <a:rPr lang="en-US" sz="1300" b="1" dirty="0">
+                <a:solidFill>
+                  <a:srgbClr val="9E9E9E"/>
+                </a:solidFill>
+                <a:latin typeface="Calibri" pitchFamily="34" charset="0"/>
+                <a:ea typeface="Calibri" pitchFamily="34" charset="-122"/>
+                <a:cs typeface="Calibri" pitchFamily="34" charset="-120"/>
+              </a:rPr>
+              <a:t>4</a:t>
+            </a:r>
+            <a:endParaRPr lang="en-US" sz="1300" dirty="0"/>
+          </a:p>
+        </p:txBody>
+      </p:sp>
+      <p:sp>
+        <p:nvSpPr>
+          <p:cNvPr id="3" name="Text 1"/>
+          <p:cNvSpPr txBox="1"/>
+          <p:nvPr/>
+        </p:nvSpPr>
+        <p:spPr>
+          <a:xfrm>
             <a:off x="731520" y="502920"/>
             <a:ext cx="10698480" cy="457200"/>
           </a:xfrm>
@@ -29803,7 +29998,7 @@
       </p:sp>
       <p:sp>
         <p:nvSpPr>
-          <p:cNvPr id="3" name="Text 1"/>
+          <p:cNvPr id="4" name="Text 2"/>
           <p:cNvSpPr txBox="1"/>
           <p:nvPr/>
         </p:nvSpPr>
@@ -29842,7 +30037,7 @@
       </p:sp>
       <p:sp>
         <p:nvSpPr>
-          <p:cNvPr id="4" name="ru0.81.9"/>
+          <p:cNvPr id="5" name="ru0.81.9"/>
           <p:cNvSpPr/>
           <p:nvPr/>
         </p:nvSpPr>
@@ -29869,7 +30064,7 @@
       </p:sp>
       <p:sp>
         <p:nvSpPr>
-          <p:cNvPr id="5" name="Text 3"/>
+          <p:cNvPr id="6" name="Text 4"/>
           <p:cNvSpPr txBox="1"/>
           <p:nvPr/>
         </p:nvSpPr>
@@ -29908,7 +30103,7 @@
       </p:sp>
       <p:sp>
         <p:nvSpPr>
-          <p:cNvPr id="6" name="Text 4"/>
+          <p:cNvPr id="7" name="Text 5"/>
           <p:cNvSpPr txBox="1"/>
           <p:nvPr/>
         </p:nvSpPr>
@@ -29950,7 +30145,7 @@
       </p:sp>
       <p:sp>
         <p:nvSpPr>
-          <p:cNvPr id="7" name="Text 5"/>
+          <p:cNvPr id="8" name="Text 6"/>
           <p:cNvSpPr txBox="1"/>
           <p:nvPr/>
         </p:nvSpPr>
@@ -29992,7 +30187,7 @@
       </p:sp>
       <p:sp>
         <p:nvSpPr>
-          <p:cNvPr id="8" name="ru0.83.4499999999999997"/>
+          <p:cNvPr id="9" name="ru0.83.4499999999999997"/>
           <p:cNvSpPr/>
           <p:nvPr/>
         </p:nvSpPr>
@@ -30019,7 +30214,7 @@
       </p:sp>
       <p:sp>
         <p:nvSpPr>
-          <p:cNvPr id="9" name="Text 7"/>
+          <p:cNvPr id="10" name="Text 8"/>
           <p:cNvSpPr txBox="1"/>
           <p:nvPr/>
         </p:nvSpPr>
@@ -30058,7 +30253,7 @@
       </p:sp>
       <p:sp>
         <p:nvSpPr>
-          <p:cNvPr id="10" name="Text 8"/>
+          <p:cNvPr id="11" name="Text 9"/>
           <p:cNvSpPr txBox="1"/>
           <p:nvPr/>
         </p:nvSpPr>
@@ -30100,7 +30295,7 @@
       </p:sp>
       <p:sp>
         <p:nvSpPr>
-          <p:cNvPr id="11" name="Text 9"/>
+          <p:cNvPr id="12" name="Text 10"/>
           <p:cNvSpPr txBox="1"/>
           <p:nvPr/>
         </p:nvSpPr>
@@ -30142,7 +30337,7 @@
       </p:sp>
       <p:sp>
         <p:nvSpPr>
-          <p:cNvPr id="12" name="ru0.84.9"/>
+          <p:cNvPr id="13" name="ru0.84.9"/>
           <p:cNvSpPr/>
           <p:nvPr/>
         </p:nvSpPr>
@@ -30169,7 +30364,7 @@
       </p:sp>
       <p:sp>
         <p:nvSpPr>
-          <p:cNvPr id="13" name="Text 11"/>
+          <p:cNvPr id="14" name="Text 12"/>
           <p:cNvSpPr txBox="1"/>
           <p:nvPr/>
         </p:nvSpPr>
@@ -30208,7 +30403,7 @@
       </p:sp>
       <p:sp>
         <p:nvSpPr>
-          <p:cNvPr id="14" name="Text 12"/>
+          <p:cNvPr id="15" name="Text 13"/>
           <p:cNvSpPr txBox="1"/>
           <p:nvPr/>
         </p:nvSpPr>
@@ -30250,7 +30445,7 @@
       </p:sp>
       <p:sp>
         <p:nvSpPr>
-          <p:cNvPr id="15" name="Text 13"/>
+          <p:cNvPr id="16" name="Text 14"/>
           <p:cNvSpPr txBox="1"/>
           <p:nvPr/>
         </p:nvSpPr>
@@ -30292,7 +30487,7 @@
       </p:sp>
       <p:sp>
         <p:nvSpPr>
-          <p:cNvPr id="16" name="Text 14"/>
+          <p:cNvPr id="17" name="Text 15"/>
           <p:cNvSpPr txBox="1"/>
           <p:nvPr/>
         </p:nvSpPr>
@@ -30329,36 +30524,6 @@
               <a:t>This is not a novel constituent. It is a documented protocol and a single coherent property set.</a:t>
             </a:r>
             <a:endParaRPr lang="en-US" sz="1200" dirty="0"/>
-          </a:p>
-        </p:txBody>
-      </p:sp>
-      <p:sp>
-        <p:nvSpPr>
-          <p:cNvPr id="18" name="Text 0"/>
-          <p:cNvSpPr/>
-          <p:nvPr>
-            <p:ph idx="100" hasCustomPrompt="1"/>
-          </p:nvPr>
-        </p:nvSpPr>
-        <p:spPr>
-          <a:xfrm>
-            <a:off x="11292840" y="6355080"/>
-            <a:ext cx="365760" cy="237744"/>
-          </a:xfrm>
-          <a:prstGeom prst="rect">
-            <a:avLst/>
-          </a:prstGeom>
-          <a:noFill/>
-          <a:ln/>
-        </p:spPr>
-        <p:txBody>
-          <a:bodyPr wrap="square" rtlCol="0"/>
-          <a:lstStyle/>
-          <a:p>
-            <a:pPr algn="r" indent="0" marL="0">
-              <a:buNone/>
-            </a:pPr>
-            <a:endParaRPr lang="en-US" sz="850" dirty="0"/>
           </a:p>
         </p:txBody>
       </p:sp>
@@ -30395,6 +30560,45 @@
         </p:nvSpPr>
         <p:spPr>
           <a:xfrm>
+            <a:off x="10972800" y="6217920"/>
+            <a:ext cx="685800" cy="365760"/>
+          </a:xfrm>
+          <a:prstGeom prst="rect">
+            <a:avLst/>
+          </a:prstGeom>
+          <a:noFill/>
+          <a:ln/>
+        </p:spPr>
+        <p:txBody>
+          <a:bodyPr wrap="square" lIns="0" tIns="0" rIns="0" bIns="0" rtlCol="0" anchor="ctr"/>
+          <a:lstStyle/>
+          <a:p>
+            <a:pPr algn="r" indent="0" marL="0">
+              <a:buNone/>
+            </a:pPr>
+            <a:r>
+              <a:rPr lang="en-US" sz="1300" b="1" dirty="0">
+                <a:solidFill>
+                  <a:srgbClr val="8C8C8C"/>
+                </a:solidFill>
+                <a:latin typeface="Calibri" pitchFamily="34" charset="0"/>
+                <a:ea typeface="Calibri" pitchFamily="34" charset="-122"/>
+                <a:cs typeface="Calibri" pitchFamily="34" charset="-120"/>
+              </a:rPr>
+              <a:t>5</a:t>
+            </a:r>
+            <a:endParaRPr lang="en-US" sz="1300" dirty="0"/>
+          </a:p>
+        </p:txBody>
+      </p:sp>
+      <p:sp>
+        <p:nvSpPr>
+          <p:cNvPr id="3" name="Text 1"/>
+          <p:cNvSpPr txBox="1"/>
+          <p:nvPr/>
+        </p:nvSpPr>
+        <p:spPr>
+          <a:xfrm>
             <a:off x="731520" y="502920"/>
             <a:ext cx="10698480" cy="457200"/>
           </a:xfrm>
@@ -30428,7 +30632,7 @@
       </p:sp>
       <p:sp>
         <p:nvSpPr>
-          <p:cNvPr id="3" name="aimp"/>
+          <p:cNvPr id="4" name="aimp"/>
           <p:cNvSpPr/>
           <p:nvPr/>
         </p:nvSpPr>
@@ -30455,7 +30659,7 @@
       </p:sp>
       <p:sp>
         <p:nvSpPr>
-          <p:cNvPr id="4" name="Text 2"/>
+          <p:cNvPr id="5" name="Text 3"/>
           <p:cNvSpPr txBox="1"/>
           <p:nvPr/>
         </p:nvSpPr>
@@ -30497,7 +30701,7 @@
       </p:sp>
       <p:sp>
         <p:nvSpPr>
-          <p:cNvPr id="5" name="Text 3"/>
+          <p:cNvPr id="6" name="Text 4"/>
           <p:cNvSpPr txBox="1"/>
           <p:nvPr/>
         </p:nvSpPr>
@@ -30536,7 +30740,7 @@
       </p:sp>
       <p:sp>
         <p:nvSpPr>
-          <p:cNvPr id="6" name="ru0.83.6"/>
+          <p:cNvPr id="7" name="ru0.83.6"/>
           <p:cNvSpPr/>
           <p:nvPr/>
         </p:nvSpPr>
@@ -30563,7 +30767,7 @@
       </p:sp>
       <p:sp>
         <p:nvSpPr>
-          <p:cNvPr id="7" name="Text 5"/>
+          <p:cNvPr id="8" name="Text 6"/>
           <p:cNvSpPr txBox="1"/>
           <p:nvPr/>
         </p:nvSpPr>
@@ -30602,7 +30806,7 @@
       </p:sp>
       <p:sp>
         <p:nvSpPr>
-          <p:cNvPr id="8" name="Text 6"/>
+          <p:cNvPr id="9" name="Text 7"/>
           <p:cNvSpPr txBox="1"/>
           <p:nvPr/>
         </p:nvSpPr>
@@ -30644,7 +30848,7 @@
       </p:sp>
       <p:sp>
         <p:nvSpPr>
-          <p:cNvPr id="9" name="Text 7"/>
+          <p:cNvPr id="10" name="Text 8"/>
           <p:cNvSpPr txBox="1"/>
           <p:nvPr/>
         </p:nvSpPr>
@@ -30683,7 +30887,7 @@
       </p:sp>
       <p:sp>
         <p:nvSpPr>
-          <p:cNvPr id="10" name="Text 8"/>
+          <p:cNvPr id="11" name="Text 9"/>
           <p:cNvSpPr txBox="1"/>
           <p:nvPr/>
         </p:nvSpPr>
@@ -30725,7 +30929,7 @@
       </p:sp>
       <p:sp>
         <p:nvSpPr>
-          <p:cNvPr id="11" name="Text 9"/>
+          <p:cNvPr id="12" name="Text 10"/>
           <p:cNvSpPr txBox="1"/>
           <p:nvPr/>
         </p:nvSpPr>
@@ -30764,7 +30968,7 @@
       </p:sp>
       <p:sp>
         <p:nvSpPr>
-          <p:cNvPr id="12" name="Text 10"/>
+          <p:cNvPr id="13" name="Text 11"/>
           <p:cNvSpPr txBox="1"/>
           <p:nvPr/>
         </p:nvSpPr>
@@ -30806,7 +31010,7 @@
       </p:sp>
       <p:sp>
         <p:nvSpPr>
-          <p:cNvPr id="13" name="Text 11"/>
+          <p:cNvPr id="14" name="Text 12"/>
           <p:cNvSpPr txBox="1"/>
           <p:nvPr/>
         </p:nvSpPr>
@@ -30845,7 +31049,7 @@
       </p:sp>
       <p:sp>
         <p:nvSpPr>
-          <p:cNvPr id="14" name="Text 12"/>
+          <p:cNvPr id="15" name="Text 13"/>
           <p:cNvSpPr txBox="1"/>
           <p:nvPr/>
         </p:nvSpPr>
@@ -30887,7 +31091,7 @@
       </p:sp>
       <p:sp>
         <p:nvSpPr>
-          <p:cNvPr id="15" name="Text 13"/>
+          <p:cNvPr id="16" name="Text 14"/>
           <p:cNvSpPr txBox="1"/>
           <p:nvPr/>
         </p:nvSpPr>
@@ -30921,7 +31125,7 @@
                 <a:ea typeface="Calibri" pitchFamily="34" charset="-122"/>
                 <a:cs typeface="Calibri" pitchFamily="34" charset="-120"/>
               </a:rPr>
-              <a:t>The fourth, deriving an evaluation criterion for this material class, is where I will spend most of my time.</a:t>
+              <a:t>The fourth objective is the one the paper turns on.</a:t>
             </a:r>
             <a:endParaRPr lang="en-US" sz="1200" dirty="0"/>
           </a:p>
@@ -30929,7 +31133,7 @@
       </p:sp>
       <p:sp>
         <p:nvSpPr>
-          <p:cNvPr id="16" name="Text 14"/>
+          <p:cNvPr id="17" name="Text 15"/>
           <p:cNvSpPr txBox="1"/>
           <p:nvPr/>
         </p:nvSpPr>
@@ -30966,36 +31170,6 @@
               <a:t>Standards applied: ASTM D790-17 · ISO 11925-2:2020 · ASTM D570-98(2018).</a:t>
             </a:r>
             <a:endParaRPr lang="en-US" sz="900" dirty="0"/>
-          </a:p>
-        </p:txBody>
-      </p:sp>
-      <p:sp>
-        <p:nvSpPr>
-          <p:cNvPr id="18" name="Text 0"/>
-          <p:cNvSpPr/>
-          <p:nvPr>
-            <p:ph idx="100" hasCustomPrompt="1"/>
-          </p:nvPr>
-        </p:nvSpPr>
-        <p:spPr>
-          <a:xfrm>
-            <a:off x="11292840" y="6355080"/>
-            <a:ext cx="365760" cy="237744"/>
-          </a:xfrm>
-          <a:prstGeom prst="rect">
-            <a:avLst/>
-          </a:prstGeom>
-          <a:noFill/>
-          <a:ln/>
-        </p:spPr>
-        <p:txBody>
-          <a:bodyPr wrap="square" rtlCol="0"/>
-          <a:lstStyle/>
-          <a:p>
-            <a:pPr algn="r" indent="0" marL="0">
-              <a:buNone/>
-            </a:pPr>
-            <a:endParaRPr lang="en-US" sz="850" dirty="0"/>
           </a:p>
         </p:txBody>
       </p:sp>
@@ -31032,6 +31206,45 @@
         </p:nvSpPr>
         <p:spPr>
           <a:xfrm>
+            <a:off x="10972800" y="6217920"/>
+            <a:ext cx="685800" cy="365760"/>
+          </a:xfrm>
+          <a:prstGeom prst="rect">
+            <a:avLst/>
+          </a:prstGeom>
+          <a:noFill/>
+          <a:ln/>
+        </p:spPr>
+        <p:txBody>
+          <a:bodyPr wrap="square" lIns="0" tIns="0" rIns="0" bIns="0" rtlCol="0" anchor="ctr"/>
+          <a:lstStyle/>
+          <a:p>
+            <a:pPr algn="r" indent="0" marL="0">
+              <a:buNone/>
+            </a:pPr>
+            <a:r>
+              <a:rPr lang="en-US" sz="1300" b="1" dirty="0">
+                <a:solidFill>
+                  <a:srgbClr val="8C8C8C"/>
+                </a:solidFill>
+                <a:latin typeface="Calibri" pitchFamily="34" charset="0"/>
+                <a:ea typeface="Calibri" pitchFamily="34" charset="-122"/>
+                <a:cs typeface="Calibri" pitchFamily="34" charset="-120"/>
+              </a:rPr>
+              <a:t>6</a:t>
+            </a:r>
+            <a:endParaRPr lang="en-US" sz="1300" dirty="0"/>
+          </a:p>
+        </p:txBody>
+      </p:sp>
+      <p:sp>
+        <p:nvSpPr>
+          <p:cNvPr id="3" name="Text 1"/>
+          <p:cNvSpPr txBox="1"/>
+          <p:nvPr/>
+        </p:nvSpPr>
+        <p:spPr>
+          <a:xfrm>
             <a:off x="731520" y="502920"/>
             <a:ext cx="10698480" cy="457200"/>
           </a:xfrm>
@@ -31065,7 +31278,7 @@
       </p:sp>
       <p:sp>
         <p:nvSpPr>
-          <p:cNvPr id="3" name="Text 1"/>
+          <p:cNvPr id="4" name="Text 2"/>
           <p:cNvSpPr txBox="1"/>
           <p:nvPr/>
         </p:nvSpPr>
@@ -32100,7 +32313,7 @@
       </p:graphicFrame>
       <p:sp>
         <p:nvSpPr>
-          <p:cNvPr id="5" name="vr8.41.45"/>
+          <p:cNvPr id="6" name="vr8.41.45"/>
           <p:cNvSpPr/>
           <p:nvPr/>
         </p:nvSpPr>
@@ -32127,7 +32340,7 @@
       </p:sp>
       <p:sp>
         <p:nvSpPr>
-          <p:cNvPr id="6" name="Text 3"/>
+          <p:cNvPr id="7" name="Text 4"/>
           <p:cNvSpPr txBox="1"/>
           <p:nvPr/>
         </p:nvSpPr>
@@ -32166,7 +32379,7 @@
       </p:sp>
       <p:sp>
         <p:nvSpPr>
-          <p:cNvPr id="7" name="Text 4"/>
+          <p:cNvPr id="8" name="Text 5"/>
           <p:cNvSpPr txBox="1"/>
           <p:nvPr/>
         </p:nvSpPr>
@@ -32284,7 +32497,7 @@
       </p:sp>
       <p:sp>
         <p:nvSpPr>
-          <p:cNvPr id="8" name="ru0.85.6"/>
+          <p:cNvPr id="9" name="ru0.85.6"/>
           <p:cNvSpPr/>
           <p:nvPr/>
         </p:nvSpPr>
@@ -32311,7 +32524,7 @@
       </p:sp>
       <p:sp>
         <p:nvSpPr>
-          <p:cNvPr id="9" name="Text 6"/>
+          <p:cNvPr id="10" name="Text 7"/>
           <p:cNvSpPr txBox="1"/>
           <p:nvPr/>
         </p:nvSpPr>
@@ -32350,7 +32563,7 @@
       </p:sp>
       <p:sp>
         <p:nvSpPr>
-          <p:cNvPr id="10" name="ch0"/>
+          <p:cNvPr id="11" name="ch0"/>
           <p:cNvSpPr/>
           <p:nvPr/>
         </p:nvSpPr>
@@ -32375,7 +32588,7 @@
       </p:sp>
       <p:sp>
         <p:nvSpPr>
-          <p:cNvPr id="11" name="Text 8"/>
+          <p:cNvPr id="12" name="Text 9"/>
           <p:cNvSpPr txBox="1"/>
           <p:nvPr/>
         </p:nvSpPr>
@@ -32417,7 +32630,7 @@
       </p:sp>
       <p:sp>
         <p:nvSpPr>
-          <p:cNvPr id="12" name="ch1"/>
+          <p:cNvPr id="13" name="ch1"/>
           <p:cNvSpPr/>
           <p:nvPr/>
         </p:nvSpPr>
@@ -32442,7 +32655,7 @@
       </p:sp>
       <p:sp>
         <p:nvSpPr>
-          <p:cNvPr id="13" name="Text 10"/>
+          <p:cNvPr id="14" name="Text 11"/>
           <p:cNvSpPr txBox="1"/>
           <p:nvPr/>
         </p:nvSpPr>
@@ -32484,7 +32697,7 @@
       </p:sp>
       <p:sp>
         <p:nvSpPr>
-          <p:cNvPr id="14" name="ch2"/>
+          <p:cNvPr id="15" name="ch2"/>
           <p:cNvSpPr/>
           <p:nvPr/>
         </p:nvSpPr>
@@ -32509,7 +32722,7 @@
       </p:sp>
       <p:sp>
         <p:nvSpPr>
-          <p:cNvPr id="15" name="Text 12"/>
+          <p:cNvPr id="16" name="Text 13"/>
           <p:cNvSpPr txBox="1"/>
           <p:nvPr/>
         </p:nvSpPr>
@@ -32551,7 +32764,7 @@
       </p:sp>
       <p:sp>
         <p:nvSpPr>
-          <p:cNvPr id="16" name="ch3"/>
+          <p:cNvPr id="17" name="ch3"/>
           <p:cNvSpPr/>
           <p:nvPr/>
         </p:nvSpPr>
@@ -32576,7 +32789,7 @@
       </p:sp>
       <p:sp>
         <p:nvSpPr>
-          <p:cNvPr id="17" name="Text 14"/>
+          <p:cNvPr id="18" name="Text 15"/>
           <p:cNvSpPr txBox="1"/>
           <p:nvPr/>
         </p:nvSpPr>
@@ -32618,7 +32831,7 @@
       </p:sp>
       <p:sp>
         <p:nvSpPr>
-          <p:cNvPr id="18" name="ch4"/>
+          <p:cNvPr id="19" name="ch4"/>
           <p:cNvSpPr/>
           <p:nvPr/>
         </p:nvSpPr>
@@ -32643,7 +32856,7 @@
       </p:sp>
       <p:sp>
         <p:nvSpPr>
-          <p:cNvPr id="19" name="Text 16"/>
+          <p:cNvPr id="20" name="Text 17"/>
           <p:cNvSpPr txBox="1"/>
           <p:nvPr/>
         </p:nvSpPr>
@@ -32685,7 +32898,7 @@
       </p:sp>
       <p:sp>
         <p:nvSpPr>
-          <p:cNvPr id="20" name="ch5"/>
+          <p:cNvPr id="21" name="ch5"/>
           <p:cNvSpPr/>
           <p:nvPr/>
         </p:nvSpPr>
@@ -32710,7 +32923,7 @@
       </p:sp>
       <p:sp>
         <p:nvSpPr>
-          <p:cNvPr id="21" name="Text 18"/>
+          <p:cNvPr id="22" name="Text 19"/>
           <p:cNvSpPr txBox="1"/>
           <p:nvPr/>
         </p:nvSpPr>
@@ -32752,7 +32965,7 @@
       </p:sp>
       <p:sp>
         <p:nvSpPr>
-          <p:cNvPr id="22" name="ch6"/>
+          <p:cNvPr id="23" name="ch6"/>
           <p:cNvSpPr/>
           <p:nvPr/>
         </p:nvSpPr>
@@ -32777,7 +32990,7 @@
       </p:sp>
       <p:sp>
         <p:nvSpPr>
-          <p:cNvPr id="23" name="Text 20"/>
+          <p:cNvPr id="24" name="Text 21"/>
           <p:cNvSpPr txBox="1"/>
           <p:nvPr/>
         </p:nvSpPr>
@@ -32819,7 +33032,7 @@
       </p:sp>
       <p:sp>
         <p:nvSpPr>
-          <p:cNvPr id="24" name="ch7"/>
+          <p:cNvPr id="25" name="ch7"/>
           <p:cNvSpPr/>
           <p:nvPr/>
         </p:nvSpPr>
@@ -32844,7 +33057,7 @@
       </p:sp>
       <p:sp>
         <p:nvSpPr>
-          <p:cNvPr id="25" name="Text 22"/>
+          <p:cNvPr id="26" name="Text 23"/>
           <p:cNvSpPr txBox="1"/>
           <p:nvPr/>
         </p:nvSpPr>
@@ -32886,7 +33099,7 @@
       </p:sp>
       <p:sp>
         <p:nvSpPr>
-          <p:cNvPr id="26" name="ch8"/>
+          <p:cNvPr id="27" name="ch8"/>
           <p:cNvSpPr/>
           <p:nvPr/>
         </p:nvSpPr>
@@ -32911,7 +33124,7 @@
       </p:sp>
       <p:sp>
         <p:nvSpPr>
-          <p:cNvPr id="27" name="Text 24"/>
+          <p:cNvPr id="28" name="Text 25"/>
           <p:cNvSpPr txBox="1"/>
           <p:nvPr/>
         </p:nvSpPr>
@@ -32953,7 +33166,7 @@
       </p:sp>
       <p:sp>
         <p:nvSpPr>
-          <p:cNvPr id="28" name="Text 25"/>
+          <p:cNvPr id="29" name="Text 26"/>
           <p:cNvSpPr txBox="1"/>
           <p:nvPr/>
         </p:nvSpPr>
@@ -32987,39 +33200,9 @@
                 <a:ea typeface="Calibri" pitchFamily="34" charset="-122"/>
                 <a:cs typeface="Calibri" pitchFamily="34" charset="-120"/>
               </a:rPr>
-              <a:t>The filled boxes are the properties I determined. The outlined boxes are the ones I did not.</a:t>
+              <a:t>The filled boxes were determined in this study. The outlined boxes were not.</a:t>
             </a:r>
             <a:endParaRPr lang="en-US" sz="1200" dirty="0"/>
-          </a:p>
-        </p:txBody>
-      </p:sp>
-      <p:sp>
-        <p:nvSpPr>
-          <p:cNvPr id="30" name="Text 0"/>
-          <p:cNvSpPr/>
-          <p:nvPr>
-            <p:ph idx="100" hasCustomPrompt="1"/>
-          </p:nvPr>
-        </p:nvSpPr>
-        <p:spPr>
-          <a:xfrm>
-            <a:off x="11292840" y="6355080"/>
-            <a:ext cx="365760" cy="237744"/>
-          </a:xfrm>
-          <a:prstGeom prst="rect">
-            <a:avLst/>
-          </a:prstGeom>
-          <a:noFill/>
-          <a:ln/>
-        </p:spPr>
-        <p:txBody>
-          <a:bodyPr wrap="square" rtlCol="0"/>
-          <a:lstStyle/>
-          <a:p>
-            <a:pPr algn="r" indent="0" marL="0">
-              <a:buNone/>
-            </a:pPr>
-            <a:endParaRPr lang="en-US" sz="850" dirty="0"/>
           </a:p>
         </p:txBody>
       </p:sp>
@@ -33056,6 +33239,45 @@
         </p:nvSpPr>
         <p:spPr>
           <a:xfrm>
+            <a:off x="10972800" y="6217920"/>
+            <a:ext cx="685800" cy="365760"/>
+          </a:xfrm>
+          <a:prstGeom prst="rect">
+            <a:avLst/>
+          </a:prstGeom>
+          <a:noFill/>
+          <a:ln/>
+        </p:spPr>
+        <p:txBody>
+          <a:bodyPr wrap="square" lIns="0" tIns="0" rIns="0" bIns="0" rtlCol="0" anchor="ctr"/>
+          <a:lstStyle/>
+          <a:p>
+            <a:pPr algn="r" indent="0" marL="0">
+              <a:buNone/>
+            </a:pPr>
+            <a:r>
+              <a:rPr lang="en-US" sz="1300" b="1" dirty="0">
+                <a:solidFill>
+                  <a:srgbClr val="8C8C8C"/>
+                </a:solidFill>
+                <a:latin typeface="Calibri" pitchFamily="34" charset="0"/>
+                <a:ea typeface="Calibri" pitchFamily="34" charset="-122"/>
+                <a:cs typeface="Calibri" pitchFamily="34" charset="-120"/>
+              </a:rPr>
+              <a:t>7</a:t>
+            </a:r>
+            <a:endParaRPr lang="en-US" sz="1300" dirty="0"/>
+          </a:p>
+        </p:txBody>
+      </p:sp>
+      <p:sp>
+        <p:nvSpPr>
+          <p:cNvPr id="3" name="Text 1"/>
+          <p:cNvSpPr txBox="1"/>
+          <p:nvPr/>
+        </p:nvSpPr>
+        <p:spPr>
+          <a:xfrm>
             <a:off x="731520" y="502920"/>
             <a:ext cx="10698480" cy="457200"/>
           </a:xfrm>
@@ -33089,7 +33311,7 @@
       </p:sp>
       <p:sp>
         <p:nvSpPr>
-          <p:cNvPr id="3" name="Text 1"/>
+          <p:cNvPr id="4" name="Text 2"/>
           <p:cNvSpPr txBox="1"/>
           <p:nvPr/>
         </p:nvSpPr>
@@ -33128,7 +33350,7 @@
       </p:sp>
       <p:sp>
         <p:nvSpPr>
-          <p:cNvPr id="4" name="mo0"/>
+          <p:cNvPr id="5" name="mo0"/>
           <p:cNvSpPr/>
           <p:nvPr/>
         </p:nvSpPr>
@@ -33153,7 +33375,7 @@
       </p:sp>
       <p:sp>
         <p:nvSpPr>
-          <p:cNvPr id="5" name="Text 3"/>
+          <p:cNvPr id="6" name="Text 4"/>
           <p:cNvSpPr txBox="1"/>
           <p:nvPr/>
         </p:nvSpPr>
@@ -33192,7 +33414,7 @@
       </p:sp>
       <p:sp>
         <p:nvSpPr>
-          <p:cNvPr id="6" name="Text 4"/>
+          <p:cNvPr id="7" name="Text 5"/>
           <p:cNvSpPr txBox="1"/>
           <p:nvPr/>
         </p:nvSpPr>
@@ -33231,7 +33453,7 @@
       </p:sp>
       <p:sp>
         <p:nvSpPr>
-          <p:cNvPr id="7" name="Text 5"/>
+          <p:cNvPr id="8" name="Text 6"/>
           <p:cNvSpPr txBox="1"/>
           <p:nvPr/>
         </p:nvSpPr>
@@ -33273,7 +33495,7 @@
       </p:sp>
       <p:sp>
         <p:nvSpPr>
-          <p:cNvPr id="8" name="ma0"/>
+          <p:cNvPr id="9" name="ma0"/>
           <p:cNvSpPr/>
           <p:nvPr/>
         </p:nvSpPr>
@@ -33300,7 +33522,7 @@
       </p:sp>
       <p:sp>
         <p:nvSpPr>
-          <p:cNvPr id="9" name="mo1"/>
+          <p:cNvPr id="10" name="mo1"/>
           <p:cNvSpPr/>
           <p:nvPr/>
         </p:nvSpPr>
@@ -33325,7 +33547,7 @@
       </p:sp>
       <p:sp>
         <p:nvSpPr>
-          <p:cNvPr id="10" name="Text 8"/>
+          <p:cNvPr id="11" name="Text 9"/>
           <p:cNvSpPr txBox="1"/>
           <p:nvPr/>
         </p:nvSpPr>
@@ -33364,7 +33586,7 @@
       </p:sp>
       <p:sp>
         <p:nvSpPr>
-          <p:cNvPr id="11" name="Text 9"/>
+          <p:cNvPr id="12" name="Text 10"/>
           <p:cNvSpPr txBox="1"/>
           <p:nvPr/>
         </p:nvSpPr>
@@ -33403,7 +33625,7 @@
       </p:sp>
       <p:sp>
         <p:nvSpPr>
-          <p:cNvPr id="12" name="Text 10"/>
+          <p:cNvPr id="13" name="Text 11"/>
           <p:cNvSpPr txBox="1"/>
           <p:nvPr/>
         </p:nvSpPr>
@@ -33445,7 +33667,7 @@
       </p:sp>
       <p:sp>
         <p:nvSpPr>
-          <p:cNvPr id="13" name="ma1"/>
+          <p:cNvPr id="14" name="ma1"/>
           <p:cNvSpPr/>
           <p:nvPr/>
         </p:nvSpPr>
@@ -33472,7 +33694,7 @@
       </p:sp>
       <p:sp>
         <p:nvSpPr>
-          <p:cNvPr id="14" name="mo2"/>
+          <p:cNvPr id="15" name="mo2"/>
           <p:cNvSpPr/>
           <p:nvPr/>
         </p:nvSpPr>
@@ -33497,7 +33719,7 @@
       </p:sp>
       <p:sp>
         <p:nvSpPr>
-          <p:cNvPr id="15" name="Text 13"/>
+          <p:cNvPr id="16" name="Text 14"/>
           <p:cNvSpPr txBox="1"/>
           <p:nvPr/>
         </p:nvSpPr>
@@ -33536,7 +33758,7 @@
       </p:sp>
       <p:sp>
         <p:nvSpPr>
-          <p:cNvPr id="16" name="Text 14"/>
+          <p:cNvPr id="17" name="Text 15"/>
           <p:cNvSpPr txBox="1"/>
           <p:nvPr/>
         </p:nvSpPr>
@@ -33575,7 +33797,7 @@
       </p:sp>
       <p:sp>
         <p:nvSpPr>
-          <p:cNvPr id="17" name="Text 15"/>
+          <p:cNvPr id="18" name="Text 16"/>
           <p:cNvSpPr txBox="1"/>
           <p:nvPr/>
         </p:nvSpPr>
@@ -33617,7 +33839,7 @@
       </p:sp>
       <p:sp>
         <p:nvSpPr>
-          <p:cNvPr id="18" name="ma2"/>
+          <p:cNvPr id="19" name="ma2"/>
           <p:cNvSpPr/>
           <p:nvPr/>
         </p:nvSpPr>
@@ -33644,7 +33866,7 @@
       </p:sp>
       <p:sp>
         <p:nvSpPr>
-          <p:cNvPr id="19" name="mo3"/>
+          <p:cNvPr id="20" name="mo3"/>
           <p:cNvSpPr/>
           <p:nvPr/>
         </p:nvSpPr>
@@ -33669,7 +33891,7 @@
       </p:sp>
       <p:sp>
         <p:nvSpPr>
-          <p:cNvPr id="20" name="Text 18"/>
+          <p:cNvPr id="21" name="Text 19"/>
           <p:cNvSpPr txBox="1"/>
           <p:nvPr/>
         </p:nvSpPr>
@@ -33708,7 +33930,7 @@
       </p:sp>
       <p:sp>
         <p:nvSpPr>
-          <p:cNvPr id="21" name="Text 19"/>
+          <p:cNvPr id="22" name="Text 20"/>
           <p:cNvSpPr txBox="1"/>
           <p:nvPr/>
         </p:nvSpPr>
@@ -33747,7 +33969,7 @@
       </p:sp>
       <p:sp>
         <p:nvSpPr>
-          <p:cNvPr id="22" name="Text 20"/>
+          <p:cNvPr id="23" name="Text 21"/>
           <p:cNvSpPr txBox="1"/>
           <p:nvPr/>
         </p:nvSpPr>
@@ -33789,7 +34011,7 @@
       </p:sp>
       <p:sp>
         <p:nvSpPr>
-          <p:cNvPr id="23" name="ru0.84.5"/>
+          <p:cNvPr id="24" name="ru0.84.5"/>
           <p:cNvSpPr/>
           <p:nvPr/>
         </p:nvSpPr>
@@ -33816,7 +34038,7 @@
       </p:sp>
       <p:sp>
         <p:nvSpPr>
-          <p:cNvPr id="24" name="Text 22"/>
+          <p:cNvPr id="25" name="Text 23"/>
           <p:cNvSpPr txBox="1"/>
           <p:nvPr/>
         </p:nvSpPr>
@@ -33858,7 +34080,7 @@
       </p:sp>
       <p:sp>
         <p:nvSpPr>
-          <p:cNvPr id="25" name="Text 23"/>
+          <p:cNvPr id="26" name="Text 24"/>
           <p:cNvSpPr txBox="1"/>
           <p:nvPr/>
         </p:nvSpPr>
@@ -33895,36 +34117,6 @@
               <a:t>Material-driven design after Karana et al. (2015)</a:t>
             </a:r>
             <a:endParaRPr lang="en-US" sz="900" dirty="0"/>
-          </a:p>
-        </p:txBody>
-      </p:sp>
-      <p:sp>
-        <p:nvSpPr>
-          <p:cNvPr id="27" name="Text 0"/>
-          <p:cNvSpPr/>
-          <p:nvPr>
-            <p:ph idx="100" hasCustomPrompt="1"/>
-          </p:nvPr>
-        </p:nvSpPr>
-        <p:spPr>
-          <a:xfrm>
-            <a:off x="11292840" y="6355080"/>
-            <a:ext cx="365760" cy="237744"/>
-          </a:xfrm>
-          <a:prstGeom prst="rect">
-            <a:avLst/>
-          </a:prstGeom>
-          <a:noFill/>
-          <a:ln/>
-        </p:spPr>
-        <p:txBody>
-          <a:bodyPr wrap="square" rtlCol="0"/>
-          <a:lstStyle/>
-          <a:p>
-            <a:pPr algn="r" indent="0" marL="0">
-              <a:buNone/>
-            </a:pPr>
-            <a:endParaRPr lang="en-US" sz="850" dirty="0"/>
           </a:p>
         </p:txBody>
       </p:sp>
@@ -33961,6 +34153,45 @@
         </p:nvSpPr>
         <p:spPr>
           <a:xfrm>
+            <a:off x="10972800" y="6217920"/>
+            <a:ext cx="685800" cy="365760"/>
+          </a:xfrm>
+          <a:prstGeom prst="rect">
+            <a:avLst/>
+          </a:prstGeom>
+          <a:noFill/>
+          <a:ln/>
+        </p:spPr>
+        <p:txBody>
+          <a:bodyPr wrap="square" lIns="0" tIns="0" rIns="0" bIns="0" rtlCol="0" anchor="ctr"/>
+          <a:lstStyle/>
+          <a:p>
+            <a:pPr algn="r" indent="0" marL="0">
+              <a:buNone/>
+            </a:pPr>
+            <a:r>
+              <a:rPr lang="en-US" sz="1300" b="1" dirty="0">
+                <a:solidFill>
+                  <a:srgbClr val="8C8C8C"/>
+                </a:solidFill>
+                <a:latin typeface="Calibri" pitchFamily="34" charset="0"/>
+                <a:ea typeface="Calibri" pitchFamily="34" charset="-122"/>
+                <a:cs typeface="Calibri" pitchFamily="34" charset="-120"/>
+              </a:rPr>
+              <a:t>8</a:t>
+            </a:r>
+            <a:endParaRPr lang="en-US" sz="1300" dirty="0"/>
+          </a:p>
+        </p:txBody>
+      </p:sp>
+      <p:sp>
+        <p:nvSpPr>
+          <p:cNvPr id="3" name="Text 1"/>
+          <p:cNvSpPr txBox="1"/>
+          <p:nvPr/>
+        </p:nvSpPr>
+        <p:spPr>
+          <a:xfrm>
             <a:off x="731520" y="502920"/>
             <a:ext cx="10698480" cy="457200"/>
           </a:xfrm>
@@ -33994,7 +34225,7 @@
       </p:sp>
       <p:sp>
         <p:nvSpPr>
-          <p:cNvPr id="3" name="ru0.81.5"/>
+          <p:cNvPr id="4" name="ru0.81.5"/>
           <p:cNvSpPr/>
           <p:nvPr/>
         </p:nvSpPr>
@@ -34021,7 +34252,7 @@
       </p:sp>
       <p:sp>
         <p:nvSpPr>
-          <p:cNvPr id="4" name="Text 2"/>
+          <p:cNvPr id="5" name="Text 3"/>
           <p:cNvSpPr txBox="1"/>
           <p:nvPr/>
         </p:nvSpPr>
@@ -34060,7 +34291,7 @@
       </p:sp>
       <p:sp>
         <p:nvSpPr>
-          <p:cNvPr id="5" name="Text 3"/>
+          <p:cNvPr id="6" name="Text 4"/>
           <p:cNvSpPr txBox="1"/>
           <p:nvPr/>
         </p:nvSpPr>
@@ -34102,7 +34333,7 @@
       </p:sp>
       <p:sp>
         <p:nvSpPr>
-          <p:cNvPr id="6" name="Text 4"/>
+          <p:cNvPr id="7" name="Text 5"/>
           <p:cNvSpPr txBox="1"/>
           <p:nvPr/>
         </p:nvSpPr>
@@ -34141,7 +34372,7 @@
       </p:sp>
       <p:sp>
         <p:nvSpPr>
-          <p:cNvPr id="7" name="ru0.82.4699999999999998"/>
+          <p:cNvPr id="8" name="ru0.82.4699999999999998"/>
           <p:cNvSpPr/>
           <p:nvPr/>
         </p:nvSpPr>
@@ -34168,7 +34399,7 @@
       </p:sp>
       <p:sp>
         <p:nvSpPr>
-          <p:cNvPr id="8" name="Text 6"/>
+          <p:cNvPr id="9" name="Text 7"/>
           <p:cNvSpPr txBox="1"/>
           <p:nvPr/>
         </p:nvSpPr>
@@ -34207,7 +34438,7 @@
       </p:sp>
       <p:sp>
         <p:nvSpPr>
-          <p:cNvPr id="9" name="Text 7"/>
+          <p:cNvPr id="10" name="Text 8"/>
           <p:cNvSpPr txBox="1"/>
           <p:nvPr/>
         </p:nvSpPr>
@@ -34249,7 +34480,7 @@
       </p:sp>
       <p:sp>
         <p:nvSpPr>
-          <p:cNvPr id="10" name="Text 8"/>
+          <p:cNvPr id="11" name="Text 9"/>
           <p:cNvSpPr txBox="1"/>
           <p:nvPr/>
         </p:nvSpPr>
@@ -34288,7 +34519,7 @@
       </p:sp>
       <p:sp>
         <p:nvSpPr>
-          <p:cNvPr id="11" name="ru0.83.42"/>
+          <p:cNvPr id="12" name="ru0.83.42"/>
           <p:cNvSpPr/>
           <p:nvPr/>
         </p:nvSpPr>
@@ -34315,7 +34546,7 @@
       </p:sp>
       <p:sp>
         <p:nvSpPr>
-          <p:cNvPr id="12" name="Text 10"/>
+          <p:cNvPr id="13" name="Text 11"/>
           <p:cNvSpPr txBox="1"/>
           <p:nvPr/>
         </p:nvSpPr>
@@ -34354,7 +34585,7 @@
       </p:sp>
       <p:sp>
         <p:nvSpPr>
-          <p:cNvPr id="13" name="Text 11"/>
+          <p:cNvPr id="14" name="Text 12"/>
           <p:cNvSpPr txBox="1"/>
           <p:nvPr/>
         </p:nvSpPr>
@@ -34396,7 +34627,7 @@
       </p:sp>
       <p:sp>
         <p:nvSpPr>
-          <p:cNvPr id="14" name="Text 12"/>
+          <p:cNvPr id="15" name="Text 13"/>
           <p:cNvSpPr txBox="1"/>
           <p:nvPr/>
         </p:nvSpPr>
@@ -34435,7 +34666,7 @@
       </p:sp>
       <p:sp>
         <p:nvSpPr>
-          <p:cNvPr id="15" name="ru0.84.37"/>
+          <p:cNvPr id="16" name="ru0.84.37"/>
           <p:cNvSpPr/>
           <p:nvPr/>
         </p:nvSpPr>
@@ -34462,7 +34693,7 @@
       </p:sp>
       <p:sp>
         <p:nvSpPr>
-          <p:cNvPr id="16" name="Text 14"/>
+          <p:cNvPr id="17" name="Text 15"/>
           <p:cNvSpPr txBox="1"/>
           <p:nvPr/>
         </p:nvSpPr>
@@ -34501,7 +34732,7 @@
       </p:sp>
       <p:sp>
         <p:nvSpPr>
-          <p:cNvPr id="17" name="Text 15"/>
+          <p:cNvPr id="18" name="Text 16"/>
           <p:cNvSpPr txBox="1"/>
           <p:nvPr/>
         </p:nvSpPr>
@@ -34543,7 +34774,7 @@
       </p:sp>
       <p:sp>
         <p:nvSpPr>
-          <p:cNvPr id="18" name="Text 16"/>
+          <p:cNvPr id="19" name="Text 17"/>
           <p:cNvSpPr txBox="1"/>
           <p:nvPr/>
         </p:nvSpPr>
@@ -34582,7 +34813,7 @@
       </p:sp>
       <p:sp>
         <p:nvSpPr>
-          <p:cNvPr id="19" name="ru0.85.319999999999999"/>
+          <p:cNvPr id="20" name="ru0.85.319999999999999"/>
           <p:cNvSpPr/>
           <p:nvPr/>
         </p:nvSpPr>
@@ -34609,7 +34840,7 @@
       </p:sp>
       <p:sp>
         <p:nvSpPr>
-          <p:cNvPr id="20" name="Text 18"/>
+          <p:cNvPr id="21" name="Text 19"/>
           <p:cNvSpPr txBox="1"/>
           <p:nvPr/>
         </p:nvSpPr>
@@ -34648,7 +34879,7 @@
       </p:sp>
       <p:sp>
         <p:nvSpPr>
-          <p:cNvPr id="21" name="Text 19"/>
+          <p:cNvPr id="22" name="Text 20"/>
           <p:cNvSpPr txBox="1"/>
           <p:nvPr/>
         </p:nvSpPr>
@@ -34690,7 +34921,7 @@
       </p:sp>
       <p:sp>
         <p:nvSpPr>
-          <p:cNvPr id="22" name="Text 20"/>
+          <p:cNvPr id="23" name="Text 21"/>
           <p:cNvSpPr txBox="1"/>
           <p:nvPr/>
         </p:nvSpPr>
@@ -34729,7 +34960,7 @@
       </p:sp>
       <p:sp>
         <p:nvSpPr>
-          <p:cNvPr id="23" name="ru0.86.27"/>
+          <p:cNvPr id="24" name="ru0.86.27"/>
           <p:cNvSpPr/>
           <p:nvPr/>
         </p:nvSpPr>
@@ -34756,7 +34987,7 @@
       </p:sp>
       <p:sp>
         <p:nvSpPr>
-          <p:cNvPr id="24" name="Text 22"/>
+          <p:cNvPr id="25" name="Text 23"/>
           <p:cNvSpPr txBox="1"/>
           <p:nvPr/>
         </p:nvSpPr>
@@ -34790,39 +35021,9 @@
                 <a:ea typeface="Calibri" pitchFamily="34" charset="-122"/>
                 <a:cs typeface="Calibri" pitchFamily="34" charset="-120"/>
               </a:rPr>
-              <a:t>The first four I can answer by measurement. The fifth I can only answer by argument.</a:t>
+              <a:t>The first four are answered by measurement. The fifth is answered by argument.</a:t>
             </a:r>
             <a:endParaRPr lang="en-US" sz="1200" dirty="0"/>
-          </a:p>
-        </p:txBody>
-      </p:sp>
-      <p:sp>
-        <p:nvSpPr>
-          <p:cNvPr id="26" name="Text 0"/>
-          <p:cNvSpPr/>
-          <p:nvPr>
-            <p:ph idx="100" hasCustomPrompt="1"/>
-          </p:nvPr>
-        </p:nvSpPr>
-        <p:spPr>
-          <a:xfrm>
-            <a:off x="11292840" y="6355080"/>
-            <a:ext cx="365760" cy="237744"/>
-          </a:xfrm>
-          <a:prstGeom prst="rect">
-            <a:avLst/>
-          </a:prstGeom>
-          <a:noFill/>
-          <a:ln/>
-        </p:spPr>
-        <p:txBody>
-          <a:bodyPr wrap="square" rtlCol="0"/>
-          <a:lstStyle/>
-          <a:p>
-            <a:pPr algn="r" indent="0" marL="0">
-              <a:buNone/>
-            </a:pPr>
-            <a:endParaRPr lang="en-US" sz="850" dirty="0"/>
           </a:p>
         </p:txBody>
       </p:sp>
@@ -34859,6 +35060,45 @@
         </p:nvSpPr>
         <p:spPr>
           <a:xfrm>
+            <a:off x="10972800" y="6217920"/>
+            <a:ext cx="685800" cy="365760"/>
+          </a:xfrm>
+          <a:prstGeom prst="rect">
+            <a:avLst/>
+          </a:prstGeom>
+          <a:noFill/>
+          <a:ln/>
+        </p:spPr>
+        <p:txBody>
+          <a:bodyPr wrap="square" lIns="0" tIns="0" rIns="0" bIns="0" rtlCol="0" anchor="ctr"/>
+          <a:lstStyle/>
+          <a:p>
+            <a:pPr algn="r" indent="0" marL="0">
+              <a:buNone/>
+            </a:pPr>
+            <a:r>
+              <a:rPr lang="en-US" sz="1300" b="1" dirty="0">
+                <a:solidFill>
+                  <a:srgbClr val="8C8C8C"/>
+                </a:solidFill>
+                <a:latin typeface="Calibri" pitchFamily="34" charset="0"/>
+                <a:ea typeface="Calibri" pitchFamily="34" charset="-122"/>
+                <a:cs typeface="Calibri" pitchFamily="34" charset="-120"/>
+              </a:rPr>
+              <a:t>9</a:t>
+            </a:r>
+            <a:endParaRPr lang="en-US" sz="1300" dirty="0"/>
+          </a:p>
+        </p:txBody>
+      </p:sp>
+      <p:sp>
+        <p:nvSpPr>
+          <p:cNvPr id="3" name="Text 1"/>
+          <p:cNvSpPr txBox="1"/>
+          <p:nvPr/>
+        </p:nvSpPr>
+        <p:spPr>
+          <a:xfrm>
             <a:off x="731520" y="502920"/>
             <a:ext cx="10698480" cy="457200"/>
           </a:xfrm>
@@ -34892,7 +35132,7 @@
       </p:sp>
       <p:sp>
         <p:nvSpPr>
-          <p:cNvPr id="3" name="hyp"/>
+          <p:cNvPr id="4" name="hyp"/>
           <p:cNvSpPr/>
           <p:nvPr/>
         </p:nvSpPr>
@@ -34919,7 +35159,7 @@
       </p:sp>
       <p:sp>
         <p:nvSpPr>
-          <p:cNvPr id="4" name="Text 2"/>
+          <p:cNvPr id="5" name="Text 3"/>
           <p:cNvSpPr txBox="1"/>
           <p:nvPr/>
         </p:nvSpPr>
@@ -34961,7 +35201,7 @@
       </p:sp>
       <p:sp>
         <p:nvSpPr>
-          <p:cNvPr id="5" name="Text 3"/>
+          <p:cNvPr id="6" name="Text 4"/>
           <p:cNvSpPr txBox="1"/>
           <p:nvPr/>
         </p:nvSpPr>
@@ -35000,7 +35240,7 @@
       </p:sp>
       <p:sp>
         <p:nvSpPr>
-          <p:cNvPr id="6" name="ru0.83.5"/>
+          <p:cNvPr id="7" name="ru0.83.5"/>
           <p:cNvSpPr/>
           <p:nvPr/>
         </p:nvSpPr>
@@ -35027,7 +35267,7 @@
       </p:sp>
       <p:sp>
         <p:nvSpPr>
-          <p:cNvPr id="7" name="Text 5"/>
+          <p:cNvPr id="8" name="Text 6"/>
           <p:cNvSpPr txBox="1"/>
           <p:nvPr/>
         </p:nvSpPr>
@@ -35066,7 +35306,7 @@
       </p:sp>
       <p:sp>
         <p:nvSpPr>
-          <p:cNvPr id="8" name="Text 6"/>
+          <p:cNvPr id="9" name="Text 7"/>
           <p:cNvSpPr txBox="1"/>
           <p:nvPr/>
         </p:nvSpPr>
@@ -35108,7 +35348,7 @@
       </p:sp>
       <p:sp>
         <p:nvSpPr>
-          <p:cNvPr id="9" name="aw8.13.92"/>
+          <p:cNvPr id="10" name="aw8.13.92"/>
           <p:cNvSpPr/>
           <p:nvPr/>
         </p:nvSpPr>
@@ -35135,7 +35375,7 @@
       </p:sp>
       <p:sp>
         <p:nvSpPr>
-          <p:cNvPr id="10" name="Text 8"/>
+          <p:cNvPr id="11" name="Text 9"/>
           <p:cNvSpPr txBox="1"/>
           <p:nvPr/>
         </p:nvSpPr>
@@ -35174,7 +35414,7 @@
       </p:sp>
       <p:sp>
         <p:nvSpPr>
-          <p:cNvPr id="11" name="ru0.84.75"/>
+          <p:cNvPr id="12" name="ru0.84.75"/>
           <p:cNvSpPr/>
           <p:nvPr/>
         </p:nvSpPr>
@@ -35201,7 +35441,7 @@
       </p:sp>
       <p:sp>
         <p:nvSpPr>
-          <p:cNvPr id="12" name="Text 10"/>
+          <p:cNvPr id="13" name="Text 11"/>
           <p:cNvSpPr txBox="1"/>
           <p:nvPr/>
         </p:nvSpPr>
@@ -35240,7 +35480,7 @@
       </p:sp>
       <p:sp>
         <p:nvSpPr>
-          <p:cNvPr id="13" name="Text 11"/>
+          <p:cNvPr id="14" name="Text 12"/>
           <p:cNvSpPr txBox="1"/>
           <p:nvPr/>
         </p:nvSpPr>
@@ -35282,7 +35522,7 @@
       </p:sp>
       <p:sp>
         <p:nvSpPr>
-          <p:cNvPr id="14" name="aw8.15.12"/>
+          <p:cNvPr id="15" name="aw8.15.12"/>
           <p:cNvSpPr/>
           <p:nvPr/>
         </p:nvSpPr>
@@ -35309,7 +35549,7 @@
       </p:sp>
       <p:sp>
         <p:nvSpPr>
-          <p:cNvPr id="15" name="Text 13"/>
+          <p:cNvPr id="16" name="Text 14"/>
           <p:cNvSpPr txBox="1"/>
           <p:nvPr/>
         </p:nvSpPr>
@@ -35348,7 +35588,7 @@
       </p:sp>
       <p:sp>
         <p:nvSpPr>
-          <p:cNvPr id="16" name="ru0.86.15"/>
+          <p:cNvPr id="17" name="ru0.86.15"/>
           <p:cNvSpPr/>
           <p:nvPr/>
         </p:nvSpPr>
@@ -35375,7 +35615,7 @@
       </p:sp>
       <p:sp>
         <p:nvSpPr>
-          <p:cNvPr id="17" name="Text 15"/>
+          <p:cNvPr id="18" name="Text 16"/>
           <p:cNvSpPr txBox="1"/>
           <p:nvPr/>
         </p:nvSpPr>
@@ -35409,39 +35649,9 @@
                 <a:ea typeface="Calibri" pitchFamily="34" charset="-122"/>
                 <a:cs typeface="Calibri" pitchFamily="34" charset="-120"/>
               </a:rPr>
-              <a:t>The dissertation behind this paper frames a broader hypothesis around spatial resilience, and what you see here is its materials-engineering component.</a:t>
+              <a:t>The dissertation behind this paper frames a broader hypothesis around spatial resilience; this is its materials-engineering component.</a:t>
             </a:r>
             <a:endParaRPr lang="en-US" sz="1150" dirty="0"/>
-          </a:p>
-        </p:txBody>
-      </p:sp>
-      <p:sp>
-        <p:nvSpPr>
-          <p:cNvPr id="19" name="Text 0"/>
-          <p:cNvSpPr/>
-          <p:nvPr>
-            <p:ph idx="100" hasCustomPrompt="1"/>
-          </p:nvPr>
-        </p:nvSpPr>
-        <p:spPr>
-          <a:xfrm>
-            <a:off x="11292840" y="6355080"/>
-            <a:ext cx="365760" cy="237744"/>
-          </a:xfrm>
-          <a:prstGeom prst="rect">
-            <a:avLst/>
-          </a:prstGeom>
-          <a:noFill/>
-          <a:ln/>
-        </p:spPr>
-        <p:txBody>
-          <a:bodyPr wrap="square" rtlCol="0"/>
-          <a:lstStyle/>
-          <a:p>
-            <a:pPr algn="r" indent="0" marL="0">
-              <a:buNone/>
-            </a:pPr>
-            <a:endParaRPr lang="en-US" sz="850" dirty="0"/>
           </a:p>
         </p:txBody>
       </p:sp>
